--- a/paper/figures/causalcache_qualitative_cart_editable.pptx
+++ b/paper/figures/causalcache_qualitative_cart_editable.pptx
@@ -1,26 +1,121 @@
 
 <file path=ppt/presentation.xml><?xml version="1.0" encoding="utf-8"?>
-<p:presentation xmlns:p="http://schemas.openxmlformats.org/presentationml/2006/main">
+<p:presentation xmlns:a="http://schemas.openxmlformats.org/drawingml/2006/main" xmlns:r="http://schemas.openxmlformats.org/officeDocument/2006/relationships" xmlns:p="http://schemas.openxmlformats.org/presentationml/2006/main">
   <p:sldMasterIdLst>
-    <p:sldMasterId xmlns:r="http://schemas.openxmlformats.org/officeDocument/2006/relationships" id="2147483648" r:id="R9eb9341be5124ebe"/>
+    <p:sldMasterId id="2147483648" r:id="rId1"/>
   </p:sldMasterIdLst>
   <p:notesMasterIdLst>
-    <p:notesMasterId xmlns:r="http://schemas.openxmlformats.org/officeDocument/2006/relationships" r:id="Rd61a2f54bc694730"/>
+    <p:notesMasterId r:id="rId3"/>
   </p:notesMasterIdLst>
   <p:sldIdLst>
-    <p:sldId xmlns:r="http://schemas.openxmlformats.org/officeDocument/2006/relationships" id="256" r:id="R9b3349e279d54a6f"/>
+    <p:sldId id="256" r:id="rId2"/>
   </p:sldIdLst>
   <p:sldSz cx="10477500" cy="3429000"/>
   <p:notesSz cx="6858000" cy="9144000"/>
+  <p:defaultTextStyle>
+    <a:defPPr>
+      <a:defRPr lang="en-CN"/>
+    </a:defPPr>
+    <a:lvl1pPr marL="0" algn="l" defTabSz="914400" rtl="0" eaLnBrk="1" latinLnBrk="0" hangingPunct="1">
+      <a:defRPr sz="1800" kern="1200">
+        <a:solidFill>
+          <a:schemeClr val="tx1"/>
+        </a:solidFill>
+        <a:latin typeface="+mn-lt"/>
+        <a:ea typeface="+mn-ea"/>
+        <a:cs typeface="+mn-cs"/>
+      </a:defRPr>
+    </a:lvl1pPr>
+    <a:lvl2pPr marL="457200" algn="l" defTabSz="914400" rtl="0" eaLnBrk="1" latinLnBrk="0" hangingPunct="1">
+      <a:defRPr sz="1800" kern="1200">
+        <a:solidFill>
+          <a:schemeClr val="tx1"/>
+        </a:solidFill>
+        <a:latin typeface="+mn-lt"/>
+        <a:ea typeface="+mn-ea"/>
+        <a:cs typeface="+mn-cs"/>
+      </a:defRPr>
+    </a:lvl2pPr>
+    <a:lvl3pPr marL="914400" algn="l" defTabSz="914400" rtl="0" eaLnBrk="1" latinLnBrk="0" hangingPunct="1">
+      <a:defRPr sz="1800" kern="1200">
+        <a:solidFill>
+          <a:schemeClr val="tx1"/>
+        </a:solidFill>
+        <a:latin typeface="+mn-lt"/>
+        <a:ea typeface="+mn-ea"/>
+        <a:cs typeface="+mn-cs"/>
+      </a:defRPr>
+    </a:lvl3pPr>
+    <a:lvl4pPr marL="1371600" algn="l" defTabSz="914400" rtl="0" eaLnBrk="1" latinLnBrk="0" hangingPunct="1">
+      <a:defRPr sz="1800" kern="1200">
+        <a:solidFill>
+          <a:schemeClr val="tx1"/>
+        </a:solidFill>
+        <a:latin typeface="+mn-lt"/>
+        <a:ea typeface="+mn-ea"/>
+        <a:cs typeface="+mn-cs"/>
+      </a:defRPr>
+    </a:lvl4pPr>
+    <a:lvl5pPr marL="1828800" algn="l" defTabSz="914400" rtl="0" eaLnBrk="1" latinLnBrk="0" hangingPunct="1">
+      <a:defRPr sz="1800" kern="1200">
+        <a:solidFill>
+          <a:schemeClr val="tx1"/>
+        </a:solidFill>
+        <a:latin typeface="+mn-lt"/>
+        <a:ea typeface="+mn-ea"/>
+        <a:cs typeface="+mn-cs"/>
+      </a:defRPr>
+    </a:lvl5pPr>
+    <a:lvl6pPr marL="2286000" algn="l" defTabSz="914400" rtl="0" eaLnBrk="1" latinLnBrk="0" hangingPunct="1">
+      <a:defRPr sz="1800" kern="1200">
+        <a:solidFill>
+          <a:schemeClr val="tx1"/>
+        </a:solidFill>
+        <a:latin typeface="+mn-lt"/>
+        <a:ea typeface="+mn-ea"/>
+        <a:cs typeface="+mn-cs"/>
+      </a:defRPr>
+    </a:lvl6pPr>
+    <a:lvl7pPr marL="2743200" algn="l" defTabSz="914400" rtl="0" eaLnBrk="1" latinLnBrk="0" hangingPunct="1">
+      <a:defRPr sz="1800" kern="1200">
+        <a:solidFill>
+          <a:schemeClr val="tx1"/>
+        </a:solidFill>
+        <a:latin typeface="+mn-lt"/>
+        <a:ea typeface="+mn-ea"/>
+        <a:cs typeface="+mn-cs"/>
+      </a:defRPr>
+    </a:lvl7pPr>
+    <a:lvl8pPr marL="3200400" algn="l" defTabSz="914400" rtl="0" eaLnBrk="1" latinLnBrk="0" hangingPunct="1">
+      <a:defRPr sz="1800" kern="1200">
+        <a:solidFill>
+          <a:schemeClr val="tx1"/>
+        </a:solidFill>
+        <a:latin typeface="+mn-lt"/>
+        <a:ea typeface="+mn-ea"/>
+        <a:cs typeface="+mn-cs"/>
+      </a:defRPr>
+    </a:lvl8pPr>
+    <a:lvl9pPr marL="3657600" algn="l" defTabSz="914400" rtl="0" eaLnBrk="1" latinLnBrk="0" hangingPunct="1">
+      <a:defRPr sz="1800" kern="1200">
+        <a:solidFill>
+          <a:schemeClr val="tx1"/>
+        </a:solidFill>
+        <a:latin typeface="+mn-lt"/>
+        <a:ea typeface="+mn-ea"/>
+        <a:cs typeface="+mn-cs"/>
+      </a:defRPr>
+    </a:lvl9pPr>
+  </p:defaultTextStyle>
 </p:presentation>
 </file>
 
 <file path=ppt/notesMasters/notesMaster1.xml><?xml version="1.0" encoding="utf-8"?>
-<p:notesMaster xmlns:p="http://schemas.openxmlformats.org/presentationml/2006/main">
+<p:notesMaster xmlns:a="http://schemas.openxmlformats.org/drawingml/2006/main" xmlns:r="http://schemas.openxmlformats.org/officeDocument/2006/relationships" xmlns:p="http://schemas.openxmlformats.org/presentationml/2006/main">
   <p:cSld>
     <p:bg>
       <p:bgRef idx="1001">
-        <a:schemeClr xmlns:a="http://schemas.openxmlformats.org/drawingml/2006/main" val="bg1"/>
+        <a:schemeClr val="bg1"/>
       </p:bgRef>
     </p:bg>
     <p:spTree>
@@ -30,380 +125,164 @@
         <p:nvPr/>
       </p:nvGrpSpPr>
       <p:grpSpPr>
-        <a:xfrm xmlns:a="http://schemas.openxmlformats.org/drawingml/2006/main"/>
+        <a:xfrm>
+          <a:off x="0" y="0"/>
+          <a:ext cx="0" cy="0"/>
+          <a:chOff x="0" y="0"/>
+          <a:chExt cx="0" cy="0"/>
+        </a:xfrm>
       </p:grpSpPr>
       <p:sp>
         <p:nvSpPr>
           <p:cNvPr id="2" name="Header Placeholder"/>
-          <p:cNvSpPr/>
+          <p:cNvSpPr>
+            <a:spLocks noGrp="1"/>
+          </p:cNvSpPr>
           <p:nvPr>
             <p:ph type="hdr" sz="quarter"/>
           </p:nvPr>
         </p:nvSpPr>
         <p:spPr>
-          <a:prstGeom xmlns:a="http://schemas.openxmlformats.org/drawingml/2006/main" prst="rect">
-            <a:avLst/>
-          </a:prstGeom>
-        </p:spPr>
-        <p:txBody>
-          <a:bodyPr xmlns:a="http://schemas.openxmlformats.org/drawingml/2006/main"/>
-          <a:lstStyle xmlns:a="http://schemas.openxmlformats.org/drawingml/2006/main"/>
-          <a:p xmlns:a="http://schemas.openxmlformats.org/drawingml/2006/main"/>
+          <a:prstGeom prst="rect">
+            <a:avLst/>
+          </a:prstGeom>
+        </p:spPr>
+        <p:txBody>
+          <a:bodyPr/>
+          <a:lstStyle/>
+          <a:p>
+            <a:endParaRPr/>
+          </a:p>
         </p:txBody>
       </p:sp>
       <p:sp>
         <p:nvSpPr>
           <p:cNvPr id="3" name="Date Placeholder"/>
-          <p:cNvSpPr/>
+          <p:cNvSpPr>
+            <a:spLocks noGrp="1"/>
+          </p:cNvSpPr>
           <p:nvPr>
             <p:ph type="dt" sz="quarter" idx="1"/>
           </p:nvPr>
         </p:nvSpPr>
         <p:spPr>
-          <a:prstGeom xmlns:a="http://schemas.openxmlformats.org/drawingml/2006/main" prst="rect">
-            <a:avLst/>
-          </a:prstGeom>
-        </p:spPr>
-        <p:txBody>
-          <a:bodyPr xmlns:a="http://schemas.openxmlformats.org/drawingml/2006/main"/>
-          <a:lstStyle xmlns:a="http://schemas.openxmlformats.org/drawingml/2006/main"/>
-          <a:p xmlns:a="http://schemas.openxmlformats.org/drawingml/2006/main"/>
+          <a:prstGeom prst="rect">
+            <a:avLst/>
+          </a:prstGeom>
+        </p:spPr>
+        <p:txBody>
+          <a:bodyPr/>
+          <a:lstStyle/>
+          <a:p>
+            <a:endParaRPr/>
+          </a:p>
         </p:txBody>
       </p:sp>
       <p:sp>
         <p:nvSpPr>
           <p:cNvPr id="4" name="Slide Image Placeholder"/>
-          <p:cNvSpPr/>
+          <p:cNvSpPr>
+            <a:spLocks noGrp="1" noRot="1" noChangeAspect="1"/>
+          </p:cNvSpPr>
           <p:nvPr>
             <p:ph type="sldImg" idx="2"/>
           </p:nvPr>
         </p:nvSpPr>
         <p:spPr>
-          <a:prstGeom xmlns:a="http://schemas.openxmlformats.org/drawingml/2006/main" prst="rect">
-            <a:avLst/>
-          </a:prstGeom>
-        </p:spPr>
-        <p:txBody>
-          <a:bodyPr xmlns:a="http://schemas.openxmlformats.org/drawingml/2006/main"/>
-          <a:lstStyle xmlns:a="http://schemas.openxmlformats.org/drawingml/2006/main"/>
-          <a:p xmlns:a="http://schemas.openxmlformats.org/drawingml/2006/main"/>
+          <a:prstGeom prst="rect">
+            <a:avLst/>
+          </a:prstGeom>
+        </p:spPr>
+        <p:txBody>
+          <a:bodyPr/>
+          <a:lstStyle/>
+          <a:p>
+            <a:endParaRPr/>
+          </a:p>
         </p:txBody>
       </p:sp>
       <p:sp>
         <p:nvSpPr>
           <p:cNvPr id="5" name="Notes Placeholder"/>
-          <p:cNvSpPr/>
+          <p:cNvSpPr>
+            <a:spLocks noGrp="1"/>
+          </p:cNvSpPr>
           <p:nvPr>
             <p:ph type="body" sz="quarter" idx="3"/>
           </p:nvPr>
         </p:nvSpPr>
         <p:spPr>
-          <a:prstGeom xmlns:a="http://schemas.openxmlformats.org/drawingml/2006/main" prst="rect">
-            <a:avLst/>
-          </a:prstGeom>
-        </p:spPr>
-        <p:txBody>
-          <a:bodyPr xmlns:a="http://schemas.openxmlformats.org/drawingml/2006/main"/>
-          <a:lstStyle xmlns:a="http://schemas.openxmlformats.org/drawingml/2006/main"/>
-          <a:p xmlns:a="http://schemas.openxmlformats.org/drawingml/2006/main"/>
+          <a:prstGeom prst="rect">
+            <a:avLst/>
+          </a:prstGeom>
+        </p:spPr>
+        <p:txBody>
+          <a:bodyPr/>
+          <a:lstStyle/>
+          <a:p>
+            <a:endParaRPr/>
+          </a:p>
         </p:txBody>
       </p:sp>
       <p:sp>
         <p:nvSpPr>
           <p:cNvPr id="6" name="Footer Placeholder"/>
-          <p:cNvSpPr/>
+          <p:cNvSpPr>
+            <a:spLocks noGrp="1"/>
+          </p:cNvSpPr>
           <p:nvPr>
             <p:ph type="ftr" sz="quarter" idx="4"/>
           </p:nvPr>
         </p:nvSpPr>
         <p:spPr>
-          <a:prstGeom xmlns:a="http://schemas.openxmlformats.org/drawingml/2006/main" prst="rect">
-            <a:avLst/>
-          </a:prstGeom>
-        </p:spPr>
-        <p:txBody>
-          <a:bodyPr xmlns:a="http://schemas.openxmlformats.org/drawingml/2006/main"/>
-          <a:lstStyle xmlns:a="http://schemas.openxmlformats.org/drawingml/2006/main"/>
-          <a:p xmlns:a="http://schemas.openxmlformats.org/drawingml/2006/main"/>
+          <a:prstGeom prst="rect">
+            <a:avLst/>
+          </a:prstGeom>
+        </p:spPr>
+        <p:txBody>
+          <a:bodyPr/>
+          <a:lstStyle/>
+          <a:p>
+            <a:endParaRPr/>
+          </a:p>
         </p:txBody>
       </p:sp>
       <p:sp>
         <p:nvSpPr>
           <p:cNvPr id="7" name="Slide Number Placeholder"/>
-          <p:cNvSpPr/>
+          <p:cNvSpPr>
+            <a:spLocks noGrp="1"/>
+          </p:cNvSpPr>
           <p:nvPr>
             <p:ph type="sldNum" sz="quarter" idx="5"/>
           </p:nvPr>
         </p:nvSpPr>
         <p:spPr>
-          <a:prstGeom xmlns:a="http://schemas.openxmlformats.org/drawingml/2006/main" prst="rect">
-            <a:avLst/>
-          </a:prstGeom>
-        </p:spPr>
-        <p:txBody>
-          <a:bodyPr xmlns:a="http://schemas.openxmlformats.org/drawingml/2006/main"/>
-          <a:lstStyle xmlns:a="http://schemas.openxmlformats.org/drawingml/2006/main"/>
-          <a:p xmlns:a="http://schemas.openxmlformats.org/drawingml/2006/main"/>
+          <a:prstGeom prst="rect">
+            <a:avLst/>
+          </a:prstGeom>
+        </p:spPr>
+        <p:txBody>
+          <a:bodyPr/>
+          <a:lstStyle/>
+          <a:p>
+            <a:endParaRPr/>
+          </a:p>
         </p:txBody>
       </p:sp>
     </p:spTree>
   </p:cSld>
   <p:clrMap bg1="lt1" tx1="dk1" bg2="lt2" tx2="dk2" accent1="accent1" accent2="accent2" accent3="accent3" accent4="accent4" accent5="accent5" accent6="accent6" hlink="hlink" folHlink="folHlink"/>
   <p:notesStyle>
-    <a:lvl1pPr xmlns:a="http://schemas.openxmlformats.org/drawingml/2006/main" marL="0" algn="l" defTabSz="914400" rtl="0" eaLnBrk="1" latinLnBrk="0" hangingPunct="1">
+    <a:lvl1pPr marL="0" algn="l" defTabSz="914400" rtl="0" eaLnBrk="1" latinLnBrk="0" hangingPunct="1">
       <a:defRPr sz="1200" kern="1200"/>
     </a:lvl1pPr>
   </p:notesStyle>
 </p:notesMaster>
 </file>
 
-<file path=ppt/notesMasters/theme/theme3.xml><?xml version="1.0" encoding="utf-8"?>
-<a:theme xmlns:a="http://schemas.openxmlformats.org/drawingml/2006/main" name="ChatGPT">
-  <a:themeElements>
-    <a:clrScheme name="ChatGPT">
-      <a:dk1>
-        <a:srgbClr val="000000"/>
-      </a:dk1>
-      <a:lt1>
-        <a:srgbClr val="FFFFFF"/>
-      </a:lt1>
-      <a:dk2>
-        <a:srgbClr val="0E2841"/>
-      </a:dk2>
-      <a:lt2>
-        <a:srgbClr val="E8E8E8"/>
-      </a:lt2>
-      <a:accent1>
-        <a:srgbClr val="156082"/>
-      </a:accent1>
-      <a:accent2>
-        <a:srgbClr val="E97132"/>
-      </a:accent2>
-      <a:accent3>
-        <a:srgbClr val="196B24"/>
-      </a:accent3>
-      <a:accent4>
-        <a:srgbClr val="0F9ED5"/>
-      </a:accent4>
-      <a:accent5>
-        <a:srgbClr val="A02B93"/>
-      </a:accent5>
-      <a:accent6>
-        <a:srgbClr val="4EA72E"/>
-      </a:accent6>
-      <a:hlink>
-        <a:srgbClr val="467886"/>
-      </a:hlink>
-      <a:folHlink>
-        <a:srgbClr val="96607D"/>
-      </a:folHlink>
-    </a:clrScheme>
-    <a:fontScheme name="Office">
-      <a:majorFont>
-        <a:latin typeface="Calibri Light"/>
-        <a:ea typeface="Calibri Light"/>
-        <a:cs typeface="Calibri Light"/>
-      </a:majorFont>
-      <a:minorFont>
-        <a:latin typeface="Calibri"/>
-        <a:ea typeface="Calibri"/>
-        <a:cs typeface="Calibri"/>
-      </a:minorFont>
-    </a:fontScheme>
-    <a:fmtScheme name="ChatGPT">
-      <a:fillStyleLst>
-        <a:solidFill>
-          <a:schemeClr val="phClr"/>
-        </a:solidFill>
-        <a:gradFill>
-          <a:gsLst>
-            <a:gs pos="0">
-              <a:schemeClr val="phClr">
-                <a:tint val="67000"/>
-                <a:lumMod val="110000"/>
-                <a:satMod val="105000"/>
-              </a:schemeClr>
-            </a:gs>
-            <a:gs pos="50000">
-              <a:schemeClr val="phClr">
-                <a:tint val="73000"/>
-                <a:lumMod val="105000"/>
-                <a:satMod val="103000"/>
-              </a:schemeClr>
-            </a:gs>
-            <a:gs pos="100000">
-              <a:schemeClr val="phClr">
-                <a:tint val="81000"/>
-                <a:lumMod val="105000"/>
-                <a:satMod val="109000"/>
-              </a:schemeClr>
-            </a:gs>
-          </a:gsLst>
-          <a:lin ang="5400000" scaled="0"/>
-        </a:gradFill>
-        <a:gradFill>
-          <a:gsLst>
-            <a:gs pos="0">
-              <a:schemeClr val="phClr">
-                <a:tint val="94000"/>
-                <a:lumMod val="102000"/>
-                <a:satMod val="103000"/>
-              </a:schemeClr>
-            </a:gs>
-            <a:gs pos="50000">
-              <a:schemeClr val="phClr">
-                <a:shade val="100000"/>
-                <a:lumMod val="100000"/>
-                <a:satMod val="110000"/>
-              </a:schemeClr>
-            </a:gs>
-            <a:gs pos="100000">
-              <a:schemeClr val="phClr">
-                <a:shade val="78000"/>
-                <a:lumMod val="99000"/>
-                <a:satMod val="120000"/>
-              </a:schemeClr>
-            </a:gs>
-          </a:gsLst>
-          <a:lin ang="5400000" scaled="0"/>
-        </a:gradFill>
-      </a:fillStyleLst>
-      <a:lnStyleLst>
-        <a:ln w="12700">
-          <a:solidFill>
-            <a:schemeClr val="phClr"/>
-          </a:solidFill>
-          <a:prstDash val="solid"/>
-        </a:ln>
-        <a:ln w="19050">
-          <a:solidFill>
-            <a:schemeClr val="phClr"/>
-          </a:solidFill>
-          <a:prstDash val="solid"/>
-        </a:ln>
-        <a:ln w="25400">
-          <a:solidFill>
-            <a:schemeClr val="phClr"/>
-          </a:solidFill>
-          <a:prstDash val="solid"/>
-        </a:ln>
-      </a:lnStyleLst>
-      <a:effectStyleLst>
-        <a:effectStyle>
-          <a:effectLst/>
-        </a:effectStyle>
-        <a:effectStyle>
-          <a:effectLst/>
-        </a:effectStyle>
-        <a:effectStyle>
-          <a:effectLst>
-            <a:outerShdw blurRad="57150" dist="19050" dir="5400000">
-              <a:srgbClr val="000000">
-                <a:alpha val="16000"/>
-              </a:srgbClr>
-            </a:outerShdw>
-          </a:effectLst>
-        </a:effectStyle>
-        <a:effectStyle>
-          <a:effectLst>
-            <a:outerShdw blurRad="19050" dist="9525" dir="5400000">
-              <a:srgbClr val="000000">
-                <a:alpha val="6000"/>
-              </a:srgbClr>
-            </a:outerShdw>
-          </a:effectLst>
-        </a:effectStyle>
-        <a:effectStyle>
-          <a:effectLst>
-            <a:outerShdw blurRad="28575" dist="9525" dir="5400000">
-              <a:srgbClr val="000000">
-                <a:alpha val="8000"/>
-              </a:srgbClr>
-            </a:outerShdw>
-          </a:effectLst>
-        </a:effectStyle>
-        <a:effectStyle>
-          <a:effectLst>
-            <a:outerShdw blurRad="57150" dist="19050" dir="5400000">
-              <a:srgbClr val="000000">
-                <a:alpha val="10000"/>
-              </a:srgbClr>
-            </a:outerShdw>
-          </a:effectLst>
-        </a:effectStyle>
-        <a:effectStyle>
-          <a:effectLst>
-            <a:outerShdw blurRad="114300" dist="38100" dir="5400000">
-              <a:srgbClr val="000000">
-                <a:alpha val="12000"/>
-              </a:srgbClr>
-            </a:outerShdw>
-          </a:effectLst>
-        </a:effectStyle>
-        <a:effectStyle>
-          <a:effectLst>
-            <a:outerShdw blurRad="171450" dist="57150" dir="5400000">
-              <a:srgbClr val="000000">
-                <a:alpha val="16000"/>
-              </a:srgbClr>
-            </a:outerShdw>
-          </a:effectLst>
-        </a:effectStyle>
-        <a:effectStyle>
-          <a:effectLst>
-            <a:outerShdw blurRad="266700" dist="95250" dir="5400000">
-              <a:srgbClr val="000000">
-                <a:alpha val="24000"/>
-              </a:srgbClr>
-            </a:outerShdw>
-          </a:effectLst>
-        </a:effectStyle>
-      </a:effectStyleLst>
-      <a:bgFillStyleLst>
-        <a:solidFill>
-          <a:schemeClr val="phClr"/>
-        </a:solidFill>
-        <a:solidFill>
-          <a:schemeClr val="phClr">
-            <a:tint val="95000"/>
-            <a:satMod val="170000"/>
-          </a:schemeClr>
-        </a:solidFill>
-        <a:gradFill>
-          <a:gsLst>
-            <a:gs pos="0">
-              <a:schemeClr val="phClr">
-                <a:tint val="93000"/>
-                <a:shade val="98000"/>
-                <a:lumMod val="102000"/>
-                <a:satMod val="150000"/>
-              </a:schemeClr>
-            </a:gs>
-            <a:gs pos="50000">
-              <a:schemeClr val="phClr">
-                <a:tint val="98000"/>
-                <a:shade val="90000"/>
-                <a:lumMod val="103000"/>
-                <a:satMod val="130000"/>
-              </a:schemeClr>
-            </a:gs>
-            <a:gs pos="100000">
-              <a:schemeClr val="phClr">
-                <a:shade val="63000"/>
-                <a:satMod val="120000"/>
-              </a:schemeClr>
-            </a:gs>
-          </a:gsLst>
-          <a:lin ang="5400000" scaled="0"/>
-        </a:gradFill>
-      </a:bgFillStyleLst>
-    </a:fmtScheme>
-  </a:themeElements>
-</a:theme>
-</file>
-
 <file path=ppt/notesSlides/notesSlide1.xml><?xml version="1.0" encoding="utf-8"?>
-<p:notes xmlns:p="http://schemas.openxmlformats.org/presentationml/2006/main">
+<p:notes xmlns:a="http://schemas.openxmlformats.org/drawingml/2006/main" xmlns:r="http://schemas.openxmlformats.org/officeDocument/2006/relationships" xmlns:p="http://schemas.openxmlformats.org/presentationml/2006/main">
   <p:cSld>
     <p:spTree>
       <p:nvGrpSpPr>
@@ -412,16 +291,21 @@
         <p:nvPr/>
       </p:nvGrpSpPr>
       <p:grpSpPr>
-        <a:xfrm xmlns:a="http://schemas.openxmlformats.org/drawingml/2006/main"/>
+        <a:xfrm>
+          <a:off x="0" y="0"/>
+          <a:ext cx="0" cy="0"/>
+          <a:chOff x="0" y="0"/>
+          <a:chExt cx="0" cy="0"/>
+        </a:xfrm>
       </p:grpSpPr>
       <p:sp>
         <p:nvSpPr>
           <p:cNvPr id="2" name="Slide Image Placeholder 1"/>
           <p:cNvSpPr>
-            <a:spLocks xmlns:a="http://schemas.openxmlformats.org/drawingml/2006/main" noGrp="1"/>
+            <a:spLocks noGrp="1" noRot="1" noChangeAspect="1"/>
           </p:cNvSpPr>
           <p:nvPr>
-            <p:ph type="sldImg" idx="0"/>
+            <p:ph type="sldImg"/>
           </p:nvPr>
         </p:nvSpPr>
         <p:spPr/>
@@ -430,7 +314,7 @@
         <p:nvSpPr>
           <p:cNvPr id="3" name="Notes Placeholder 2"/>
           <p:cNvSpPr>
-            <a:spLocks xmlns:a="http://schemas.openxmlformats.org/drawingml/2006/main" noGrp="1"/>
+            <a:spLocks noGrp="1"/>
           </p:cNvSpPr>
           <p:nvPr>
             <p:ph type="body" idx="1"/>
@@ -438,24 +322,24 @@
         </p:nvSpPr>
         <p:spPr/>
         <p:txBody>
-          <a:bodyPr xmlns:a="http://schemas.openxmlformats.org/drawingml/2006/main"/>
-          <a:lstStyle xmlns:a="http://schemas.openxmlformats.org/drawingml/2006/main"/>
-          <a:p xmlns:a="http://schemas.openxmlformats.org/drawingml/2006/main">
+          <a:bodyPr/>
+          <a:lstStyle/>
+          <a:p>
             <a:r>
               <a:t>[Sources]</a:t>
             </a:r>
           </a:p>
-          <a:p xmlns:a="http://schemas.openxmlformats.org/drawingml/2006/main">
+          <a:p>
             <a:r>
               <a:t>- Internal audited case: data/results/mobileworld_hgkv_selected_b4/qualitative_cart_audit.json</a:t>
             </a:r>
           </a:p>
-          <a:p xmlns:a="http://schemas.openxmlformats.org/drawingml/2006/main">
+          <a:p>
             <a:r>
               <a:t>- Local de-identified crops: paper/figures/assets/cart_order_evidence.png; paper/figures/assets/cart_message_input.png</a:t>
             </a:r>
           </a:p>
-          <a:p xmlns:a="http://schemas.openxmlformats.org/drawingml/2006/main">
+          <a:p>
             <a:r>
               <a:t>[/Sources]</a:t>
             </a:r>
@@ -466,7 +350,7 @@
         <p:nvSpPr>
           <p:cNvPr id="4" name="Slide Number Placeholder 3"/>
           <p:cNvSpPr>
-            <a:spLocks xmlns:a="http://schemas.openxmlformats.org/drawingml/2006/main" noGrp="1"/>
+            <a:spLocks noGrp="1"/>
           </p:cNvSpPr>
           <p:nvPr>
             <p:ph type="sldNum" idx="5"/>
@@ -474,21 +358,23 @@
         </p:nvSpPr>
         <p:spPr/>
         <p:txBody>
-          <a:bodyPr xmlns:a="http://schemas.openxmlformats.org/drawingml/2006/main"/>
-          <a:lstStyle xmlns:a="http://schemas.openxmlformats.org/drawingml/2006/main"/>
-          <a:p xmlns:a="http://schemas.openxmlformats.org/drawingml/2006/main"/>
+          <a:bodyPr/>
+          <a:lstStyle/>
+          <a:p>
+            <a:endParaRPr/>
+          </a:p>
         </p:txBody>
       </p:sp>
     </p:spTree>
   </p:cSld>
   <p:clrMapOvr>
-    <a:masterClrMapping xmlns:a="http://schemas.openxmlformats.org/drawingml/2006/main"/>
+    <a:masterClrMapping/>
   </p:clrMapOvr>
 </p:notes>
 </file>
 
 <file path=ppt/slideLayouts/slideLayout1.xml><?xml version="1.0" encoding="utf-8"?>
-<p:sldLayout xmlns:p="http://schemas.openxmlformats.org/presentationml/2006/main" type="title">
+<p:sldLayout xmlns:a="http://schemas.openxmlformats.org/drawingml/2006/main" xmlns:r="http://schemas.openxmlformats.org/officeDocument/2006/relationships" xmlns:p="http://schemas.openxmlformats.org/presentationml/2006/main" type="title">
   <p:cSld name="Title Slide">
     <p:spTree>
       <p:nvGrpSpPr>
@@ -497,19 +383,27 @@
         <p:nvPr/>
       </p:nvGrpSpPr>
       <p:grpSpPr>
-        <a:xfrm xmlns:a="http://schemas.openxmlformats.org/drawingml/2006/main"/>
+        <a:xfrm>
+          <a:off x="0" y="0"/>
+          <a:ext cx="0" cy="0"/>
+          <a:chOff x="0" y="0"/>
+          <a:chExt cx="0" cy="0"/>
+        </a:xfrm>
       </p:grpSpPr>
     </p:spTree>
   </p:cSld>
+  <p:clrMapOvr>
+    <a:masterClrMapping/>
+  </p:clrMapOvr>
 </p:sldLayout>
 </file>
 
 <file path=ppt/slideMasters/slideMaster1.xml><?xml version="1.0" encoding="utf-8"?>
-<p:sldMaster xmlns:p="http://schemas.openxmlformats.org/presentationml/2006/main">
+<p:sldMaster xmlns:a="http://schemas.openxmlformats.org/drawingml/2006/main" xmlns:r="http://schemas.openxmlformats.org/officeDocument/2006/relationships" xmlns:p="http://schemas.openxmlformats.org/presentationml/2006/main">
   <p:cSld name="Master">
     <p:bg>
       <p:bgRef idx="1001">
-        <a:schemeClr xmlns:a="http://schemas.openxmlformats.org/drawingml/2006/main" val="bg1"/>
+        <a:schemeClr val="bg1"/>
       </p:bgRef>
     </p:bg>
     <p:spTree>
@@ -519,17 +413,22 @@
         <p:nvPr/>
       </p:nvGrpSpPr>
       <p:grpSpPr>
-        <a:xfrm xmlns:a="http://schemas.openxmlformats.org/drawingml/2006/main"/>
+        <a:xfrm>
+          <a:off x="0" y="0"/>
+          <a:ext cx="0" cy="0"/>
+          <a:chOff x="0" y="0"/>
+          <a:chExt cx="0" cy="0"/>
+        </a:xfrm>
       </p:grpSpPr>
     </p:spTree>
   </p:cSld>
   <p:clrMap bg1="lt1" tx1="dk1" bg2="lt2" tx2="dk2" accent1="accent1" accent2="accent2" accent3="accent3" accent4="accent4" accent5="accent5" accent6="accent6" hlink="hlink" folHlink="folHlink"/>
   <p:sldLayoutIdLst>
-    <p:sldLayoutId xmlns:r="http://schemas.openxmlformats.org/officeDocument/2006/relationships" id="2147483649" r:id="R0a57b4228d8c4b5d"/>
+    <p:sldLayoutId id="2147483649" r:id="rId1"/>
   </p:sldLayoutIdLst>
   <p:txStyles>
     <p:titleStyle>
-      <a:lvl1pPr xmlns:a="http://schemas.openxmlformats.org/drawingml/2006/main" algn="l">
+      <a:lvl1pPr algn="l">
         <a:lnSpc>
           <a:spcPct val="90000"/>
         </a:lnSpc>
@@ -548,7 +447,7 @@
       </a:lvl1pPr>
     </p:titleStyle>
     <p:bodyStyle>
-      <a:lvl1pPr xmlns:a="http://schemas.openxmlformats.org/drawingml/2006/main" marL="228600" indent="-228600" algn="l">
+      <a:lvl1pPr marL="228600" indent="-228600" algn="l">
         <a:lnSpc>
           <a:spcPct val="90000"/>
         </a:lnSpc>
@@ -565,7 +464,7 @@
           <a:cs typeface="+mn-lt"/>
         </a:defRPr>
       </a:lvl1pPr>
-      <a:lvl2pPr xmlns:a="http://schemas.openxmlformats.org/drawingml/2006/main" marL="685800" indent="-228600" algn="l">
+      <a:lvl2pPr marL="685800" indent="-228600" algn="l">
         <a:lnSpc>
           <a:spcPct val="90000"/>
         </a:lnSpc>
@@ -582,7 +481,7 @@
           <a:cs typeface="+mn-lt"/>
         </a:defRPr>
       </a:lvl2pPr>
-      <a:lvl3pPr xmlns:a="http://schemas.openxmlformats.org/drawingml/2006/main" marL="1143000" indent="-228600" algn="l">
+      <a:lvl3pPr marL="1143000" indent="-228600" algn="l">
         <a:lnSpc>
           <a:spcPct val="90000"/>
         </a:lnSpc>
@@ -599,7 +498,7 @@
           <a:cs typeface="+mn-lt"/>
         </a:defRPr>
       </a:lvl3pPr>
-      <a:lvl4pPr xmlns:a="http://schemas.openxmlformats.org/drawingml/2006/main" marL="1600200" indent="-228600" algn="l">
+      <a:lvl4pPr marL="1600200" indent="-228600" algn="l">
         <a:lnSpc>
           <a:spcPct val="90000"/>
         </a:lnSpc>
@@ -616,7 +515,7 @@
           <a:cs typeface="+mn-lt"/>
         </a:defRPr>
       </a:lvl4pPr>
-      <a:lvl5pPr xmlns:a="http://schemas.openxmlformats.org/drawingml/2006/main" marL="2057400" indent="-228600" algn="l">
+      <a:lvl5pPr marL="2057400" indent="-228600" algn="l">
         <a:lnSpc>
           <a:spcPct val="90000"/>
         </a:lnSpc>
@@ -633,7 +532,7 @@
           <a:cs typeface="+mn-lt"/>
         </a:defRPr>
       </a:lvl5pPr>
-      <a:lvl6pPr xmlns:a="http://schemas.openxmlformats.org/drawingml/2006/main" marL="2514600" indent="-228600" algn="l">
+      <a:lvl6pPr marL="2514600" indent="-228600" algn="l">
         <a:lnSpc>
           <a:spcPct val="90000"/>
         </a:lnSpc>
@@ -650,7 +549,7 @@
           <a:cs typeface="+mn-lt"/>
         </a:defRPr>
       </a:lvl6pPr>
-      <a:lvl7pPr xmlns:a="http://schemas.openxmlformats.org/drawingml/2006/main" marL="2971800" indent="-228600" algn="l">
+      <a:lvl7pPr marL="2971800" indent="-228600" algn="l">
         <a:lnSpc>
           <a:spcPct val="90000"/>
         </a:lnSpc>
@@ -667,7 +566,7 @@
           <a:cs typeface="+mn-lt"/>
         </a:defRPr>
       </a:lvl7pPr>
-      <a:lvl8pPr xmlns:a="http://schemas.openxmlformats.org/drawingml/2006/main" marL="3429000" indent="-228600" algn="l">
+      <a:lvl8pPr marL="3429000" indent="-228600" algn="l">
         <a:lnSpc>
           <a:spcPct val="90000"/>
         </a:lnSpc>
@@ -684,7 +583,7 @@
           <a:cs typeface="+mn-lt"/>
         </a:defRPr>
       </a:lvl8pPr>
-      <a:lvl9pPr xmlns:a="http://schemas.openxmlformats.org/drawingml/2006/main" marL="3886200" indent="-228600" algn="l">
+      <a:lvl9pPr marL="3886200" indent="-228600" algn="l">
         <a:lnSpc>
           <a:spcPct val="90000"/>
         </a:lnSpc>
@@ -703,7 +602,7 @@
       </a:lvl9pPr>
     </p:bodyStyle>
     <p:otherStyle>
-      <a:lvl1pPr xmlns:a="http://schemas.openxmlformats.org/drawingml/2006/main" marL="0" algn="l">
+      <a:lvl1pPr marL="0" algn="l">
         <a:buNone/>
         <a:defRPr sz="1800">
           <a:solidFill>
@@ -714,7 +613,7 @@
           <a:cs typeface="+mn-lt"/>
         </a:defRPr>
       </a:lvl1pPr>
-      <a:lvl2pPr xmlns:a="http://schemas.openxmlformats.org/drawingml/2006/main" marL="457200" algn="l">
+      <a:lvl2pPr marL="457200" algn="l">
         <a:buNone/>
         <a:defRPr sz="1800">
           <a:solidFill>
@@ -725,7 +624,7 @@
           <a:cs typeface="+mn-lt"/>
         </a:defRPr>
       </a:lvl2pPr>
-      <a:lvl3pPr xmlns:a="http://schemas.openxmlformats.org/drawingml/2006/main" marL="914400" algn="l">
+      <a:lvl3pPr marL="914400" algn="l">
         <a:buNone/>
         <a:defRPr sz="1800">
           <a:solidFill>
@@ -736,7 +635,7 @@
           <a:cs typeface="+mn-lt"/>
         </a:defRPr>
       </a:lvl3pPr>
-      <a:lvl4pPr xmlns:a="http://schemas.openxmlformats.org/drawingml/2006/main" marL="1371600" algn="l">
+      <a:lvl4pPr marL="1371600" algn="l">
         <a:buNone/>
         <a:defRPr sz="1800">
           <a:solidFill>
@@ -747,7 +646,7 @@
           <a:cs typeface="+mn-lt"/>
         </a:defRPr>
       </a:lvl4pPr>
-      <a:lvl5pPr xmlns:a="http://schemas.openxmlformats.org/drawingml/2006/main" marL="1828800" algn="l">
+      <a:lvl5pPr marL="1828800" algn="l">
         <a:buNone/>
         <a:defRPr sz="1800">
           <a:solidFill>
@@ -758,7 +657,7 @@
           <a:cs typeface="+mn-lt"/>
         </a:defRPr>
       </a:lvl5pPr>
-      <a:lvl6pPr xmlns:a="http://schemas.openxmlformats.org/drawingml/2006/main" marL="2286000" algn="l">
+      <a:lvl6pPr marL="2286000" algn="l">
         <a:buNone/>
         <a:defRPr sz="1800">
           <a:solidFill>
@@ -769,7 +668,7 @@
           <a:cs typeface="+mn-lt"/>
         </a:defRPr>
       </a:lvl6pPr>
-      <a:lvl7pPr xmlns:a="http://schemas.openxmlformats.org/drawingml/2006/main" marL="2743200" algn="l">
+      <a:lvl7pPr marL="2743200" algn="l">
         <a:buNone/>
         <a:defRPr sz="1800">
           <a:solidFill>
@@ -780,7 +679,7 @@
           <a:cs typeface="+mn-lt"/>
         </a:defRPr>
       </a:lvl7pPr>
-      <a:lvl8pPr xmlns:a="http://schemas.openxmlformats.org/drawingml/2006/main" marL="3200400" algn="l">
+      <a:lvl8pPr marL="3200400" algn="l">
         <a:buNone/>
         <a:defRPr sz="1800">
           <a:solidFill>
@@ -791,7 +690,7 @@
           <a:cs typeface="+mn-lt"/>
         </a:defRPr>
       </a:lvl8pPr>
-      <a:lvl9pPr xmlns:a="http://schemas.openxmlformats.org/drawingml/2006/main" marL="3657600" algn="l">
+      <a:lvl9pPr marL="3657600" algn="l">
         <a:buNone/>
         <a:defRPr sz="1800">
           <a:solidFill>
@@ -807,259 +706,15 @@
 </p:sldMaster>
 </file>
 
-<file path=ppt/slideMasters/theme/theme2.xml><?xml version="1.0" encoding="utf-8"?>
-<a:theme xmlns:a="http://schemas.openxmlformats.org/drawingml/2006/main" name="ChatGPT">
-  <a:themeElements>
-    <a:clrScheme name="ChatGPT">
-      <a:dk1>
-        <a:srgbClr val="000000"/>
-      </a:dk1>
-      <a:lt1>
-        <a:srgbClr val="FFFFFF"/>
-      </a:lt1>
-      <a:dk2>
-        <a:srgbClr val="0E2841"/>
-      </a:dk2>
-      <a:lt2>
-        <a:srgbClr val="E8E8E8"/>
-      </a:lt2>
-      <a:accent1>
-        <a:srgbClr val="156082"/>
-      </a:accent1>
-      <a:accent2>
-        <a:srgbClr val="E97132"/>
-      </a:accent2>
-      <a:accent3>
-        <a:srgbClr val="196B24"/>
-      </a:accent3>
-      <a:accent4>
-        <a:srgbClr val="0F9ED5"/>
-      </a:accent4>
-      <a:accent5>
-        <a:srgbClr val="A02B93"/>
-      </a:accent5>
-      <a:accent6>
-        <a:srgbClr val="4EA72E"/>
-      </a:accent6>
-      <a:hlink>
-        <a:srgbClr val="467886"/>
-      </a:hlink>
-      <a:folHlink>
-        <a:srgbClr val="96607D"/>
-      </a:folHlink>
-    </a:clrScheme>
-    <a:fontScheme name="Office">
-      <a:majorFont>
-        <a:latin typeface="Calibri Light"/>
-        <a:ea typeface="Calibri Light"/>
-        <a:cs typeface="Calibri Light"/>
-      </a:majorFont>
-      <a:minorFont>
-        <a:latin typeface="Calibri"/>
-        <a:ea typeface="Calibri"/>
-        <a:cs typeface="Calibri"/>
-      </a:minorFont>
-    </a:fontScheme>
-    <a:fmtScheme name="ChatGPT">
-      <a:fillStyleLst>
-        <a:solidFill>
-          <a:schemeClr val="phClr"/>
-        </a:solidFill>
-        <a:gradFill>
-          <a:gsLst>
-            <a:gs pos="0">
-              <a:schemeClr val="phClr">
-                <a:tint val="67000"/>
-                <a:lumMod val="110000"/>
-                <a:satMod val="105000"/>
-              </a:schemeClr>
-            </a:gs>
-            <a:gs pos="50000">
-              <a:schemeClr val="phClr">
-                <a:tint val="73000"/>
-                <a:lumMod val="105000"/>
-                <a:satMod val="103000"/>
-              </a:schemeClr>
-            </a:gs>
-            <a:gs pos="100000">
-              <a:schemeClr val="phClr">
-                <a:tint val="81000"/>
-                <a:lumMod val="105000"/>
-                <a:satMod val="109000"/>
-              </a:schemeClr>
-            </a:gs>
-          </a:gsLst>
-          <a:lin ang="5400000" scaled="0"/>
-        </a:gradFill>
-        <a:gradFill>
-          <a:gsLst>
-            <a:gs pos="0">
-              <a:schemeClr val="phClr">
-                <a:tint val="94000"/>
-                <a:lumMod val="102000"/>
-                <a:satMod val="103000"/>
-              </a:schemeClr>
-            </a:gs>
-            <a:gs pos="50000">
-              <a:schemeClr val="phClr">
-                <a:shade val="100000"/>
-                <a:lumMod val="100000"/>
-                <a:satMod val="110000"/>
-              </a:schemeClr>
-            </a:gs>
-            <a:gs pos="100000">
-              <a:schemeClr val="phClr">
-                <a:shade val="78000"/>
-                <a:lumMod val="99000"/>
-                <a:satMod val="120000"/>
-              </a:schemeClr>
-            </a:gs>
-          </a:gsLst>
-          <a:lin ang="5400000" scaled="0"/>
-        </a:gradFill>
-      </a:fillStyleLst>
-      <a:lnStyleLst>
-        <a:ln w="12700">
-          <a:solidFill>
-            <a:schemeClr val="phClr"/>
-          </a:solidFill>
-          <a:prstDash val="solid"/>
-        </a:ln>
-        <a:ln w="19050">
-          <a:solidFill>
-            <a:schemeClr val="phClr"/>
-          </a:solidFill>
-          <a:prstDash val="solid"/>
-        </a:ln>
-        <a:ln w="25400">
-          <a:solidFill>
-            <a:schemeClr val="phClr"/>
-          </a:solidFill>
-          <a:prstDash val="solid"/>
-        </a:ln>
-      </a:lnStyleLst>
-      <a:effectStyleLst>
-        <a:effectStyle>
-          <a:effectLst/>
-        </a:effectStyle>
-        <a:effectStyle>
-          <a:effectLst/>
-        </a:effectStyle>
-        <a:effectStyle>
-          <a:effectLst>
-            <a:outerShdw blurRad="57150" dist="19050" dir="5400000">
-              <a:srgbClr val="000000">
-                <a:alpha val="16000"/>
-              </a:srgbClr>
-            </a:outerShdw>
-          </a:effectLst>
-        </a:effectStyle>
-        <a:effectStyle>
-          <a:effectLst>
-            <a:outerShdw blurRad="19050" dist="9525" dir="5400000">
-              <a:srgbClr val="000000">
-                <a:alpha val="6000"/>
-              </a:srgbClr>
-            </a:outerShdw>
-          </a:effectLst>
-        </a:effectStyle>
-        <a:effectStyle>
-          <a:effectLst>
-            <a:outerShdw blurRad="28575" dist="9525" dir="5400000">
-              <a:srgbClr val="000000">
-                <a:alpha val="8000"/>
-              </a:srgbClr>
-            </a:outerShdw>
-          </a:effectLst>
-        </a:effectStyle>
-        <a:effectStyle>
-          <a:effectLst>
-            <a:outerShdw blurRad="57150" dist="19050" dir="5400000">
-              <a:srgbClr val="000000">
-                <a:alpha val="10000"/>
-              </a:srgbClr>
-            </a:outerShdw>
-          </a:effectLst>
-        </a:effectStyle>
-        <a:effectStyle>
-          <a:effectLst>
-            <a:outerShdw blurRad="114300" dist="38100" dir="5400000">
-              <a:srgbClr val="000000">
-                <a:alpha val="12000"/>
-              </a:srgbClr>
-            </a:outerShdw>
-          </a:effectLst>
-        </a:effectStyle>
-        <a:effectStyle>
-          <a:effectLst>
-            <a:outerShdw blurRad="171450" dist="57150" dir="5400000">
-              <a:srgbClr val="000000">
-                <a:alpha val="16000"/>
-              </a:srgbClr>
-            </a:outerShdw>
-          </a:effectLst>
-        </a:effectStyle>
-        <a:effectStyle>
-          <a:effectLst>
-            <a:outerShdw blurRad="266700" dist="95250" dir="5400000">
-              <a:srgbClr val="000000">
-                <a:alpha val="24000"/>
-              </a:srgbClr>
-            </a:outerShdw>
-          </a:effectLst>
-        </a:effectStyle>
-      </a:effectStyleLst>
-      <a:bgFillStyleLst>
-        <a:solidFill>
-          <a:schemeClr val="phClr"/>
-        </a:solidFill>
-        <a:solidFill>
-          <a:schemeClr val="phClr">
-            <a:tint val="95000"/>
-            <a:satMod val="170000"/>
-          </a:schemeClr>
-        </a:solidFill>
-        <a:gradFill>
-          <a:gsLst>
-            <a:gs pos="0">
-              <a:schemeClr val="phClr">
-                <a:tint val="93000"/>
-                <a:shade val="98000"/>
-                <a:lumMod val="102000"/>
-                <a:satMod val="150000"/>
-              </a:schemeClr>
-            </a:gs>
-            <a:gs pos="50000">
-              <a:schemeClr val="phClr">
-                <a:tint val="98000"/>
-                <a:shade val="90000"/>
-                <a:lumMod val="103000"/>
-                <a:satMod val="130000"/>
-              </a:schemeClr>
-            </a:gs>
-            <a:gs pos="100000">
-              <a:schemeClr val="phClr">
-                <a:shade val="63000"/>
-                <a:satMod val="120000"/>
-              </a:schemeClr>
-            </a:gs>
-          </a:gsLst>
-          <a:lin ang="5400000" scaled="0"/>
-        </a:gradFill>
-      </a:bgFillStyleLst>
-    </a:fmtScheme>
-  </a:themeElements>
-</a:theme>
-</file>
-
 <file path=ppt/slides/slide1.xml><?xml version="1.0" encoding="utf-8"?>
-<p:sld xmlns:p="http://schemas.openxmlformats.org/presentationml/2006/main">
+<p:sld xmlns:a="http://schemas.openxmlformats.org/drawingml/2006/main" xmlns:r="http://schemas.openxmlformats.org/officeDocument/2006/relationships" xmlns:p="http://schemas.openxmlformats.org/presentationml/2006/main">
   <p:cSld>
     <p:bg>
       <p:bgPr>
-        <a:solidFill xmlns:a="http://schemas.openxmlformats.org/drawingml/2006/main">
+        <a:solidFill>
           <a:srgbClr val="FCFCFB"/>
         </a:solidFill>
+        <a:effectLst/>
       </p:bgPr>
     </p:bg>
     <p:spTree>
@@ -1069,707 +724,435 @@
         <p:nvPr/>
       </p:nvGrpSpPr>
       <p:grpSpPr>
-        <a:xfrm xmlns:a="http://schemas.openxmlformats.org/drawingml/2006/main"/>
+        <a:xfrm>
+          <a:off x="0" y="0"/>
+          <a:ext cx="0" cy="0"/>
+          <a:chOff x="0" y="0"/>
+          <a:chExt cx="0" cy="0"/>
+        </a:xfrm>
       </p:grpSpPr>
       <p:sp>
         <p:nvSpPr>
           <p:cNvPr id="70" name="trace-line">
-            <a:extLst xmlns:a="http://schemas.openxmlformats.org/drawingml/2006/main">
+            <a:extLst>
               <a:ext uri="{FF2B5EF4-FFF2-40B4-BE49-F238E27FC236}">
                 <a16:creationId xmlns:a16="http://schemas.microsoft.com/office/drawing/2014/main" id="{7406C35B-CCEE-4F6A-ACA3-6EACA9A90A79}"/>
               </a:ext>
             </a:extLst>
           </p:cNvPr>
           <p:cNvSpPr>
-            <a:spLocks xmlns:a="http://schemas.openxmlformats.org/drawingml/2006/main" noGrp="1"/>
-          </p:cNvSpPr>
-          <p:nvPr/>
-        </p:nvSpPr>
-        <p:spPr>
-          <a:xfrm xmlns:a="http://schemas.openxmlformats.org/drawingml/2006/main">
+            <a:spLocks noGrp="1"/>
+          </p:cNvSpPr>
+          <p:nvPr/>
+        </p:nvSpPr>
+        <p:spPr>
+          <a:xfrm>
             <a:off x="285750" y="1343025"/>
             <a:ext cx="3333750" cy="0"/>
           </a:xfrm>
-          <a:prstGeom xmlns:a="http://schemas.openxmlformats.org/drawingml/2006/main" prst="line">
-            <a:avLst/>
-          </a:prstGeom>
-          <a:noFill xmlns:a="http://schemas.openxmlformats.org/drawingml/2006/main"/>
-          <a:ln xmlns:a="http://schemas.openxmlformats.org/drawingml/2006/main" w="14288">
+          <a:prstGeom prst="line">
+            <a:avLst/>
+          </a:prstGeom>
+          <a:noFill/>
+          <a:ln w="14288">
             <a:solidFill>
               <a:srgbClr val="17212B"/>
             </a:solidFill>
             <a:prstDash val="solid"/>
           </a:ln>
         </p:spPr>
-      </p:sp>
-      <p:sp>
-        <p:nvSpPr>
-          <p:cNvPr id="2" name="fork-stem">
-            <a:extLst xmlns:a="http://schemas.openxmlformats.org/drawingml/2006/main">
-              <a:ext uri="{FF2B5EF4-FFF2-40B4-BE49-F238E27FC236}">
-                <a16:creationId xmlns:a16="http://schemas.microsoft.com/office/drawing/2014/main" id="{1FF9A54C-D455-47E4-B931-2F730267C818}"/>
-              </a:ext>
-            </a:extLst>
-          </p:cNvPr>
-          <p:cNvSpPr>
-            <a:spLocks xmlns:a="http://schemas.openxmlformats.org/drawingml/2006/main" noGrp="1"/>
-          </p:cNvSpPr>
-          <p:nvPr/>
-        </p:nvSpPr>
-        <p:spPr>
-          <a:xfrm xmlns:a="http://schemas.openxmlformats.org/drawingml/2006/main">
-            <a:off x="3762375" y="1343025"/>
-            <a:ext cx="0" cy="1419225"/>
-          </a:xfrm>
-          <a:prstGeom xmlns:a="http://schemas.openxmlformats.org/drawingml/2006/main" prst="line">
-            <a:avLst/>
-          </a:prstGeom>
-          <a:noFill xmlns:a="http://schemas.openxmlformats.org/drawingml/2006/main"/>
-          <a:ln xmlns:a="http://schemas.openxmlformats.org/drawingml/2006/main" w="17145">
+        <p:txBody>
+          <a:bodyPr/>
+          <a:lstStyle/>
+          <a:p>
+            <a:endParaRPr lang="en-CN"/>
+          </a:p>
+        </p:txBody>
+      </p:sp>
+      <p:sp>
+        <p:nvSpPr>
+          <p:cNvPr id="9" name="recent-current-head">
+            <a:extLst>
+              <a:ext uri="{FF2B5EF4-FFF2-40B4-BE49-F238E27FC236}">
+                <a16:creationId xmlns:a16="http://schemas.microsoft.com/office/drawing/2014/main" id="{E763AA32-10B5-40EA-B0AF-3A7AB52226D2}"/>
+              </a:ext>
+            </a:extLst>
+          </p:cNvPr>
+          <p:cNvSpPr>
+            <a:spLocks noGrp="1"/>
+          </p:cNvSpPr>
+          <p:nvPr/>
+        </p:nvSpPr>
+        <p:spPr>
+          <a:xfrm rot="7500000">
+            <a:off x="6541082" y="1519672"/>
+            <a:ext cx="85725" cy="85725"/>
+          </a:xfrm>
+          <a:prstGeom prst="triangle">
+            <a:avLst/>
+          </a:prstGeom>
+          <a:solidFill>
+            <a:srgbClr val="2E6F9E"/>
+          </a:solidFill>
+          <a:ln w="0">
+            <a:solidFill>
+              <a:srgbClr val="2E6F9E"/>
+            </a:solidFill>
+            <a:prstDash val="solid"/>
+          </a:ln>
+        </p:spPr>
+        <p:txBody>
+          <a:bodyPr/>
+          <a:lstStyle/>
+          <a:p>
+            <a:endParaRPr lang="en-CN"/>
+          </a:p>
+        </p:txBody>
+      </p:sp>
+      <p:sp>
+        <p:nvSpPr>
+          <p:cNvPr id="14" name="e7-current-head">
+            <a:extLst>
+              <a:ext uri="{FF2B5EF4-FFF2-40B4-BE49-F238E27FC236}">
+                <a16:creationId xmlns:a16="http://schemas.microsoft.com/office/drawing/2014/main" id="{9F08A7A7-9877-4A4B-98C9-385688C62BA8}"/>
+              </a:ext>
+            </a:extLst>
+          </p:cNvPr>
+          <p:cNvSpPr>
+            <a:spLocks noGrp="1"/>
+          </p:cNvSpPr>
+          <p:nvPr/>
+        </p:nvSpPr>
+        <p:spPr>
+          <a:xfrm>
+            <a:off x="6541082" y="1510147"/>
+            <a:ext cx="85725" cy="85725"/>
+          </a:xfrm>
+          <a:prstGeom prst="triangle">
+            <a:avLst/>
+          </a:prstGeom>
+          <a:solidFill>
+            <a:srgbClr val="C45A14"/>
+          </a:solidFill>
+          <a:ln w="0">
+            <a:solidFill>
+              <a:srgbClr val="C45A14"/>
+            </a:solidFill>
+            <a:prstDash val="solid"/>
+          </a:ln>
+        </p:spPr>
+        <p:txBody>
+          <a:bodyPr/>
+          <a:lstStyle/>
+          <a:p>
+            <a:endParaRPr lang="en-CN"/>
+          </a:p>
+        </p:txBody>
+      </p:sp>
+      <p:sp>
+        <p:nvSpPr>
+          <p:cNvPr id="15" name="current-action-stem">
+            <a:extLst>
+              <a:ext uri="{FF2B5EF4-FFF2-40B4-BE49-F238E27FC236}">
+                <a16:creationId xmlns:a16="http://schemas.microsoft.com/office/drawing/2014/main" id="{1775661C-BAF3-4620-AB14-983E4B8E9E27}"/>
+              </a:ext>
+            </a:extLst>
+          </p:cNvPr>
+          <p:cNvSpPr>
+            <a:spLocks noGrp="1"/>
+          </p:cNvSpPr>
+          <p:nvPr/>
+        </p:nvSpPr>
+        <p:spPr>
+          <a:xfrm>
+            <a:off x="7531682" y="1557772"/>
+            <a:ext cx="95250" cy="0"/>
+          </a:xfrm>
+          <a:prstGeom prst="line">
+            <a:avLst/>
+          </a:prstGeom>
+          <a:noFill/>
+          <a:ln w="17145">
             <a:solidFill>
               <a:srgbClr val="17212B"/>
             </a:solidFill>
             <a:prstDash val="solid"/>
           </a:ln>
         </p:spPr>
-      </p:sp>
-      <p:sp>
-        <p:nvSpPr>
-          <p:cNvPr id="3" name="fork-top">
-            <a:extLst xmlns:a="http://schemas.openxmlformats.org/drawingml/2006/main">
-              <a:ext uri="{FF2B5EF4-FFF2-40B4-BE49-F238E27FC236}">
-                <a16:creationId xmlns:a16="http://schemas.microsoft.com/office/drawing/2014/main" id="{6D870BFE-7D53-451F-89D7-AD3CA5A0844C}"/>
-              </a:ext>
-            </a:extLst>
-          </p:cNvPr>
-          <p:cNvSpPr>
-            <a:spLocks xmlns:a="http://schemas.openxmlformats.org/drawingml/2006/main" noGrp="1"/>
-          </p:cNvSpPr>
-          <p:nvPr/>
-        </p:nvSpPr>
-        <p:spPr>
-          <a:xfrm xmlns:a="http://schemas.openxmlformats.org/drawingml/2006/main">
-            <a:off x="3762375" y="1514475"/>
-            <a:ext cx="266700" cy="0"/>
-          </a:xfrm>
-          <a:prstGeom xmlns:a="http://schemas.openxmlformats.org/drawingml/2006/main" prst="line">
-            <a:avLst/>
-          </a:prstGeom>
-          <a:noFill xmlns:a="http://schemas.openxmlformats.org/drawingml/2006/main"/>
-          <a:ln xmlns:a="http://schemas.openxmlformats.org/drawingml/2006/main" w="17145">
-            <a:solidFill>
-              <a:srgbClr val="17212B"/>
-            </a:solidFill>
-            <a:prstDash val="solid"/>
-          </a:ln>
-        </p:spPr>
-      </p:sp>
-      <p:sp>
-        <p:nvSpPr>
-          <p:cNvPr id="4" name="fork-bottom">
-            <a:extLst xmlns:a="http://schemas.openxmlformats.org/drawingml/2006/main">
-              <a:ext uri="{FF2B5EF4-FFF2-40B4-BE49-F238E27FC236}">
-                <a16:creationId xmlns:a16="http://schemas.microsoft.com/office/drawing/2014/main" id="{538AEC29-7007-4AEC-A273-32D52E8FAE40}"/>
-              </a:ext>
-            </a:extLst>
-          </p:cNvPr>
-          <p:cNvSpPr>
-            <a:spLocks xmlns:a="http://schemas.openxmlformats.org/drawingml/2006/main" noGrp="1"/>
-          </p:cNvSpPr>
-          <p:nvPr/>
-        </p:nvSpPr>
-        <p:spPr>
-          <a:xfrm xmlns:a="http://schemas.openxmlformats.org/drawingml/2006/main">
-            <a:off x="3762375" y="2752725"/>
-            <a:ext cx="266700" cy="0"/>
-          </a:xfrm>
-          <a:prstGeom xmlns:a="http://schemas.openxmlformats.org/drawingml/2006/main" prst="line">
-            <a:avLst/>
-          </a:prstGeom>
-          <a:noFill xmlns:a="http://schemas.openxmlformats.org/drawingml/2006/main"/>
-          <a:ln xmlns:a="http://schemas.openxmlformats.org/drawingml/2006/main" w="17145">
-            <a:solidFill>
-              <a:srgbClr val="17212B"/>
-            </a:solidFill>
-            <a:prstDash val="solid"/>
-          </a:ln>
-        </p:spPr>
-      </p:sp>
-      <p:sp>
-        <p:nvSpPr>
-          <p:cNvPr id="5" name="fork-top-head">
-            <a:extLst xmlns:a="http://schemas.openxmlformats.org/drawingml/2006/main">
-              <a:ext uri="{FF2B5EF4-FFF2-40B4-BE49-F238E27FC236}">
-                <a16:creationId xmlns:a16="http://schemas.microsoft.com/office/drawing/2014/main" id="{15B77AFA-5B14-497C-AD60-DC72F920518A}"/>
-              </a:ext>
-            </a:extLst>
-          </p:cNvPr>
-          <p:cNvSpPr>
-            <a:spLocks xmlns:a="http://schemas.openxmlformats.org/drawingml/2006/main" noGrp="1"/>
-          </p:cNvSpPr>
-          <p:nvPr/>
-        </p:nvSpPr>
-        <p:spPr>
-          <a:xfrm xmlns:a="http://schemas.openxmlformats.org/drawingml/2006/main" rot="5400000">
-            <a:off x="3990975" y="1476375"/>
-            <a:ext cx="85725" cy="85725"/>
-          </a:xfrm>
-          <a:prstGeom xmlns:a="http://schemas.openxmlformats.org/drawingml/2006/main" prst="triangle">
-            <a:avLst/>
-          </a:prstGeom>
-          <a:solidFill xmlns:a="http://schemas.openxmlformats.org/drawingml/2006/main">
-            <a:srgbClr val="17212B"/>
-          </a:solidFill>
-          <a:ln xmlns:a="http://schemas.openxmlformats.org/drawingml/2006/main" w="0">
-            <a:solidFill>
-              <a:srgbClr val="17212B"/>
-            </a:solidFill>
-            <a:prstDash val="solid"/>
-          </a:ln>
-        </p:spPr>
-      </p:sp>
-      <p:sp>
-        <p:nvSpPr>
-          <p:cNvPr id="6" name="fork-bottom-head">
-            <a:extLst xmlns:a="http://schemas.openxmlformats.org/drawingml/2006/main">
-              <a:ext uri="{FF2B5EF4-FFF2-40B4-BE49-F238E27FC236}">
-                <a16:creationId xmlns:a16="http://schemas.microsoft.com/office/drawing/2014/main" id="{E7B4A691-FF3D-4F8C-8BDB-4B5B351AF36A}"/>
-              </a:ext>
-            </a:extLst>
-          </p:cNvPr>
-          <p:cNvSpPr>
-            <a:spLocks xmlns:a="http://schemas.openxmlformats.org/drawingml/2006/main" noGrp="1"/>
-          </p:cNvSpPr>
-          <p:nvPr/>
-        </p:nvSpPr>
-        <p:spPr>
-          <a:xfrm xmlns:a="http://schemas.openxmlformats.org/drawingml/2006/main" rot="5400000">
-            <a:off x="3990975" y="2714625"/>
-            <a:ext cx="85725" cy="85725"/>
-          </a:xfrm>
-          <a:prstGeom xmlns:a="http://schemas.openxmlformats.org/drawingml/2006/main" prst="triangle">
-            <a:avLst/>
-          </a:prstGeom>
-          <a:solidFill xmlns:a="http://schemas.openxmlformats.org/drawingml/2006/main">
-            <a:srgbClr val="17212B"/>
-          </a:solidFill>
-          <a:ln xmlns:a="http://schemas.openxmlformats.org/drawingml/2006/main" w="0">
-            <a:solidFill>
-              <a:srgbClr val="17212B"/>
-            </a:solidFill>
-            <a:prstDash val="solid"/>
-          </a:ln>
-        </p:spPr>
-      </p:sp>
-      <p:sp>
-        <p:nvSpPr>
-          <p:cNvPr id="7" name="recent-run">
-            <a:extLst xmlns:a="http://schemas.openxmlformats.org/drawingml/2006/main">
-              <a:ext uri="{FF2B5EF4-FFF2-40B4-BE49-F238E27FC236}">
-                <a16:creationId xmlns:a16="http://schemas.microsoft.com/office/drawing/2014/main" id="{21F2612E-85A3-43A5-9B7C-FED2B9040297}"/>
-              </a:ext>
-            </a:extLst>
-          </p:cNvPr>
-          <p:cNvSpPr>
-            <a:spLocks xmlns:a="http://schemas.openxmlformats.org/drawingml/2006/main" noGrp="1"/>
-          </p:cNvSpPr>
-          <p:nvPr/>
-        </p:nvSpPr>
-        <p:spPr>
-          <a:xfrm xmlns:a="http://schemas.openxmlformats.org/drawingml/2006/main">
-            <a:off x="5781675" y="1514475"/>
-            <a:ext cx="1381125" cy="0"/>
-          </a:xfrm>
-          <a:prstGeom xmlns:a="http://schemas.openxmlformats.org/drawingml/2006/main" prst="line">
-            <a:avLst/>
-          </a:prstGeom>
-          <a:noFill xmlns:a="http://schemas.openxmlformats.org/drawingml/2006/main"/>
-          <a:ln xmlns:a="http://schemas.openxmlformats.org/drawingml/2006/main" w="23813">
-            <a:solidFill>
-              <a:srgbClr val="2E6F9E"/>
-            </a:solidFill>
-            <a:prstDash val="solid"/>
-          </a:ln>
-        </p:spPr>
-      </p:sp>
-      <p:sp>
-        <p:nvSpPr>
-          <p:cNvPr id="8" name="recent-diagonal">
-            <a:extLst xmlns:a="http://schemas.openxmlformats.org/drawingml/2006/main">
-              <a:ext uri="{FF2B5EF4-FFF2-40B4-BE49-F238E27FC236}">
-                <a16:creationId xmlns:a16="http://schemas.microsoft.com/office/drawing/2014/main" id="{88B8D4C5-F1DA-45E6-83B9-A19C235E7A73}"/>
-              </a:ext>
-            </a:extLst>
-          </p:cNvPr>
-          <p:cNvSpPr>
-            <a:spLocks xmlns:a="http://schemas.openxmlformats.org/drawingml/2006/main" noGrp="1"/>
-          </p:cNvSpPr>
-          <p:nvPr/>
-        </p:nvSpPr>
-        <p:spPr>
-          <a:xfrm xmlns:a="http://schemas.openxmlformats.org/drawingml/2006/main">
-            <a:off x="7162800" y="1514475"/>
-            <a:ext cx="552450" cy="209550"/>
-          </a:xfrm>
-          <a:prstGeom xmlns:a="http://schemas.openxmlformats.org/drawingml/2006/main" prst="line">
-            <a:avLst/>
-          </a:prstGeom>
-          <a:noFill xmlns:a="http://schemas.openxmlformats.org/drawingml/2006/main"/>
-          <a:ln xmlns:a="http://schemas.openxmlformats.org/drawingml/2006/main" w="23813">
-            <a:solidFill>
-              <a:srgbClr val="2E6F9E"/>
-            </a:solidFill>
-            <a:prstDash val="solid"/>
-          </a:ln>
-        </p:spPr>
-      </p:sp>
-      <p:sp>
-        <p:nvSpPr>
-          <p:cNvPr id="9" name="recent-current-head">
-            <a:extLst xmlns:a="http://schemas.openxmlformats.org/drawingml/2006/main">
-              <a:ext uri="{FF2B5EF4-FFF2-40B4-BE49-F238E27FC236}">
-                <a16:creationId xmlns:a16="http://schemas.microsoft.com/office/drawing/2014/main" id="{E763AA32-10B5-40EA-B0AF-3A7AB52226D2}"/>
-              </a:ext>
-            </a:extLst>
-          </p:cNvPr>
-          <p:cNvSpPr>
-            <a:spLocks xmlns:a="http://schemas.openxmlformats.org/drawingml/2006/main" noGrp="1"/>
-          </p:cNvSpPr>
-          <p:nvPr/>
-        </p:nvSpPr>
-        <p:spPr>
-          <a:xfrm xmlns:a="http://schemas.openxmlformats.org/drawingml/2006/main" rot="7500000">
-            <a:off x="7677150" y="1685925"/>
-            <a:ext cx="85725" cy="85725"/>
-          </a:xfrm>
-          <a:prstGeom xmlns:a="http://schemas.openxmlformats.org/drawingml/2006/main" prst="triangle">
-            <a:avLst/>
-          </a:prstGeom>
-          <a:solidFill xmlns:a="http://schemas.openxmlformats.org/drawingml/2006/main">
-            <a:srgbClr val="2E6F9E"/>
-          </a:solidFill>
-          <a:ln xmlns:a="http://schemas.openxmlformats.org/drawingml/2006/main" w="0">
-            <a:solidFill>
-              <a:srgbClr val="2E6F9E"/>
-            </a:solidFill>
-            <a:prstDash val="solid"/>
-          </a:ln>
-        </p:spPr>
-      </p:sp>
-      <p:sp>
-        <p:nvSpPr>
-          <p:cNvPr id="10" name="causal-to-e7">
-            <a:extLst xmlns:a="http://schemas.openxmlformats.org/drawingml/2006/main">
-              <a:ext uri="{FF2B5EF4-FFF2-40B4-BE49-F238E27FC236}">
-                <a16:creationId xmlns:a16="http://schemas.microsoft.com/office/drawing/2014/main" id="{93AE3575-6336-47F4-B59B-3376D8B6673B}"/>
-              </a:ext>
-            </a:extLst>
-          </p:cNvPr>
-          <p:cNvSpPr>
-            <a:spLocks xmlns:a="http://schemas.openxmlformats.org/drawingml/2006/main" noGrp="1"/>
-          </p:cNvSpPr>
-          <p:nvPr/>
-        </p:nvSpPr>
-        <p:spPr>
-          <a:xfrm xmlns:a="http://schemas.openxmlformats.org/drawingml/2006/main">
-            <a:off x="5781675" y="2752725"/>
-            <a:ext cx="152400" cy="0"/>
-          </a:xfrm>
-          <a:prstGeom xmlns:a="http://schemas.openxmlformats.org/drawingml/2006/main" prst="line">
-            <a:avLst/>
-          </a:prstGeom>
-          <a:noFill xmlns:a="http://schemas.openxmlformats.org/drawingml/2006/main"/>
-          <a:ln xmlns:a="http://schemas.openxmlformats.org/drawingml/2006/main" w="23813">
-            <a:solidFill>
-              <a:srgbClr val="C45A14"/>
-            </a:solidFill>
-            <a:prstDash val="solid"/>
-          </a:ln>
-        </p:spPr>
-      </p:sp>
-      <p:sp>
-        <p:nvSpPr>
-          <p:cNvPr id="11" name="causal-e7-head">
-            <a:extLst xmlns:a="http://schemas.openxmlformats.org/drawingml/2006/main">
-              <a:ext uri="{FF2B5EF4-FFF2-40B4-BE49-F238E27FC236}">
-                <a16:creationId xmlns:a16="http://schemas.microsoft.com/office/drawing/2014/main" id="{B5BB9E97-3EFC-41F8-87C4-AD2860748558}"/>
-              </a:ext>
-            </a:extLst>
-          </p:cNvPr>
-          <p:cNvSpPr>
-            <a:spLocks xmlns:a="http://schemas.openxmlformats.org/drawingml/2006/main" noGrp="1"/>
-          </p:cNvSpPr>
-          <p:nvPr/>
-        </p:nvSpPr>
-        <p:spPr>
-          <a:xfrm xmlns:a="http://schemas.openxmlformats.org/drawingml/2006/main" rot="5400000">
-            <a:off x="5895975" y="2714625"/>
-            <a:ext cx="85725" cy="85725"/>
-          </a:xfrm>
-          <a:prstGeom xmlns:a="http://schemas.openxmlformats.org/drawingml/2006/main" prst="triangle">
-            <a:avLst/>
-          </a:prstGeom>
-          <a:solidFill xmlns:a="http://schemas.openxmlformats.org/drawingml/2006/main">
-            <a:srgbClr val="C45A14"/>
-          </a:solidFill>
-          <a:ln xmlns:a="http://schemas.openxmlformats.org/drawingml/2006/main" w="0">
-            <a:solidFill>
-              <a:srgbClr val="C45A14"/>
-            </a:solidFill>
-            <a:prstDash val="solid"/>
-          </a:ln>
-        </p:spPr>
-      </p:sp>
-      <p:sp>
-        <p:nvSpPr>
-          <p:cNvPr id="12" name="e7-current-horizontal">
-            <a:extLst xmlns:a="http://schemas.openxmlformats.org/drawingml/2006/main">
-              <a:ext uri="{FF2B5EF4-FFF2-40B4-BE49-F238E27FC236}">
-                <a16:creationId xmlns:a16="http://schemas.microsoft.com/office/drawing/2014/main" id="{FC130CDC-0D9B-4ACD-93CD-15ADEB640796}"/>
-              </a:ext>
-            </a:extLst>
-          </p:cNvPr>
-          <p:cNvSpPr>
-            <a:spLocks xmlns:a="http://schemas.openxmlformats.org/drawingml/2006/main" noGrp="1"/>
-          </p:cNvSpPr>
-          <p:nvPr/>
-        </p:nvSpPr>
-        <p:spPr>
-          <a:xfrm xmlns:a="http://schemas.openxmlformats.org/drawingml/2006/main">
-            <a:off x="7524750" y="2590800"/>
-            <a:ext cx="190500" cy="0"/>
-          </a:xfrm>
-          <a:prstGeom xmlns:a="http://schemas.openxmlformats.org/drawingml/2006/main" prst="line">
-            <a:avLst/>
-          </a:prstGeom>
-          <a:noFill xmlns:a="http://schemas.openxmlformats.org/drawingml/2006/main"/>
-          <a:ln xmlns:a="http://schemas.openxmlformats.org/drawingml/2006/main" w="23813">
-            <a:solidFill>
-              <a:srgbClr val="C45A14"/>
-            </a:solidFill>
-            <a:prstDash val="solid"/>
-          </a:ln>
-        </p:spPr>
-      </p:sp>
-      <p:sp>
-        <p:nvSpPr>
-          <p:cNvPr id="13" name="e7-current-vertical">
-            <a:extLst xmlns:a="http://schemas.openxmlformats.org/drawingml/2006/main">
-              <a:ext uri="{FF2B5EF4-FFF2-40B4-BE49-F238E27FC236}">
-                <a16:creationId xmlns:a16="http://schemas.microsoft.com/office/drawing/2014/main" id="{A84AA669-34FB-440C-A3CA-D8FF62D6BDA9}"/>
-              </a:ext>
-            </a:extLst>
-          </p:cNvPr>
-          <p:cNvSpPr>
-            <a:spLocks xmlns:a="http://schemas.openxmlformats.org/drawingml/2006/main" noGrp="1"/>
-          </p:cNvSpPr>
-          <p:nvPr/>
-        </p:nvSpPr>
-        <p:spPr>
-          <a:xfrm xmlns:a="http://schemas.openxmlformats.org/drawingml/2006/main">
-            <a:off x="7715250" y="1724025"/>
-            <a:ext cx="0" cy="866775"/>
-          </a:xfrm>
-          <a:prstGeom xmlns:a="http://schemas.openxmlformats.org/drawingml/2006/main" prst="line">
-            <a:avLst/>
-          </a:prstGeom>
-          <a:noFill xmlns:a="http://schemas.openxmlformats.org/drawingml/2006/main"/>
-          <a:ln xmlns:a="http://schemas.openxmlformats.org/drawingml/2006/main" w="23813">
-            <a:solidFill>
-              <a:srgbClr val="C45A14"/>
-            </a:solidFill>
-            <a:prstDash val="solid"/>
-          </a:ln>
-        </p:spPr>
-      </p:sp>
-      <p:sp>
-        <p:nvSpPr>
-          <p:cNvPr id="14" name="e7-current-head">
-            <a:extLst xmlns:a="http://schemas.openxmlformats.org/drawingml/2006/main">
-              <a:ext uri="{FF2B5EF4-FFF2-40B4-BE49-F238E27FC236}">
-                <a16:creationId xmlns:a16="http://schemas.microsoft.com/office/drawing/2014/main" id="{9F08A7A7-9877-4A4B-98C9-385688C62BA8}"/>
-              </a:ext>
-            </a:extLst>
-          </p:cNvPr>
-          <p:cNvSpPr>
-            <a:spLocks xmlns:a="http://schemas.openxmlformats.org/drawingml/2006/main" noGrp="1"/>
-          </p:cNvSpPr>
-          <p:nvPr/>
-        </p:nvSpPr>
-        <p:spPr>
-          <a:xfrm xmlns:a="http://schemas.openxmlformats.org/drawingml/2006/main" rot="0">
-            <a:off x="7677150" y="1676400"/>
-            <a:ext cx="85725" cy="85725"/>
-          </a:xfrm>
-          <a:prstGeom xmlns:a="http://schemas.openxmlformats.org/drawingml/2006/main" prst="triangle">
-            <a:avLst/>
-          </a:prstGeom>
-          <a:solidFill xmlns:a="http://schemas.openxmlformats.org/drawingml/2006/main">
-            <a:srgbClr val="C45A14"/>
-          </a:solidFill>
-          <a:ln xmlns:a="http://schemas.openxmlformats.org/drawingml/2006/main" w="0">
-            <a:solidFill>
-              <a:srgbClr val="C45A14"/>
-            </a:solidFill>
-            <a:prstDash val="solid"/>
-          </a:ln>
-        </p:spPr>
-      </p:sp>
-      <p:sp>
-        <p:nvSpPr>
-          <p:cNvPr id="15" name="current-action-stem">
-            <a:extLst xmlns:a="http://schemas.openxmlformats.org/drawingml/2006/main">
-              <a:ext uri="{FF2B5EF4-FFF2-40B4-BE49-F238E27FC236}">
-                <a16:creationId xmlns:a16="http://schemas.microsoft.com/office/drawing/2014/main" id="{1775661C-BAF3-4620-AB14-983E4B8E9E27}"/>
-              </a:ext>
-            </a:extLst>
-          </p:cNvPr>
-          <p:cNvSpPr>
-            <a:spLocks xmlns:a="http://schemas.openxmlformats.org/drawingml/2006/main" noGrp="1"/>
-          </p:cNvSpPr>
-          <p:nvPr/>
-        </p:nvSpPr>
-        <p:spPr>
-          <a:xfrm xmlns:a="http://schemas.openxmlformats.org/drawingml/2006/main">
-            <a:off x="8667750" y="1724025"/>
-            <a:ext cx="95250" cy="0"/>
-          </a:xfrm>
-          <a:prstGeom xmlns:a="http://schemas.openxmlformats.org/drawingml/2006/main" prst="line">
-            <a:avLst/>
-          </a:prstGeom>
-          <a:noFill xmlns:a="http://schemas.openxmlformats.org/drawingml/2006/main"/>
-          <a:ln xmlns:a="http://schemas.openxmlformats.org/drawingml/2006/main" w="17145">
-            <a:solidFill>
-              <a:srgbClr val="17212B"/>
-            </a:solidFill>
-            <a:prstDash val="solid"/>
-          </a:ln>
-        </p:spPr>
+        <p:txBody>
+          <a:bodyPr/>
+          <a:lstStyle/>
+          <a:p>
+            <a:endParaRPr lang="en-CN"/>
+          </a:p>
+        </p:txBody>
       </p:sp>
       <p:sp>
         <p:nvSpPr>
           <p:cNvPr id="16" name="current-action-up">
-            <a:extLst xmlns:a="http://schemas.openxmlformats.org/drawingml/2006/main">
+            <a:extLst>
               <a:ext uri="{FF2B5EF4-FFF2-40B4-BE49-F238E27FC236}">
                 <a16:creationId xmlns:a16="http://schemas.microsoft.com/office/drawing/2014/main" id="{66A38DA5-1F4A-4603-8EC9-BAE8429062B4}"/>
               </a:ext>
             </a:extLst>
           </p:cNvPr>
           <p:cNvSpPr>
-            <a:spLocks xmlns:a="http://schemas.openxmlformats.org/drawingml/2006/main" noGrp="1"/>
-          </p:cNvSpPr>
-          <p:nvPr/>
-        </p:nvSpPr>
-        <p:spPr>
-          <a:xfrm xmlns:a="http://schemas.openxmlformats.org/drawingml/2006/main">
-            <a:off x="8763000" y="990600"/>
+            <a:spLocks noGrp="1"/>
+          </p:cNvSpPr>
+          <p:nvPr/>
+        </p:nvSpPr>
+        <p:spPr>
+          <a:xfrm>
+            <a:off x="8504374" y="787403"/>
             <a:ext cx="0" cy="733425"/>
           </a:xfrm>
-          <a:prstGeom xmlns:a="http://schemas.openxmlformats.org/drawingml/2006/main" prst="line">
-            <a:avLst/>
-          </a:prstGeom>
-          <a:noFill xmlns:a="http://schemas.openxmlformats.org/drawingml/2006/main"/>
-          <a:ln xmlns:a="http://schemas.openxmlformats.org/drawingml/2006/main" w="17145">
+          <a:prstGeom prst="line">
+            <a:avLst/>
+          </a:prstGeom>
+          <a:noFill/>
+          <a:ln w="17145">
             <a:solidFill>
               <a:srgbClr val="B33A3A"/>
             </a:solidFill>
             <a:prstDash val="solid"/>
           </a:ln>
         </p:spPr>
+        <p:txBody>
+          <a:bodyPr/>
+          <a:lstStyle/>
+          <a:p>
+            <a:endParaRPr lang="en-CN"/>
+          </a:p>
+        </p:txBody>
       </p:sp>
       <p:sp>
         <p:nvSpPr>
           <p:cNvPr id="17" name="current-action-down">
-            <a:extLst xmlns:a="http://schemas.openxmlformats.org/drawingml/2006/main">
+            <a:extLst>
               <a:ext uri="{FF2B5EF4-FFF2-40B4-BE49-F238E27FC236}">
                 <a16:creationId xmlns:a16="http://schemas.microsoft.com/office/drawing/2014/main" id="{F5CACB05-BCF1-4E33-A8C2-932B0E08FE5E}"/>
               </a:ext>
             </a:extLst>
           </p:cNvPr>
           <p:cNvSpPr>
-            <a:spLocks xmlns:a="http://schemas.openxmlformats.org/drawingml/2006/main" noGrp="1"/>
-          </p:cNvSpPr>
-          <p:nvPr/>
-        </p:nvSpPr>
-        <p:spPr>
-          <a:xfrm xmlns:a="http://schemas.openxmlformats.org/drawingml/2006/main">
-            <a:off x="8763000" y="1724025"/>
+            <a:spLocks noGrp="1"/>
+          </p:cNvSpPr>
+          <p:nvPr/>
+        </p:nvSpPr>
+        <p:spPr>
+          <a:xfrm>
+            <a:off x="8504374" y="1520828"/>
             <a:ext cx="0" cy="914400"/>
           </a:xfrm>
-          <a:prstGeom xmlns:a="http://schemas.openxmlformats.org/drawingml/2006/main" prst="line">
-            <a:avLst/>
-          </a:prstGeom>
-          <a:noFill xmlns:a="http://schemas.openxmlformats.org/drawingml/2006/main"/>
-          <a:ln xmlns:a="http://schemas.openxmlformats.org/drawingml/2006/main" w="17145">
+          <a:prstGeom prst="line">
+            <a:avLst/>
+          </a:prstGeom>
+          <a:noFill/>
+          <a:ln w="17145">
             <a:solidFill>
               <a:srgbClr val="2E7D4F"/>
             </a:solidFill>
             <a:prstDash val="solid"/>
           </a:ln>
         </p:spPr>
+        <p:txBody>
+          <a:bodyPr/>
+          <a:lstStyle/>
+          <a:p>
+            <a:endParaRPr lang="en-CN"/>
+          </a:p>
+        </p:txBody>
       </p:sp>
       <p:sp>
         <p:nvSpPr>
           <p:cNvPr id="18" name="current-action-up-out">
-            <a:extLst xmlns:a="http://schemas.openxmlformats.org/drawingml/2006/main">
+            <a:extLst>
               <a:ext uri="{FF2B5EF4-FFF2-40B4-BE49-F238E27FC236}">
                 <a16:creationId xmlns:a16="http://schemas.microsoft.com/office/drawing/2014/main" id="{0B964772-7478-4E01-854B-73C755E6FBF2}"/>
               </a:ext>
             </a:extLst>
           </p:cNvPr>
           <p:cNvSpPr>
-            <a:spLocks xmlns:a="http://schemas.openxmlformats.org/drawingml/2006/main" noGrp="1"/>
-          </p:cNvSpPr>
-          <p:nvPr/>
-        </p:nvSpPr>
-        <p:spPr>
-          <a:xfrm xmlns:a="http://schemas.openxmlformats.org/drawingml/2006/main">
-            <a:off x="8763000" y="990600"/>
+            <a:spLocks noGrp="1"/>
+          </p:cNvSpPr>
+          <p:nvPr/>
+        </p:nvSpPr>
+        <p:spPr>
+          <a:xfrm>
+            <a:off x="8504374" y="787403"/>
             <a:ext cx="114300" cy="0"/>
           </a:xfrm>
-          <a:prstGeom xmlns:a="http://schemas.openxmlformats.org/drawingml/2006/main" prst="line">
-            <a:avLst/>
-          </a:prstGeom>
-          <a:noFill xmlns:a="http://schemas.openxmlformats.org/drawingml/2006/main"/>
-          <a:ln xmlns:a="http://schemas.openxmlformats.org/drawingml/2006/main" w="17145">
+          <a:prstGeom prst="line">
+            <a:avLst/>
+          </a:prstGeom>
+          <a:noFill/>
+          <a:ln w="17145">
             <a:solidFill>
               <a:srgbClr val="B33A3A"/>
             </a:solidFill>
             <a:prstDash val="solid"/>
           </a:ln>
         </p:spPr>
+        <p:txBody>
+          <a:bodyPr/>
+          <a:lstStyle/>
+          <a:p>
+            <a:endParaRPr lang="en-CN"/>
+          </a:p>
+        </p:txBody>
       </p:sp>
       <p:sp>
         <p:nvSpPr>
           <p:cNvPr id="19" name="current-action-down-out">
-            <a:extLst xmlns:a="http://schemas.openxmlformats.org/drawingml/2006/main">
+            <a:extLst>
               <a:ext uri="{FF2B5EF4-FFF2-40B4-BE49-F238E27FC236}">
                 <a16:creationId xmlns:a16="http://schemas.microsoft.com/office/drawing/2014/main" id="{A7C9F19B-6660-477A-A6D8-F22016B7F5AC}"/>
               </a:ext>
             </a:extLst>
           </p:cNvPr>
           <p:cNvSpPr>
-            <a:spLocks xmlns:a="http://schemas.openxmlformats.org/drawingml/2006/main" noGrp="1"/>
-          </p:cNvSpPr>
-          <p:nvPr/>
-        </p:nvSpPr>
-        <p:spPr>
-          <a:xfrm xmlns:a="http://schemas.openxmlformats.org/drawingml/2006/main">
-            <a:off x="8763000" y="2638425"/>
+            <a:spLocks noGrp="1"/>
+          </p:cNvSpPr>
+          <p:nvPr/>
+        </p:nvSpPr>
+        <p:spPr>
+          <a:xfrm>
+            <a:off x="8504374" y="2435228"/>
             <a:ext cx="114300" cy="0"/>
           </a:xfrm>
-          <a:prstGeom xmlns:a="http://schemas.openxmlformats.org/drawingml/2006/main" prst="line">
-            <a:avLst/>
-          </a:prstGeom>
-          <a:noFill xmlns:a="http://schemas.openxmlformats.org/drawingml/2006/main"/>
-          <a:ln xmlns:a="http://schemas.openxmlformats.org/drawingml/2006/main" w="17145">
+          <a:prstGeom prst="line">
+            <a:avLst/>
+          </a:prstGeom>
+          <a:noFill/>
+          <a:ln w="17145">
             <a:solidFill>
               <a:srgbClr val="2E7D4F"/>
             </a:solidFill>
             <a:prstDash val="solid"/>
           </a:ln>
         </p:spPr>
+        <p:txBody>
+          <a:bodyPr/>
+          <a:lstStyle/>
+          <a:p>
+            <a:endParaRPr lang="en-CN"/>
+          </a:p>
+        </p:txBody>
       </p:sp>
       <p:sp>
         <p:nvSpPr>
           <p:cNvPr id="20" name="recent-action-head">
-            <a:extLst xmlns:a="http://schemas.openxmlformats.org/drawingml/2006/main">
+            <a:extLst>
               <a:ext uri="{FF2B5EF4-FFF2-40B4-BE49-F238E27FC236}">
                 <a16:creationId xmlns:a16="http://schemas.microsoft.com/office/drawing/2014/main" id="{C0AFCB28-852B-4879-A60E-C2CFF8A67B15}"/>
               </a:ext>
             </a:extLst>
           </p:cNvPr>
           <p:cNvSpPr>
-            <a:spLocks xmlns:a="http://schemas.openxmlformats.org/drawingml/2006/main" noGrp="1"/>
-          </p:cNvSpPr>
-          <p:nvPr/>
-        </p:nvSpPr>
-        <p:spPr>
-          <a:xfrm xmlns:a="http://schemas.openxmlformats.org/drawingml/2006/main" rot="5400000">
-            <a:off x="8839200" y="952500"/>
+            <a:spLocks noGrp="1"/>
+          </p:cNvSpPr>
+          <p:nvPr/>
+        </p:nvSpPr>
+        <p:spPr>
+          <a:xfrm rot="5400000">
+            <a:off x="8580574" y="749303"/>
             <a:ext cx="85725" cy="85725"/>
           </a:xfrm>
-          <a:prstGeom xmlns:a="http://schemas.openxmlformats.org/drawingml/2006/main" prst="triangle">
-            <a:avLst/>
-          </a:prstGeom>
-          <a:solidFill xmlns:a="http://schemas.openxmlformats.org/drawingml/2006/main">
+          <a:prstGeom prst="triangle">
+            <a:avLst/>
+          </a:prstGeom>
+          <a:solidFill>
             <a:srgbClr val="B33A3A"/>
           </a:solidFill>
-          <a:ln xmlns:a="http://schemas.openxmlformats.org/drawingml/2006/main" w="0">
+          <a:ln w="0">
             <a:solidFill>
               <a:srgbClr val="B33A3A"/>
             </a:solidFill>
             <a:prstDash val="solid"/>
           </a:ln>
         </p:spPr>
+        <p:txBody>
+          <a:bodyPr/>
+          <a:lstStyle/>
+          <a:p>
+            <a:endParaRPr lang="en-CN"/>
+          </a:p>
+        </p:txBody>
       </p:sp>
       <p:sp>
         <p:nvSpPr>
           <p:cNvPr id="21" name="causal-action-head">
-            <a:extLst xmlns:a="http://schemas.openxmlformats.org/drawingml/2006/main">
+            <a:extLst>
               <a:ext uri="{FF2B5EF4-FFF2-40B4-BE49-F238E27FC236}">
                 <a16:creationId xmlns:a16="http://schemas.microsoft.com/office/drawing/2014/main" id="{104526E7-4EF6-41B0-82B1-A8EE4D624ED0}"/>
               </a:ext>
             </a:extLst>
           </p:cNvPr>
           <p:cNvSpPr>
-            <a:spLocks xmlns:a="http://schemas.openxmlformats.org/drawingml/2006/main" noGrp="1"/>
-          </p:cNvSpPr>
-          <p:nvPr/>
-        </p:nvSpPr>
-        <p:spPr>
-          <a:xfrm xmlns:a="http://schemas.openxmlformats.org/drawingml/2006/main" rot="5400000">
-            <a:off x="8839200" y="2600325"/>
+            <a:spLocks noGrp="1"/>
+          </p:cNvSpPr>
+          <p:nvPr/>
+        </p:nvSpPr>
+        <p:spPr>
+          <a:xfrm rot="5400000">
+            <a:off x="8580574" y="2397128"/>
             <a:ext cx="85725" cy="85725"/>
           </a:xfrm>
-          <a:prstGeom xmlns:a="http://schemas.openxmlformats.org/drawingml/2006/main" prst="triangle">
-            <a:avLst/>
-          </a:prstGeom>
-          <a:solidFill xmlns:a="http://schemas.openxmlformats.org/drawingml/2006/main">
+          <a:prstGeom prst="triangle">
+            <a:avLst/>
+          </a:prstGeom>
+          <a:solidFill>
             <a:srgbClr val="2E7D4F"/>
           </a:solidFill>
-          <a:ln xmlns:a="http://schemas.openxmlformats.org/drawingml/2006/main" w="0">
+          <a:ln w="0">
             <a:solidFill>
               <a:srgbClr val="2E7D4F"/>
             </a:solidFill>
             <a:prstDash val="solid"/>
           </a:ln>
         </p:spPr>
+        <p:txBody>
+          <a:bodyPr/>
+          <a:lstStyle/>
+          <a:p>
+            <a:endParaRPr lang="en-CN"/>
+          </a:p>
+        </p:txBody>
       </p:sp>
       <p:sp>
         <p:nvSpPr>
           <p:cNvPr id="22" name="shared-prompt-title">
-            <a:extLst xmlns:a="http://schemas.openxmlformats.org/drawingml/2006/main">
+            <a:extLst>
               <a:ext uri="{FF2B5EF4-FFF2-40B4-BE49-F238E27FC236}">
                 <a16:creationId xmlns:a16="http://schemas.microsoft.com/office/drawing/2014/main" id="{A9B42570-4912-437A-94B9-495443017946}"/>
               </a:ext>
             </a:extLst>
           </p:cNvPr>
           <p:cNvSpPr>
-            <a:spLocks xmlns:a="http://schemas.openxmlformats.org/drawingml/2006/main" noGrp="1"/>
-          </p:cNvSpPr>
-          <p:nvPr/>
-        </p:nvSpPr>
-        <p:spPr>
-          <a:xfrm xmlns:a="http://schemas.openxmlformats.org/drawingml/2006/main">
+            <a:spLocks noGrp="1"/>
+          </p:cNvSpPr>
+          <p:nvPr/>
+        </p:nvSpPr>
+        <p:spPr>
+          <a:xfrm>
             <a:off x="285750" y="180975"/>
             <a:ext cx="1714500" cy="266700"/>
           </a:xfrm>
-          <a:prstGeom xmlns:a="http://schemas.openxmlformats.org/drawingml/2006/main" prst="rect">
-            <a:avLst/>
-          </a:prstGeom>
-          <a:noFill xmlns:a="http://schemas.openxmlformats.org/drawingml/2006/main"/>
-          <a:ln xmlns:a="http://schemas.openxmlformats.org/drawingml/2006/main" w="0">
+          <a:prstGeom prst="rect">
+            <a:avLst/>
+          </a:prstGeom>
+          <a:noFill/>
+          <a:ln w="0">
             <a:noFill/>
             <a:prstDash val="solid"/>
           </a:ln>
         </p:spPr>
         <p:txBody>
-          <a:bodyPr xmlns:a="http://schemas.openxmlformats.org/drawingml/2006/main" wrap="square" lIns="0" tIns="0" rIns="0" bIns="0" anchor="ctr">
-            <a:normAutofit fontScale="100000"/>
+          <a:bodyPr wrap="square" lIns="0" tIns="0" rIns="0" bIns="0" anchor="ctr">
+            <a:normAutofit/>
           </a:bodyPr>
-          <a:lstStyle xmlns:a="http://schemas.openxmlformats.org/drawingml/2006/main"/>
-          <a:p xmlns:a="http://schemas.openxmlformats.org/drawingml/2006/main">
+          <a:lstStyle/>
+          <a:p>
             <a:pPr algn="l">
               <a:lnSpc>
                 <a:spcPct val="95000"/>
@@ -1785,7 +1168,7 @@
               </a:defRPr>
             </a:pPr>
             <a:r>
-              <a:rPr sz="1575" b="1">
+              <a:rPr sz="1575" b="1" dirty="0">
                 <a:solidFill>
                   <a:srgbClr val="17212B"/>
                 </a:solidFill>
@@ -1793,45 +1176,64 @@
                 <a:ea typeface="Arial"/>
                 <a:cs typeface="Arial"/>
               </a:rPr>
-              <a:t>Shared prompt</a:t>
-            </a:r>
+              <a:t>Shared </a:t>
+            </a:r>
+            <a:r>
+              <a:rPr lang="en-CN" sz="1575" b="1" dirty="0">
+                <a:solidFill>
+                  <a:srgbClr val="17212B"/>
+                </a:solidFill>
+                <a:latin typeface="Arial"/>
+                <a:ea typeface="Arial"/>
+                <a:cs typeface="Arial"/>
+              </a:rPr>
+              <a:t>Context</a:t>
+            </a:r>
+            <a:endParaRPr sz="1575" b="1" dirty="0">
+              <a:solidFill>
+                <a:srgbClr val="17212B"/>
+              </a:solidFill>
+              <a:latin typeface="Arial"/>
+              <a:ea typeface="Arial"/>
+              <a:cs typeface="Arial"/>
+            </a:endParaRPr>
           </a:p>
         </p:txBody>
       </p:sp>
       <p:sp>
         <p:nvSpPr>
           <p:cNvPr id="23" name="goal-label">
-            <a:extLst xmlns:a="http://schemas.openxmlformats.org/drawingml/2006/main">
+            <a:extLst>
               <a:ext uri="{FF2B5EF4-FFF2-40B4-BE49-F238E27FC236}">
                 <a16:creationId xmlns:a16="http://schemas.microsoft.com/office/drawing/2014/main" id="{4EC935C0-3B1F-4F1A-8D32-17E067328E03}"/>
               </a:ext>
             </a:extLst>
           </p:cNvPr>
           <p:cNvSpPr>
-            <a:spLocks xmlns:a="http://schemas.openxmlformats.org/drawingml/2006/main" noGrp="1"/>
-          </p:cNvSpPr>
-          <p:nvPr/>
-        </p:nvSpPr>
-        <p:spPr>
-          <a:xfrm xmlns:a="http://schemas.openxmlformats.org/drawingml/2006/main">
+            <a:spLocks noGrp="1"/>
+          </p:cNvSpPr>
+          <p:nvPr/>
+        </p:nvSpPr>
+        <p:spPr>
+          <a:xfrm>
             <a:off x="285750" y="495300"/>
             <a:ext cx="457200" cy="209550"/>
           </a:xfrm>
-          <a:prstGeom xmlns:a="http://schemas.openxmlformats.org/drawingml/2006/main" prst="rect">
-            <a:avLst/>
-          </a:prstGeom>
-          <a:noFill xmlns:a="http://schemas.openxmlformats.org/drawingml/2006/main"/>
-          <a:ln xmlns:a="http://schemas.openxmlformats.org/drawingml/2006/main" w="0">
+          <a:prstGeom prst="rect">
+            <a:avLst/>
+          </a:prstGeom>
+          <a:noFill/>
+          <a:ln w="0">
             <a:noFill/>
             <a:prstDash val="solid"/>
           </a:ln>
         </p:spPr>
         <p:txBody>
-          <a:bodyPr xmlns:a="http://schemas.openxmlformats.org/drawingml/2006/main" wrap="square" lIns="0" tIns="0" rIns="0" bIns="0" anchor="ctr">
-            <a:normAutofit fontScale="100000"/>
+          <a:bodyPr wrap="square" lIns="0" tIns="0" rIns="0" bIns="0" anchor="ctr">
+            <a:normAutofit/>
           </a:bodyPr>
-          <a:lstStyle xmlns:a="http://schemas.openxmlformats.org/drawingml/2006/main"/>
-          <a:p xmlns:a="http://schemas.openxmlformats.org/drawingml/2006/main">
+          <a:lstStyle/>
+          <a:p>
             <a:pPr algn="l">
               <a:lnSpc>
                 <a:spcPct val="95000"/>
@@ -1847,7 +1249,7 @@
               </a:defRPr>
             </a:pPr>
             <a:r>
-              <a:rPr sz="1200" b="1">
+              <a:rPr sz="1200" b="1" dirty="0">
                 <a:solidFill>
                   <a:srgbClr val="66727D"/>
                 </a:solidFill>
@@ -1863,37 +1265,37 @@
       <p:sp>
         <p:nvSpPr>
           <p:cNvPr id="24" name="goal-value">
-            <a:extLst xmlns:a="http://schemas.openxmlformats.org/drawingml/2006/main">
+            <a:extLst>
               <a:ext uri="{FF2B5EF4-FFF2-40B4-BE49-F238E27FC236}">
                 <a16:creationId xmlns:a16="http://schemas.microsoft.com/office/drawing/2014/main" id="{29F64F0A-A4FE-415C-AE00-6DA48F0E8345}"/>
               </a:ext>
             </a:extLst>
           </p:cNvPr>
           <p:cNvSpPr>
-            <a:spLocks xmlns:a="http://schemas.openxmlformats.org/drawingml/2006/main" noGrp="1"/>
-          </p:cNvSpPr>
-          <p:nvPr/>
-        </p:nvSpPr>
-        <p:spPr>
-          <a:xfrm xmlns:a="http://schemas.openxmlformats.org/drawingml/2006/main">
+            <a:spLocks noGrp="1"/>
+          </p:cNvSpPr>
+          <p:nvPr/>
+        </p:nvSpPr>
+        <p:spPr>
+          <a:xfrm>
             <a:off x="781050" y="495300"/>
             <a:ext cx="2714625" cy="209550"/>
           </a:xfrm>
-          <a:prstGeom xmlns:a="http://schemas.openxmlformats.org/drawingml/2006/main" prst="rect">
-            <a:avLst/>
-          </a:prstGeom>
-          <a:noFill xmlns:a="http://schemas.openxmlformats.org/drawingml/2006/main"/>
-          <a:ln xmlns:a="http://schemas.openxmlformats.org/drawingml/2006/main" w="0">
+          <a:prstGeom prst="rect">
+            <a:avLst/>
+          </a:prstGeom>
+          <a:noFill/>
+          <a:ln w="0">
             <a:noFill/>
             <a:prstDash val="solid"/>
           </a:ln>
         </p:spPr>
         <p:txBody>
-          <a:bodyPr xmlns:a="http://schemas.openxmlformats.org/drawingml/2006/main" wrap="square" lIns="0" tIns="0" rIns="0" bIns="0" anchor="ctr">
-            <a:normAutofit fontScale="100000"/>
+          <a:bodyPr wrap="square" lIns="0" tIns="0" rIns="0" bIns="0" anchor="ctr">
+            <a:normAutofit/>
           </a:bodyPr>
-          <a:lstStyle xmlns:a="http://schemas.openxmlformats.org/drawingml/2006/main"/>
-          <a:p xmlns:a="http://schemas.openxmlformats.org/drawingml/2006/main">
+          <a:lstStyle/>
+          <a:p>
             <a:pPr algn="l">
               <a:lnSpc>
                 <a:spcPct val="95000"/>
@@ -1909,7 +1311,7 @@
               </a:defRPr>
             </a:pPr>
             <a:r>
-              <a:rPr sz="1200" b="1">
+              <a:rPr sz="1200" b="1" dirty="0">
                 <a:solidFill>
                   <a:srgbClr val="17212B"/>
                 </a:solidFill>
@@ -1925,37 +1327,37 @@
       <p:sp>
         <p:nvSpPr>
           <p:cNvPr id="25" name="trace-title">
-            <a:extLst xmlns:a="http://schemas.openxmlformats.org/drawingml/2006/main">
+            <a:extLst>
               <a:ext uri="{FF2B5EF4-FFF2-40B4-BE49-F238E27FC236}">
                 <a16:creationId xmlns:a16="http://schemas.microsoft.com/office/drawing/2014/main" id="{90C432F5-CBEF-4448-9807-CE019EC563F5}"/>
               </a:ext>
             </a:extLst>
           </p:cNvPr>
           <p:cNvSpPr>
-            <a:spLocks xmlns:a="http://schemas.openxmlformats.org/drawingml/2006/main" noGrp="1"/>
-          </p:cNvSpPr>
-          <p:nvPr/>
-        </p:nvSpPr>
-        <p:spPr>
-          <a:xfrm xmlns:a="http://schemas.openxmlformats.org/drawingml/2006/main">
+            <a:spLocks noGrp="1"/>
+          </p:cNvSpPr>
+          <p:nvPr/>
+        </p:nvSpPr>
+        <p:spPr>
+          <a:xfrm>
             <a:off x="285750" y="800100"/>
             <a:ext cx="2000250" cy="238125"/>
           </a:xfrm>
-          <a:prstGeom xmlns:a="http://schemas.openxmlformats.org/drawingml/2006/main" prst="rect">
-            <a:avLst/>
-          </a:prstGeom>
-          <a:noFill xmlns:a="http://schemas.openxmlformats.org/drawingml/2006/main"/>
-          <a:ln xmlns:a="http://schemas.openxmlformats.org/drawingml/2006/main" w="0">
+          <a:prstGeom prst="rect">
+            <a:avLst/>
+          </a:prstGeom>
+          <a:noFill/>
+          <a:ln w="0">
             <a:noFill/>
             <a:prstDash val="solid"/>
           </a:ln>
         </p:spPr>
         <p:txBody>
-          <a:bodyPr xmlns:a="http://schemas.openxmlformats.org/drawingml/2006/main" wrap="square" lIns="0" tIns="0" rIns="0" bIns="0" anchor="ctr">
-            <a:normAutofit fontScale="100000"/>
+          <a:bodyPr wrap="square" lIns="0" tIns="0" rIns="0" bIns="0" anchor="ctr">
+            <a:normAutofit/>
           </a:bodyPr>
-          <a:lstStyle xmlns:a="http://schemas.openxmlformats.org/drawingml/2006/main"/>
-          <a:p xmlns:a="http://schemas.openxmlformats.org/drawingml/2006/main">
+          <a:lstStyle/>
+          <a:p>
             <a:pPr algn="l">
               <a:lnSpc>
                 <a:spcPct val="95000"/>
@@ -1987,29 +1389,29 @@
       <p:sp>
         <p:nvSpPr>
           <p:cNvPr id="26" name="trace-0-dot">
-            <a:extLst xmlns:a="http://schemas.openxmlformats.org/drawingml/2006/main">
+            <a:extLst>
               <a:ext uri="{FF2B5EF4-FFF2-40B4-BE49-F238E27FC236}">
                 <a16:creationId xmlns:a16="http://schemas.microsoft.com/office/drawing/2014/main" id="{75E99575-2A19-486A-88BC-2EAA7276B8DE}"/>
               </a:ext>
             </a:extLst>
           </p:cNvPr>
           <p:cNvSpPr>
-            <a:spLocks xmlns:a="http://schemas.openxmlformats.org/drawingml/2006/main" noGrp="1"/>
-          </p:cNvSpPr>
-          <p:nvPr/>
-        </p:nvSpPr>
-        <p:spPr>
-          <a:xfrm xmlns:a="http://schemas.openxmlformats.org/drawingml/2006/main">
+            <a:spLocks noGrp="1"/>
+          </p:cNvSpPr>
+          <p:nvPr/>
+        </p:nvSpPr>
+        <p:spPr>
+          <a:xfrm>
             <a:off x="285750" y="1162050"/>
             <a:ext cx="304800" cy="304800"/>
           </a:xfrm>
-          <a:prstGeom xmlns:a="http://schemas.openxmlformats.org/drawingml/2006/main" prst="ellipse">
-            <a:avLst/>
-          </a:prstGeom>
-          <a:solidFill xmlns:a="http://schemas.openxmlformats.org/drawingml/2006/main">
+          <a:prstGeom prst="ellipse">
+            <a:avLst/>
+          </a:prstGeom>
+          <a:solidFill>
             <a:srgbClr val="F3F5F6"/>
           </a:solidFill>
-          <a:ln xmlns:a="http://schemas.openxmlformats.org/drawingml/2006/main" w="14288">
+          <a:ln w="14288">
             <a:solidFill>
               <a:srgbClr val="66727D"/>
             </a:solidFill>
@@ -2017,11 +1419,11 @@
           </a:ln>
         </p:spPr>
         <p:txBody>
-          <a:bodyPr xmlns:a="http://schemas.openxmlformats.org/drawingml/2006/main" lIns="0" tIns="0" rIns="0" bIns="0" anchor="ctr">
-            <a:normAutofit fontScale="100000"/>
+          <a:bodyPr lIns="0" tIns="0" rIns="0" bIns="0" anchor="ctr">
+            <a:normAutofit/>
           </a:bodyPr>
-          <a:lstStyle xmlns:a="http://schemas.openxmlformats.org/drawingml/2006/main"/>
-          <a:p xmlns:a="http://schemas.openxmlformats.org/drawingml/2006/main">
+          <a:lstStyle/>
+          <a:p>
             <a:pPr algn="ctr">
               <a:defRPr sz="975" b="1">
                 <a:solidFill>
@@ -2049,29 +1451,29 @@
       <p:sp>
         <p:nvSpPr>
           <p:cNvPr id="27" name="trace-1-dot">
-            <a:extLst xmlns:a="http://schemas.openxmlformats.org/drawingml/2006/main">
+            <a:extLst>
               <a:ext uri="{FF2B5EF4-FFF2-40B4-BE49-F238E27FC236}">
                 <a16:creationId xmlns:a16="http://schemas.microsoft.com/office/drawing/2014/main" id="{1E009E3F-4ED4-4193-9B27-D5F41714634A}"/>
               </a:ext>
             </a:extLst>
           </p:cNvPr>
           <p:cNvSpPr>
-            <a:spLocks xmlns:a="http://schemas.openxmlformats.org/drawingml/2006/main" noGrp="1"/>
-          </p:cNvSpPr>
-          <p:nvPr/>
-        </p:nvSpPr>
-        <p:spPr>
-          <a:xfrm xmlns:a="http://schemas.openxmlformats.org/drawingml/2006/main">
+            <a:spLocks noGrp="1"/>
+          </p:cNvSpPr>
+          <p:nvPr/>
+        </p:nvSpPr>
+        <p:spPr>
+          <a:xfrm>
             <a:off x="609600" y="1162050"/>
             <a:ext cx="304800" cy="304800"/>
           </a:xfrm>
-          <a:prstGeom xmlns:a="http://schemas.openxmlformats.org/drawingml/2006/main" prst="ellipse">
-            <a:avLst/>
-          </a:prstGeom>
-          <a:solidFill xmlns:a="http://schemas.openxmlformats.org/drawingml/2006/main">
+          <a:prstGeom prst="ellipse">
+            <a:avLst/>
+          </a:prstGeom>
+          <a:solidFill>
             <a:srgbClr val="F3F5F6"/>
           </a:solidFill>
-          <a:ln xmlns:a="http://schemas.openxmlformats.org/drawingml/2006/main" w="14288">
+          <a:ln w="14288">
             <a:solidFill>
               <a:srgbClr val="66727D"/>
             </a:solidFill>
@@ -2079,11 +1481,11 @@
           </a:ln>
         </p:spPr>
         <p:txBody>
-          <a:bodyPr xmlns:a="http://schemas.openxmlformats.org/drawingml/2006/main" lIns="0" tIns="0" rIns="0" bIns="0" anchor="ctr">
-            <a:normAutofit fontScale="100000"/>
+          <a:bodyPr lIns="0" tIns="0" rIns="0" bIns="0" anchor="ctr">
+            <a:normAutofit/>
           </a:bodyPr>
-          <a:lstStyle xmlns:a="http://schemas.openxmlformats.org/drawingml/2006/main"/>
-          <a:p xmlns:a="http://schemas.openxmlformats.org/drawingml/2006/main">
+          <a:lstStyle/>
+          <a:p>
             <a:pPr algn="ctr">
               <a:defRPr sz="975" b="1">
                 <a:solidFill>
@@ -2111,29 +1513,29 @@
       <p:sp>
         <p:nvSpPr>
           <p:cNvPr id="28" name="trace-2-dot">
-            <a:extLst xmlns:a="http://schemas.openxmlformats.org/drawingml/2006/main">
+            <a:extLst>
               <a:ext uri="{FF2B5EF4-FFF2-40B4-BE49-F238E27FC236}">
                 <a16:creationId xmlns:a16="http://schemas.microsoft.com/office/drawing/2014/main" id="{855D64C7-1313-407D-8595-E111EDC58AC0}"/>
               </a:ext>
             </a:extLst>
           </p:cNvPr>
           <p:cNvSpPr>
-            <a:spLocks xmlns:a="http://schemas.openxmlformats.org/drawingml/2006/main" noGrp="1"/>
-          </p:cNvSpPr>
-          <p:nvPr/>
-        </p:nvSpPr>
-        <p:spPr>
-          <a:xfrm xmlns:a="http://schemas.openxmlformats.org/drawingml/2006/main">
+            <a:spLocks noGrp="1"/>
+          </p:cNvSpPr>
+          <p:nvPr/>
+        </p:nvSpPr>
+        <p:spPr>
+          <a:xfrm>
             <a:off x="933450" y="1162050"/>
             <a:ext cx="304800" cy="304800"/>
           </a:xfrm>
-          <a:prstGeom xmlns:a="http://schemas.openxmlformats.org/drawingml/2006/main" prst="ellipse">
-            <a:avLst/>
-          </a:prstGeom>
-          <a:solidFill xmlns:a="http://schemas.openxmlformats.org/drawingml/2006/main">
+          <a:prstGeom prst="ellipse">
+            <a:avLst/>
+          </a:prstGeom>
+          <a:solidFill>
             <a:srgbClr val="F3F5F6"/>
           </a:solidFill>
-          <a:ln xmlns:a="http://schemas.openxmlformats.org/drawingml/2006/main" w="14288">
+          <a:ln w="14288">
             <a:solidFill>
               <a:srgbClr val="66727D"/>
             </a:solidFill>
@@ -2141,11 +1543,11 @@
           </a:ln>
         </p:spPr>
         <p:txBody>
-          <a:bodyPr xmlns:a="http://schemas.openxmlformats.org/drawingml/2006/main" lIns="0" tIns="0" rIns="0" bIns="0" anchor="ctr">
-            <a:normAutofit fontScale="100000"/>
+          <a:bodyPr lIns="0" tIns="0" rIns="0" bIns="0" anchor="ctr">
+            <a:normAutofit/>
           </a:bodyPr>
-          <a:lstStyle xmlns:a="http://schemas.openxmlformats.org/drawingml/2006/main"/>
-          <a:p xmlns:a="http://schemas.openxmlformats.org/drawingml/2006/main">
+          <a:lstStyle/>
+          <a:p>
             <a:pPr algn="ctr">
               <a:defRPr sz="975" b="1">
                 <a:solidFill>
@@ -2173,29 +1575,29 @@
       <p:sp>
         <p:nvSpPr>
           <p:cNvPr id="29" name="trace-3-dot">
-            <a:extLst xmlns:a="http://schemas.openxmlformats.org/drawingml/2006/main">
+            <a:extLst>
               <a:ext uri="{FF2B5EF4-FFF2-40B4-BE49-F238E27FC236}">
                 <a16:creationId xmlns:a16="http://schemas.microsoft.com/office/drawing/2014/main" id="{B4C7246A-2C40-4564-8599-1D3FD5705048}"/>
               </a:ext>
             </a:extLst>
           </p:cNvPr>
           <p:cNvSpPr>
-            <a:spLocks xmlns:a="http://schemas.openxmlformats.org/drawingml/2006/main" noGrp="1"/>
-          </p:cNvSpPr>
-          <p:nvPr/>
-        </p:nvSpPr>
-        <p:spPr>
-          <a:xfrm xmlns:a="http://schemas.openxmlformats.org/drawingml/2006/main">
+            <a:spLocks noGrp="1"/>
+          </p:cNvSpPr>
+          <p:nvPr/>
+        </p:nvSpPr>
+        <p:spPr>
+          <a:xfrm>
             <a:off x="1257300" y="1162050"/>
             <a:ext cx="304800" cy="304800"/>
           </a:xfrm>
-          <a:prstGeom xmlns:a="http://schemas.openxmlformats.org/drawingml/2006/main" prst="ellipse">
-            <a:avLst/>
-          </a:prstGeom>
-          <a:solidFill xmlns:a="http://schemas.openxmlformats.org/drawingml/2006/main">
+          <a:prstGeom prst="ellipse">
+            <a:avLst/>
+          </a:prstGeom>
+          <a:solidFill>
             <a:srgbClr val="FFF1E7"/>
           </a:solidFill>
-          <a:ln xmlns:a="http://schemas.openxmlformats.org/drawingml/2006/main" w="14288">
+          <a:ln w="14288">
             <a:solidFill>
               <a:srgbClr val="C45A14"/>
             </a:solidFill>
@@ -2203,11 +1605,11 @@
           </a:ln>
         </p:spPr>
         <p:txBody>
-          <a:bodyPr xmlns:a="http://schemas.openxmlformats.org/drawingml/2006/main" lIns="0" tIns="0" rIns="0" bIns="0" anchor="ctr">
-            <a:normAutofit fontScale="100000"/>
+          <a:bodyPr lIns="0" tIns="0" rIns="0" bIns="0" anchor="ctr">
+            <a:normAutofit/>
           </a:bodyPr>
-          <a:lstStyle xmlns:a="http://schemas.openxmlformats.org/drawingml/2006/main"/>
-          <a:p xmlns:a="http://schemas.openxmlformats.org/drawingml/2006/main">
+          <a:lstStyle/>
+          <a:p>
             <a:pPr algn="ctr">
               <a:defRPr sz="975" b="1">
                 <a:solidFill>
@@ -2235,29 +1637,29 @@
       <p:sp>
         <p:nvSpPr>
           <p:cNvPr id="30" name="trace-4-dot">
-            <a:extLst xmlns:a="http://schemas.openxmlformats.org/drawingml/2006/main">
+            <a:extLst>
               <a:ext uri="{FF2B5EF4-FFF2-40B4-BE49-F238E27FC236}">
                 <a16:creationId xmlns:a16="http://schemas.microsoft.com/office/drawing/2014/main" id="{CADC5127-6A47-4CFA-8200-2DDBDD8B1128}"/>
               </a:ext>
             </a:extLst>
           </p:cNvPr>
           <p:cNvSpPr>
-            <a:spLocks xmlns:a="http://schemas.openxmlformats.org/drawingml/2006/main" noGrp="1"/>
-          </p:cNvSpPr>
-          <p:nvPr/>
-        </p:nvSpPr>
-        <p:spPr>
-          <a:xfrm xmlns:a="http://schemas.openxmlformats.org/drawingml/2006/main">
+            <a:spLocks noGrp="1"/>
+          </p:cNvSpPr>
+          <p:nvPr/>
+        </p:nvSpPr>
+        <p:spPr>
+          <a:xfrm>
             <a:off x="1581150" y="1162050"/>
             <a:ext cx="304800" cy="304800"/>
           </a:xfrm>
-          <a:prstGeom xmlns:a="http://schemas.openxmlformats.org/drawingml/2006/main" prst="ellipse">
-            <a:avLst/>
-          </a:prstGeom>
-          <a:solidFill xmlns:a="http://schemas.openxmlformats.org/drawingml/2006/main">
+          <a:prstGeom prst="ellipse">
+            <a:avLst/>
+          </a:prstGeom>
+          <a:solidFill>
             <a:srgbClr val="F3F5F6"/>
           </a:solidFill>
-          <a:ln xmlns:a="http://schemas.openxmlformats.org/drawingml/2006/main" w="14288">
+          <a:ln w="14288">
             <a:solidFill>
               <a:srgbClr val="66727D"/>
             </a:solidFill>
@@ -2265,11 +1667,11 @@
           </a:ln>
         </p:spPr>
         <p:txBody>
-          <a:bodyPr xmlns:a="http://schemas.openxmlformats.org/drawingml/2006/main" lIns="0" tIns="0" rIns="0" bIns="0" anchor="ctr">
-            <a:normAutofit fontScale="100000"/>
+          <a:bodyPr lIns="0" tIns="0" rIns="0" bIns="0" anchor="ctr">
+            <a:normAutofit/>
           </a:bodyPr>
-          <a:lstStyle xmlns:a="http://schemas.openxmlformats.org/drawingml/2006/main"/>
-          <a:p xmlns:a="http://schemas.openxmlformats.org/drawingml/2006/main">
+          <a:lstStyle/>
+          <a:p>
             <a:pPr algn="ctr">
               <a:defRPr sz="975" b="1">
                 <a:solidFill>
@@ -2297,29 +1699,29 @@
       <p:sp>
         <p:nvSpPr>
           <p:cNvPr id="31" name="trace-5-dot">
-            <a:extLst xmlns:a="http://schemas.openxmlformats.org/drawingml/2006/main">
+            <a:extLst>
               <a:ext uri="{FF2B5EF4-FFF2-40B4-BE49-F238E27FC236}">
                 <a16:creationId xmlns:a16="http://schemas.microsoft.com/office/drawing/2014/main" id="{5FE98C78-CD80-40F4-AD7F-D829BF09503C}"/>
               </a:ext>
             </a:extLst>
           </p:cNvPr>
           <p:cNvSpPr>
-            <a:spLocks xmlns:a="http://schemas.openxmlformats.org/drawingml/2006/main" noGrp="1"/>
-          </p:cNvSpPr>
-          <p:nvPr/>
-        </p:nvSpPr>
-        <p:spPr>
-          <a:xfrm xmlns:a="http://schemas.openxmlformats.org/drawingml/2006/main">
+            <a:spLocks noGrp="1"/>
+          </p:cNvSpPr>
+          <p:nvPr/>
+        </p:nvSpPr>
+        <p:spPr>
+          <a:xfrm>
             <a:off x="1905000" y="1162050"/>
             <a:ext cx="304800" cy="304800"/>
           </a:xfrm>
-          <a:prstGeom xmlns:a="http://schemas.openxmlformats.org/drawingml/2006/main" prst="ellipse">
-            <a:avLst/>
-          </a:prstGeom>
-          <a:solidFill xmlns:a="http://schemas.openxmlformats.org/drawingml/2006/main">
+          <a:prstGeom prst="ellipse">
+            <a:avLst/>
+          </a:prstGeom>
+          <a:solidFill>
             <a:srgbClr val="F3F5F6"/>
           </a:solidFill>
-          <a:ln xmlns:a="http://schemas.openxmlformats.org/drawingml/2006/main" w="14288">
+          <a:ln w="14288">
             <a:solidFill>
               <a:srgbClr val="66727D"/>
             </a:solidFill>
@@ -2327,11 +1729,11 @@
           </a:ln>
         </p:spPr>
         <p:txBody>
-          <a:bodyPr xmlns:a="http://schemas.openxmlformats.org/drawingml/2006/main" lIns="0" tIns="0" rIns="0" bIns="0" anchor="ctr">
-            <a:normAutofit fontScale="100000"/>
+          <a:bodyPr lIns="0" tIns="0" rIns="0" bIns="0" anchor="ctr">
+            <a:normAutofit/>
           </a:bodyPr>
-          <a:lstStyle xmlns:a="http://schemas.openxmlformats.org/drawingml/2006/main"/>
-          <a:p xmlns:a="http://schemas.openxmlformats.org/drawingml/2006/main">
+          <a:lstStyle/>
+          <a:p>
             <a:pPr algn="ctr">
               <a:defRPr sz="975" b="1">
                 <a:solidFill>
@@ -2359,29 +1761,29 @@
       <p:sp>
         <p:nvSpPr>
           <p:cNvPr id="32" name="trace-6-dot">
-            <a:extLst xmlns:a="http://schemas.openxmlformats.org/drawingml/2006/main">
+            <a:extLst>
               <a:ext uri="{FF2B5EF4-FFF2-40B4-BE49-F238E27FC236}">
                 <a16:creationId xmlns:a16="http://schemas.microsoft.com/office/drawing/2014/main" id="{6EBC596A-EB38-4378-8401-BAF3BCF78A6D}"/>
               </a:ext>
             </a:extLst>
           </p:cNvPr>
           <p:cNvSpPr>
-            <a:spLocks xmlns:a="http://schemas.openxmlformats.org/drawingml/2006/main" noGrp="1"/>
-          </p:cNvSpPr>
-          <p:nvPr/>
-        </p:nvSpPr>
-        <p:spPr>
-          <a:xfrm xmlns:a="http://schemas.openxmlformats.org/drawingml/2006/main">
+            <a:spLocks noGrp="1"/>
+          </p:cNvSpPr>
+          <p:nvPr/>
+        </p:nvSpPr>
+        <p:spPr>
+          <a:xfrm>
             <a:off x="2228850" y="1162050"/>
             <a:ext cx="304800" cy="304800"/>
           </a:xfrm>
-          <a:prstGeom xmlns:a="http://schemas.openxmlformats.org/drawingml/2006/main" prst="ellipse">
-            <a:avLst/>
-          </a:prstGeom>
-          <a:solidFill xmlns:a="http://schemas.openxmlformats.org/drawingml/2006/main">
+          <a:prstGeom prst="ellipse">
+            <a:avLst/>
+          </a:prstGeom>
+          <a:solidFill>
             <a:srgbClr val="EAF3F8"/>
           </a:solidFill>
-          <a:ln xmlns:a="http://schemas.openxmlformats.org/drawingml/2006/main" w="14288">
+          <a:ln w="14288">
             <a:solidFill>
               <a:srgbClr val="2E6F9E"/>
             </a:solidFill>
@@ -2389,11 +1791,11 @@
           </a:ln>
         </p:spPr>
         <p:txBody>
-          <a:bodyPr xmlns:a="http://schemas.openxmlformats.org/drawingml/2006/main" lIns="0" tIns="0" rIns="0" bIns="0" anchor="ctr">
-            <a:normAutofit fontScale="100000"/>
+          <a:bodyPr lIns="0" tIns="0" rIns="0" bIns="0" anchor="ctr">
+            <a:normAutofit/>
           </a:bodyPr>
-          <a:lstStyle xmlns:a="http://schemas.openxmlformats.org/drawingml/2006/main"/>
-          <a:p xmlns:a="http://schemas.openxmlformats.org/drawingml/2006/main">
+          <a:lstStyle/>
+          <a:p>
             <a:pPr algn="ctr">
               <a:defRPr sz="975" b="1">
                 <a:solidFill>
@@ -2421,29 +1823,29 @@
       <p:sp>
         <p:nvSpPr>
           <p:cNvPr id="33" name="trace-7-dot">
-            <a:extLst xmlns:a="http://schemas.openxmlformats.org/drawingml/2006/main">
+            <a:extLst>
               <a:ext uri="{FF2B5EF4-FFF2-40B4-BE49-F238E27FC236}">
                 <a16:creationId xmlns:a16="http://schemas.microsoft.com/office/drawing/2014/main" id="{076144F2-1115-4D84-A24C-A6F3AB51ED57}"/>
               </a:ext>
             </a:extLst>
           </p:cNvPr>
           <p:cNvSpPr>
-            <a:spLocks xmlns:a="http://schemas.openxmlformats.org/drawingml/2006/main" noGrp="1"/>
-          </p:cNvSpPr>
-          <p:nvPr/>
-        </p:nvSpPr>
-        <p:spPr>
-          <a:xfrm xmlns:a="http://schemas.openxmlformats.org/drawingml/2006/main">
+            <a:spLocks noGrp="1"/>
+          </p:cNvSpPr>
+          <p:nvPr/>
+        </p:nvSpPr>
+        <p:spPr>
+          <a:xfrm>
             <a:off x="2552700" y="1162050"/>
             <a:ext cx="304800" cy="304800"/>
           </a:xfrm>
-          <a:prstGeom xmlns:a="http://schemas.openxmlformats.org/drawingml/2006/main" prst="ellipse">
-            <a:avLst/>
-          </a:prstGeom>
-          <a:solidFill xmlns:a="http://schemas.openxmlformats.org/drawingml/2006/main">
+          <a:prstGeom prst="ellipse">
+            <a:avLst/>
+          </a:prstGeom>
+          <a:solidFill>
             <a:srgbClr val="EAF3F8"/>
           </a:solidFill>
-          <a:ln xmlns:a="http://schemas.openxmlformats.org/drawingml/2006/main" w="14288">
+          <a:ln w="14288">
             <a:solidFill>
               <a:srgbClr val="2E6F9E"/>
             </a:solidFill>
@@ -2451,11 +1853,11 @@
           </a:ln>
         </p:spPr>
         <p:txBody>
-          <a:bodyPr xmlns:a="http://schemas.openxmlformats.org/drawingml/2006/main" lIns="0" tIns="0" rIns="0" bIns="0" anchor="ctr">
-            <a:normAutofit fontScale="100000"/>
+          <a:bodyPr lIns="0" tIns="0" rIns="0" bIns="0" anchor="ctr">
+            <a:normAutofit/>
           </a:bodyPr>
-          <a:lstStyle xmlns:a="http://schemas.openxmlformats.org/drawingml/2006/main"/>
-          <a:p xmlns:a="http://schemas.openxmlformats.org/drawingml/2006/main">
+          <a:lstStyle/>
+          <a:p>
             <a:pPr algn="ctr">
               <a:defRPr sz="975" b="1">
                 <a:solidFill>
@@ -2483,29 +1885,29 @@
       <p:sp>
         <p:nvSpPr>
           <p:cNvPr id="34" name="trace-8-dot">
-            <a:extLst xmlns:a="http://schemas.openxmlformats.org/drawingml/2006/main">
+            <a:extLst>
               <a:ext uri="{FF2B5EF4-FFF2-40B4-BE49-F238E27FC236}">
                 <a16:creationId xmlns:a16="http://schemas.microsoft.com/office/drawing/2014/main" id="{8100205D-5BF4-40BF-A763-22DEFB770872}"/>
               </a:ext>
             </a:extLst>
           </p:cNvPr>
           <p:cNvSpPr>
-            <a:spLocks xmlns:a="http://schemas.openxmlformats.org/drawingml/2006/main" noGrp="1"/>
-          </p:cNvSpPr>
-          <p:nvPr/>
-        </p:nvSpPr>
-        <p:spPr>
-          <a:xfrm xmlns:a="http://schemas.openxmlformats.org/drawingml/2006/main">
+            <a:spLocks noGrp="1"/>
+          </p:cNvSpPr>
+          <p:nvPr/>
+        </p:nvSpPr>
+        <p:spPr>
+          <a:xfrm>
             <a:off x="2876550" y="1162050"/>
             <a:ext cx="304800" cy="304800"/>
           </a:xfrm>
-          <a:prstGeom xmlns:a="http://schemas.openxmlformats.org/drawingml/2006/main" prst="ellipse">
-            <a:avLst/>
-          </a:prstGeom>
-          <a:solidFill xmlns:a="http://schemas.openxmlformats.org/drawingml/2006/main">
+          <a:prstGeom prst="ellipse">
+            <a:avLst/>
+          </a:prstGeom>
+          <a:solidFill>
             <a:srgbClr val="EAF3F8"/>
           </a:solidFill>
-          <a:ln xmlns:a="http://schemas.openxmlformats.org/drawingml/2006/main" w="14288">
+          <a:ln w="14288">
             <a:solidFill>
               <a:srgbClr val="2E6F9E"/>
             </a:solidFill>
@@ -2513,11 +1915,11 @@
           </a:ln>
         </p:spPr>
         <p:txBody>
-          <a:bodyPr xmlns:a="http://schemas.openxmlformats.org/drawingml/2006/main" lIns="0" tIns="0" rIns="0" bIns="0" anchor="ctr">
-            <a:normAutofit fontScale="100000"/>
+          <a:bodyPr lIns="0" tIns="0" rIns="0" bIns="0" anchor="ctr">
+            <a:normAutofit/>
           </a:bodyPr>
-          <a:lstStyle xmlns:a="http://schemas.openxmlformats.org/drawingml/2006/main"/>
-          <a:p xmlns:a="http://schemas.openxmlformats.org/drawingml/2006/main">
+          <a:lstStyle/>
+          <a:p>
             <a:pPr algn="ctr">
               <a:defRPr sz="975" b="1">
                 <a:solidFill>
@@ -2545,29 +1947,29 @@
       <p:sp>
         <p:nvSpPr>
           <p:cNvPr id="35" name="trace-9-dot">
-            <a:extLst xmlns:a="http://schemas.openxmlformats.org/drawingml/2006/main">
+            <a:extLst>
               <a:ext uri="{FF2B5EF4-FFF2-40B4-BE49-F238E27FC236}">
                 <a16:creationId xmlns:a16="http://schemas.microsoft.com/office/drawing/2014/main" id="{C7B39A8B-6B01-4C88-86A1-94CB177C1715}"/>
               </a:ext>
             </a:extLst>
           </p:cNvPr>
           <p:cNvSpPr>
-            <a:spLocks xmlns:a="http://schemas.openxmlformats.org/drawingml/2006/main" noGrp="1"/>
-          </p:cNvSpPr>
-          <p:nvPr/>
-        </p:nvSpPr>
-        <p:spPr>
-          <a:xfrm xmlns:a="http://schemas.openxmlformats.org/drawingml/2006/main">
+            <a:spLocks noGrp="1"/>
+          </p:cNvSpPr>
+          <p:nvPr/>
+        </p:nvSpPr>
+        <p:spPr>
+          <a:xfrm>
             <a:off x="3200400" y="1162050"/>
             <a:ext cx="304800" cy="304800"/>
           </a:xfrm>
-          <a:prstGeom xmlns:a="http://schemas.openxmlformats.org/drawingml/2006/main" prst="ellipse">
-            <a:avLst/>
-          </a:prstGeom>
-          <a:solidFill xmlns:a="http://schemas.openxmlformats.org/drawingml/2006/main">
+          <a:prstGeom prst="ellipse">
+            <a:avLst/>
+          </a:prstGeom>
+          <a:solidFill>
             <a:srgbClr val="EAF3F8"/>
           </a:solidFill>
-          <a:ln xmlns:a="http://schemas.openxmlformats.org/drawingml/2006/main" w="14288">
+          <a:ln w="14288">
             <a:solidFill>
               <a:srgbClr val="2E6F9E"/>
             </a:solidFill>
@@ -2575,11 +1977,11 @@
           </a:ln>
         </p:spPr>
         <p:txBody>
-          <a:bodyPr xmlns:a="http://schemas.openxmlformats.org/drawingml/2006/main" lIns="0" tIns="0" rIns="0" bIns="0" anchor="ctr">
-            <a:normAutofit fontScale="100000"/>
+          <a:bodyPr lIns="0" tIns="0" rIns="0" bIns="0" anchor="ctr">
+            <a:normAutofit/>
           </a:bodyPr>
-          <a:lstStyle xmlns:a="http://schemas.openxmlformats.org/drawingml/2006/main"/>
-          <a:p xmlns:a="http://schemas.openxmlformats.org/drawingml/2006/main">
+          <a:lstStyle/>
+          <a:p>
             <a:pPr algn="ctr">
               <a:defRPr sz="975" b="1">
                 <a:solidFill>
@@ -2607,37 +2009,37 @@
       <p:sp>
         <p:nvSpPr>
           <p:cNvPr id="36" name="summary-e6-id">
-            <a:extLst xmlns:a="http://schemas.openxmlformats.org/drawingml/2006/main">
+            <a:extLst>
               <a:ext uri="{FF2B5EF4-FFF2-40B4-BE49-F238E27FC236}">
                 <a16:creationId xmlns:a16="http://schemas.microsoft.com/office/drawing/2014/main" id="{14C95885-F8AF-4F31-91E3-9900FFCE649E}"/>
               </a:ext>
             </a:extLst>
           </p:cNvPr>
           <p:cNvSpPr>
-            <a:spLocks xmlns:a="http://schemas.openxmlformats.org/drawingml/2006/main" noGrp="1"/>
-          </p:cNvSpPr>
-          <p:nvPr/>
-        </p:nvSpPr>
-        <p:spPr>
-          <a:xfrm xmlns:a="http://schemas.openxmlformats.org/drawingml/2006/main">
+            <a:spLocks noGrp="1"/>
+          </p:cNvSpPr>
+          <p:nvPr/>
+        </p:nvSpPr>
+        <p:spPr>
+          <a:xfrm>
             <a:off x="304800" y="1581150"/>
             <a:ext cx="342900" cy="190500"/>
           </a:xfrm>
-          <a:prstGeom xmlns:a="http://schemas.openxmlformats.org/drawingml/2006/main" prst="rect">
-            <a:avLst/>
-          </a:prstGeom>
-          <a:noFill xmlns:a="http://schemas.openxmlformats.org/drawingml/2006/main"/>
-          <a:ln xmlns:a="http://schemas.openxmlformats.org/drawingml/2006/main" w="0">
+          <a:prstGeom prst="rect">
+            <a:avLst/>
+          </a:prstGeom>
+          <a:noFill/>
+          <a:ln w="0">
             <a:noFill/>
             <a:prstDash val="solid"/>
           </a:ln>
         </p:spPr>
         <p:txBody>
-          <a:bodyPr xmlns:a="http://schemas.openxmlformats.org/drawingml/2006/main" wrap="square" lIns="0" tIns="0" rIns="0" bIns="0" anchor="ctr">
-            <a:normAutofit fontScale="100000"/>
+          <a:bodyPr wrap="square" lIns="0" tIns="0" rIns="0" bIns="0" anchor="ctr">
+            <a:normAutofit/>
           </a:bodyPr>
-          <a:lstStyle xmlns:a="http://schemas.openxmlformats.org/drawingml/2006/main"/>
-          <a:p xmlns:a="http://schemas.openxmlformats.org/drawingml/2006/main">
+          <a:lstStyle/>
+          <a:p>
             <a:pPr algn="l">
               <a:lnSpc>
                 <a:spcPct val="95000"/>
@@ -2669,37 +2071,37 @@
       <p:sp>
         <p:nvSpPr>
           <p:cNvPr id="37" name="summary-e6-text">
-            <a:extLst xmlns:a="http://schemas.openxmlformats.org/drawingml/2006/main">
+            <a:extLst>
               <a:ext uri="{FF2B5EF4-FFF2-40B4-BE49-F238E27FC236}">
                 <a16:creationId xmlns:a16="http://schemas.microsoft.com/office/drawing/2014/main" id="{29724644-62B5-4C9E-BD6A-467BBA0CF6C3}"/>
               </a:ext>
             </a:extLst>
           </p:cNvPr>
           <p:cNvSpPr>
-            <a:spLocks xmlns:a="http://schemas.openxmlformats.org/drawingml/2006/main" noGrp="1"/>
-          </p:cNvSpPr>
-          <p:nvPr/>
-        </p:nvSpPr>
-        <p:spPr>
-          <a:xfrm xmlns:a="http://schemas.openxmlformats.org/drawingml/2006/main">
+            <a:spLocks noGrp="1"/>
+          </p:cNvSpPr>
+          <p:nvPr/>
+        </p:nvSpPr>
+        <p:spPr>
+          <a:xfrm>
             <a:off x="666750" y="1581150"/>
             <a:ext cx="2190750" cy="190500"/>
           </a:xfrm>
-          <a:prstGeom xmlns:a="http://schemas.openxmlformats.org/drawingml/2006/main" prst="rect">
-            <a:avLst/>
-          </a:prstGeom>
-          <a:noFill xmlns:a="http://schemas.openxmlformats.org/drawingml/2006/main"/>
-          <a:ln xmlns:a="http://schemas.openxmlformats.org/drawingml/2006/main" w="0">
+          <a:prstGeom prst="rect">
+            <a:avLst/>
+          </a:prstGeom>
+          <a:noFill/>
+          <a:ln w="0">
             <a:noFill/>
             <a:prstDash val="solid"/>
           </a:ln>
         </p:spPr>
         <p:txBody>
-          <a:bodyPr xmlns:a="http://schemas.openxmlformats.org/drawingml/2006/main" wrap="square" lIns="0" tIns="0" rIns="0" bIns="0" anchor="ctr">
-            <a:normAutofit fontScale="100000"/>
+          <a:bodyPr wrap="square" lIns="0" tIns="0" rIns="0" bIns="0" anchor="ctr">
+            <a:normAutofit/>
           </a:bodyPr>
-          <a:lstStyle xmlns:a="http://schemas.openxmlformats.org/drawingml/2006/main"/>
-          <a:p xmlns:a="http://schemas.openxmlformats.org/drawingml/2006/main">
+          <a:lstStyle/>
+          <a:p>
             <a:pPr algn="l">
               <a:lnSpc>
                 <a:spcPct val="95000"/>
@@ -2731,37 +2133,37 @@
       <p:sp>
         <p:nvSpPr>
           <p:cNvPr id="38" name="summary-e7-id">
-            <a:extLst xmlns:a="http://schemas.openxmlformats.org/drawingml/2006/main">
+            <a:extLst>
               <a:ext uri="{FF2B5EF4-FFF2-40B4-BE49-F238E27FC236}">
                 <a16:creationId xmlns:a16="http://schemas.microsoft.com/office/drawing/2014/main" id="{0B04DDBB-7DBD-4C3F-8FE5-52D436E61D3D}"/>
               </a:ext>
             </a:extLst>
           </p:cNvPr>
           <p:cNvSpPr>
-            <a:spLocks xmlns:a="http://schemas.openxmlformats.org/drawingml/2006/main" noGrp="1"/>
-          </p:cNvSpPr>
-          <p:nvPr/>
-        </p:nvSpPr>
-        <p:spPr>
-          <a:xfrm xmlns:a="http://schemas.openxmlformats.org/drawingml/2006/main">
+            <a:spLocks noGrp="1"/>
+          </p:cNvSpPr>
+          <p:nvPr/>
+        </p:nvSpPr>
+        <p:spPr>
+          <a:xfrm>
             <a:off x="304800" y="1838325"/>
             <a:ext cx="342900" cy="190500"/>
           </a:xfrm>
-          <a:prstGeom xmlns:a="http://schemas.openxmlformats.org/drawingml/2006/main" prst="rect">
-            <a:avLst/>
-          </a:prstGeom>
-          <a:noFill xmlns:a="http://schemas.openxmlformats.org/drawingml/2006/main"/>
-          <a:ln xmlns:a="http://schemas.openxmlformats.org/drawingml/2006/main" w="0">
+          <a:prstGeom prst="rect">
+            <a:avLst/>
+          </a:prstGeom>
+          <a:noFill/>
+          <a:ln w="0">
             <a:noFill/>
             <a:prstDash val="solid"/>
           </a:ln>
         </p:spPr>
         <p:txBody>
-          <a:bodyPr xmlns:a="http://schemas.openxmlformats.org/drawingml/2006/main" wrap="square" lIns="0" tIns="0" rIns="0" bIns="0" anchor="ctr">
-            <a:normAutofit fontScale="100000"/>
+          <a:bodyPr wrap="square" lIns="0" tIns="0" rIns="0" bIns="0" anchor="ctr">
+            <a:normAutofit/>
           </a:bodyPr>
-          <a:lstStyle xmlns:a="http://schemas.openxmlformats.org/drawingml/2006/main"/>
-          <a:p xmlns:a="http://schemas.openxmlformats.org/drawingml/2006/main">
+          <a:lstStyle/>
+          <a:p>
             <a:pPr algn="l">
               <a:lnSpc>
                 <a:spcPct val="95000"/>
@@ -2793,37 +2195,37 @@
       <p:sp>
         <p:nvSpPr>
           <p:cNvPr id="39" name="summary-e7-text">
-            <a:extLst xmlns:a="http://schemas.openxmlformats.org/drawingml/2006/main">
+            <a:extLst>
               <a:ext uri="{FF2B5EF4-FFF2-40B4-BE49-F238E27FC236}">
                 <a16:creationId xmlns:a16="http://schemas.microsoft.com/office/drawing/2014/main" id="{845BB38F-F39C-481E-A09D-B133DC44E2C6}"/>
               </a:ext>
             </a:extLst>
           </p:cNvPr>
           <p:cNvSpPr>
-            <a:spLocks xmlns:a="http://schemas.openxmlformats.org/drawingml/2006/main" noGrp="1"/>
-          </p:cNvSpPr>
-          <p:nvPr/>
-        </p:nvSpPr>
-        <p:spPr>
-          <a:xfrm xmlns:a="http://schemas.openxmlformats.org/drawingml/2006/main">
+            <a:spLocks noGrp="1"/>
+          </p:cNvSpPr>
+          <p:nvPr/>
+        </p:nvSpPr>
+        <p:spPr>
+          <a:xfrm>
             <a:off x="666750" y="1838325"/>
             <a:ext cx="2190750" cy="190500"/>
           </a:xfrm>
-          <a:prstGeom xmlns:a="http://schemas.openxmlformats.org/drawingml/2006/main" prst="rect">
-            <a:avLst/>
-          </a:prstGeom>
-          <a:noFill xmlns:a="http://schemas.openxmlformats.org/drawingml/2006/main"/>
-          <a:ln xmlns:a="http://schemas.openxmlformats.org/drawingml/2006/main" w="0">
+          <a:prstGeom prst="rect">
+            <a:avLst/>
+          </a:prstGeom>
+          <a:noFill/>
+          <a:ln w="0">
             <a:noFill/>
             <a:prstDash val="solid"/>
           </a:ln>
         </p:spPr>
         <p:txBody>
-          <a:bodyPr xmlns:a="http://schemas.openxmlformats.org/drawingml/2006/main" wrap="square" lIns="0" tIns="0" rIns="0" bIns="0" anchor="ctr">
-            <a:normAutofit fontScale="100000"/>
+          <a:bodyPr wrap="square" lIns="0" tIns="0" rIns="0" bIns="0" anchor="ctr">
+            <a:normAutofit/>
           </a:bodyPr>
-          <a:lstStyle xmlns:a="http://schemas.openxmlformats.org/drawingml/2006/main"/>
-          <a:p xmlns:a="http://schemas.openxmlformats.org/drawingml/2006/main">
+          <a:lstStyle/>
+          <a:p>
             <a:pPr algn="l">
               <a:lnSpc>
                 <a:spcPct val="95000"/>
@@ -2855,37 +2257,37 @@
       <p:sp>
         <p:nvSpPr>
           <p:cNvPr id="40" name="summary-e8-id">
-            <a:extLst xmlns:a="http://schemas.openxmlformats.org/drawingml/2006/main">
+            <a:extLst>
               <a:ext uri="{FF2B5EF4-FFF2-40B4-BE49-F238E27FC236}">
                 <a16:creationId xmlns:a16="http://schemas.microsoft.com/office/drawing/2014/main" id="{82ED315B-F591-45B4-B1C9-14BE91521837}"/>
               </a:ext>
             </a:extLst>
           </p:cNvPr>
           <p:cNvSpPr>
-            <a:spLocks xmlns:a="http://schemas.openxmlformats.org/drawingml/2006/main" noGrp="1"/>
-          </p:cNvSpPr>
-          <p:nvPr/>
-        </p:nvSpPr>
-        <p:spPr>
-          <a:xfrm xmlns:a="http://schemas.openxmlformats.org/drawingml/2006/main">
+            <a:spLocks noGrp="1"/>
+          </p:cNvSpPr>
+          <p:nvPr/>
+        </p:nvSpPr>
+        <p:spPr>
+          <a:xfrm>
             <a:off x="304800" y="2095500"/>
             <a:ext cx="342900" cy="190500"/>
           </a:xfrm>
-          <a:prstGeom xmlns:a="http://schemas.openxmlformats.org/drawingml/2006/main" prst="rect">
-            <a:avLst/>
-          </a:prstGeom>
-          <a:noFill xmlns:a="http://schemas.openxmlformats.org/drawingml/2006/main"/>
-          <a:ln xmlns:a="http://schemas.openxmlformats.org/drawingml/2006/main" w="0">
+          <a:prstGeom prst="rect">
+            <a:avLst/>
+          </a:prstGeom>
+          <a:noFill/>
+          <a:ln w="0">
             <a:noFill/>
             <a:prstDash val="solid"/>
           </a:ln>
         </p:spPr>
         <p:txBody>
-          <a:bodyPr xmlns:a="http://schemas.openxmlformats.org/drawingml/2006/main" wrap="square" lIns="0" tIns="0" rIns="0" bIns="0" anchor="ctr">
-            <a:normAutofit fontScale="100000"/>
+          <a:bodyPr wrap="square" lIns="0" tIns="0" rIns="0" bIns="0" anchor="ctr">
+            <a:normAutofit/>
           </a:bodyPr>
-          <a:lstStyle xmlns:a="http://schemas.openxmlformats.org/drawingml/2006/main"/>
-          <a:p xmlns:a="http://schemas.openxmlformats.org/drawingml/2006/main">
+          <a:lstStyle/>
+          <a:p>
             <a:pPr algn="l">
               <a:lnSpc>
                 <a:spcPct val="95000"/>
@@ -2917,37 +2319,37 @@
       <p:sp>
         <p:nvSpPr>
           <p:cNvPr id="41" name="summary-e8-text">
-            <a:extLst xmlns:a="http://schemas.openxmlformats.org/drawingml/2006/main">
+            <a:extLst>
               <a:ext uri="{FF2B5EF4-FFF2-40B4-BE49-F238E27FC236}">
                 <a16:creationId xmlns:a16="http://schemas.microsoft.com/office/drawing/2014/main" id="{70D49823-48B6-4ED1-83DC-B655CB1FB553}"/>
               </a:ext>
             </a:extLst>
           </p:cNvPr>
           <p:cNvSpPr>
-            <a:spLocks xmlns:a="http://schemas.openxmlformats.org/drawingml/2006/main" noGrp="1"/>
-          </p:cNvSpPr>
-          <p:nvPr/>
-        </p:nvSpPr>
-        <p:spPr>
-          <a:xfrm xmlns:a="http://schemas.openxmlformats.org/drawingml/2006/main">
+            <a:spLocks noGrp="1"/>
+          </p:cNvSpPr>
+          <p:nvPr/>
+        </p:nvSpPr>
+        <p:spPr>
+          <a:xfrm>
             <a:off x="666750" y="2095500"/>
             <a:ext cx="2190750" cy="190500"/>
           </a:xfrm>
-          <a:prstGeom xmlns:a="http://schemas.openxmlformats.org/drawingml/2006/main" prst="rect">
-            <a:avLst/>
-          </a:prstGeom>
-          <a:noFill xmlns:a="http://schemas.openxmlformats.org/drawingml/2006/main"/>
-          <a:ln xmlns:a="http://schemas.openxmlformats.org/drawingml/2006/main" w="0">
+          <a:prstGeom prst="rect">
+            <a:avLst/>
+          </a:prstGeom>
+          <a:noFill/>
+          <a:ln w="0">
             <a:noFill/>
             <a:prstDash val="solid"/>
           </a:ln>
         </p:spPr>
         <p:txBody>
-          <a:bodyPr xmlns:a="http://schemas.openxmlformats.org/drawingml/2006/main" wrap="square" lIns="0" tIns="0" rIns="0" bIns="0" anchor="ctr">
-            <a:normAutofit fontScale="100000"/>
+          <a:bodyPr wrap="square" lIns="0" tIns="0" rIns="0" bIns="0" anchor="ctr">
+            <a:normAutofit/>
           </a:bodyPr>
-          <a:lstStyle xmlns:a="http://schemas.openxmlformats.org/drawingml/2006/main"/>
-          <a:p xmlns:a="http://schemas.openxmlformats.org/drawingml/2006/main">
+          <a:lstStyle/>
+          <a:p>
             <a:pPr algn="l">
               <a:lnSpc>
                 <a:spcPct val="95000"/>
@@ -2979,37 +2381,37 @@
       <p:sp>
         <p:nvSpPr>
           <p:cNvPr id="42" name="summary-e12-id">
-            <a:extLst xmlns:a="http://schemas.openxmlformats.org/drawingml/2006/main">
+            <a:extLst>
               <a:ext uri="{FF2B5EF4-FFF2-40B4-BE49-F238E27FC236}">
                 <a16:creationId xmlns:a16="http://schemas.microsoft.com/office/drawing/2014/main" id="{12B72A54-2BEE-458E-9EEB-40AA1EBC64CB}"/>
               </a:ext>
             </a:extLst>
           </p:cNvPr>
           <p:cNvSpPr>
-            <a:spLocks xmlns:a="http://schemas.openxmlformats.org/drawingml/2006/main" noGrp="1"/>
-          </p:cNvSpPr>
-          <p:nvPr/>
-        </p:nvSpPr>
-        <p:spPr>
-          <a:xfrm xmlns:a="http://schemas.openxmlformats.org/drawingml/2006/main">
+            <a:spLocks noGrp="1"/>
+          </p:cNvSpPr>
+          <p:nvPr/>
+        </p:nvSpPr>
+        <p:spPr>
+          <a:xfrm>
             <a:off x="304800" y="2352675"/>
             <a:ext cx="342900" cy="190500"/>
           </a:xfrm>
-          <a:prstGeom xmlns:a="http://schemas.openxmlformats.org/drawingml/2006/main" prst="rect">
-            <a:avLst/>
-          </a:prstGeom>
-          <a:noFill xmlns:a="http://schemas.openxmlformats.org/drawingml/2006/main"/>
-          <a:ln xmlns:a="http://schemas.openxmlformats.org/drawingml/2006/main" w="0">
+          <a:prstGeom prst="rect">
+            <a:avLst/>
+          </a:prstGeom>
+          <a:noFill/>
+          <a:ln w="0">
             <a:noFill/>
             <a:prstDash val="solid"/>
           </a:ln>
         </p:spPr>
         <p:txBody>
-          <a:bodyPr xmlns:a="http://schemas.openxmlformats.org/drawingml/2006/main" wrap="square" lIns="0" tIns="0" rIns="0" bIns="0" anchor="ctr">
-            <a:normAutofit fontScale="100000"/>
+          <a:bodyPr wrap="square" lIns="0" tIns="0" rIns="0" bIns="0" anchor="ctr">
+            <a:normAutofit/>
           </a:bodyPr>
-          <a:lstStyle xmlns:a="http://schemas.openxmlformats.org/drawingml/2006/main"/>
-          <a:p xmlns:a="http://schemas.openxmlformats.org/drawingml/2006/main">
+          <a:lstStyle/>
+          <a:p>
             <a:pPr algn="l">
               <a:lnSpc>
                 <a:spcPct val="95000"/>
@@ -3041,37 +2443,37 @@
       <p:sp>
         <p:nvSpPr>
           <p:cNvPr id="43" name="summary-e12-text">
-            <a:extLst xmlns:a="http://schemas.openxmlformats.org/drawingml/2006/main">
+            <a:extLst>
               <a:ext uri="{FF2B5EF4-FFF2-40B4-BE49-F238E27FC236}">
                 <a16:creationId xmlns:a16="http://schemas.microsoft.com/office/drawing/2014/main" id="{62AEB2E7-7076-411E-B294-FDEEF030B1FD}"/>
               </a:ext>
             </a:extLst>
           </p:cNvPr>
           <p:cNvSpPr>
-            <a:spLocks xmlns:a="http://schemas.openxmlformats.org/drawingml/2006/main" noGrp="1"/>
-          </p:cNvSpPr>
-          <p:nvPr/>
-        </p:nvSpPr>
-        <p:spPr>
-          <a:xfrm xmlns:a="http://schemas.openxmlformats.org/drawingml/2006/main">
+            <a:spLocks noGrp="1"/>
+          </p:cNvSpPr>
+          <p:nvPr/>
+        </p:nvSpPr>
+        <p:spPr>
+          <a:xfrm>
             <a:off x="666750" y="2352675"/>
             <a:ext cx="2190750" cy="190500"/>
           </a:xfrm>
-          <a:prstGeom xmlns:a="http://schemas.openxmlformats.org/drawingml/2006/main" prst="rect">
-            <a:avLst/>
-          </a:prstGeom>
-          <a:noFill xmlns:a="http://schemas.openxmlformats.org/drawingml/2006/main"/>
-          <a:ln xmlns:a="http://schemas.openxmlformats.org/drawingml/2006/main" w="0">
+          <a:prstGeom prst="rect">
+            <a:avLst/>
+          </a:prstGeom>
+          <a:noFill/>
+          <a:ln w="0">
             <a:noFill/>
             <a:prstDash val="solid"/>
           </a:ln>
         </p:spPr>
         <p:txBody>
-          <a:bodyPr xmlns:a="http://schemas.openxmlformats.org/drawingml/2006/main" wrap="square" lIns="0" tIns="0" rIns="0" bIns="0" anchor="ctr">
-            <a:normAutofit fontScale="100000"/>
+          <a:bodyPr wrap="square" lIns="0" tIns="0" rIns="0" bIns="0" anchor="ctr">
+            <a:normAutofit/>
           </a:bodyPr>
-          <a:lstStyle xmlns:a="http://schemas.openxmlformats.org/drawingml/2006/main"/>
-          <a:p xmlns:a="http://schemas.openxmlformats.org/drawingml/2006/main">
+          <a:lstStyle/>
+          <a:p>
             <a:pPr algn="l">
               <a:lnSpc>
                 <a:spcPct val="95000"/>
@@ -3103,37 +2505,37 @@
       <p:sp>
         <p:nvSpPr>
           <p:cNvPr id="44" name="summary-e14-id">
-            <a:extLst xmlns:a="http://schemas.openxmlformats.org/drawingml/2006/main">
+            <a:extLst>
               <a:ext uri="{FF2B5EF4-FFF2-40B4-BE49-F238E27FC236}">
                 <a16:creationId xmlns:a16="http://schemas.microsoft.com/office/drawing/2014/main" id="{66112484-A71D-4628-810B-8423CA4E828D}"/>
               </a:ext>
             </a:extLst>
           </p:cNvPr>
           <p:cNvSpPr>
-            <a:spLocks xmlns:a="http://schemas.openxmlformats.org/drawingml/2006/main" noGrp="1"/>
-          </p:cNvSpPr>
-          <p:nvPr/>
-        </p:nvSpPr>
-        <p:spPr>
-          <a:xfrm xmlns:a="http://schemas.openxmlformats.org/drawingml/2006/main">
+            <a:spLocks noGrp="1"/>
+          </p:cNvSpPr>
+          <p:nvPr/>
+        </p:nvSpPr>
+        <p:spPr>
+          <a:xfrm>
             <a:off x="304800" y="2609850"/>
             <a:ext cx="342900" cy="190500"/>
           </a:xfrm>
-          <a:prstGeom xmlns:a="http://schemas.openxmlformats.org/drawingml/2006/main" prst="rect">
-            <a:avLst/>
-          </a:prstGeom>
-          <a:noFill xmlns:a="http://schemas.openxmlformats.org/drawingml/2006/main"/>
-          <a:ln xmlns:a="http://schemas.openxmlformats.org/drawingml/2006/main" w="0">
+          <a:prstGeom prst="rect">
+            <a:avLst/>
+          </a:prstGeom>
+          <a:noFill/>
+          <a:ln w="0">
             <a:noFill/>
             <a:prstDash val="solid"/>
           </a:ln>
         </p:spPr>
         <p:txBody>
-          <a:bodyPr xmlns:a="http://schemas.openxmlformats.org/drawingml/2006/main" wrap="square" lIns="0" tIns="0" rIns="0" bIns="0" anchor="ctr">
-            <a:normAutofit fontScale="100000"/>
+          <a:bodyPr wrap="square" lIns="0" tIns="0" rIns="0" bIns="0" anchor="ctr">
+            <a:normAutofit/>
           </a:bodyPr>
-          <a:lstStyle xmlns:a="http://schemas.openxmlformats.org/drawingml/2006/main"/>
-          <a:p xmlns:a="http://schemas.openxmlformats.org/drawingml/2006/main">
+          <a:lstStyle/>
+          <a:p>
             <a:pPr algn="l">
               <a:lnSpc>
                 <a:spcPct val="95000"/>
@@ -3165,37 +2567,37 @@
       <p:sp>
         <p:nvSpPr>
           <p:cNvPr id="45" name="summary-e14-text">
-            <a:extLst xmlns:a="http://schemas.openxmlformats.org/drawingml/2006/main">
+            <a:extLst>
               <a:ext uri="{FF2B5EF4-FFF2-40B4-BE49-F238E27FC236}">
                 <a16:creationId xmlns:a16="http://schemas.microsoft.com/office/drawing/2014/main" id="{F9B1F09C-930C-412D-BF3C-5D3BCA06199B}"/>
               </a:ext>
             </a:extLst>
           </p:cNvPr>
           <p:cNvSpPr>
-            <a:spLocks xmlns:a="http://schemas.openxmlformats.org/drawingml/2006/main" noGrp="1"/>
-          </p:cNvSpPr>
-          <p:nvPr/>
-        </p:nvSpPr>
-        <p:spPr>
-          <a:xfrm xmlns:a="http://schemas.openxmlformats.org/drawingml/2006/main">
+            <a:spLocks noGrp="1"/>
+          </p:cNvSpPr>
+          <p:nvPr/>
+        </p:nvSpPr>
+        <p:spPr>
+          <a:xfrm>
             <a:off x="666750" y="2609850"/>
             <a:ext cx="2190750" cy="190500"/>
           </a:xfrm>
-          <a:prstGeom xmlns:a="http://schemas.openxmlformats.org/drawingml/2006/main" prst="rect">
-            <a:avLst/>
-          </a:prstGeom>
-          <a:noFill xmlns:a="http://schemas.openxmlformats.org/drawingml/2006/main"/>
-          <a:ln xmlns:a="http://schemas.openxmlformats.org/drawingml/2006/main" w="0">
+          <a:prstGeom prst="rect">
+            <a:avLst/>
+          </a:prstGeom>
+          <a:noFill/>
+          <a:ln w="0">
             <a:noFill/>
             <a:prstDash val="solid"/>
           </a:ln>
         </p:spPr>
         <p:txBody>
-          <a:bodyPr xmlns:a="http://schemas.openxmlformats.org/drawingml/2006/main" wrap="square" lIns="0" tIns="0" rIns="0" bIns="0" anchor="ctr">
-            <a:normAutofit fontScale="100000"/>
+          <a:bodyPr wrap="square" lIns="0" tIns="0" rIns="0" bIns="0" anchor="ctr">
+            <a:normAutofit/>
           </a:bodyPr>
-          <a:lstStyle xmlns:a="http://schemas.openxmlformats.org/drawingml/2006/main"/>
-          <a:p xmlns:a="http://schemas.openxmlformats.org/drawingml/2006/main">
+          <a:lstStyle/>
+          <a:p>
             <a:pPr algn="l">
               <a:lnSpc>
                 <a:spcPct val="95000"/>
@@ -3227,37 +2629,37 @@
       <p:sp>
         <p:nvSpPr>
           <p:cNvPr id="46" name="recent-label">
-            <a:extLst xmlns:a="http://schemas.openxmlformats.org/drawingml/2006/main">
+            <a:extLst>
               <a:ext uri="{FF2B5EF4-FFF2-40B4-BE49-F238E27FC236}">
                 <a16:creationId xmlns:a16="http://schemas.microsoft.com/office/drawing/2014/main" id="{377479B6-77D9-477C-8BF8-FC9E8F3B14F1}"/>
               </a:ext>
             </a:extLst>
           </p:cNvPr>
           <p:cNvSpPr>
-            <a:spLocks xmlns:a="http://schemas.openxmlformats.org/drawingml/2006/main" noGrp="1"/>
-          </p:cNvSpPr>
-          <p:nvPr/>
-        </p:nvSpPr>
-        <p:spPr>
-          <a:xfrm xmlns:a="http://schemas.openxmlformats.org/drawingml/2006/main">
-            <a:off x="4095750" y="1066800"/>
-            <a:ext cx="1143000" cy="247650"/>
-          </a:xfrm>
-          <a:prstGeom xmlns:a="http://schemas.openxmlformats.org/drawingml/2006/main" prst="rect">
-            <a:avLst/>
-          </a:prstGeom>
-          <a:noFill xmlns:a="http://schemas.openxmlformats.org/drawingml/2006/main"/>
-          <a:ln xmlns:a="http://schemas.openxmlformats.org/drawingml/2006/main" w="0">
+            <a:spLocks noGrp="1"/>
+          </p:cNvSpPr>
+          <p:nvPr/>
+        </p:nvSpPr>
+        <p:spPr>
+          <a:xfrm>
+            <a:off x="3983181" y="520995"/>
+            <a:ext cx="2057401" cy="247650"/>
+          </a:xfrm>
+          <a:prstGeom prst="rect">
+            <a:avLst/>
+          </a:prstGeom>
+          <a:noFill/>
+          <a:ln w="0">
             <a:noFill/>
             <a:prstDash val="solid"/>
           </a:ln>
         </p:spPr>
         <p:txBody>
-          <a:bodyPr xmlns:a="http://schemas.openxmlformats.org/drawingml/2006/main" wrap="square" lIns="0" tIns="0" rIns="0" bIns="0" anchor="ctr">
-            <a:normAutofit fontScale="100000"/>
+          <a:bodyPr wrap="square" lIns="0" tIns="0" rIns="0" bIns="0" anchor="ctr">
+            <a:normAutofit fontScale="77500" lnSpcReduction="20000"/>
           </a:bodyPr>
-          <a:lstStyle xmlns:a="http://schemas.openxmlformats.org/drawingml/2006/main"/>
-          <a:p xmlns:a="http://schemas.openxmlformats.org/drawingml/2006/main">
+          <a:lstStyle/>
+          <a:p>
             <a:pPr algn="l">
               <a:lnSpc>
                 <a:spcPct val="95000"/>
@@ -3273,7 +2675,7 @@
               </a:defRPr>
             </a:pPr>
             <a:r>
-              <a:rPr sz="1575" b="1">
+              <a:rPr sz="1575" b="1" dirty="0">
                 <a:solidFill>
                   <a:srgbClr val="2E6F9E"/>
                 </a:solidFill>
@@ -3281,37 +2683,56 @@
                 <a:ea typeface="Arial"/>
                 <a:cs typeface="Arial"/>
               </a:rPr>
-              <a:t>Recent-4</a:t>
-            </a:r>
+              <a:t>Recent</a:t>
+            </a:r>
+            <a:r>
+              <a:rPr lang="en-US" sz="1575" b="1" dirty="0">
+                <a:solidFill>
+                  <a:srgbClr val="2E6F9E"/>
+                </a:solidFill>
+                <a:latin typeface="Arial"/>
+                <a:ea typeface="Arial"/>
+                <a:cs typeface="Arial"/>
+              </a:rPr>
+              <a:t> High-Fidelity Images</a:t>
+            </a:r>
+            <a:endParaRPr sz="1575" b="1" dirty="0">
+              <a:solidFill>
+                <a:srgbClr val="2E6F9E"/>
+              </a:solidFill>
+              <a:latin typeface="Arial"/>
+              <a:ea typeface="Arial"/>
+              <a:cs typeface="Arial"/>
+            </a:endParaRPr>
           </a:p>
         </p:txBody>
       </p:sp>
       <p:sp>
         <p:nvSpPr>
           <p:cNvPr id="47" name="recent-e11-dot">
-            <a:extLst xmlns:a="http://schemas.openxmlformats.org/drawingml/2006/main">
+            <a:extLst>
               <a:ext uri="{FF2B5EF4-FFF2-40B4-BE49-F238E27FC236}">
                 <a16:creationId xmlns:a16="http://schemas.microsoft.com/office/drawing/2014/main" id="{4B0AA075-C987-4A11-B7EC-B289BD56FFFD}"/>
               </a:ext>
             </a:extLst>
           </p:cNvPr>
           <p:cNvSpPr>
-            <a:spLocks xmlns:a="http://schemas.openxmlformats.org/drawingml/2006/main" noGrp="1"/>
-          </p:cNvSpPr>
-          <p:nvPr/>
-        </p:nvSpPr>
-        <p:spPr>
-          <a:xfrm xmlns:a="http://schemas.openxmlformats.org/drawingml/2006/main">
-            <a:off x="4095750" y="1343025"/>
+            <a:spLocks noGrp="1"/>
+          </p:cNvSpPr>
+          <p:nvPr/>
+        </p:nvSpPr>
+        <p:spPr>
+          <a:xfrm>
+            <a:off x="4040332" y="825795"/>
             <a:ext cx="342900" cy="342900"/>
           </a:xfrm>
-          <a:prstGeom xmlns:a="http://schemas.openxmlformats.org/drawingml/2006/main" prst="ellipse">
-            <a:avLst/>
-          </a:prstGeom>
-          <a:solidFill xmlns:a="http://schemas.openxmlformats.org/drawingml/2006/main">
+          <a:prstGeom prst="ellipse">
+            <a:avLst/>
+          </a:prstGeom>
+          <a:solidFill>
             <a:srgbClr val="EAF3F8"/>
           </a:solidFill>
-          <a:ln xmlns:a="http://schemas.openxmlformats.org/drawingml/2006/main" w="14288">
+          <a:ln w="14288">
             <a:solidFill>
               <a:srgbClr val="2E6F9E"/>
             </a:solidFill>
@@ -3319,11 +2740,11 @@
           </a:ln>
         </p:spPr>
         <p:txBody>
-          <a:bodyPr xmlns:a="http://schemas.openxmlformats.org/drawingml/2006/main" lIns="0" tIns="0" rIns="0" bIns="0" anchor="ctr">
-            <a:normAutofit fontScale="100000"/>
+          <a:bodyPr lIns="0" tIns="0" rIns="0" bIns="0" anchor="ctr">
+            <a:normAutofit/>
           </a:bodyPr>
-          <a:lstStyle xmlns:a="http://schemas.openxmlformats.org/drawingml/2006/main"/>
-          <a:p xmlns:a="http://schemas.openxmlformats.org/drawingml/2006/main">
+          <a:lstStyle/>
+          <a:p>
             <a:pPr algn="ctr">
               <a:defRPr sz="1125" b="1">
                 <a:solidFill>
@@ -3351,29 +2772,29 @@
       <p:sp>
         <p:nvSpPr>
           <p:cNvPr id="48" name="recent-e12-dot">
-            <a:extLst xmlns:a="http://schemas.openxmlformats.org/drawingml/2006/main">
+            <a:extLst>
               <a:ext uri="{FF2B5EF4-FFF2-40B4-BE49-F238E27FC236}">
                 <a16:creationId xmlns:a16="http://schemas.microsoft.com/office/drawing/2014/main" id="{69EF4AA2-9CCF-445E-8153-CDCE57F1AEAA}"/>
               </a:ext>
             </a:extLst>
           </p:cNvPr>
           <p:cNvSpPr>
-            <a:spLocks xmlns:a="http://schemas.openxmlformats.org/drawingml/2006/main" noGrp="1"/>
-          </p:cNvSpPr>
-          <p:nvPr/>
-        </p:nvSpPr>
-        <p:spPr>
-          <a:xfrm xmlns:a="http://schemas.openxmlformats.org/drawingml/2006/main">
-            <a:off x="4533900" y="1343025"/>
+            <a:spLocks noGrp="1"/>
+          </p:cNvSpPr>
+          <p:nvPr/>
+        </p:nvSpPr>
+        <p:spPr>
+          <a:xfrm>
+            <a:off x="4478482" y="825795"/>
             <a:ext cx="342900" cy="342900"/>
           </a:xfrm>
-          <a:prstGeom xmlns:a="http://schemas.openxmlformats.org/drawingml/2006/main" prst="ellipse">
-            <a:avLst/>
-          </a:prstGeom>
-          <a:solidFill xmlns:a="http://schemas.openxmlformats.org/drawingml/2006/main">
+          <a:prstGeom prst="ellipse">
+            <a:avLst/>
+          </a:prstGeom>
+          <a:solidFill>
             <a:srgbClr val="EAF3F8"/>
           </a:solidFill>
-          <a:ln xmlns:a="http://schemas.openxmlformats.org/drawingml/2006/main" w="14288">
+          <a:ln w="14288">
             <a:solidFill>
               <a:srgbClr val="2E6F9E"/>
             </a:solidFill>
@@ -3381,11 +2802,11 @@
           </a:ln>
         </p:spPr>
         <p:txBody>
-          <a:bodyPr xmlns:a="http://schemas.openxmlformats.org/drawingml/2006/main" lIns="0" tIns="0" rIns="0" bIns="0" anchor="ctr">
-            <a:normAutofit fontScale="100000"/>
+          <a:bodyPr lIns="0" tIns="0" rIns="0" bIns="0" anchor="ctr">
+            <a:normAutofit/>
           </a:bodyPr>
-          <a:lstStyle xmlns:a="http://schemas.openxmlformats.org/drawingml/2006/main"/>
-          <a:p xmlns:a="http://schemas.openxmlformats.org/drawingml/2006/main">
+          <a:lstStyle/>
+          <a:p>
             <a:pPr algn="ctr">
               <a:defRPr sz="1125" b="1">
                 <a:solidFill>
@@ -3413,29 +2834,29 @@
       <p:sp>
         <p:nvSpPr>
           <p:cNvPr id="49" name="recent-e13-dot">
-            <a:extLst xmlns:a="http://schemas.openxmlformats.org/drawingml/2006/main">
+            <a:extLst>
               <a:ext uri="{FF2B5EF4-FFF2-40B4-BE49-F238E27FC236}">
                 <a16:creationId xmlns:a16="http://schemas.microsoft.com/office/drawing/2014/main" id="{E90C362C-A1D6-4BE7-8CEB-E9E2A7008128}"/>
               </a:ext>
             </a:extLst>
           </p:cNvPr>
           <p:cNvSpPr>
-            <a:spLocks xmlns:a="http://schemas.openxmlformats.org/drawingml/2006/main" noGrp="1"/>
-          </p:cNvSpPr>
-          <p:nvPr/>
-        </p:nvSpPr>
-        <p:spPr>
-          <a:xfrm xmlns:a="http://schemas.openxmlformats.org/drawingml/2006/main">
-            <a:off x="4972050" y="1343025"/>
+            <a:spLocks noGrp="1"/>
+          </p:cNvSpPr>
+          <p:nvPr/>
+        </p:nvSpPr>
+        <p:spPr>
+          <a:xfrm>
+            <a:off x="4916632" y="825795"/>
             <a:ext cx="342900" cy="342900"/>
           </a:xfrm>
-          <a:prstGeom xmlns:a="http://schemas.openxmlformats.org/drawingml/2006/main" prst="ellipse">
-            <a:avLst/>
-          </a:prstGeom>
-          <a:solidFill xmlns:a="http://schemas.openxmlformats.org/drawingml/2006/main">
+          <a:prstGeom prst="ellipse">
+            <a:avLst/>
+          </a:prstGeom>
+          <a:solidFill>
             <a:srgbClr val="EAF3F8"/>
           </a:solidFill>
-          <a:ln xmlns:a="http://schemas.openxmlformats.org/drawingml/2006/main" w="14288">
+          <a:ln w="14288">
             <a:solidFill>
               <a:srgbClr val="2E6F9E"/>
             </a:solidFill>
@@ -3443,11 +2864,11 @@
           </a:ln>
         </p:spPr>
         <p:txBody>
-          <a:bodyPr xmlns:a="http://schemas.openxmlformats.org/drawingml/2006/main" lIns="0" tIns="0" rIns="0" bIns="0" anchor="ctr">
-            <a:normAutofit fontScale="100000"/>
+          <a:bodyPr lIns="0" tIns="0" rIns="0" bIns="0" anchor="ctr">
+            <a:normAutofit/>
           </a:bodyPr>
-          <a:lstStyle xmlns:a="http://schemas.openxmlformats.org/drawingml/2006/main"/>
-          <a:p xmlns:a="http://schemas.openxmlformats.org/drawingml/2006/main">
+          <a:lstStyle/>
+          <a:p>
             <a:pPr algn="ctr">
               <a:defRPr sz="1125" b="1">
                 <a:solidFill>
@@ -3475,29 +2896,29 @@
       <p:sp>
         <p:nvSpPr>
           <p:cNvPr id="50" name="recent-e14-dot">
-            <a:extLst xmlns:a="http://schemas.openxmlformats.org/drawingml/2006/main">
+            <a:extLst>
               <a:ext uri="{FF2B5EF4-FFF2-40B4-BE49-F238E27FC236}">
                 <a16:creationId xmlns:a16="http://schemas.microsoft.com/office/drawing/2014/main" id="{805890C2-A385-471E-A22F-7E4911903AC9}"/>
               </a:ext>
             </a:extLst>
           </p:cNvPr>
           <p:cNvSpPr>
-            <a:spLocks xmlns:a="http://schemas.openxmlformats.org/drawingml/2006/main" noGrp="1"/>
-          </p:cNvSpPr>
-          <p:nvPr/>
-        </p:nvSpPr>
-        <p:spPr>
-          <a:xfrm xmlns:a="http://schemas.openxmlformats.org/drawingml/2006/main">
-            <a:off x="5410200" y="1343025"/>
+            <a:spLocks noGrp="1"/>
+          </p:cNvSpPr>
+          <p:nvPr/>
+        </p:nvSpPr>
+        <p:spPr>
+          <a:xfrm>
+            <a:off x="5354782" y="825795"/>
             <a:ext cx="342900" cy="342900"/>
           </a:xfrm>
-          <a:prstGeom xmlns:a="http://schemas.openxmlformats.org/drawingml/2006/main" prst="ellipse">
-            <a:avLst/>
-          </a:prstGeom>
-          <a:solidFill xmlns:a="http://schemas.openxmlformats.org/drawingml/2006/main">
+          <a:prstGeom prst="ellipse">
+            <a:avLst/>
+          </a:prstGeom>
+          <a:solidFill>
             <a:srgbClr val="EAF3F8"/>
           </a:solidFill>
-          <a:ln xmlns:a="http://schemas.openxmlformats.org/drawingml/2006/main" w="14288">
+          <a:ln w="14288">
             <a:solidFill>
               <a:srgbClr val="2E6F9E"/>
             </a:solidFill>
@@ -3505,11 +2926,11 @@
           </a:ln>
         </p:spPr>
         <p:txBody>
-          <a:bodyPr xmlns:a="http://schemas.openxmlformats.org/drawingml/2006/main" lIns="0" tIns="0" rIns="0" bIns="0" anchor="ctr">
-            <a:normAutofit fontScale="100000"/>
+          <a:bodyPr lIns="0" tIns="0" rIns="0" bIns="0" anchor="ctr">
+            <a:normAutofit/>
           </a:bodyPr>
-          <a:lstStyle xmlns:a="http://schemas.openxmlformats.org/drawingml/2006/main"/>
-          <a:p xmlns:a="http://schemas.openxmlformats.org/drawingml/2006/main">
+          <a:lstStyle/>
+          <a:p>
             <a:pPr algn="ctr">
               <a:defRPr sz="1125" b="1">
                 <a:solidFill>
@@ -3537,37 +2958,37 @@
       <p:sp>
         <p:nvSpPr>
           <p:cNvPr id="51" name="causal-label">
-            <a:extLst xmlns:a="http://schemas.openxmlformats.org/drawingml/2006/main">
+            <a:extLst>
               <a:ext uri="{FF2B5EF4-FFF2-40B4-BE49-F238E27FC236}">
                 <a16:creationId xmlns:a16="http://schemas.microsoft.com/office/drawing/2014/main" id="{F43058FD-F2E2-4D45-A0F0-7937BDF077D3}"/>
               </a:ext>
             </a:extLst>
           </p:cNvPr>
           <p:cNvSpPr>
-            <a:spLocks xmlns:a="http://schemas.openxmlformats.org/drawingml/2006/main" noGrp="1"/>
-          </p:cNvSpPr>
-          <p:nvPr/>
-        </p:nvSpPr>
-        <p:spPr>
-          <a:xfrm xmlns:a="http://schemas.openxmlformats.org/drawingml/2006/main">
-            <a:off x="4095750" y="2295525"/>
+            <a:spLocks noGrp="1"/>
+          </p:cNvSpPr>
+          <p:nvPr/>
+        </p:nvSpPr>
+        <p:spPr>
+          <a:xfrm>
+            <a:off x="4058805" y="1344189"/>
             <a:ext cx="1428750" cy="257175"/>
           </a:xfrm>
-          <a:prstGeom xmlns:a="http://schemas.openxmlformats.org/drawingml/2006/main" prst="rect">
-            <a:avLst/>
-          </a:prstGeom>
-          <a:noFill xmlns:a="http://schemas.openxmlformats.org/drawingml/2006/main"/>
-          <a:ln xmlns:a="http://schemas.openxmlformats.org/drawingml/2006/main" w="0">
+          <a:prstGeom prst="rect">
+            <a:avLst/>
+          </a:prstGeom>
+          <a:noFill/>
+          <a:ln w="0">
             <a:noFill/>
             <a:prstDash val="solid"/>
           </a:ln>
         </p:spPr>
         <p:txBody>
-          <a:bodyPr xmlns:a="http://schemas.openxmlformats.org/drawingml/2006/main" wrap="square" lIns="0" tIns="0" rIns="0" bIns="0" anchor="ctr">
-            <a:normAutofit fontScale="100000"/>
+          <a:bodyPr wrap="square" lIns="0" tIns="0" rIns="0" bIns="0" anchor="ctr">
+            <a:normAutofit/>
           </a:bodyPr>
-          <a:lstStyle xmlns:a="http://schemas.openxmlformats.org/drawingml/2006/main"/>
-          <a:p xmlns:a="http://schemas.openxmlformats.org/drawingml/2006/main">
+          <a:lstStyle/>
+          <a:p>
             <a:pPr algn="l">
               <a:lnSpc>
                 <a:spcPct val="95000"/>
@@ -3599,29 +3020,29 @@
       <p:sp>
         <p:nvSpPr>
           <p:cNvPr id="52" name="causal-e6-dot">
-            <a:extLst xmlns:a="http://schemas.openxmlformats.org/drawingml/2006/main">
+            <a:extLst>
               <a:ext uri="{FF2B5EF4-FFF2-40B4-BE49-F238E27FC236}">
                 <a16:creationId xmlns:a16="http://schemas.microsoft.com/office/drawing/2014/main" id="{9684E93E-8A5E-4B86-AD80-386775412B67}"/>
               </a:ext>
             </a:extLst>
           </p:cNvPr>
           <p:cNvSpPr>
-            <a:spLocks xmlns:a="http://schemas.openxmlformats.org/drawingml/2006/main" noGrp="1"/>
-          </p:cNvSpPr>
-          <p:nvPr/>
-        </p:nvSpPr>
-        <p:spPr>
-          <a:xfrm xmlns:a="http://schemas.openxmlformats.org/drawingml/2006/main">
-            <a:off x="4095750" y="2581275"/>
+            <a:spLocks noGrp="1"/>
+          </p:cNvSpPr>
+          <p:nvPr/>
+        </p:nvSpPr>
+        <p:spPr>
+          <a:xfrm>
+            <a:off x="4058805" y="1629939"/>
             <a:ext cx="342900" cy="342900"/>
           </a:xfrm>
-          <a:prstGeom xmlns:a="http://schemas.openxmlformats.org/drawingml/2006/main" prst="ellipse">
-            <a:avLst/>
-          </a:prstGeom>
-          <a:solidFill xmlns:a="http://schemas.openxmlformats.org/drawingml/2006/main">
+          <a:prstGeom prst="ellipse">
+            <a:avLst/>
+          </a:prstGeom>
+          <a:solidFill>
             <a:srgbClr val="FFF1E7"/>
           </a:solidFill>
-          <a:ln xmlns:a="http://schemas.openxmlformats.org/drawingml/2006/main" w="14288">
+          <a:ln w="14288">
             <a:solidFill>
               <a:srgbClr val="C45A14"/>
             </a:solidFill>
@@ -3629,11 +3050,11 @@
           </a:ln>
         </p:spPr>
         <p:txBody>
-          <a:bodyPr xmlns:a="http://schemas.openxmlformats.org/drawingml/2006/main" lIns="0" tIns="0" rIns="0" bIns="0" anchor="ctr">
-            <a:normAutofit fontScale="100000"/>
+          <a:bodyPr lIns="0" tIns="0" rIns="0" bIns="0" anchor="ctr">
+            <a:normAutofit/>
           </a:bodyPr>
-          <a:lstStyle xmlns:a="http://schemas.openxmlformats.org/drawingml/2006/main"/>
-          <a:p xmlns:a="http://schemas.openxmlformats.org/drawingml/2006/main">
+          <a:lstStyle/>
+          <a:p>
             <a:pPr algn="ctr">
               <a:defRPr sz="1125" b="1">
                 <a:solidFill>
@@ -3661,29 +3082,29 @@
       <p:sp>
         <p:nvSpPr>
           <p:cNvPr id="53" name="causal-e7-dot">
-            <a:extLst xmlns:a="http://schemas.openxmlformats.org/drawingml/2006/main">
+            <a:extLst>
               <a:ext uri="{FF2B5EF4-FFF2-40B4-BE49-F238E27FC236}">
                 <a16:creationId xmlns:a16="http://schemas.microsoft.com/office/drawing/2014/main" id="{521458AB-53BE-4166-9D74-C93F3D1C925C}"/>
               </a:ext>
             </a:extLst>
           </p:cNvPr>
           <p:cNvSpPr>
-            <a:spLocks xmlns:a="http://schemas.openxmlformats.org/drawingml/2006/main" noGrp="1"/>
-          </p:cNvSpPr>
-          <p:nvPr/>
-        </p:nvSpPr>
-        <p:spPr>
-          <a:xfrm xmlns:a="http://schemas.openxmlformats.org/drawingml/2006/main">
-            <a:off x="4533900" y="2581275"/>
+            <a:spLocks noGrp="1"/>
+          </p:cNvSpPr>
+          <p:nvPr/>
+        </p:nvSpPr>
+        <p:spPr>
+          <a:xfrm>
+            <a:off x="4496955" y="1629939"/>
             <a:ext cx="342900" cy="342900"/>
           </a:xfrm>
-          <a:prstGeom xmlns:a="http://schemas.openxmlformats.org/drawingml/2006/main" prst="ellipse">
-            <a:avLst/>
-          </a:prstGeom>
-          <a:solidFill xmlns:a="http://schemas.openxmlformats.org/drawingml/2006/main">
+          <a:prstGeom prst="ellipse">
+            <a:avLst/>
+          </a:prstGeom>
+          <a:solidFill>
             <a:srgbClr val="FFF1E7"/>
           </a:solidFill>
-          <a:ln xmlns:a="http://schemas.openxmlformats.org/drawingml/2006/main" w="14288">
+          <a:ln w="14288">
             <a:solidFill>
               <a:srgbClr val="C45A14"/>
             </a:solidFill>
@@ -3691,11 +3112,11 @@
           </a:ln>
         </p:spPr>
         <p:txBody>
-          <a:bodyPr xmlns:a="http://schemas.openxmlformats.org/drawingml/2006/main" lIns="0" tIns="0" rIns="0" bIns="0" anchor="ctr">
-            <a:normAutofit fontScale="100000"/>
+          <a:bodyPr lIns="0" tIns="0" rIns="0" bIns="0" anchor="ctr">
+            <a:normAutofit/>
           </a:bodyPr>
-          <a:lstStyle xmlns:a="http://schemas.openxmlformats.org/drawingml/2006/main"/>
-          <a:p xmlns:a="http://schemas.openxmlformats.org/drawingml/2006/main">
+          <a:lstStyle/>
+          <a:p>
             <a:pPr algn="ctr">
               <a:defRPr sz="1125" b="1">
                 <a:solidFill>
@@ -3707,7 +3128,7 @@
               </a:defRPr>
             </a:pPr>
             <a:r>
-              <a:rPr sz="1125" b="1">
+              <a:rPr sz="1125" b="1" dirty="0">
                 <a:solidFill>
                   <a:srgbClr val="C45A14"/>
                 </a:solidFill>
@@ -3723,29 +3144,29 @@
       <p:sp>
         <p:nvSpPr>
           <p:cNvPr id="54" name="causal-e8-dot">
-            <a:extLst xmlns:a="http://schemas.openxmlformats.org/drawingml/2006/main">
+            <a:extLst>
               <a:ext uri="{FF2B5EF4-FFF2-40B4-BE49-F238E27FC236}">
                 <a16:creationId xmlns:a16="http://schemas.microsoft.com/office/drawing/2014/main" id="{FF618102-7C71-47BB-836B-EC3EBF48EFCB}"/>
               </a:ext>
             </a:extLst>
           </p:cNvPr>
           <p:cNvSpPr>
-            <a:spLocks xmlns:a="http://schemas.openxmlformats.org/drawingml/2006/main" noGrp="1"/>
-          </p:cNvSpPr>
-          <p:nvPr/>
-        </p:nvSpPr>
-        <p:spPr>
-          <a:xfrm xmlns:a="http://schemas.openxmlformats.org/drawingml/2006/main">
-            <a:off x="4972050" y="2581275"/>
+            <a:spLocks noGrp="1"/>
+          </p:cNvSpPr>
+          <p:nvPr/>
+        </p:nvSpPr>
+        <p:spPr>
+          <a:xfrm>
+            <a:off x="4935105" y="1629939"/>
             <a:ext cx="342900" cy="342900"/>
           </a:xfrm>
-          <a:prstGeom xmlns:a="http://schemas.openxmlformats.org/drawingml/2006/main" prst="ellipse">
-            <a:avLst/>
-          </a:prstGeom>
-          <a:solidFill xmlns:a="http://schemas.openxmlformats.org/drawingml/2006/main">
+          <a:prstGeom prst="ellipse">
+            <a:avLst/>
+          </a:prstGeom>
+          <a:solidFill>
             <a:srgbClr val="FFF1E7"/>
           </a:solidFill>
-          <a:ln xmlns:a="http://schemas.openxmlformats.org/drawingml/2006/main" w="14288">
+          <a:ln w="14288">
             <a:solidFill>
               <a:srgbClr val="C45A14"/>
             </a:solidFill>
@@ -3753,11 +3174,11 @@
           </a:ln>
         </p:spPr>
         <p:txBody>
-          <a:bodyPr xmlns:a="http://schemas.openxmlformats.org/drawingml/2006/main" lIns="0" tIns="0" rIns="0" bIns="0" anchor="ctr">
-            <a:normAutofit fontScale="100000"/>
+          <a:bodyPr lIns="0" tIns="0" rIns="0" bIns="0" anchor="ctr">
+            <a:normAutofit/>
           </a:bodyPr>
-          <a:lstStyle xmlns:a="http://schemas.openxmlformats.org/drawingml/2006/main"/>
-          <a:p xmlns:a="http://schemas.openxmlformats.org/drawingml/2006/main">
+          <a:lstStyle/>
+          <a:p>
             <a:pPr algn="ctr">
               <a:defRPr sz="1125" b="1">
                 <a:solidFill>
@@ -3785,29 +3206,29 @@
       <p:sp>
         <p:nvSpPr>
           <p:cNvPr id="55" name="causal-e12-dot">
-            <a:extLst xmlns:a="http://schemas.openxmlformats.org/drawingml/2006/main">
+            <a:extLst>
               <a:ext uri="{FF2B5EF4-FFF2-40B4-BE49-F238E27FC236}">
                 <a16:creationId xmlns:a16="http://schemas.microsoft.com/office/drawing/2014/main" id="{AAC720B7-90BB-465C-A910-03801A33288C}"/>
               </a:ext>
             </a:extLst>
           </p:cNvPr>
           <p:cNvSpPr>
-            <a:spLocks xmlns:a="http://schemas.openxmlformats.org/drawingml/2006/main" noGrp="1"/>
-          </p:cNvSpPr>
-          <p:nvPr/>
-        </p:nvSpPr>
-        <p:spPr>
-          <a:xfrm xmlns:a="http://schemas.openxmlformats.org/drawingml/2006/main">
-            <a:off x="5410200" y="2581275"/>
+            <a:spLocks noGrp="1"/>
+          </p:cNvSpPr>
+          <p:nvPr/>
+        </p:nvSpPr>
+        <p:spPr>
+          <a:xfrm>
+            <a:off x="5373255" y="1629939"/>
             <a:ext cx="342900" cy="342900"/>
           </a:xfrm>
-          <a:prstGeom xmlns:a="http://schemas.openxmlformats.org/drawingml/2006/main" prst="ellipse">
-            <a:avLst/>
-          </a:prstGeom>
-          <a:solidFill xmlns:a="http://schemas.openxmlformats.org/drawingml/2006/main">
+          <a:prstGeom prst="ellipse">
+            <a:avLst/>
+          </a:prstGeom>
+          <a:solidFill>
             <a:srgbClr val="EAF3F8"/>
           </a:solidFill>
-          <a:ln xmlns:a="http://schemas.openxmlformats.org/drawingml/2006/main" w="14288">
+          <a:ln w="14288">
             <a:solidFill>
               <a:srgbClr val="2E6F9E"/>
             </a:solidFill>
@@ -3815,11 +3236,11 @@
           </a:ln>
         </p:spPr>
         <p:txBody>
-          <a:bodyPr xmlns:a="http://schemas.openxmlformats.org/drawingml/2006/main" lIns="0" tIns="0" rIns="0" bIns="0" anchor="ctr">
-            <a:normAutofit fontScale="100000"/>
+          <a:bodyPr lIns="0" tIns="0" rIns="0" bIns="0" anchor="ctr">
+            <a:normAutofit/>
           </a:bodyPr>
-          <a:lstStyle xmlns:a="http://schemas.openxmlformats.org/drawingml/2006/main"/>
-          <a:p xmlns:a="http://schemas.openxmlformats.org/drawingml/2006/main">
+          <a:lstStyle/>
+          <a:p>
             <a:pPr algn="ctr">
               <a:defRPr sz="1125" b="1">
                 <a:solidFill>
@@ -3844,40 +3265,102 @@
           </a:p>
         </p:txBody>
       </p:sp>
-      <p:sp>
-        <p:nvSpPr>
-          <p:cNvPr id="56" name="e7-label">
-            <a:extLst xmlns:a="http://schemas.openxmlformats.org/drawingml/2006/main">
-              <a:ext uri="{FF2B5EF4-FFF2-40B4-BE49-F238E27FC236}">
-                <a16:creationId xmlns:a16="http://schemas.microsoft.com/office/drawing/2014/main" id="{B30118E8-AE60-49C2-ABE5-0484585150E4}"/>
-              </a:ext>
-            </a:extLst>
-          </p:cNvPr>
-          <p:cNvSpPr>
-            <a:spLocks xmlns:a="http://schemas.openxmlformats.org/drawingml/2006/main" noGrp="1"/>
-          </p:cNvSpPr>
-          <p:nvPr/>
-        </p:nvSpPr>
-        <p:spPr>
-          <a:xfrm xmlns:a="http://schemas.openxmlformats.org/drawingml/2006/main">
-            <a:off x="5953125" y="1685925"/>
-            <a:ext cx="1571625" cy="228600"/>
-          </a:xfrm>
-          <a:prstGeom xmlns:a="http://schemas.openxmlformats.org/drawingml/2006/main" prst="rect">
-            <a:avLst/>
-          </a:prstGeom>
-          <a:noFill xmlns:a="http://schemas.openxmlformats.org/drawingml/2006/main"/>
-          <a:ln xmlns:a="http://schemas.openxmlformats.org/drawingml/2006/main" w="0">
+      <p:pic>
+        <p:nvPicPr>
+          <p:cNvPr id="126" name="Picture 125"/>
+          <p:cNvPicPr>
+            <a:picLocks noChangeAspect="1"/>
+          </p:cNvPicPr>
+          <p:nvPr/>
+        </p:nvPicPr>
+        <p:blipFill>
+          <a:blip r:embed="rId3"/>
+          <a:stretch/>
+        </p:blipFill>
+        <p:spPr>
+          <a:xfrm>
+            <a:off x="4161678" y="2150171"/>
+            <a:ext cx="1207604" cy="1285875"/>
+          </a:xfrm>
+          <a:prstGeom prst="rect">
+            <a:avLst/>
+          </a:prstGeom>
+        </p:spPr>
+      </p:pic>
+      <p:sp>
+        <p:nvSpPr>
+          <p:cNvPr id="58" name="e7-image-border">
+            <a:extLst>
+              <a:ext uri="{FF2B5EF4-FFF2-40B4-BE49-F238E27FC236}">
+                <a16:creationId xmlns:a16="http://schemas.microsoft.com/office/drawing/2014/main" id="{828A0895-FBB0-43FF-A307-73ABAF4C379A}"/>
+              </a:ext>
+            </a:extLst>
+          </p:cNvPr>
+          <p:cNvSpPr>
+            <a:spLocks noGrp="1"/>
+          </p:cNvSpPr>
+          <p:nvPr/>
+        </p:nvSpPr>
+        <p:spPr>
+          <a:xfrm>
+            <a:off x="4129520" y="2156223"/>
+            <a:ext cx="1261000" cy="1285875"/>
+          </a:xfrm>
+          <a:prstGeom prst="roundRect">
+            <a:avLst>
+              <a:gd name="adj" fmla="val 2878"/>
+            </a:avLst>
+          </a:prstGeom>
+          <a:noFill/>
+          <a:ln w="19050">
+            <a:solidFill>
+              <a:srgbClr val="C45A14"/>
+            </a:solidFill>
+            <a:prstDash val="solid"/>
+          </a:ln>
+        </p:spPr>
+        <p:txBody>
+          <a:bodyPr/>
+          <a:lstStyle/>
+          <a:p>
+            <a:endParaRPr lang="en-CN"/>
+          </a:p>
+        </p:txBody>
+      </p:sp>
+      <p:sp>
+        <p:nvSpPr>
+          <p:cNvPr id="59" name="current-label">
+            <a:extLst>
+              <a:ext uri="{FF2B5EF4-FFF2-40B4-BE49-F238E27FC236}">
+                <a16:creationId xmlns:a16="http://schemas.microsoft.com/office/drawing/2014/main" id="{9E0BB765-D725-4D0F-B594-5329DFD9E7B5}"/>
+              </a:ext>
+            </a:extLst>
+          </p:cNvPr>
+          <p:cNvSpPr>
+            <a:spLocks noGrp="1"/>
+          </p:cNvSpPr>
+          <p:nvPr/>
+        </p:nvSpPr>
+        <p:spPr>
+          <a:xfrm>
+            <a:off x="6173926" y="857250"/>
+            <a:ext cx="1982932" cy="304800"/>
+          </a:xfrm>
+          <a:prstGeom prst="rect">
+            <a:avLst/>
+          </a:prstGeom>
+          <a:noFill/>
+          <a:ln w="0">
             <a:noFill/>
             <a:prstDash val="solid"/>
           </a:ln>
         </p:spPr>
         <p:txBody>
-          <a:bodyPr xmlns:a="http://schemas.openxmlformats.org/drawingml/2006/main" wrap="square" lIns="0" tIns="0" rIns="0" bIns="0" anchor="ctr">
-            <a:normAutofit fontScale="100000"/>
+          <a:bodyPr wrap="square" lIns="0" tIns="0" rIns="0" bIns="0" anchor="ctr">
+            <a:normAutofit fontScale="92500"/>
           </a:bodyPr>
-          <a:lstStyle xmlns:a="http://schemas.openxmlformats.org/drawingml/2006/main"/>
-          <a:p xmlns:a="http://schemas.openxmlformats.org/drawingml/2006/main">
+          <a:lstStyle/>
+          <a:p>
             <a:pPr algn="ctr">
               <a:lnSpc>
                 <a:spcPct val="95000"/>
@@ -3885,7 +3368,7 @@
               <a:buNone/>
               <a:defRPr sz="1350" b="1">
                 <a:solidFill>
-                  <a:srgbClr val="C45A14"/>
+                  <a:srgbClr val="17212B"/>
                 </a:solidFill>
                 <a:latin typeface="Arial"/>
                 <a:ea typeface="Arial"/>
@@ -3893,225 +3376,116 @@
               </a:defRPr>
             </a:pPr>
             <a:r>
-              <a:rPr sz="1350" b="1">
-                <a:solidFill>
-                  <a:srgbClr val="C45A14"/>
-                </a:solidFill>
-                <a:latin typeface="Arial"/>
-                <a:ea typeface="Arial"/>
-                <a:cs typeface="Arial"/>
-              </a:rPr>
-              <a:t>e7 restored</a:t>
-            </a:r>
+              <a:rPr lang="en-US" sz="1350" b="1" dirty="0">
+                <a:solidFill>
+                  <a:srgbClr val="17212B"/>
+                </a:solidFill>
+                <a:latin typeface="Arial"/>
+                <a:ea typeface="Arial"/>
+                <a:cs typeface="Arial"/>
+              </a:rPr>
+              <a:t>C</a:t>
+            </a:r>
+            <a:r>
+              <a:rPr sz="1350" b="1" dirty="0">
+                <a:solidFill>
+                  <a:srgbClr val="17212B"/>
+                </a:solidFill>
+                <a:latin typeface="Arial"/>
+                <a:ea typeface="Arial"/>
+                <a:cs typeface="Arial"/>
+              </a:rPr>
+              <a:t>urrent</a:t>
+            </a:r>
+            <a:r>
+              <a:rPr lang="zh-CN" altLang="en-US" sz="1350" b="1" dirty="0">
+                <a:solidFill>
+                  <a:srgbClr val="17212B"/>
+                </a:solidFill>
+                <a:latin typeface="Arial"/>
+                <a:ea typeface="Arial"/>
+                <a:cs typeface="Arial"/>
+              </a:rPr>
+              <a:t> </a:t>
+            </a:r>
+            <a:r>
+              <a:rPr lang="en-US" altLang="zh-CN" sz="1350" b="1" dirty="0">
+                <a:solidFill>
+                  <a:srgbClr val="17212B"/>
+                </a:solidFill>
+                <a:latin typeface="Arial"/>
+                <a:ea typeface="Arial"/>
+                <a:cs typeface="Arial"/>
+              </a:rPr>
+              <a:t>Keyboard Image</a:t>
+            </a:r>
+            <a:endParaRPr sz="1350" b="1" dirty="0">
+              <a:solidFill>
+                <a:srgbClr val="17212B"/>
+              </a:solidFill>
+              <a:latin typeface="Arial"/>
+              <a:ea typeface="Arial"/>
+              <a:cs typeface="Arial"/>
+            </a:endParaRPr>
           </a:p>
         </p:txBody>
       </p:sp>
       <p:pic>
         <p:nvPicPr>
-          <p:cNvPr id="126" name=""/>
+          <p:cNvPr id="129" name="Picture 128"/>
           <p:cNvPicPr>
-            <a:picLocks xmlns:a="http://schemas.openxmlformats.org/drawingml/2006/main" noChangeAspect="1"/>
+            <a:picLocks noChangeAspect="1"/>
           </p:cNvPicPr>
           <p:nvPr/>
         </p:nvPicPr>
         <p:blipFill>
-          <a:blip xmlns:r="http://schemas.openxmlformats.org/officeDocument/2006/relationships" xmlns:a="http://schemas.openxmlformats.org/drawingml/2006/main" r:embed="Rf728ad662d5f4960"/>
-          <a:stretch xmlns:a="http://schemas.openxmlformats.org/drawingml/2006/main"/>
+          <a:blip r:embed="rId4"/>
+          <a:stretch/>
         </p:blipFill>
         <p:spPr>
-          <a:xfrm xmlns:a="http://schemas.openxmlformats.org/drawingml/2006/main">
-            <a:off x="6135135" y="1943100"/>
-            <a:ext cx="1207604" cy="1285875"/>
-          </a:xfrm>
-          <a:prstGeom xmlns:a="http://schemas.openxmlformats.org/drawingml/2006/main" prst="rect">
+          <a:xfrm>
+            <a:off x="6163829" y="1169173"/>
+            <a:ext cx="2126682" cy="590744"/>
+          </a:xfrm>
+          <a:prstGeom prst="rect">
             <a:avLst/>
           </a:prstGeom>
         </p:spPr>
       </p:pic>
       <p:sp>
         <p:nvSpPr>
-          <p:cNvPr id="58" name="e7-image-border">
-            <a:extLst xmlns:a="http://schemas.openxmlformats.org/drawingml/2006/main">
-              <a:ext uri="{FF2B5EF4-FFF2-40B4-BE49-F238E27FC236}">
-                <a16:creationId xmlns:a16="http://schemas.microsoft.com/office/drawing/2014/main" id="{828A0895-FBB0-43FF-A307-73ABAF4C379A}"/>
-              </a:ext>
-            </a:extLst>
-          </p:cNvPr>
-          <p:cNvSpPr>
-            <a:spLocks xmlns:a="http://schemas.openxmlformats.org/drawingml/2006/main" noGrp="1"/>
-          </p:cNvSpPr>
-          <p:nvPr/>
-        </p:nvSpPr>
-        <p:spPr>
-          <a:xfrm xmlns:a="http://schemas.openxmlformats.org/drawingml/2006/main">
-            <a:off x="5934075" y="1924050"/>
-            <a:ext cx="1609725" cy="1323975"/>
-          </a:xfrm>
-          <a:prstGeom xmlns:a="http://schemas.openxmlformats.org/drawingml/2006/main" prst="roundRect">
-            <a:avLst>
-              <a:gd name="adj" fmla="val 2878"/>
-            </a:avLst>
-          </a:prstGeom>
-          <a:noFill xmlns:a="http://schemas.openxmlformats.org/drawingml/2006/main"/>
-          <a:ln xmlns:a="http://schemas.openxmlformats.org/drawingml/2006/main" w="19050">
-            <a:solidFill>
-              <a:srgbClr val="C45A14"/>
-            </a:solidFill>
-            <a:prstDash val="solid"/>
-          </a:ln>
-        </p:spPr>
-      </p:sp>
-      <p:sp>
-        <p:nvSpPr>
-          <p:cNvPr id="59" name="current-label">
-            <a:extLst xmlns:a="http://schemas.openxmlformats.org/drawingml/2006/main">
-              <a:ext uri="{FF2B5EF4-FFF2-40B4-BE49-F238E27FC236}">
-                <a16:creationId xmlns:a16="http://schemas.microsoft.com/office/drawing/2014/main" id="{9E0BB765-D725-4D0F-B594-5329DFD9E7B5}"/>
-              </a:ext>
-            </a:extLst>
-          </p:cNvPr>
-          <p:cNvSpPr>
-            <a:spLocks xmlns:a="http://schemas.openxmlformats.org/drawingml/2006/main" noGrp="1"/>
-          </p:cNvSpPr>
-          <p:nvPr/>
-        </p:nvSpPr>
-        <p:spPr>
-          <a:xfrm xmlns:a="http://schemas.openxmlformats.org/drawingml/2006/main">
-            <a:off x="7734300" y="1200150"/>
-            <a:ext cx="933450" cy="209550"/>
-          </a:xfrm>
-          <a:prstGeom xmlns:a="http://schemas.openxmlformats.org/drawingml/2006/main" prst="rect">
-            <a:avLst/>
-          </a:prstGeom>
-          <a:noFill xmlns:a="http://schemas.openxmlformats.org/drawingml/2006/main"/>
-          <a:ln xmlns:a="http://schemas.openxmlformats.org/drawingml/2006/main" w="0">
+          <p:cNvPr id="62" name="recent-action-label">
+            <a:extLst>
+              <a:ext uri="{FF2B5EF4-FFF2-40B4-BE49-F238E27FC236}">
+                <a16:creationId xmlns:a16="http://schemas.microsoft.com/office/drawing/2014/main" id="{768912DE-ECC4-47CA-9908-F21841DC31A2}"/>
+              </a:ext>
+            </a:extLst>
+          </p:cNvPr>
+          <p:cNvSpPr>
+            <a:spLocks noGrp="1"/>
+          </p:cNvSpPr>
+          <p:nvPr/>
+        </p:nvSpPr>
+        <p:spPr>
+          <a:xfrm>
+            <a:off x="8574802" y="63503"/>
+            <a:ext cx="1123950" cy="247650"/>
+          </a:xfrm>
+          <a:prstGeom prst="rect">
+            <a:avLst/>
+          </a:prstGeom>
+          <a:noFill/>
+          <a:ln w="0">
             <a:noFill/>
             <a:prstDash val="solid"/>
           </a:ln>
         </p:spPr>
         <p:txBody>
-          <a:bodyPr xmlns:a="http://schemas.openxmlformats.org/drawingml/2006/main" wrap="square" lIns="0" tIns="0" rIns="0" bIns="0" anchor="ctr">
-            <a:normAutofit fontScale="100000"/>
+          <a:bodyPr wrap="square" lIns="0" tIns="0" rIns="0" bIns="0" anchor="ctr">
+            <a:normAutofit/>
           </a:bodyPr>
-          <a:lstStyle xmlns:a="http://schemas.openxmlformats.org/drawingml/2006/main"/>
-          <a:p xmlns:a="http://schemas.openxmlformats.org/drawingml/2006/main">
-            <a:pPr algn="ctr">
-              <a:lnSpc>
-                <a:spcPct val="95000"/>
-              </a:lnSpc>
-              <a:buNone/>
-              <a:defRPr sz="1350" b="1">
-                <a:solidFill>
-                  <a:srgbClr val="17212B"/>
-                </a:solidFill>
-                <a:latin typeface="Arial"/>
-                <a:ea typeface="Arial"/>
-                <a:cs typeface="Arial"/>
-              </a:defRPr>
-            </a:pPr>
-            <a:r>
-              <a:rPr sz="1350" b="1">
-                <a:solidFill>
-                  <a:srgbClr val="17212B"/>
-                </a:solidFill>
-                <a:latin typeface="Arial"/>
-                <a:ea typeface="Arial"/>
-                <a:cs typeface="Arial"/>
-              </a:rPr>
-              <a:t>current</a:t>
-            </a:r>
-          </a:p>
-        </p:txBody>
-      </p:sp>
-      <p:pic>
-        <p:nvPicPr>
-          <p:cNvPr id="129" name=""/>
-          <p:cNvPicPr>
-            <a:picLocks xmlns:a="http://schemas.openxmlformats.org/drawingml/2006/main" noChangeAspect="1"/>
-          </p:cNvPicPr>
-          <p:nvPr/>
-        </p:nvPicPr>
-        <p:blipFill>
-          <a:blip xmlns:r="http://schemas.openxmlformats.org/officeDocument/2006/relationships" xmlns:a="http://schemas.openxmlformats.org/drawingml/2006/main" r:embed="R8380cfe2eff14408"/>
-          <a:stretch xmlns:a="http://schemas.openxmlformats.org/drawingml/2006/main"/>
-        </p:blipFill>
-        <p:spPr>
-          <a:xfrm xmlns:a="http://schemas.openxmlformats.org/drawingml/2006/main">
-            <a:off x="7715250" y="1553633"/>
-            <a:ext cx="952500" cy="264583"/>
-          </a:xfrm>
-          <a:prstGeom xmlns:a="http://schemas.openxmlformats.org/drawingml/2006/main" prst="rect">
-            <a:avLst/>
-          </a:prstGeom>
-        </p:spPr>
-      </p:pic>
-      <p:sp>
-        <p:nvSpPr>
-          <p:cNvPr id="61" name="current-image-border">
-            <a:extLst xmlns:a="http://schemas.openxmlformats.org/drawingml/2006/main">
-              <a:ext uri="{FF2B5EF4-FFF2-40B4-BE49-F238E27FC236}">
-                <a16:creationId xmlns:a16="http://schemas.microsoft.com/office/drawing/2014/main" id="{650A2D95-FA2E-4BA7-AD50-E55BEE788F29}"/>
-              </a:ext>
-            </a:extLst>
-          </p:cNvPr>
-          <p:cNvSpPr>
-            <a:spLocks xmlns:a="http://schemas.openxmlformats.org/drawingml/2006/main" noGrp="1"/>
-          </p:cNvSpPr>
-          <p:nvPr/>
-        </p:nvSpPr>
-        <p:spPr>
-          <a:xfrm xmlns:a="http://schemas.openxmlformats.org/drawingml/2006/main">
-            <a:off x="7696200" y="1419225"/>
-            <a:ext cx="990600" cy="533400"/>
-          </a:xfrm>
-          <a:prstGeom xmlns:a="http://schemas.openxmlformats.org/drawingml/2006/main" prst="roundRect">
-            <a:avLst>
-              <a:gd name="adj" fmla="val 5357"/>
-            </a:avLst>
-          </a:prstGeom>
-          <a:noFill xmlns:a="http://schemas.openxmlformats.org/drawingml/2006/main"/>
-          <a:ln xmlns:a="http://schemas.openxmlformats.org/drawingml/2006/main" w="14288">
-            <a:solidFill>
-              <a:srgbClr val="17212B"/>
-            </a:solidFill>
-            <a:prstDash val="solid"/>
-          </a:ln>
-        </p:spPr>
-      </p:sp>
-      <p:sp>
-        <p:nvSpPr>
-          <p:cNvPr id="62" name="recent-action-label">
-            <a:extLst xmlns:a="http://schemas.openxmlformats.org/drawingml/2006/main">
-              <a:ext uri="{FF2B5EF4-FFF2-40B4-BE49-F238E27FC236}">
-                <a16:creationId xmlns:a16="http://schemas.microsoft.com/office/drawing/2014/main" id="{768912DE-ECC4-47CA-9908-F21841DC31A2}"/>
-              </a:ext>
-            </a:extLst>
-          </p:cNvPr>
-          <p:cNvSpPr>
-            <a:spLocks xmlns:a="http://schemas.openxmlformats.org/drawingml/2006/main" noGrp="1"/>
-          </p:cNvSpPr>
-          <p:nvPr/>
-        </p:nvSpPr>
-        <p:spPr>
-          <a:xfrm xmlns:a="http://schemas.openxmlformats.org/drawingml/2006/main">
-            <a:off x="8953500" y="266700"/>
-            <a:ext cx="1123950" cy="247650"/>
-          </a:xfrm>
-          <a:prstGeom xmlns:a="http://schemas.openxmlformats.org/drawingml/2006/main" prst="rect">
-            <a:avLst/>
-          </a:prstGeom>
-          <a:noFill xmlns:a="http://schemas.openxmlformats.org/drawingml/2006/main"/>
-          <a:ln xmlns:a="http://schemas.openxmlformats.org/drawingml/2006/main" w="0">
-            <a:noFill/>
-            <a:prstDash val="solid"/>
-          </a:ln>
-        </p:spPr>
-        <p:txBody>
-          <a:bodyPr xmlns:a="http://schemas.openxmlformats.org/drawingml/2006/main" wrap="square" lIns="0" tIns="0" rIns="0" bIns="0" anchor="ctr">
-            <a:normAutofit fontScale="100000"/>
-          </a:bodyPr>
-          <a:lstStyle xmlns:a="http://schemas.openxmlformats.org/drawingml/2006/main"/>
-          <a:p xmlns:a="http://schemas.openxmlformats.org/drawingml/2006/main">
+          <a:lstStyle/>
+          <a:p>
             <a:pPr algn="l">
               <a:lnSpc>
                 <a:spcPct val="95000"/>
@@ -4143,37 +3517,37 @@
       <p:sp>
         <p:nvSpPr>
           <p:cNvPr id="63" name="recent-cross">
-            <a:extLst xmlns:a="http://schemas.openxmlformats.org/drawingml/2006/main">
+            <a:extLst>
               <a:ext uri="{FF2B5EF4-FFF2-40B4-BE49-F238E27FC236}">
                 <a16:creationId xmlns:a16="http://schemas.microsoft.com/office/drawing/2014/main" id="{0E02D744-9CF8-4343-8A08-1CD79E79771E}"/>
               </a:ext>
             </a:extLst>
           </p:cNvPr>
           <p:cNvSpPr>
-            <a:spLocks xmlns:a="http://schemas.openxmlformats.org/drawingml/2006/main" noGrp="1"/>
-          </p:cNvSpPr>
-          <p:nvPr/>
-        </p:nvSpPr>
-        <p:spPr>
-          <a:xfrm xmlns:a="http://schemas.openxmlformats.org/drawingml/2006/main">
-            <a:off x="10096500" y="228600"/>
+            <a:spLocks noGrp="1"/>
+          </p:cNvSpPr>
+          <p:nvPr/>
+        </p:nvSpPr>
+        <p:spPr>
+          <a:xfrm>
+            <a:off x="9717802" y="25403"/>
             <a:ext cx="285750" cy="285750"/>
           </a:xfrm>
-          <a:prstGeom xmlns:a="http://schemas.openxmlformats.org/drawingml/2006/main" prst="rect">
-            <a:avLst/>
-          </a:prstGeom>
-          <a:noFill xmlns:a="http://schemas.openxmlformats.org/drawingml/2006/main"/>
-          <a:ln xmlns:a="http://schemas.openxmlformats.org/drawingml/2006/main" w="0">
+          <a:prstGeom prst="rect">
+            <a:avLst/>
+          </a:prstGeom>
+          <a:noFill/>
+          <a:ln w="0">
             <a:noFill/>
             <a:prstDash val="solid"/>
           </a:ln>
         </p:spPr>
         <p:txBody>
-          <a:bodyPr xmlns:a="http://schemas.openxmlformats.org/drawingml/2006/main" wrap="square" lIns="0" tIns="0" rIns="0" bIns="0" anchor="ctr">
-            <a:normAutofit fontScale="97466"/>
+          <a:bodyPr wrap="square" lIns="0" tIns="0" rIns="0" bIns="0" anchor="ctr">
+            <a:normAutofit fontScale="97466" lnSpcReduction="10000"/>
           </a:bodyPr>
-          <a:lstStyle xmlns:a="http://schemas.openxmlformats.org/drawingml/2006/main"/>
-          <a:p xmlns:a="http://schemas.openxmlformats.org/drawingml/2006/main">
+          <a:lstStyle/>
+          <a:p>
             <a:pPr algn="ctr">
               <a:lnSpc>
                 <a:spcPct val="95000"/>
@@ -4205,37 +3579,37 @@
       <p:sp>
         <p:nvSpPr>
           <p:cNvPr id="64" name="recent-action">
-            <a:extLst xmlns:a="http://schemas.openxmlformats.org/drawingml/2006/main">
+            <a:extLst>
               <a:ext uri="{FF2B5EF4-FFF2-40B4-BE49-F238E27FC236}">
                 <a16:creationId xmlns:a16="http://schemas.microsoft.com/office/drawing/2014/main" id="{67A8085D-1AA4-4BBA-BB66-81BB6E0869F8}"/>
               </a:ext>
             </a:extLst>
           </p:cNvPr>
           <p:cNvSpPr>
-            <a:spLocks xmlns:a="http://schemas.openxmlformats.org/drawingml/2006/main" noGrp="1"/>
-          </p:cNvSpPr>
-          <p:nvPr/>
-        </p:nvSpPr>
-        <p:spPr>
-          <a:xfrm xmlns:a="http://schemas.openxmlformats.org/drawingml/2006/main">
-            <a:off x="8953500" y="571500"/>
+            <a:spLocks noGrp="1"/>
+          </p:cNvSpPr>
+          <p:nvPr/>
+        </p:nvSpPr>
+        <p:spPr>
+          <a:xfrm>
+            <a:off x="8694874" y="368303"/>
             <a:ext cx="1428750" cy="1066800"/>
           </a:xfrm>
-          <a:prstGeom xmlns:a="http://schemas.openxmlformats.org/drawingml/2006/main" prst="rect">
-            <a:avLst/>
-          </a:prstGeom>
-          <a:noFill xmlns:a="http://schemas.openxmlformats.org/drawingml/2006/main"/>
-          <a:ln xmlns:a="http://schemas.openxmlformats.org/drawingml/2006/main" w="0">
+          <a:prstGeom prst="rect">
+            <a:avLst/>
+          </a:prstGeom>
+          <a:noFill/>
+          <a:ln w="0">
             <a:noFill/>
             <a:prstDash val="solid"/>
           </a:ln>
         </p:spPr>
         <p:txBody>
-          <a:bodyPr xmlns:a="http://schemas.openxmlformats.org/drawingml/2006/main" wrap="square" lIns="0" tIns="0" rIns="0" bIns="0" anchor="ctr">
-            <a:normAutofit fontScale="100000"/>
+          <a:bodyPr wrap="square" lIns="0" tIns="0" rIns="0" bIns="0" anchor="ctr">
+            <a:normAutofit/>
           </a:bodyPr>
-          <a:lstStyle xmlns:a="http://schemas.openxmlformats.org/drawingml/2006/main"/>
-          <a:p xmlns:a="http://schemas.openxmlformats.org/drawingml/2006/main">
+          <a:lstStyle/>
+          <a:p>
             <a:pPr algn="l">
               <a:lnSpc>
                 <a:spcPct val="90000"/>
@@ -4251,7 +3625,7 @@
               </a:defRPr>
             </a:pPr>
             <a:r>
-              <a:rPr sz="1350" b="1">
+              <a:rPr sz="1350" b="1" dirty="0">
                 <a:solidFill>
                   <a:srgbClr val="17212B"/>
                 </a:solidFill>
@@ -4262,7 +3636,7 @@
               <a:t>type:</a:t>
             </a:r>
           </a:p>
-          <a:p xmlns:a="http://schemas.openxmlformats.org/drawingml/2006/main">
+          <a:p>
             <a:pPr algn="l">
               <a:lnSpc>
                 <a:spcPct val="90000"/>
@@ -4278,7 +3652,7 @@
               </a:defRPr>
             </a:pPr>
             <a:r>
-              <a:rPr sz="1350" b="1">
+              <a:rPr sz="1350" b="1" dirty="0">
                 <a:solidFill>
                   <a:srgbClr val="17212B"/>
                 </a:solidFill>
@@ -4289,7 +3663,7 @@
               <a:t>Women's Cotton</a:t>
             </a:r>
           </a:p>
-          <a:p xmlns:a="http://schemas.openxmlformats.org/drawingml/2006/main">
+          <a:p>
             <a:pPr algn="l">
               <a:lnSpc>
                 <a:spcPct val="90000"/>
@@ -4305,7 +3679,7 @@
               </a:defRPr>
             </a:pPr>
             <a:r>
-              <a:rPr sz="1350" b="1">
+              <a:rPr sz="1350" b="1" dirty="0">
                 <a:solidFill>
                   <a:srgbClr val="17212B"/>
                 </a:solidFill>
@@ -4316,7 +3690,7 @@
               <a:t>Short Sleeve T-shirt,</a:t>
             </a:r>
           </a:p>
-          <a:p xmlns:a="http://schemas.openxmlformats.org/drawingml/2006/main">
+          <a:p>
             <a:pPr algn="l">
               <a:lnSpc>
                 <a:spcPct val="90000"/>
@@ -4332,7 +3706,7 @@
               </a:defRPr>
             </a:pPr>
             <a:r>
-              <a:rPr sz="1350" b="1">
+              <a:rPr sz="1350" b="1" dirty="0">
                 <a:solidFill>
                   <a:srgbClr val="17212B"/>
                 </a:solidFill>
@@ -4348,68 +3722,75 @@
       <p:sp>
         <p:nvSpPr>
           <p:cNvPr id="65" name="recent-result-rule">
-            <a:extLst xmlns:a="http://schemas.openxmlformats.org/drawingml/2006/main">
+            <a:extLst>
               <a:ext uri="{FF2B5EF4-FFF2-40B4-BE49-F238E27FC236}">
                 <a16:creationId xmlns:a16="http://schemas.microsoft.com/office/drawing/2014/main" id="{07533E0F-AC24-458E-AC7B-EAA3BE3840C5}"/>
               </a:ext>
             </a:extLst>
           </p:cNvPr>
           <p:cNvSpPr>
-            <a:spLocks xmlns:a="http://schemas.openxmlformats.org/drawingml/2006/main" noGrp="1"/>
-          </p:cNvSpPr>
-          <p:nvPr/>
-        </p:nvSpPr>
-        <p:spPr>
-          <a:xfrm xmlns:a="http://schemas.openxmlformats.org/drawingml/2006/main">
-            <a:off x="8953500" y="1695450"/>
+            <a:spLocks noGrp="1"/>
+          </p:cNvSpPr>
+          <p:nvPr/>
+        </p:nvSpPr>
+        <p:spPr>
+          <a:xfrm>
+            <a:off x="8694874" y="1492253"/>
             <a:ext cx="1428750" cy="0"/>
           </a:xfrm>
-          <a:prstGeom xmlns:a="http://schemas.openxmlformats.org/drawingml/2006/main" prst="line">
-            <a:avLst/>
-          </a:prstGeom>
-          <a:noFill xmlns:a="http://schemas.openxmlformats.org/drawingml/2006/main"/>
-          <a:ln xmlns:a="http://schemas.openxmlformats.org/drawingml/2006/main" w="9525">
+          <a:prstGeom prst="line">
+            <a:avLst/>
+          </a:prstGeom>
+          <a:noFill/>
+          <a:ln w="9525">
             <a:solidFill>
               <a:srgbClr val="E8EDF1"/>
             </a:solidFill>
             <a:prstDash val="solid"/>
           </a:ln>
         </p:spPr>
+        <p:txBody>
+          <a:bodyPr/>
+          <a:lstStyle/>
+          <a:p>
+            <a:endParaRPr lang="en-CN"/>
+          </a:p>
+        </p:txBody>
       </p:sp>
       <p:sp>
         <p:nvSpPr>
           <p:cNvPr id="66" name="causal-action-label">
-            <a:extLst xmlns:a="http://schemas.openxmlformats.org/drawingml/2006/main">
+            <a:extLst>
               <a:ext uri="{FF2B5EF4-FFF2-40B4-BE49-F238E27FC236}">
                 <a16:creationId xmlns:a16="http://schemas.microsoft.com/office/drawing/2014/main" id="{3954EE80-1CC3-44CE-A1DB-9388B24C62A1}"/>
               </a:ext>
             </a:extLst>
           </p:cNvPr>
           <p:cNvSpPr>
-            <a:spLocks xmlns:a="http://schemas.openxmlformats.org/drawingml/2006/main" noGrp="1"/>
-          </p:cNvSpPr>
-          <p:nvPr/>
-        </p:nvSpPr>
-        <p:spPr>
-          <a:xfrm xmlns:a="http://schemas.openxmlformats.org/drawingml/2006/main">
-            <a:off x="8953500" y="1924050"/>
+            <a:spLocks noGrp="1"/>
+          </p:cNvSpPr>
+          <p:nvPr/>
+        </p:nvSpPr>
+        <p:spPr>
+          <a:xfrm>
+            <a:off x="8694874" y="1720853"/>
             <a:ext cx="1123950" cy="257175"/>
           </a:xfrm>
-          <a:prstGeom xmlns:a="http://schemas.openxmlformats.org/drawingml/2006/main" prst="rect">
-            <a:avLst/>
-          </a:prstGeom>
-          <a:noFill xmlns:a="http://schemas.openxmlformats.org/drawingml/2006/main"/>
-          <a:ln xmlns:a="http://schemas.openxmlformats.org/drawingml/2006/main" w="0">
+          <a:prstGeom prst="rect">
+            <a:avLst/>
+          </a:prstGeom>
+          <a:noFill/>
+          <a:ln w="0">
             <a:noFill/>
             <a:prstDash val="solid"/>
           </a:ln>
         </p:spPr>
         <p:txBody>
-          <a:bodyPr xmlns:a="http://schemas.openxmlformats.org/drawingml/2006/main" wrap="square" lIns="0" tIns="0" rIns="0" bIns="0" anchor="ctr">
-            <a:normAutofit fontScale="100000"/>
+          <a:bodyPr wrap="square" lIns="0" tIns="0" rIns="0" bIns="0" anchor="ctr">
+            <a:normAutofit/>
           </a:bodyPr>
-          <a:lstStyle xmlns:a="http://schemas.openxmlformats.org/drawingml/2006/main"/>
-          <a:p xmlns:a="http://schemas.openxmlformats.org/drawingml/2006/main">
+          <a:lstStyle/>
+          <a:p>
             <a:pPr algn="l">
               <a:lnSpc>
                 <a:spcPct val="95000"/>
@@ -4441,37 +3822,37 @@
       <p:sp>
         <p:nvSpPr>
           <p:cNvPr id="67" name="causal-check">
-            <a:extLst xmlns:a="http://schemas.openxmlformats.org/drawingml/2006/main">
+            <a:extLst>
               <a:ext uri="{FF2B5EF4-FFF2-40B4-BE49-F238E27FC236}">
                 <a16:creationId xmlns:a16="http://schemas.microsoft.com/office/drawing/2014/main" id="{6EFB5E33-F4DB-46A0-A6BE-1D1BDE10AA1F}"/>
               </a:ext>
             </a:extLst>
           </p:cNvPr>
           <p:cNvSpPr>
-            <a:spLocks xmlns:a="http://schemas.openxmlformats.org/drawingml/2006/main" noGrp="1"/>
-          </p:cNvSpPr>
-          <p:nvPr/>
-        </p:nvSpPr>
-        <p:spPr>
-          <a:xfrm xmlns:a="http://schemas.openxmlformats.org/drawingml/2006/main">
-            <a:off x="10086975" y="1885950"/>
+            <a:spLocks noGrp="1"/>
+          </p:cNvSpPr>
+          <p:nvPr/>
+        </p:nvSpPr>
+        <p:spPr>
+          <a:xfrm>
+            <a:off x="9828349" y="1682753"/>
             <a:ext cx="295275" cy="295275"/>
           </a:xfrm>
-          <a:prstGeom xmlns:a="http://schemas.openxmlformats.org/drawingml/2006/main" prst="rect">
-            <a:avLst/>
-          </a:prstGeom>
-          <a:noFill xmlns:a="http://schemas.openxmlformats.org/drawingml/2006/main"/>
-          <a:ln xmlns:a="http://schemas.openxmlformats.org/drawingml/2006/main" w="0">
+          <a:prstGeom prst="rect">
+            <a:avLst/>
+          </a:prstGeom>
+          <a:noFill/>
+          <a:ln w="0">
             <a:noFill/>
             <a:prstDash val="solid"/>
           </a:ln>
         </p:spPr>
         <p:txBody>
-          <a:bodyPr xmlns:a="http://schemas.openxmlformats.org/drawingml/2006/main" wrap="square" lIns="0" tIns="0" rIns="0" bIns="0" anchor="ctr">
-            <a:normAutofit fontScale="100000"/>
+          <a:bodyPr wrap="square" lIns="0" tIns="0" rIns="0" bIns="0" anchor="ctr">
+            <a:normAutofit/>
           </a:bodyPr>
-          <a:lstStyle xmlns:a="http://schemas.openxmlformats.org/drawingml/2006/main"/>
-          <a:p xmlns:a="http://schemas.openxmlformats.org/drawingml/2006/main">
+          <a:lstStyle/>
+          <a:p>
             <a:pPr algn="ctr">
               <a:lnSpc>
                 <a:spcPct val="95000"/>
@@ -4503,37 +3884,37 @@
       <p:sp>
         <p:nvSpPr>
           <p:cNvPr id="68" name="causal-action">
-            <a:extLst xmlns:a="http://schemas.openxmlformats.org/drawingml/2006/main">
+            <a:extLst>
               <a:ext uri="{FF2B5EF4-FFF2-40B4-BE49-F238E27FC236}">
                 <a16:creationId xmlns:a16="http://schemas.microsoft.com/office/drawing/2014/main" id="{E2D38684-84C8-45BE-888A-0116BACD4E75}"/>
               </a:ext>
             </a:extLst>
           </p:cNvPr>
           <p:cNvSpPr>
-            <a:spLocks xmlns:a="http://schemas.openxmlformats.org/drawingml/2006/main" noGrp="1"/>
-          </p:cNvSpPr>
-          <p:nvPr/>
-        </p:nvSpPr>
-        <p:spPr>
-          <a:xfrm xmlns:a="http://schemas.openxmlformats.org/drawingml/2006/main">
-            <a:off x="8953500" y="2209800"/>
+            <a:spLocks noGrp="1"/>
+          </p:cNvSpPr>
+          <p:nvPr/>
+        </p:nvSpPr>
+        <p:spPr>
+          <a:xfrm>
+            <a:off x="8694874" y="2006603"/>
             <a:ext cx="1428750" cy="857250"/>
           </a:xfrm>
-          <a:prstGeom xmlns:a="http://schemas.openxmlformats.org/drawingml/2006/main" prst="rect">
-            <a:avLst/>
-          </a:prstGeom>
-          <a:noFill xmlns:a="http://schemas.openxmlformats.org/drawingml/2006/main"/>
-          <a:ln xmlns:a="http://schemas.openxmlformats.org/drawingml/2006/main" w="0">
+          <a:prstGeom prst="rect">
+            <a:avLst/>
+          </a:prstGeom>
+          <a:noFill/>
+          <a:ln w="0">
             <a:noFill/>
             <a:prstDash val="solid"/>
           </a:ln>
         </p:spPr>
         <p:txBody>
-          <a:bodyPr xmlns:a="http://schemas.openxmlformats.org/drawingml/2006/main" wrap="square" lIns="0" tIns="0" rIns="0" bIns="0" anchor="ctr">
-            <a:normAutofit fontScale="100000"/>
+          <a:bodyPr wrap="square" lIns="0" tIns="0" rIns="0" bIns="0" anchor="ctr">
+            <a:normAutofit/>
           </a:bodyPr>
-          <a:lstStyle xmlns:a="http://schemas.openxmlformats.org/drawingml/2006/main"/>
-          <a:p xmlns:a="http://schemas.openxmlformats.org/drawingml/2006/main">
+          <a:lstStyle/>
+          <a:p>
             <a:pPr algn="l">
               <a:lnSpc>
                 <a:spcPct val="90000"/>
@@ -4560,7 +3941,7 @@
               <a:t>type:</a:t>
             </a:r>
           </a:p>
-          <a:p xmlns:a="http://schemas.openxmlformats.org/drawingml/2006/main">
+          <a:p>
             <a:pPr algn="l">
               <a:lnSpc>
                 <a:spcPct val="90000"/>
@@ -4587,7 +3968,7 @@
               <a:t>经典白色T恤,</a:t>
             </a:r>
           </a:p>
-          <a:p xmlns:a="http://schemas.openxmlformats.org/drawingml/2006/main">
+          <a:p>
             <a:pPr algn="l">
               <a:lnSpc>
                 <a:spcPct val="90000"/>
@@ -4614,7 +3995,7 @@
               <a:t>保湿面霜套装,</a:t>
             </a:r>
           </a:p>
-          <a:p xmlns:a="http://schemas.openxmlformats.org/drawingml/2006/main">
+          <a:p>
             <a:pPr algn="l">
               <a:lnSpc>
                 <a:spcPct val="90000"/>
@@ -4646,34 +4027,293 @@
       <p:sp>
         <p:nvSpPr>
           <p:cNvPr id="69" name="causal-result-rule">
-            <a:extLst xmlns:a="http://schemas.openxmlformats.org/drawingml/2006/main">
+            <a:extLst>
               <a:ext uri="{FF2B5EF4-FFF2-40B4-BE49-F238E27FC236}">
                 <a16:creationId xmlns:a16="http://schemas.microsoft.com/office/drawing/2014/main" id="{F979257B-A37D-4587-AB3B-FD8B27063617}"/>
               </a:ext>
             </a:extLst>
           </p:cNvPr>
           <p:cNvSpPr>
-            <a:spLocks xmlns:a="http://schemas.openxmlformats.org/drawingml/2006/main" noGrp="1"/>
-          </p:cNvSpPr>
-          <p:nvPr/>
-        </p:nvSpPr>
-        <p:spPr>
-          <a:xfrm xmlns:a="http://schemas.openxmlformats.org/drawingml/2006/main">
-            <a:off x="8953500" y="3067050"/>
+            <a:spLocks noGrp="1"/>
+          </p:cNvSpPr>
+          <p:nvPr/>
+        </p:nvSpPr>
+        <p:spPr>
+          <a:xfrm>
+            <a:off x="8694874" y="2863853"/>
             <a:ext cx="1428750" cy="0"/>
           </a:xfrm>
-          <a:prstGeom xmlns:a="http://schemas.openxmlformats.org/drawingml/2006/main" prst="line">
-            <a:avLst/>
-          </a:prstGeom>
-          <a:noFill xmlns:a="http://schemas.openxmlformats.org/drawingml/2006/main"/>
-          <a:ln xmlns:a="http://schemas.openxmlformats.org/drawingml/2006/main" w="9525">
+          <a:prstGeom prst="line">
+            <a:avLst/>
+          </a:prstGeom>
+          <a:noFill/>
+          <a:ln w="9525">
             <a:solidFill>
               <a:srgbClr val="E8EDF1"/>
             </a:solidFill>
             <a:prstDash val="solid"/>
           </a:ln>
         </p:spPr>
-      </p:sp>
+        <p:txBody>
+          <a:bodyPr/>
+          <a:lstStyle/>
+          <a:p>
+            <a:endParaRPr lang="en-CN"/>
+          </a:p>
+        </p:txBody>
+      </p:sp>
+      <p:cxnSp>
+        <p:nvCxnSpPr>
+          <p:cNvPr id="72" name="Straight Arrow Connector 71">
+            <a:extLst>
+              <a:ext uri="{FF2B5EF4-FFF2-40B4-BE49-F238E27FC236}">
+                <a16:creationId xmlns:a16="http://schemas.microsoft.com/office/drawing/2014/main" id="{93D83DE7-CFDD-7E82-FEF6-6280BB19E7D2}"/>
+              </a:ext>
+            </a:extLst>
+          </p:cNvPr>
+          <p:cNvCxnSpPr>
+            <a:endCxn id="47" idx="2"/>
+          </p:cNvCxnSpPr>
+          <p:nvPr/>
+        </p:nvCxnSpPr>
+        <p:spPr>
+          <a:xfrm flipV="1">
+            <a:off x="3619500" y="997245"/>
+            <a:ext cx="420832" cy="345780"/>
+          </a:xfrm>
+          <a:prstGeom prst="straightConnector1">
+            <a:avLst/>
+          </a:prstGeom>
+          <a:ln>
+            <a:tailEnd type="triangle"/>
+          </a:ln>
+        </p:spPr>
+        <p:style>
+          <a:lnRef idx="1">
+            <a:schemeClr val="dk1"/>
+          </a:lnRef>
+          <a:fillRef idx="0">
+            <a:schemeClr val="dk1"/>
+          </a:fillRef>
+          <a:effectRef idx="0">
+            <a:schemeClr val="dk1"/>
+          </a:effectRef>
+          <a:fontRef idx="minor">
+            <a:schemeClr val="tx1"/>
+          </a:fontRef>
+        </p:style>
+      </p:cxnSp>
+      <p:cxnSp>
+        <p:nvCxnSpPr>
+          <p:cNvPr id="74" name="Straight Arrow Connector 73">
+            <a:extLst>
+              <a:ext uri="{FF2B5EF4-FFF2-40B4-BE49-F238E27FC236}">
+                <a16:creationId xmlns:a16="http://schemas.microsoft.com/office/drawing/2014/main" id="{7F03416E-AB1F-7A7B-BCEA-F601B02876B2}"/>
+              </a:ext>
+            </a:extLst>
+          </p:cNvPr>
+          <p:cNvCxnSpPr/>
+          <p:nvPr/>
+        </p:nvCxnSpPr>
+        <p:spPr>
+          <a:xfrm>
+            <a:off x="3636334" y="1343025"/>
+            <a:ext cx="420832" cy="428625"/>
+          </a:xfrm>
+          <a:prstGeom prst="straightConnector1">
+            <a:avLst/>
+          </a:prstGeom>
+          <a:ln>
+            <a:tailEnd type="triangle"/>
+          </a:ln>
+        </p:spPr>
+        <p:style>
+          <a:lnRef idx="1">
+            <a:schemeClr val="dk1"/>
+          </a:lnRef>
+          <a:fillRef idx="0">
+            <a:schemeClr val="dk1"/>
+          </a:fillRef>
+          <a:effectRef idx="0">
+            <a:schemeClr val="dk1"/>
+          </a:effectRef>
+          <a:fontRef idx="minor">
+            <a:schemeClr val="tx1"/>
+          </a:fontRef>
+        </p:style>
+      </p:cxnSp>
+      <p:sp>
+        <p:nvSpPr>
+          <p:cNvPr id="78" name="Down Arrow 77">
+            <a:extLst>
+              <a:ext uri="{FF2B5EF4-FFF2-40B4-BE49-F238E27FC236}">
+                <a16:creationId xmlns:a16="http://schemas.microsoft.com/office/drawing/2014/main" id="{34E2B314-5650-18ED-5743-3AF95A88704E}"/>
+              </a:ext>
+            </a:extLst>
+          </p:cNvPr>
+          <p:cNvSpPr/>
+          <p:nvPr/>
+        </p:nvSpPr>
+        <p:spPr>
+          <a:xfrm>
+            <a:off x="4668405" y="2015255"/>
+            <a:ext cx="45719" cy="100012"/>
+          </a:xfrm>
+          <a:prstGeom prst="downArrow">
+            <a:avLst/>
+          </a:prstGeom>
+        </p:spPr>
+        <p:style>
+          <a:lnRef idx="2">
+            <a:schemeClr val="accent1">
+              <a:shade val="15000"/>
+            </a:schemeClr>
+          </a:lnRef>
+          <a:fillRef idx="1">
+            <a:schemeClr val="accent1"/>
+          </a:fillRef>
+          <a:effectRef idx="0">
+            <a:schemeClr val="accent1"/>
+          </a:effectRef>
+          <a:fontRef idx="minor">
+            <a:schemeClr val="lt1"/>
+          </a:fontRef>
+        </p:style>
+        <p:txBody>
+          <a:bodyPr rtlCol="0" anchor="ctr"/>
+          <a:lstStyle/>
+          <a:p>
+            <a:pPr algn="ctr"/>
+            <a:endParaRPr lang="en-CN"/>
+          </a:p>
+        </p:txBody>
+      </p:sp>
+      <p:sp>
+        <p:nvSpPr>
+          <p:cNvPr id="79" name="Right Brace 78">
+            <a:extLst>
+              <a:ext uri="{FF2B5EF4-FFF2-40B4-BE49-F238E27FC236}">
+                <a16:creationId xmlns:a16="http://schemas.microsoft.com/office/drawing/2014/main" id="{CAF379E8-8C3F-0235-E532-24E7470E0290}"/>
+              </a:ext>
+            </a:extLst>
+          </p:cNvPr>
+          <p:cNvSpPr/>
+          <p:nvPr/>
+        </p:nvSpPr>
+        <p:spPr>
+          <a:xfrm>
+            <a:off x="5749844" y="962025"/>
+            <a:ext cx="155448" cy="914400"/>
+          </a:xfrm>
+          <a:prstGeom prst="rightBrace">
+            <a:avLst/>
+          </a:prstGeom>
+        </p:spPr>
+        <p:style>
+          <a:lnRef idx="2">
+            <a:schemeClr val="dk1"/>
+          </a:lnRef>
+          <a:fillRef idx="0">
+            <a:schemeClr val="dk1"/>
+          </a:fillRef>
+          <a:effectRef idx="1">
+            <a:schemeClr val="dk1"/>
+          </a:effectRef>
+          <a:fontRef idx="minor">
+            <a:schemeClr val="tx1"/>
+          </a:fontRef>
+        </p:style>
+        <p:txBody>
+          <a:bodyPr rtlCol="0" anchor="ctr"/>
+          <a:lstStyle/>
+          <a:p>
+            <a:pPr algn="ctr"/>
+            <a:endParaRPr lang="en-CN"/>
+          </a:p>
+        </p:txBody>
+      </p:sp>
+      <p:cxnSp>
+        <p:nvCxnSpPr>
+          <p:cNvPr id="81" name="Straight Arrow Connector 80">
+            <a:extLst>
+              <a:ext uri="{FF2B5EF4-FFF2-40B4-BE49-F238E27FC236}">
+                <a16:creationId xmlns:a16="http://schemas.microsoft.com/office/drawing/2014/main" id="{0DB745FC-CE1E-3449-D5A0-18B12A493675}"/>
+              </a:ext>
+            </a:extLst>
+          </p:cNvPr>
+          <p:cNvCxnSpPr>
+            <a:cxnSpLocks/>
+          </p:cNvCxnSpPr>
+          <p:nvPr/>
+        </p:nvCxnSpPr>
+        <p:spPr>
+          <a:xfrm>
+            <a:off x="5905292" y="1419225"/>
+            <a:ext cx="273835" cy="0"/>
+          </a:xfrm>
+          <a:prstGeom prst="straightConnector1">
+            <a:avLst/>
+          </a:prstGeom>
+          <a:ln>
+            <a:tailEnd type="triangle"/>
+          </a:ln>
+        </p:spPr>
+        <p:style>
+          <a:lnRef idx="1">
+            <a:schemeClr val="dk1"/>
+          </a:lnRef>
+          <a:fillRef idx="0">
+            <a:schemeClr val="dk1"/>
+          </a:fillRef>
+          <a:effectRef idx="0">
+            <a:schemeClr val="dk1"/>
+          </a:effectRef>
+          <a:fontRef idx="minor">
+            <a:schemeClr val="tx1"/>
+          </a:fontRef>
+        </p:style>
+      </p:cxnSp>
+      <p:cxnSp>
+        <p:nvCxnSpPr>
+          <p:cNvPr id="83" name="Straight Arrow Connector 82">
+            <a:extLst>
+              <a:ext uri="{FF2B5EF4-FFF2-40B4-BE49-F238E27FC236}">
+                <a16:creationId xmlns:a16="http://schemas.microsoft.com/office/drawing/2014/main" id="{70655B4A-64DC-0F74-44E1-130549656C9A}"/>
+              </a:ext>
+            </a:extLst>
+          </p:cNvPr>
+          <p:cNvCxnSpPr>
+            <a:cxnSpLocks/>
+          </p:cNvCxnSpPr>
+          <p:nvPr/>
+        </p:nvCxnSpPr>
+        <p:spPr>
+          <a:xfrm>
+            <a:off x="8230539" y="1484460"/>
+            <a:ext cx="273835" cy="0"/>
+          </a:xfrm>
+          <a:prstGeom prst="straightConnector1">
+            <a:avLst/>
+          </a:prstGeom>
+          <a:ln>
+            <a:tailEnd type="triangle"/>
+          </a:ln>
+        </p:spPr>
+        <p:style>
+          <a:lnRef idx="1">
+            <a:schemeClr val="dk1"/>
+          </a:lnRef>
+          <a:fillRef idx="0">
+            <a:schemeClr val="dk1"/>
+          </a:fillRef>
+          <a:effectRef idx="0">
+            <a:schemeClr val="dk1"/>
+          </a:effectRef>
+          <a:fontRef idx="minor">
+            <a:schemeClr val="tx1"/>
+          </a:fontRef>
+        </p:style>
+      </p:cxnSp>
     </p:spTree>
     <p:extLst>
       <p:ext uri="{BB962C8B-B14F-4D97-AF65-F5344CB8AC3E}">
@@ -4681,6 +4321,9 @@
       </p:ext>
     </p:extLst>
   </p:cSld>
+  <p:clrMapOvr>
+    <a:masterClrMapping/>
+  </p:clrMapOvr>
 </p:sld>
 </file>
 
@@ -4926,5 +4569,254 @@
       </a:bgFillStyleLst>
     </a:fmtScheme>
   </a:themeElements>
+  <a:objectDefaults/>
+  <a:extraClrSchemeLst/>
+</a:theme>
+</file>
+
+<file path=ppt/theme/theme2.xml><?xml version="1.0" encoding="utf-8"?>
+<a:theme xmlns:a="http://schemas.openxmlformats.org/drawingml/2006/main" name="ChatGPT">
+  <a:themeElements>
+    <a:clrScheme name="ChatGPT">
+      <a:dk1>
+        <a:srgbClr val="000000"/>
+      </a:dk1>
+      <a:lt1>
+        <a:srgbClr val="FFFFFF"/>
+      </a:lt1>
+      <a:dk2>
+        <a:srgbClr val="0E2841"/>
+      </a:dk2>
+      <a:lt2>
+        <a:srgbClr val="E8E8E8"/>
+      </a:lt2>
+      <a:accent1>
+        <a:srgbClr val="156082"/>
+      </a:accent1>
+      <a:accent2>
+        <a:srgbClr val="E97132"/>
+      </a:accent2>
+      <a:accent3>
+        <a:srgbClr val="196B24"/>
+      </a:accent3>
+      <a:accent4>
+        <a:srgbClr val="0F9ED5"/>
+      </a:accent4>
+      <a:accent5>
+        <a:srgbClr val="A02B93"/>
+      </a:accent5>
+      <a:accent6>
+        <a:srgbClr val="4EA72E"/>
+      </a:accent6>
+      <a:hlink>
+        <a:srgbClr val="467886"/>
+      </a:hlink>
+      <a:folHlink>
+        <a:srgbClr val="96607D"/>
+      </a:folHlink>
+    </a:clrScheme>
+    <a:fontScheme name="Office">
+      <a:majorFont>
+        <a:latin typeface="Calibri Light"/>
+        <a:ea typeface="Calibri Light"/>
+        <a:cs typeface="Calibri Light"/>
+      </a:majorFont>
+      <a:minorFont>
+        <a:latin typeface="Calibri"/>
+        <a:ea typeface="Calibri"/>
+        <a:cs typeface="Calibri"/>
+      </a:minorFont>
+    </a:fontScheme>
+    <a:fmtScheme name="ChatGPT">
+      <a:fillStyleLst>
+        <a:solidFill>
+          <a:schemeClr val="phClr"/>
+        </a:solidFill>
+        <a:gradFill>
+          <a:gsLst>
+            <a:gs pos="0">
+              <a:schemeClr val="phClr">
+                <a:tint val="67000"/>
+                <a:lumMod val="110000"/>
+                <a:satMod val="105000"/>
+              </a:schemeClr>
+            </a:gs>
+            <a:gs pos="50000">
+              <a:schemeClr val="phClr">
+                <a:tint val="73000"/>
+                <a:lumMod val="105000"/>
+                <a:satMod val="103000"/>
+              </a:schemeClr>
+            </a:gs>
+            <a:gs pos="100000">
+              <a:schemeClr val="phClr">
+                <a:tint val="81000"/>
+                <a:lumMod val="105000"/>
+                <a:satMod val="109000"/>
+              </a:schemeClr>
+            </a:gs>
+          </a:gsLst>
+          <a:lin ang="5400000" scaled="0"/>
+        </a:gradFill>
+        <a:gradFill>
+          <a:gsLst>
+            <a:gs pos="0">
+              <a:schemeClr val="phClr">
+                <a:tint val="94000"/>
+                <a:lumMod val="102000"/>
+                <a:satMod val="103000"/>
+              </a:schemeClr>
+            </a:gs>
+            <a:gs pos="50000">
+              <a:schemeClr val="phClr">
+                <a:shade val="100000"/>
+                <a:lumMod val="100000"/>
+                <a:satMod val="110000"/>
+              </a:schemeClr>
+            </a:gs>
+            <a:gs pos="100000">
+              <a:schemeClr val="phClr">
+                <a:shade val="78000"/>
+                <a:lumMod val="99000"/>
+                <a:satMod val="120000"/>
+              </a:schemeClr>
+            </a:gs>
+          </a:gsLst>
+          <a:lin ang="5400000" scaled="0"/>
+        </a:gradFill>
+      </a:fillStyleLst>
+      <a:lnStyleLst>
+        <a:ln w="12700">
+          <a:solidFill>
+            <a:schemeClr val="phClr"/>
+          </a:solidFill>
+          <a:prstDash val="solid"/>
+        </a:ln>
+        <a:ln w="19050">
+          <a:solidFill>
+            <a:schemeClr val="phClr"/>
+          </a:solidFill>
+          <a:prstDash val="solid"/>
+        </a:ln>
+        <a:ln w="25400">
+          <a:solidFill>
+            <a:schemeClr val="phClr"/>
+          </a:solidFill>
+          <a:prstDash val="solid"/>
+        </a:ln>
+      </a:lnStyleLst>
+      <a:effectStyleLst>
+        <a:effectStyle>
+          <a:effectLst/>
+        </a:effectStyle>
+        <a:effectStyle>
+          <a:effectLst/>
+        </a:effectStyle>
+        <a:effectStyle>
+          <a:effectLst>
+            <a:outerShdw blurRad="57150" dist="19050" dir="5400000">
+              <a:srgbClr val="000000">
+                <a:alpha val="16000"/>
+              </a:srgbClr>
+            </a:outerShdw>
+          </a:effectLst>
+        </a:effectStyle>
+        <a:effectStyle>
+          <a:effectLst>
+            <a:outerShdw blurRad="19050" dist="9525" dir="5400000">
+              <a:srgbClr val="000000">
+                <a:alpha val="6000"/>
+              </a:srgbClr>
+            </a:outerShdw>
+          </a:effectLst>
+        </a:effectStyle>
+        <a:effectStyle>
+          <a:effectLst>
+            <a:outerShdw blurRad="28575" dist="9525" dir="5400000">
+              <a:srgbClr val="000000">
+                <a:alpha val="8000"/>
+              </a:srgbClr>
+            </a:outerShdw>
+          </a:effectLst>
+        </a:effectStyle>
+        <a:effectStyle>
+          <a:effectLst>
+            <a:outerShdw blurRad="57150" dist="19050" dir="5400000">
+              <a:srgbClr val="000000">
+                <a:alpha val="10000"/>
+              </a:srgbClr>
+            </a:outerShdw>
+          </a:effectLst>
+        </a:effectStyle>
+        <a:effectStyle>
+          <a:effectLst>
+            <a:outerShdw blurRad="114300" dist="38100" dir="5400000">
+              <a:srgbClr val="000000">
+                <a:alpha val="12000"/>
+              </a:srgbClr>
+            </a:outerShdw>
+          </a:effectLst>
+        </a:effectStyle>
+        <a:effectStyle>
+          <a:effectLst>
+            <a:outerShdw blurRad="171450" dist="57150" dir="5400000">
+              <a:srgbClr val="000000">
+                <a:alpha val="16000"/>
+              </a:srgbClr>
+            </a:outerShdw>
+          </a:effectLst>
+        </a:effectStyle>
+        <a:effectStyle>
+          <a:effectLst>
+            <a:outerShdw blurRad="266700" dist="95250" dir="5400000">
+              <a:srgbClr val="000000">
+                <a:alpha val="24000"/>
+              </a:srgbClr>
+            </a:outerShdw>
+          </a:effectLst>
+        </a:effectStyle>
+      </a:effectStyleLst>
+      <a:bgFillStyleLst>
+        <a:solidFill>
+          <a:schemeClr val="phClr"/>
+        </a:solidFill>
+        <a:solidFill>
+          <a:schemeClr val="phClr">
+            <a:tint val="95000"/>
+            <a:satMod val="170000"/>
+          </a:schemeClr>
+        </a:solidFill>
+        <a:gradFill>
+          <a:gsLst>
+            <a:gs pos="0">
+              <a:schemeClr val="phClr">
+                <a:tint val="93000"/>
+                <a:shade val="98000"/>
+                <a:lumMod val="102000"/>
+                <a:satMod val="150000"/>
+              </a:schemeClr>
+            </a:gs>
+            <a:gs pos="50000">
+              <a:schemeClr val="phClr">
+                <a:tint val="98000"/>
+                <a:shade val="90000"/>
+                <a:lumMod val="103000"/>
+                <a:satMod val="130000"/>
+              </a:schemeClr>
+            </a:gs>
+            <a:gs pos="100000">
+              <a:schemeClr val="phClr">
+                <a:shade val="63000"/>
+                <a:satMod val="120000"/>
+              </a:schemeClr>
+            </a:gs>
+          </a:gsLst>
+          <a:lin ang="5400000" scaled="0"/>
+        </a:gradFill>
+      </a:bgFillStyleLst>
+    </a:fmtScheme>
+  </a:themeElements>
+  <a:objectDefaults/>
+  <a:extraClrSchemeLst/>
 </a:theme>
 </file>
--- a/paper/figures/causalcache_qualitative_cart_editable.pptx
+++ b/paper/figures/causalcache_qualitative_cart_editable.pptx
@@ -1,121 +1,26 @@
 
 <file path=ppt/presentation.xml><?xml version="1.0" encoding="utf-8"?>
-<p:presentation xmlns:a="http://schemas.openxmlformats.org/drawingml/2006/main" xmlns:r="http://schemas.openxmlformats.org/officeDocument/2006/relationships" xmlns:p="http://schemas.openxmlformats.org/presentationml/2006/main">
+<p:presentation xmlns:p="http://schemas.openxmlformats.org/presentationml/2006/main">
   <p:sldMasterIdLst>
-    <p:sldMasterId id="2147483648" r:id="rId1"/>
+    <p:sldMasterId xmlns:r="http://schemas.openxmlformats.org/officeDocument/2006/relationships" id="2147483648" r:id="Rc031cdfd4236456f"/>
   </p:sldMasterIdLst>
   <p:notesMasterIdLst>
-    <p:notesMasterId r:id="rId3"/>
+    <p:notesMasterId xmlns:r="http://schemas.openxmlformats.org/officeDocument/2006/relationships" r:id="Rd53ca2ca1c00497f"/>
   </p:notesMasterIdLst>
   <p:sldIdLst>
-    <p:sldId id="256" r:id="rId2"/>
+    <p:sldId xmlns:r="http://schemas.openxmlformats.org/officeDocument/2006/relationships" id="256" r:id="Rf7283c3a4bc14d59"/>
   </p:sldIdLst>
   <p:sldSz cx="10477500" cy="3429000"/>
   <p:notesSz cx="6858000" cy="9144000"/>
-  <p:defaultTextStyle>
-    <a:defPPr>
-      <a:defRPr lang="en-CN"/>
-    </a:defPPr>
-    <a:lvl1pPr marL="0" algn="l" defTabSz="914400" rtl="0" eaLnBrk="1" latinLnBrk="0" hangingPunct="1">
-      <a:defRPr sz="1800" kern="1200">
-        <a:solidFill>
-          <a:schemeClr val="tx1"/>
-        </a:solidFill>
-        <a:latin typeface="+mn-lt"/>
-        <a:ea typeface="+mn-ea"/>
-        <a:cs typeface="+mn-cs"/>
-      </a:defRPr>
-    </a:lvl1pPr>
-    <a:lvl2pPr marL="457200" algn="l" defTabSz="914400" rtl="0" eaLnBrk="1" latinLnBrk="0" hangingPunct="1">
-      <a:defRPr sz="1800" kern="1200">
-        <a:solidFill>
-          <a:schemeClr val="tx1"/>
-        </a:solidFill>
-        <a:latin typeface="+mn-lt"/>
-        <a:ea typeface="+mn-ea"/>
-        <a:cs typeface="+mn-cs"/>
-      </a:defRPr>
-    </a:lvl2pPr>
-    <a:lvl3pPr marL="914400" algn="l" defTabSz="914400" rtl="0" eaLnBrk="1" latinLnBrk="0" hangingPunct="1">
-      <a:defRPr sz="1800" kern="1200">
-        <a:solidFill>
-          <a:schemeClr val="tx1"/>
-        </a:solidFill>
-        <a:latin typeface="+mn-lt"/>
-        <a:ea typeface="+mn-ea"/>
-        <a:cs typeface="+mn-cs"/>
-      </a:defRPr>
-    </a:lvl3pPr>
-    <a:lvl4pPr marL="1371600" algn="l" defTabSz="914400" rtl="0" eaLnBrk="1" latinLnBrk="0" hangingPunct="1">
-      <a:defRPr sz="1800" kern="1200">
-        <a:solidFill>
-          <a:schemeClr val="tx1"/>
-        </a:solidFill>
-        <a:latin typeface="+mn-lt"/>
-        <a:ea typeface="+mn-ea"/>
-        <a:cs typeface="+mn-cs"/>
-      </a:defRPr>
-    </a:lvl4pPr>
-    <a:lvl5pPr marL="1828800" algn="l" defTabSz="914400" rtl="0" eaLnBrk="1" latinLnBrk="0" hangingPunct="1">
-      <a:defRPr sz="1800" kern="1200">
-        <a:solidFill>
-          <a:schemeClr val="tx1"/>
-        </a:solidFill>
-        <a:latin typeface="+mn-lt"/>
-        <a:ea typeface="+mn-ea"/>
-        <a:cs typeface="+mn-cs"/>
-      </a:defRPr>
-    </a:lvl5pPr>
-    <a:lvl6pPr marL="2286000" algn="l" defTabSz="914400" rtl="0" eaLnBrk="1" latinLnBrk="0" hangingPunct="1">
-      <a:defRPr sz="1800" kern="1200">
-        <a:solidFill>
-          <a:schemeClr val="tx1"/>
-        </a:solidFill>
-        <a:latin typeface="+mn-lt"/>
-        <a:ea typeface="+mn-ea"/>
-        <a:cs typeface="+mn-cs"/>
-      </a:defRPr>
-    </a:lvl6pPr>
-    <a:lvl7pPr marL="2743200" algn="l" defTabSz="914400" rtl="0" eaLnBrk="1" latinLnBrk="0" hangingPunct="1">
-      <a:defRPr sz="1800" kern="1200">
-        <a:solidFill>
-          <a:schemeClr val="tx1"/>
-        </a:solidFill>
-        <a:latin typeface="+mn-lt"/>
-        <a:ea typeface="+mn-ea"/>
-        <a:cs typeface="+mn-cs"/>
-      </a:defRPr>
-    </a:lvl7pPr>
-    <a:lvl8pPr marL="3200400" algn="l" defTabSz="914400" rtl="0" eaLnBrk="1" latinLnBrk="0" hangingPunct="1">
-      <a:defRPr sz="1800" kern="1200">
-        <a:solidFill>
-          <a:schemeClr val="tx1"/>
-        </a:solidFill>
-        <a:latin typeface="+mn-lt"/>
-        <a:ea typeface="+mn-ea"/>
-        <a:cs typeface="+mn-cs"/>
-      </a:defRPr>
-    </a:lvl8pPr>
-    <a:lvl9pPr marL="3657600" algn="l" defTabSz="914400" rtl="0" eaLnBrk="1" latinLnBrk="0" hangingPunct="1">
-      <a:defRPr sz="1800" kern="1200">
-        <a:solidFill>
-          <a:schemeClr val="tx1"/>
-        </a:solidFill>
-        <a:latin typeface="+mn-lt"/>
-        <a:ea typeface="+mn-ea"/>
-        <a:cs typeface="+mn-cs"/>
-      </a:defRPr>
-    </a:lvl9pPr>
-  </p:defaultTextStyle>
 </p:presentation>
 </file>
 
 <file path=ppt/notesMasters/notesMaster1.xml><?xml version="1.0" encoding="utf-8"?>
-<p:notesMaster xmlns:a="http://schemas.openxmlformats.org/drawingml/2006/main" xmlns:r="http://schemas.openxmlformats.org/officeDocument/2006/relationships" xmlns:p="http://schemas.openxmlformats.org/presentationml/2006/main">
+<p:notesMaster xmlns:p="http://schemas.openxmlformats.org/presentationml/2006/main">
   <p:cSld>
     <p:bg>
       <p:bgRef idx="1001">
-        <a:schemeClr val="bg1"/>
+        <a:schemeClr xmlns:a="http://schemas.openxmlformats.org/drawingml/2006/main" val="bg1"/>
       </p:bgRef>
     </p:bg>
     <p:spTree>
@@ -125,164 +30,380 @@
         <p:nvPr/>
       </p:nvGrpSpPr>
       <p:grpSpPr>
-        <a:xfrm>
-          <a:off x="0" y="0"/>
-          <a:ext cx="0" cy="0"/>
-          <a:chOff x="0" y="0"/>
-          <a:chExt cx="0" cy="0"/>
-        </a:xfrm>
+        <a:xfrm xmlns:a="http://schemas.openxmlformats.org/drawingml/2006/main"/>
       </p:grpSpPr>
       <p:sp>
         <p:nvSpPr>
           <p:cNvPr id="2" name="Header Placeholder"/>
-          <p:cNvSpPr>
-            <a:spLocks noGrp="1"/>
-          </p:cNvSpPr>
+          <p:cNvSpPr/>
           <p:nvPr>
             <p:ph type="hdr" sz="quarter"/>
           </p:nvPr>
         </p:nvSpPr>
         <p:spPr>
-          <a:prstGeom prst="rect">
-            <a:avLst/>
-          </a:prstGeom>
-        </p:spPr>
-        <p:txBody>
-          <a:bodyPr/>
-          <a:lstStyle/>
-          <a:p>
-            <a:endParaRPr/>
-          </a:p>
+          <a:prstGeom xmlns:a="http://schemas.openxmlformats.org/drawingml/2006/main" prst="rect">
+            <a:avLst/>
+          </a:prstGeom>
+        </p:spPr>
+        <p:txBody>
+          <a:bodyPr xmlns:a="http://schemas.openxmlformats.org/drawingml/2006/main"/>
+          <a:lstStyle xmlns:a="http://schemas.openxmlformats.org/drawingml/2006/main"/>
+          <a:p xmlns:a="http://schemas.openxmlformats.org/drawingml/2006/main"/>
         </p:txBody>
       </p:sp>
       <p:sp>
         <p:nvSpPr>
           <p:cNvPr id="3" name="Date Placeholder"/>
-          <p:cNvSpPr>
-            <a:spLocks noGrp="1"/>
-          </p:cNvSpPr>
+          <p:cNvSpPr/>
           <p:nvPr>
             <p:ph type="dt" sz="quarter" idx="1"/>
           </p:nvPr>
         </p:nvSpPr>
         <p:spPr>
-          <a:prstGeom prst="rect">
-            <a:avLst/>
-          </a:prstGeom>
-        </p:spPr>
-        <p:txBody>
-          <a:bodyPr/>
-          <a:lstStyle/>
-          <a:p>
-            <a:endParaRPr/>
-          </a:p>
+          <a:prstGeom xmlns:a="http://schemas.openxmlformats.org/drawingml/2006/main" prst="rect">
+            <a:avLst/>
+          </a:prstGeom>
+        </p:spPr>
+        <p:txBody>
+          <a:bodyPr xmlns:a="http://schemas.openxmlformats.org/drawingml/2006/main"/>
+          <a:lstStyle xmlns:a="http://schemas.openxmlformats.org/drawingml/2006/main"/>
+          <a:p xmlns:a="http://schemas.openxmlformats.org/drawingml/2006/main"/>
         </p:txBody>
       </p:sp>
       <p:sp>
         <p:nvSpPr>
           <p:cNvPr id="4" name="Slide Image Placeholder"/>
-          <p:cNvSpPr>
-            <a:spLocks noGrp="1" noRot="1" noChangeAspect="1"/>
-          </p:cNvSpPr>
+          <p:cNvSpPr/>
           <p:nvPr>
             <p:ph type="sldImg" idx="2"/>
           </p:nvPr>
         </p:nvSpPr>
         <p:spPr>
-          <a:prstGeom prst="rect">
-            <a:avLst/>
-          </a:prstGeom>
-        </p:spPr>
-        <p:txBody>
-          <a:bodyPr/>
-          <a:lstStyle/>
-          <a:p>
-            <a:endParaRPr/>
-          </a:p>
+          <a:prstGeom xmlns:a="http://schemas.openxmlformats.org/drawingml/2006/main" prst="rect">
+            <a:avLst/>
+          </a:prstGeom>
+        </p:spPr>
+        <p:txBody>
+          <a:bodyPr xmlns:a="http://schemas.openxmlformats.org/drawingml/2006/main"/>
+          <a:lstStyle xmlns:a="http://schemas.openxmlformats.org/drawingml/2006/main"/>
+          <a:p xmlns:a="http://schemas.openxmlformats.org/drawingml/2006/main"/>
         </p:txBody>
       </p:sp>
       <p:sp>
         <p:nvSpPr>
           <p:cNvPr id="5" name="Notes Placeholder"/>
-          <p:cNvSpPr>
-            <a:spLocks noGrp="1"/>
-          </p:cNvSpPr>
+          <p:cNvSpPr/>
           <p:nvPr>
             <p:ph type="body" sz="quarter" idx="3"/>
           </p:nvPr>
         </p:nvSpPr>
         <p:spPr>
-          <a:prstGeom prst="rect">
-            <a:avLst/>
-          </a:prstGeom>
-        </p:spPr>
-        <p:txBody>
-          <a:bodyPr/>
-          <a:lstStyle/>
-          <a:p>
-            <a:endParaRPr/>
-          </a:p>
+          <a:prstGeom xmlns:a="http://schemas.openxmlformats.org/drawingml/2006/main" prst="rect">
+            <a:avLst/>
+          </a:prstGeom>
+        </p:spPr>
+        <p:txBody>
+          <a:bodyPr xmlns:a="http://schemas.openxmlformats.org/drawingml/2006/main"/>
+          <a:lstStyle xmlns:a="http://schemas.openxmlformats.org/drawingml/2006/main"/>
+          <a:p xmlns:a="http://schemas.openxmlformats.org/drawingml/2006/main"/>
         </p:txBody>
       </p:sp>
       <p:sp>
         <p:nvSpPr>
           <p:cNvPr id="6" name="Footer Placeholder"/>
-          <p:cNvSpPr>
-            <a:spLocks noGrp="1"/>
-          </p:cNvSpPr>
+          <p:cNvSpPr/>
           <p:nvPr>
             <p:ph type="ftr" sz="quarter" idx="4"/>
           </p:nvPr>
         </p:nvSpPr>
         <p:spPr>
-          <a:prstGeom prst="rect">
-            <a:avLst/>
-          </a:prstGeom>
-        </p:spPr>
-        <p:txBody>
-          <a:bodyPr/>
-          <a:lstStyle/>
-          <a:p>
-            <a:endParaRPr/>
-          </a:p>
+          <a:prstGeom xmlns:a="http://schemas.openxmlformats.org/drawingml/2006/main" prst="rect">
+            <a:avLst/>
+          </a:prstGeom>
+        </p:spPr>
+        <p:txBody>
+          <a:bodyPr xmlns:a="http://schemas.openxmlformats.org/drawingml/2006/main"/>
+          <a:lstStyle xmlns:a="http://schemas.openxmlformats.org/drawingml/2006/main"/>
+          <a:p xmlns:a="http://schemas.openxmlformats.org/drawingml/2006/main"/>
         </p:txBody>
       </p:sp>
       <p:sp>
         <p:nvSpPr>
           <p:cNvPr id="7" name="Slide Number Placeholder"/>
-          <p:cNvSpPr>
-            <a:spLocks noGrp="1"/>
-          </p:cNvSpPr>
+          <p:cNvSpPr/>
           <p:nvPr>
             <p:ph type="sldNum" sz="quarter" idx="5"/>
           </p:nvPr>
         </p:nvSpPr>
         <p:spPr>
-          <a:prstGeom prst="rect">
-            <a:avLst/>
-          </a:prstGeom>
-        </p:spPr>
-        <p:txBody>
-          <a:bodyPr/>
-          <a:lstStyle/>
-          <a:p>
-            <a:endParaRPr/>
-          </a:p>
+          <a:prstGeom xmlns:a="http://schemas.openxmlformats.org/drawingml/2006/main" prst="rect">
+            <a:avLst/>
+          </a:prstGeom>
+        </p:spPr>
+        <p:txBody>
+          <a:bodyPr xmlns:a="http://schemas.openxmlformats.org/drawingml/2006/main"/>
+          <a:lstStyle xmlns:a="http://schemas.openxmlformats.org/drawingml/2006/main"/>
+          <a:p xmlns:a="http://schemas.openxmlformats.org/drawingml/2006/main"/>
         </p:txBody>
       </p:sp>
     </p:spTree>
   </p:cSld>
   <p:clrMap bg1="lt1" tx1="dk1" bg2="lt2" tx2="dk2" accent1="accent1" accent2="accent2" accent3="accent3" accent4="accent4" accent5="accent5" accent6="accent6" hlink="hlink" folHlink="folHlink"/>
   <p:notesStyle>
-    <a:lvl1pPr marL="0" algn="l" defTabSz="914400" rtl="0" eaLnBrk="1" latinLnBrk="0" hangingPunct="1">
+    <a:lvl1pPr xmlns:a="http://schemas.openxmlformats.org/drawingml/2006/main" marL="0" algn="l" defTabSz="914400" rtl="0" eaLnBrk="1" latinLnBrk="0" hangingPunct="1">
       <a:defRPr sz="1200" kern="1200"/>
     </a:lvl1pPr>
   </p:notesStyle>
 </p:notesMaster>
 </file>
 
+<file path=ppt/notesMasters/theme/theme3.xml><?xml version="1.0" encoding="utf-8"?>
+<a:theme xmlns:a="http://schemas.openxmlformats.org/drawingml/2006/main" name="ChatGPT">
+  <a:themeElements>
+    <a:clrScheme name="ChatGPT">
+      <a:dk1>
+        <a:srgbClr val="000000"/>
+      </a:dk1>
+      <a:lt1>
+        <a:srgbClr val="FFFFFF"/>
+      </a:lt1>
+      <a:dk2>
+        <a:srgbClr val="0E2841"/>
+      </a:dk2>
+      <a:lt2>
+        <a:srgbClr val="E8E8E8"/>
+      </a:lt2>
+      <a:accent1>
+        <a:srgbClr val="156082"/>
+      </a:accent1>
+      <a:accent2>
+        <a:srgbClr val="E97132"/>
+      </a:accent2>
+      <a:accent3>
+        <a:srgbClr val="196B24"/>
+      </a:accent3>
+      <a:accent4>
+        <a:srgbClr val="0F9ED5"/>
+      </a:accent4>
+      <a:accent5>
+        <a:srgbClr val="A02B93"/>
+      </a:accent5>
+      <a:accent6>
+        <a:srgbClr val="4EA72E"/>
+      </a:accent6>
+      <a:hlink>
+        <a:srgbClr val="467886"/>
+      </a:hlink>
+      <a:folHlink>
+        <a:srgbClr val="96607D"/>
+      </a:folHlink>
+    </a:clrScheme>
+    <a:fontScheme name="Office">
+      <a:majorFont>
+        <a:latin typeface="Calibri Light"/>
+        <a:ea typeface="Calibri Light"/>
+        <a:cs typeface="Calibri Light"/>
+      </a:majorFont>
+      <a:minorFont>
+        <a:latin typeface="Calibri"/>
+        <a:ea typeface="Calibri"/>
+        <a:cs typeface="Calibri"/>
+      </a:minorFont>
+    </a:fontScheme>
+    <a:fmtScheme name="ChatGPT">
+      <a:fillStyleLst>
+        <a:solidFill>
+          <a:schemeClr val="phClr"/>
+        </a:solidFill>
+        <a:gradFill>
+          <a:gsLst>
+            <a:gs pos="0">
+              <a:schemeClr val="phClr">
+                <a:tint val="67000"/>
+                <a:lumMod val="110000"/>
+                <a:satMod val="105000"/>
+              </a:schemeClr>
+            </a:gs>
+            <a:gs pos="50000">
+              <a:schemeClr val="phClr">
+                <a:tint val="73000"/>
+                <a:lumMod val="105000"/>
+                <a:satMod val="103000"/>
+              </a:schemeClr>
+            </a:gs>
+            <a:gs pos="100000">
+              <a:schemeClr val="phClr">
+                <a:tint val="81000"/>
+                <a:lumMod val="105000"/>
+                <a:satMod val="109000"/>
+              </a:schemeClr>
+            </a:gs>
+          </a:gsLst>
+          <a:lin ang="5400000" scaled="0"/>
+        </a:gradFill>
+        <a:gradFill>
+          <a:gsLst>
+            <a:gs pos="0">
+              <a:schemeClr val="phClr">
+                <a:tint val="94000"/>
+                <a:lumMod val="102000"/>
+                <a:satMod val="103000"/>
+              </a:schemeClr>
+            </a:gs>
+            <a:gs pos="50000">
+              <a:schemeClr val="phClr">
+                <a:shade val="100000"/>
+                <a:lumMod val="100000"/>
+                <a:satMod val="110000"/>
+              </a:schemeClr>
+            </a:gs>
+            <a:gs pos="100000">
+              <a:schemeClr val="phClr">
+                <a:shade val="78000"/>
+                <a:lumMod val="99000"/>
+                <a:satMod val="120000"/>
+              </a:schemeClr>
+            </a:gs>
+          </a:gsLst>
+          <a:lin ang="5400000" scaled="0"/>
+        </a:gradFill>
+      </a:fillStyleLst>
+      <a:lnStyleLst>
+        <a:ln w="12700">
+          <a:solidFill>
+            <a:schemeClr val="phClr"/>
+          </a:solidFill>
+          <a:prstDash val="solid"/>
+        </a:ln>
+        <a:ln w="19050">
+          <a:solidFill>
+            <a:schemeClr val="phClr"/>
+          </a:solidFill>
+          <a:prstDash val="solid"/>
+        </a:ln>
+        <a:ln w="25400">
+          <a:solidFill>
+            <a:schemeClr val="phClr"/>
+          </a:solidFill>
+          <a:prstDash val="solid"/>
+        </a:ln>
+      </a:lnStyleLst>
+      <a:effectStyleLst>
+        <a:effectStyle>
+          <a:effectLst/>
+        </a:effectStyle>
+        <a:effectStyle>
+          <a:effectLst/>
+        </a:effectStyle>
+        <a:effectStyle>
+          <a:effectLst>
+            <a:outerShdw blurRad="57150" dist="19050" dir="5400000">
+              <a:srgbClr val="000000">
+                <a:alpha val="16000"/>
+              </a:srgbClr>
+            </a:outerShdw>
+          </a:effectLst>
+        </a:effectStyle>
+        <a:effectStyle>
+          <a:effectLst>
+            <a:outerShdw blurRad="19050" dist="9525" dir="5400000">
+              <a:srgbClr val="000000">
+                <a:alpha val="6000"/>
+              </a:srgbClr>
+            </a:outerShdw>
+          </a:effectLst>
+        </a:effectStyle>
+        <a:effectStyle>
+          <a:effectLst>
+            <a:outerShdw blurRad="28575" dist="9525" dir="5400000">
+              <a:srgbClr val="000000">
+                <a:alpha val="8000"/>
+              </a:srgbClr>
+            </a:outerShdw>
+          </a:effectLst>
+        </a:effectStyle>
+        <a:effectStyle>
+          <a:effectLst>
+            <a:outerShdw blurRad="57150" dist="19050" dir="5400000">
+              <a:srgbClr val="000000">
+                <a:alpha val="10000"/>
+              </a:srgbClr>
+            </a:outerShdw>
+          </a:effectLst>
+        </a:effectStyle>
+        <a:effectStyle>
+          <a:effectLst>
+            <a:outerShdw blurRad="114300" dist="38100" dir="5400000">
+              <a:srgbClr val="000000">
+                <a:alpha val="12000"/>
+              </a:srgbClr>
+            </a:outerShdw>
+          </a:effectLst>
+        </a:effectStyle>
+        <a:effectStyle>
+          <a:effectLst>
+            <a:outerShdw blurRad="171450" dist="57150" dir="5400000">
+              <a:srgbClr val="000000">
+                <a:alpha val="16000"/>
+              </a:srgbClr>
+            </a:outerShdw>
+          </a:effectLst>
+        </a:effectStyle>
+        <a:effectStyle>
+          <a:effectLst>
+            <a:outerShdw blurRad="266700" dist="95250" dir="5400000">
+              <a:srgbClr val="000000">
+                <a:alpha val="24000"/>
+              </a:srgbClr>
+            </a:outerShdw>
+          </a:effectLst>
+        </a:effectStyle>
+      </a:effectStyleLst>
+      <a:bgFillStyleLst>
+        <a:solidFill>
+          <a:schemeClr val="phClr"/>
+        </a:solidFill>
+        <a:solidFill>
+          <a:schemeClr val="phClr">
+            <a:tint val="95000"/>
+            <a:satMod val="170000"/>
+          </a:schemeClr>
+        </a:solidFill>
+        <a:gradFill>
+          <a:gsLst>
+            <a:gs pos="0">
+              <a:schemeClr val="phClr">
+                <a:tint val="93000"/>
+                <a:shade val="98000"/>
+                <a:lumMod val="102000"/>
+                <a:satMod val="150000"/>
+              </a:schemeClr>
+            </a:gs>
+            <a:gs pos="50000">
+              <a:schemeClr val="phClr">
+                <a:tint val="98000"/>
+                <a:shade val="90000"/>
+                <a:lumMod val="103000"/>
+                <a:satMod val="130000"/>
+              </a:schemeClr>
+            </a:gs>
+            <a:gs pos="100000">
+              <a:schemeClr val="phClr">
+                <a:shade val="63000"/>
+                <a:satMod val="120000"/>
+              </a:schemeClr>
+            </a:gs>
+          </a:gsLst>
+          <a:lin ang="5400000" scaled="0"/>
+        </a:gradFill>
+      </a:bgFillStyleLst>
+    </a:fmtScheme>
+  </a:themeElements>
+</a:theme>
+</file>
+
 <file path=ppt/notesSlides/notesSlide1.xml><?xml version="1.0" encoding="utf-8"?>
-<p:notes xmlns:a="http://schemas.openxmlformats.org/drawingml/2006/main" xmlns:r="http://schemas.openxmlformats.org/officeDocument/2006/relationships" xmlns:p="http://schemas.openxmlformats.org/presentationml/2006/main">
+<p:notes xmlns:p="http://schemas.openxmlformats.org/presentationml/2006/main">
   <p:cSld>
     <p:spTree>
       <p:nvGrpSpPr>
@@ -291,21 +412,16 @@
         <p:nvPr/>
       </p:nvGrpSpPr>
       <p:grpSpPr>
-        <a:xfrm>
-          <a:off x="0" y="0"/>
-          <a:ext cx="0" cy="0"/>
-          <a:chOff x="0" y="0"/>
-          <a:chExt cx="0" cy="0"/>
-        </a:xfrm>
+        <a:xfrm xmlns:a="http://schemas.openxmlformats.org/drawingml/2006/main"/>
       </p:grpSpPr>
       <p:sp>
         <p:nvSpPr>
           <p:cNvPr id="2" name="Slide Image Placeholder 1"/>
           <p:cNvSpPr>
-            <a:spLocks noGrp="1" noRot="1" noChangeAspect="1"/>
+            <a:spLocks xmlns:a="http://schemas.openxmlformats.org/drawingml/2006/main" noGrp="1"/>
           </p:cNvSpPr>
           <p:nvPr>
-            <p:ph type="sldImg"/>
+            <p:ph type="sldImg" idx="0"/>
           </p:nvPr>
         </p:nvSpPr>
         <p:spPr/>
@@ -314,7 +430,7 @@
         <p:nvSpPr>
           <p:cNvPr id="3" name="Notes Placeholder 2"/>
           <p:cNvSpPr>
-            <a:spLocks noGrp="1"/>
+            <a:spLocks xmlns:a="http://schemas.openxmlformats.org/drawingml/2006/main" noGrp="1"/>
           </p:cNvSpPr>
           <p:nvPr>
             <p:ph type="body" idx="1"/>
@@ -322,24 +438,24 @@
         </p:nvSpPr>
         <p:spPr/>
         <p:txBody>
-          <a:bodyPr/>
-          <a:lstStyle/>
-          <a:p>
+          <a:bodyPr xmlns:a="http://schemas.openxmlformats.org/drawingml/2006/main"/>
+          <a:lstStyle xmlns:a="http://schemas.openxmlformats.org/drawingml/2006/main"/>
+          <a:p xmlns:a="http://schemas.openxmlformats.org/drawingml/2006/main">
             <a:r>
               <a:t>[Sources]</a:t>
             </a:r>
           </a:p>
-          <a:p>
+          <a:p xmlns:a="http://schemas.openxmlformats.org/drawingml/2006/main">
             <a:r>
               <a:t>- Internal audited case: data/results/mobileworld_hgkv_selected_b4/qualitative_cart_audit.json</a:t>
             </a:r>
           </a:p>
-          <a:p>
+          <a:p xmlns:a="http://schemas.openxmlformats.org/drawingml/2006/main">
             <a:r>
               <a:t>- Local de-identified crops: paper/figures/assets/cart_order_evidence.png; paper/figures/assets/cart_message_input.png</a:t>
             </a:r>
           </a:p>
-          <a:p>
+          <a:p xmlns:a="http://schemas.openxmlformats.org/drawingml/2006/main">
             <a:r>
               <a:t>[/Sources]</a:t>
             </a:r>
@@ -350,7 +466,7 @@
         <p:nvSpPr>
           <p:cNvPr id="4" name="Slide Number Placeholder 3"/>
           <p:cNvSpPr>
-            <a:spLocks noGrp="1"/>
+            <a:spLocks xmlns:a="http://schemas.openxmlformats.org/drawingml/2006/main" noGrp="1"/>
           </p:cNvSpPr>
           <p:nvPr>
             <p:ph type="sldNum" idx="5"/>
@@ -358,23 +474,21 @@
         </p:nvSpPr>
         <p:spPr/>
         <p:txBody>
-          <a:bodyPr/>
-          <a:lstStyle/>
-          <a:p>
-            <a:endParaRPr/>
-          </a:p>
+          <a:bodyPr xmlns:a="http://schemas.openxmlformats.org/drawingml/2006/main"/>
+          <a:lstStyle xmlns:a="http://schemas.openxmlformats.org/drawingml/2006/main"/>
+          <a:p xmlns:a="http://schemas.openxmlformats.org/drawingml/2006/main"/>
         </p:txBody>
       </p:sp>
     </p:spTree>
   </p:cSld>
   <p:clrMapOvr>
-    <a:masterClrMapping/>
+    <a:masterClrMapping xmlns:a="http://schemas.openxmlformats.org/drawingml/2006/main"/>
   </p:clrMapOvr>
 </p:notes>
 </file>
 
 <file path=ppt/slideLayouts/slideLayout1.xml><?xml version="1.0" encoding="utf-8"?>
-<p:sldLayout xmlns:a="http://schemas.openxmlformats.org/drawingml/2006/main" xmlns:r="http://schemas.openxmlformats.org/officeDocument/2006/relationships" xmlns:p="http://schemas.openxmlformats.org/presentationml/2006/main" type="title">
+<p:sldLayout xmlns:p="http://schemas.openxmlformats.org/presentationml/2006/main" type="title">
   <p:cSld name="Title Slide">
     <p:spTree>
       <p:nvGrpSpPr>
@@ -383,27 +497,19 @@
         <p:nvPr/>
       </p:nvGrpSpPr>
       <p:grpSpPr>
-        <a:xfrm>
-          <a:off x="0" y="0"/>
-          <a:ext cx="0" cy="0"/>
-          <a:chOff x="0" y="0"/>
-          <a:chExt cx="0" cy="0"/>
-        </a:xfrm>
+        <a:xfrm xmlns:a="http://schemas.openxmlformats.org/drawingml/2006/main"/>
       </p:grpSpPr>
     </p:spTree>
   </p:cSld>
-  <p:clrMapOvr>
-    <a:masterClrMapping/>
-  </p:clrMapOvr>
 </p:sldLayout>
 </file>
 
 <file path=ppt/slideMasters/slideMaster1.xml><?xml version="1.0" encoding="utf-8"?>
-<p:sldMaster xmlns:a="http://schemas.openxmlformats.org/drawingml/2006/main" xmlns:r="http://schemas.openxmlformats.org/officeDocument/2006/relationships" xmlns:p="http://schemas.openxmlformats.org/presentationml/2006/main">
+<p:sldMaster xmlns:p="http://schemas.openxmlformats.org/presentationml/2006/main">
   <p:cSld name="Master">
     <p:bg>
       <p:bgRef idx="1001">
-        <a:schemeClr val="bg1"/>
+        <a:schemeClr xmlns:a="http://schemas.openxmlformats.org/drawingml/2006/main" val="bg1"/>
       </p:bgRef>
     </p:bg>
     <p:spTree>
@@ -413,22 +519,17 @@
         <p:nvPr/>
       </p:nvGrpSpPr>
       <p:grpSpPr>
-        <a:xfrm>
-          <a:off x="0" y="0"/>
-          <a:ext cx="0" cy="0"/>
-          <a:chOff x="0" y="0"/>
-          <a:chExt cx="0" cy="0"/>
-        </a:xfrm>
+        <a:xfrm xmlns:a="http://schemas.openxmlformats.org/drawingml/2006/main"/>
       </p:grpSpPr>
     </p:spTree>
   </p:cSld>
   <p:clrMap bg1="lt1" tx1="dk1" bg2="lt2" tx2="dk2" accent1="accent1" accent2="accent2" accent3="accent3" accent4="accent4" accent5="accent5" accent6="accent6" hlink="hlink" folHlink="folHlink"/>
   <p:sldLayoutIdLst>
-    <p:sldLayoutId id="2147483649" r:id="rId1"/>
+    <p:sldLayoutId xmlns:r="http://schemas.openxmlformats.org/officeDocument/2006/relationships" id="2147483649" r:id="R08cb64358daf404c"/>
   </p:sldLayoutIdLst>
   <p:txStyles>
     <p:titleStyle>
-      <a:lvl1pPr algn="l">
+      <a:lvl1pPr xmlns:a="http://schemas.openxmlformats.org/drawingml/2006/main" algn="l">
         <a:lnSpc>
           <a:spcPct val="90000"/>
         </a:lnSpc>
@@ -447,7 +548,7 @@
       </a:lvl1pPr>
     </p:titleStyle>
     <p:bodyStyle>
-      <a:lvl1pPr marL="228600" indent="-228600" algn="l">
+      <a:lvl1pPr xmlns:a="http://schemas.openxmlformats.org/drawingml/2006/main" marL="228600" indent="-228600" algn="l">
         <a:lnSpc>
           <a:spcPct val="90000"/>
         </a:lnSpc>
@@ -464,7 +565,7 @@
           <a:cs typeface="+mn-lt"/>
         </a:defRPr>
       </a:lvl1pPr>
-      <a:lvl2pPr marL="685800" indent="-228600" algn="l">
+      <a:lvl2pPr xmlns:a="http://schemas.openxmlformats.org/drawingml/2006/main" marL="685800" indent="-228600" algn="l">
         <a:lnSpc>
           <a:spcPct val="90000"/>
         </a:lnSpc>
@@ -481,7 +582,7 @@
           <a:cs typeface="+mn-lt"/>
         </a:defRPr>
       </a:lvl2pPr>
-      <a:lvl3pPr marL="1143000" indent="-228600" algn="l">
+      <a:lvl3pPr xmlns:a="http://schemas.openxmlformats.org/drawingml/2006/main" marL="1143000" indent="-228600" algn="l">
         <a:lnSpc>
           <a:spcPct val="90000"/>
         </a:lnSpc>
@@ -498,7 +599,7 @@
           <a:cs typeface="+mn-lt"/>
         </a:defRPr>
       </a:lvl3pPr>
-      <a:lvl4pPr marL="1600200" indent="-228600" algn="l">
+      <a:lvl4pPr xmlns:a="http://schemas.openxmlformats.org/drawingml/2006/main" marL="1600200" indent="-228600" algn="l">
         <a:lnSpc>
           <a:spcPct val="90000"/>
         </a:lnSpc>
@@ -515,7 +616,7 @@
           <a:cs typeface="+mn-lt"/>
         </a:defRPr>
       </a:lvl4pPr>
-      <a:lvl5pPr marL="2057400" indent="-228600" algn="l">
+      <a:lvl5pPr xmlns:a="http://schemas.openxmlformats.org/drawingml/2006/main" marL="2057400" indent="-228600" algn="l">
         <a:lnSpc>
           <a:spcPct val="90000"/>
         </a:lnSpc>
@@ -532,7 +633,7 @@
           <a:cs typeface="+mn-lt"/>
         </a:defRPr>
       </a:lvl5pPr>
-      <a:lvl6pPr marL="2514600" indent="-228600" algn="l">
+      <a:lvl6pPr xmlns:a="http://schemas.openxmlformats.org/drawingml/2006/main" marL="2514600" indent="-228600" algn="l">
         <a:lnSpc>
           <a:spcPct val="90000"/>
         </a:lnSpc>
@@ -549,7 +650,7 @@
           <a:cs typeface="+mn-lt"/>
         </a:defRPr>
       </a:lvl6pPr>
-      <a:lvl7pPr marL="2971800" indent="-228600" algn="l">
+      <a:lvl7pPr xmlns:a="http://schemas.openxmlformats.org/drawingml/2006/main" marL="2971800" indent="-228600" algn="l">
         <a:lnSpc>
           <a:spcPct val="90000"/>
         </a:lnSpc>
@@ -566,7 +667,7 @@
           <a:cs typeface="+mn-lt"/>
         </a:defRPr>
       </a:lvl7pPr>
-      <a:lvl8pPr marL="3429000" indent="-228600" algn="l">
+      <a:lvl8pPr xmlns:a="http://schemas.openxmlformats.org/drawingml/2006/main" marL="3429000" indent="-228600" algn="l">
         <a:lnSpc>
           <a:spcPct val="90000"/>
         </a:lnSpc>
@@ -583,7 +684,7 @@
           <a:cs typeface="+mn-lt"/>
         </a:defRPr>
       </a:lvl8pPr>
-      <a:lvl9pPr marL="3886200" indent="-228600" algn="l">
+      <a:lvl9pPr xmlns:a="http://schemas.openxmlformats.org/drawingml/2006/main" marL="3886200" indent="-228600" algn="l">
         <a:lnSpc>
           <a:spcPct val="90000"/>
         </a:lnSpc>
@@ -602,7 +703,7 @@
       </a:lvl9pPr>
     </p:bodyStyle>
     <p:otherStyle>
-      <a:lvl1pPr marL="0" algn="l">
+      <a:lvl1pPr xmlns:a="http://schemas.openxmlformats.org/drawingml/2006/main" marL="0" algn="l">
         <a:buNone/>
         <a:defRPr sz="1800">
           <a:solidFill>
@@ -613,7 +714,7 @@
           <a:cs typeface="+mn-lt"/>
         </a:defRPr>
       </a:lvl1pPr>
-      <a:lvl2pPr marL="457200" algn="l">
+      <a:lvl2pPr xmlns:a="http://schemas.openxmlformats.org/drawingml/2006/main" marL="457200" algn="l">
         <a:buNone/>
         <a:defRPr sz="1800">
           <a:solidFill>
@@ -624,7 +725,7 @@
           <a:cs typeface="+mn-lt"/>
         </a:defRPr>
       </a:lvl2pPr>
-      <a:lvl3pPr marL="914400" algn="l">
+      <a:lvl3pPr xmlns:a="http://schemas.openxmlformats.org/drawingml/2006/main" marL="914400" algn="l">
         <a:buNone/>
         <a:defRPr sz="1800">
           <a:solidFill>
@@ -635,7 +736,7 @@
           <a:cs typeface="+mn-lt"/>
         </a:defRPr>
       </a:lvl3pPr>
-      <a:lvl4pPr marL="1371600" algn="l">
+      <a:lvl4pPr xmlns:a="http://schemas.openxmlformats.org/drawingml/2006/main" marL="1371600" algn="l">
         <a:buNone/>
         <a:defRPr sz="1800">
           <a:solidFill>
@@ -646,7 +747,7 @@
           <a:cs typeface="+mn-lt"/>
         </a:defRPr>
       </a:lvl4pPr>
-      <a:lvl5pPr marL="1828800" algn="l">
+      <a:lvl5pPr xmlns:a="http://schemas.openxmlformats.org/drawingml/2006/main" marL="1828800" algn="l">
         <a:buNone/>
         <a:defRPr sz="1800">
           <a:solidFill>
@@ -657,7 +758,7 @@
           <a:cs typeface="+mn-lt"/>
         </a:defRPr>
       </a:lvl5pPr>
-      <a:lvl6pPr marL="2286000" algn="l">
+      <a:lvl6pPr xmlns:a="http://schemas.openxmlformats.org/drawingml/2006/main" marL="2286000" algn="l">
         <a:buNone/>
         <a:defRPr sz="1800">
           <a:solidFill>
@@ -668,7 +769,7 @@
           <a:cs typeface="+mn-lt"/>
         </a:defRPr>
       </a:lvl6pPr>
-      <a:lvl7pPr marL="2743200" algn="l">
+      <a:lvl7pPr xmlns:a="http://schemas.openxmlformats.org/drawingml/2006/main" marL="2743200" algn="l">
         <a:buNone/>
         <a:defRPr sz="1800">
           <a:solidFill>
@@ -679,7 +780,7 @@
           <a:cs typeface="+mn-lt"/>
         </a:defRPr>
       </a:lvl7pPr>
-      <a:lvl8pPr marL="3200400" algn="l">
+      <a:lvl8pPr xmlns:a="http://schemas.openxmlformats.org/drawingml/2006/main" marL="3200400" algn="l">
         <a:buNone/>
         <a:defRPr sz="1800">
           <a:solidFill>
@@ -690,7 +791,7 @@
           <a:cs typeface="+mn-lt"/>
         </a:defRPr>
       </a:lvl8pPr>
-      <a:lvl9pPr marL="3657600" algn="l">
+      <a:lvl9pPr xmlns:a="http://schemas.openxmlformats.org/drawingml/2006/main" marL="3657600" algn="l">
         <a:buNone/>
         <a:defRPr sz="1800">
           <a:solidFill>
@@ -706,15 +807,259 @@
 </p:sldMaster>
 </file>
 
+<file path=ppt/slideMasters/theme/theme2.xml><?xml version="1.0" encoding="utf-8"?>
+<a:theme xmlns:a="http://schemas.openxmlformats.org/drawingml/2006/main" name="ChatGPT">
+  <a:themeElements>
+    <a:clrScheme name="ChatGPT">
+      <a:dk1>
+        <a:srgbClr val="000000"/>
+      </a:dk1>
+      <a:lt1>
+        <a:srgbClr val="FFFFFF"/>
+      </a:lt1>
+      <a:dk2>
+        <a:srgbClr val="0E2841"/>
+      </a:dk2>
+      <a:lt2>
+        <a:srgbClr val="E8E8E8"/>
+      </a:lt2>
+      <a:accent1>
+        <a:srgbClr val="156082"/>
+      </a:accent1>
+      <a:accent2>
+        <a:srgbClr val="E97132"/>
+      </a:accent2>
+      <a:accent3>
+        <a:srgbClr val="196B24"/>
+      </a:accent3>
+      <a:accent4>
+        <a:srgbClr val="0F9ED5"/>
+      </a:accent4>
+      <a:accent5>
+        <a:srgbClr val="A02B93"/>
+      </a:accent5>
+      <a:accent6>
+        <a:srgbClr val="4EA72E"/>
+      </a:accent6>
+      <a:hlink>
+        <a:srgbClr val="467886"/>
+      </a:hlink>
+      <a:folHlink>
+        <a:srgbClr val="96607D"/>
+      </a:folHlink>
+    </a:clrScheme>
+    <a:fontScheme name="Office">
+      <a:majorFont>
+        <a:latin typeface="Calibri Light"/>
+        <a:ea typeface="Calibri Light"/>
+        <a:cs typeface="Calibri Light"/>
+      </a:majorFont>
+      <a:minorFont>
+        <a:latin typeface="Calibri"/>
+        <a:ea typeface="Calibri"/>
+        <a:cs typeface="Calibri"/>
+      </a:minorFont>
+    </a:fontScheme>
+    <a:fmtScheme name="ChatGPT">
+      <a:fillStyleLst>
+        <a:solidFill>
+          <a:schemeClr val="phClr"/>
+        </a:solidFill>
+        <a:gradFill>
+          <a:gsLst>
+            <a:gs pos="0">
+              <a:schemeClr val="phClr">
+                <a:tint val="67000"/>
+                <a:lumMod val="110000"/>
+                <a:satMod val="105000"/>
+              </a:schemeClr>
+            </a:gs>
+            <a:gs pos="50000">
+              <a:schemeClr val="phClr">
+                <a:tint val="73000"/>
+                <a:lumMod val="105000"/>
+                <a:satMod val="103000"/>
+              </a:schemeClr>
+            </a:gs>
+            <a:gs pos="100000">
+              <a:schemeClr val="phClr">
+                <a:tint val="81000"/>
+                <a:lumMod val="105000"/>
+                <a:satMod val="109000"/>
+              </a:schemeClr>
+            </a:gs>
+          </a:gsLst>
+          <a:lin ang="5400000" scaled="0"/>
+        </a:gradFill>
+        <a:gradFill>
+          <a:gsLst>
+            <a:gs pos="0">
+              <a:schemeClr val="phClr">
+                <a:tint val="94000"/>
+                <a:lumMod val="102000"/>
+                <a:satMod val="103000"/>
+              </a:schemeClr>
+            </a:gs>
+            <a:gs pos="50000">
+              <a:schemeClr val="phClr">
+                <a:shade val="100000"/>
+                <a:lumMod val="100000"/>
+                <a:satMod val="110000"/>
+              </a:schemeClr>
+            </a:gs>
+            <a:gs pos="100000">
+              <a:schemeClr val="phClr">
+                <a:shade val="78000"/>
+                <a:lumMod val="99000"/>
+                <a:satMod val="120000"/>
+              </a:schemeClr>
+            </a:gs>
+          </a:gsLst>
+          <a:lin ang="5400000" scaled="0"/>
+        </a:gradFill>
+      </a:fillStyleLst>
+      <a:lnStyleLst>
+        <a:ln w="12700">
+          <a:solidFill>
+            <a:schemeClr val="phClr"/>
+          </a:solidFill>
+          <a:prstDash val="solid"/>
+        </a:ln>
+        <a:ln w="19050">
+          <a:solidFill>
+            <a:schemeClr val="phClr"/>
+          </a:solidFill>
+          <a:prstDash val="solid"/>
+        </a:ln>
+        <a:ln w="25400">
+          <a:solidFill>
+            <a:schemeClr val="phClr"/>
+          </a:solidFill>
+          <a:prstDash val="solid"/>
+        </a:ln>
+      </a:lnStyleLst>
+      <a:effectStyleLst>
+        <a:effectStyle>
+          <a:effectLst/>
+        </a:effectStyle>
+        <a:effectStyle>
+          <a:effectLst/>
+        </a:effectStyle>
+        <a:effectStyle>
+          <a:effectLst>
+            <a:outerShdw blurRad="57150" dist="19050" dir="5400000">
+              <a:srgbClr val="000000">
+                <a:alpha val="16000"/>
+              </a:srgbClr>
+            </a:outerShdw>
+          </a:effectLst>
+        </a:effectStyle>
+        <a:effectStyle>
+          <a:effectLst>
+            <a:outerShdw blurRad="19050" dist="9525" dir="5400000">
+              <a:srgbClr val="000000">
+                <a:alpha val="6000"/>
+              </a:srgbClr>
+            </a:outerShdw>
+          </a:effectLst>
+        </a:effectStyle>
+        <a:effectStyle>
+          <a:effectLst>
+            <a:outerShdw blurRad="28575" dist="9525" dir="5400000">
+              <a:srgbClr val="000000">
+                <a:alpha val="8000"/>
+              </a:srgbClr>
+            </a:outerShdw>
+          </a:effectLst>
+        </a:effectStyle>
+        <a:effectStyle>
+          <a:effectLst>
+            <a:outerShdw blurRad="57150" dist="19050" dir="5400000">
+              <a:srgbClr val="000000">
+                <a:alpha val="10000"/>
+              </a:srgbClr>
+            </a:outerShdw>
+          </a:effectLst>
+        </a:effectStyle>
+        <a:effectStyle>
+          <a:effectLst>
+            <a:outerShdw blurRad="114300" dist="38100" dir="5400000">
+              <a:srgbClr val="000000">
+                <a:alpha val="12000"/>
+              </a:srgbClr>
+            </a:outerShdw>
+          </a:effectLst>
+        </a:effectStyle>
+        <a:effectStyle>
+          <a:effectLst>
+            <a:outerShdw blurRad="171450" dist="57150" dir="5400000">
+              <a:srgbClr val="000000">
+                <a:alpha val="16000"/>
+              </a:srgbClr>
+            </a:outerShdw>
+          </a:effectLst>
+        </a:effectStyle>
+        <a:effectStyle>
+          <a:effectLst>
+            <a:outerShdw blurRad="266700" dist="95250" dir="5400000">
+              <a:srgbClr val="000000">
+                <a:alpha val="24000"/>
+              </a:srgbClr>
+            </a:outerShdw>
+          </a:effectLst>
+        </a:effectStyle>
+      </a:effectStyleLst>
+      <a:bgFillStyleLst>
+        <a:solidFill>
+          <a:schemeClr val="phClr"/>
+        </a:solidFill>
+        <a:solidFill>
+          <a:schemeClr val="phClr">
+            <a:tint val="95000"/>
+            <a:satMod val="170000"/>
+          </a:schemeClr>
+        </a:solidFill>
+        <a:gradFill>
+          <a:gsLst>
+            <a:gs pos="0">
+              <a:schemeClr val="phClr">
+                <a:tint val="93000"/>
+                <a:shade val="98000"/>
+                <a:lumMod val="102000"/>
+                <a:satMod val="150000"/>
+              </a:schemeClr>
+            </a:gs>
+            <a:gs pos="50000">
+              <a:schemeClr val="phClr">
+                <a:tint val="98000"/>
+                <a:shade val="90000"/>
+                <a:lumMod val="103000"/>
+                <a:satMod val="130000"/>
+              </a:schemeClr>
+            </a:gs>
+            <a:gs pos="100000">
+              <a:schemeClr val="phClr">
+                <a:shade val="63000"/>
+                <a:satMod val="120000"/>
+              </a:schemeClr>
+            </a:gs>
+          </a:gsLst>
+          <a:lin ang="5400000" scaled="0"/>
+        </a:gradFill>
+      </a:bgFillStyleLst>
+    </a:fmtScheme>
+  </a:themeElements>
+</a:theme>
+</file>
+
 <file path=ppt/slides/slide1.xml><?xml version="1.0" encoding="utf-8"?>
-<p:sld xmlns:a="http://schemas.openxmlformats.org/drawingml/2006/main" xmlns:r="http://schemas.openxmlformats.org/officeDocument/2006/relationships" xmlns:p="http://schemas.openxmlformats.org/presentationml/2006/main">
+<p:sld xmlns:p="http://schemas.openxmlformats.org/presentationml/2006/main">
   <p:cSld>
     <p:bg>
       <p:bgPr>
-        <a:solidFill>
+        <a:solidFill xmlns:a="http://schemas.openxmlformats.org/drawingml/2006/main">
           <a:srgbClr val="FCFCFB"/>
         </a:solidFill>
-        <a:effectLst/>
       </p:bgPr>
     </p:bg>
     <p:spTree>
@@ -724,37 +1069,32 @@
         <p:nvPr/>
       </p:nvGrpSpPr>
       <p:grpSpPr>
-        <a:xfrm>
-          <a:off x="0" y="0"/>
-          <a:ext cx="0" cy="0"/>
-          <a:chOff x="0" y="0"/>
-          <a:chExt cx="0" cy="0"/>
-        </a:xfrm>
+        <a:xfrm xmlns:a="http://schemas.openxmlformats.org/drawingml/2006/main"/>
       </p:grpSpPr>
       <p:sp>
         <p:nvSpPr>
           <p:cNvPr id="70" name="trace-line">
-            <a:extLst>
+            <a:extLst xmlns:a="http://schemas.openxmlformats.org/drawingml/2006/main">
               <a:ext uri="{FF2B5EF4-FFF2-40B4-BE49-F238E27FC236}">
                 <a16:creationId xmlns:a16="http://schemas.microsoft.com/office/drawing/2014/main" id="{7406C35B-CCEE-4F6A-ACA3-6EACA9A90A79}"/>
               </a:ext>
             </a:extLst>
           </p:cNvPr>
           <p:cNvSpPr>
-            <a:spLocks noGrp="1"/>
-          </p:cNvSpPr>
-          <p:nvPr/>
-        </p:nvSpPr>
-        <p:spPr>
-          <a:xfrm>
-            <a:off x="285750" y="1343025"/>
-            <a:ext cx="3333750" cy="0"/>
-          </a:xfrm>
-          <a:prstGeom prst="line">
-            <a:avLst/>
-          </a:prstGeom>
-          <a:noFill/>
-          <a:ln w="14288">
+            <a:spLocks xmlns:a="http://schemas.openxmlformats.org/drawingml/2006/main" noGrp="1"/>
+          </p:cNvSpPr>
+          <p:nvPr/>
+        </p:nvSpPr>
+        <p:spPr>
+          <a:xfrm xmlns:a="http://schemas.openxmlformats.org/drawingml/2006/main">
+            <a:off x="285750" y="1571625"/>
+            <a:ext cx="3486150" cy="0"/>
+          </a:xfrm>
+          <a:prstGeom xmlns:a="http://schemas.openxmlformats.org/drawingml/2006/main" prst="line">
+            <a:avLst/>
+          </a:prstGeom>
+          <a:noFill xmlns:a="http://schemas.openxmlformats.org/drawingml/2006/main"/>
+          <a:ln xmlns:a="http://schemas.openxmlformats.org/drawingml/2006/main" w="14288">
             <a:solidFill>
               <a:srgbClr val="17212B"/>
             </a:solidFill>
@@ -762,39 +1102,37 @@
           </a:ln>
         </p:spPr>
         <p:txBody>
-          <a:bodyPr/>
-          <a:lstStyle/>
-          <a:p>
-            <a:endParaRPr lang="en-CN"/>
-          </a:p>
+          <a:bodyPr xmlns:a="http://schemas.openxmlformats.org/drawingml/2006/main"/>
+          <a:lstStyle xmlns:a="http://schemas.openxmlformats.org/drawingml/2006/main"/>
+          <a:p xmlns:a="http://schemas.openxmlformats.org/drawingml/2006/main"/>
         </p:txBody>
       </p:sp>
       <p:sp>
         <p:nvSpPr>
           <p:cNvPr id="9" name="recent-current-head">
-            <a:extLst>
+            <a:extLst xmlns:a="http://schemas.openxmlformats.org/drawingml/2006/main">
               <a:ext uri="{FF2B5EF4-FFF2-40B4-BE49-F238E27FC236}">
                 <a16:creationId xmlns:a16="http://schemas.microsoft.com/office/drawing/2014/main" id="{E763AA32-10B5-40EA-B0AF-3A7AB52226D2}"/>
               </a:ext>
             </a:extLst>
           </p:cNvPr>
           <p:cNvSpPr>
-            <a:spLocks noGrp="1"/>
-          </p:cNvSpPr>
-          <p:nvPr/>
-        </p:nvSpPr>
-        <p:spPr>
-          <a:xfrm rot="7500000">
+            <a:spLocks xmlns:a="http://schemas.openxmlformats.org/drawingml/2006/main" noGrp="1"/>
+          </p:cNvSpPr>
+          <p:nvPr/>
+        </p:nvSpPr>
+        <p:spPr>
+          <a:xfrm xmlns:a="http://schemas.openxmlformats.org/drawingml/2006/main" rot="7500000">
             <a:off x="6541082" y="1519672"/>
             <a:ext cx="85725" cy="85725"/>
           </a:xfrm>
-          <a:prstGeom prst="triangle">
-            <a:avLst/>
-          </a:prstGeom>
-          <a:solidFill>
+          <a:prstGeom xmlns:a="http://schemas.openxmlformats.org/drawingml/2006/main" prst="triangle">
+            <a:avLst/>
+          </a:prstGeom>
+          <a:solidFill xmlns:a="http://schemas.openxmlformats.org/drawingml/2006/main">
             <a:srgbClr val="2E6F9E"/>
           </a:solidFill>
-          <a:ln w="0">
+          <a:ln xmlns:a="http://schemas.openxmlformats.org/drawingml/2006/main" w="0">
             <a:solidFill>
               <a:srgbClr val="2E6F9E"/>
             </a:solidFill>
@@ -802,39 +1140,37 @@
           </a:ln>
         </p:spPr>
         <p:txBody>
-          <a:bodyPr/>
-          <a:lstStyle/>
-          <a:p>
-            <a:endParaRPr lang="en-CN"/>
-          </a:p>
+          <a:bodyPr xmlns:a="http://schemas.openxmlformats.org/drawingml/2006/main"/>
+          <a:lstStyle xmlns:a="http://schemas.openxmlformats.org/drawingml/2006/main"/>
+          <a:p xmlns:a="http://schemas.openxmlformats.org/drawingml/2006/main"/>
         </p:txBody>
       </p:sp>
       <p:sp>
         <p:nvSpPr>
           <p:cNvPr id="14" name="e7-current-head">
-            <a:extLst>
+            <a:extLst xmlns:a="http://schemas.openxmlformats.org/drawingml/2006/main">
               <a:ext uri="{FF2B5EF4-FFF2-40B4-BE49-F238E27FC236}">
                 <a16:creationId xmlns:a16="http://schemas.microsoft.com/office/drawing/2014/main" id="{9F08A7A7-9877-4A4B-98C9-385688C62BA8}"/>
               </a:ext>
             </a:extLst>
           </p:cNvPr>
           <p:cNvSpPr>
-            <a:spLocks noGrp="1"/>
-          </p:cNvSpPr>
-          <p:nvPr/>
-        </p:nvSpPr>
-        <p:spPr>
-          <a:xfrm>
+            <a:spLocks xmlns:a="http://schemas.openxmlformats.org/drawingml/2006/main" noGrp="1"/>
+          </p:cNvSpPr>
+          <p:nvPr/>
+        </p:nvSpPr>
+        <p:spPr>
+          <a:xfrm xmlns:a="http://schemas.openxmlformats.org/drawingml/2006/main">
             <a:off x="6541082" y="1510147"/>
             <a:ext cx="85725" cy="85725"/>
           </a:xfrm>
-          <a:prstGeom prst="triangle">
-            <a:avLst/>
-          </a:prstGeom>
-          <a:solidFill>
+          <a:prstGeom xmlns:a="http://schemas.openxmlformats.org/drawingml/2006/main" prst="triangle">
+            <a:avLst/>
+          </a:prstGeom>
+          <a:solidFill xmlns:a="http://schemas.openxmlformats.org/drawingml/2006/main">
             <a:srgbClr val="C45A14"/>
           </a:solidFill>
-          <a:ln w="0">
+          <a:ln xmlns:a="http://schemas.openxmlformats.org/drawingml/2006/main" w="0">
             <a:solidFill>
               <a:srgbClr val="C45A14"/>
             </a:solidFill>
@@ -842,37 +1178,35 @@
           </a:ln>
         </p:spPr>
         <p:txBody>
-          <a:bodyPr/>
-          <a:lstStyle/>
-          <a:p>
-            <a:endParaRPr lang="en-CN"/>
-          </a:p>
+          <a:bodyPr xmlns:a="http://schemas.openxmlformats.org/drawingml/2006/main"/>
+          <a:lstStyle xmlns:a="http://schemas.openxmlformats.org/drawingml/2006/main"/>
+          <a:p xmlns:a="http://schemas.openxmlformats.org/drawingml/2006/main"/>
         </p:txBody>
       </p:sp>
       <p:sp>
         <p:nvSpPr>
           <p:cNvPr id="15" name="current-action-stem">
-            <a:extLst>
+            <a:extLst xmlns:a="http://schemas.openxmlformats.org/drawingml/2006/main">
               <a:ext uri="{FF2B5EF4-FFF2-40B4-BE49-F238E27FC236}">
                 <a16:creationId xmlns:a16="http://schemas.microsoft.com/office/drawing/2014/main" id="{1775661C-BAF3-4620-AB14-983E4B8E9E27}"/>
               </a:ext>
             </a:extLst>
           </p:cNvPr>
           <p:cNvSpPr>
-            <a:spLocks noGrp="1"/>
-          </p:cNvSpPr>
-          <p:nvPr/>
-        </p:nvSpPr>
-        <p:spPr>
-          <a:xfrm>
+            <a:spLocks xmlns:a="http://schemas.openxmlformats.org/drawingml/2006/main" noGrp="1"/>
+          </p:cNvSpPr>
+          <p:nvPr/>
+        </p:nvSpPr>
+        <p:spPr>
+          <a:xfrm xmlns:a="http://schemas.openxmlformats.org/drawingml/2006/main">
             <a:off x="7531682" y="1557772"/>
             <a:ext cx="95250" cy="0"/>
           </a:xfrm>
-          <a:prstGeom prst="line">
-            <a:avLst/>
-          </a:prstGeom>
-          <a:noFill/>
-          <a:ln w="17145">
+          <a:prstGeom xmlns:a="http://schemas.openxmlformats.org/drawingml/2006/main" prst="line">
+            <a:avLst/>
+          </a:prstGeom>
+          <a:noFill xmlns:a="http://schemas.openxmlformats.org/drawingml/2006/main"/>
+          <a:ln xmlns:a="http://schemas.openxmlformats.org/drawingml/2006/main" w="17145">
             <a:solidFill>
               <a:srgbClr val="17212B"/>
             </a:solidFill>
@@ -880,37 +1214,35 @@
           </a:ln>
         </p:spPr>
         <p:txBody>
-          <a:bodyPr/>
-          <a:lstStyle/>
-          <a:p>
-            <a:endParaRPr lang="en-CN"/>
-          </a:p>
+          <a:bodyPr xmlns:a="http://schemas.openxmlformats.org/drawingml/2006/main"/>
+          <a:lstStyle xmlns:a="http://schemas.openxmlformats.org/drawingml/2006/main"/>
+          <a:p xmlns:a="http://schemas.openxmlformats.org/drawingml/2006/main"/>
         </p:txBody>
       </p:sp>
       <p:sp>
         <p:nvSpPr>
           <p:cNvPr id="16" name="current-action-up">
-            <a:extLst>
+            <a:extLst xmlns:a="http://schemas.openxmlformats.org/drawingml/2006/main">
               <a:ext uri="{FF2B5EF4-FFF2-40B4-BE49-F238E27FC236}">
                 <a16:creationId xmlns:a16="http://schemas.microsoft.com/office/drawing/2014/main" id="{66A38DA5-1F4A-4603-8EC9-BAE8429062B4}"/>
               </a:ext>
             </a:extLst>
           </p:cNvPr>
           <p:cNvSpPr>
-            <a:spLocks noGrp="1"/>
-          </p:cNvSpPr>
-          <p:nvPr/>
-        </p:nvSpPr>
-        <p:spPr>
-          <a:xfrm>
+            <a:spLocks xmlns:a="http://schemas.openxmlformats.org/drawingml/2006/main" noGrp="1"/>
+          </p:cNvSpPr>
+          <p:nvPr/>
+        </p:nvSpPr>
+        <p:spPr>
+          <a:xfrm xmlns:a="http://schemas.openxmlformats.org/drawingml/2006/main">
             <a:off x="8504374" y="787403"/>
             <a:ext cx="0" cy="733425"/>
           </a:xfrm>
-          <a:prstGeom prst="line">
-            <a:avLst/>
-          </a:prstGeom>
-          <a:noFill/>
-          <a:ln w="17145">
+          <a:prstGeom xmlns:a="http://schemas.openxmlformats.org/drawingml/2006/main" prst="line">
+            <a:avLst/>
+          </a:prstGeom>
+          <a:noFill xmlns:a="http://schemas.openxmlformats.org/drawingml/2006/main"/>
+          <a:ln xmlns:a="http://schemas.openxmlformats.org/drawingml/2006/main" w="17145">
             <a:solidFill>
               <a:srgbClr val="B33A3A"/>
             </a:solidFill>
@@ -918,37 +1250,35 @@
           </a:ln>
         </p:spPr>
         <p:txBody>
-          <a:bodyPr/>
-          <a:lstStyle/>
-          <a:p>
-            <a:endParaRPr lang="en-CN"/>
-          </a:p>
+          <a:bodyPr xmlns:a="http://schemas.openxmlformats.org/drawingml/2006/main"/>
+          <a:lstStyle xmlns:a="http://schemas.openxmlformats.org/drawingml/2006/main"/>
+          <a:p xmlns:a="http://schemas.openxmlformats.org/drawingml/2006/main"/>
         </p:txBody>
       </p:sp>
       <p:sp>
         <p:nvSpPr>
           <p:cNvPr id="17" name="current-action-down">
-            <a:extLst>
+            <a:extLst xmlns:a="http://schemas.openxmlformats.org/drawingml/2006/main">
               <a:ext uri="{FF2B5EF4-FFF2-40B4-BE49-F238E27FC236}">
                 <a16:creationId xmlns:a16="http://schemas.microsoft.com/office/drawing/2014/main" id="{F5CACB05-BCF1-4E33-A8C2-932B0E08FE5E}"/>
               </a:ext>
             </a:extLst>
           </p:cNvPr>
           <p:cNvSpPr>
-            <a:spLocks noGrp="1"/>
-          </p:cNvSpPr>
-          <p:nvPr/>
-        </p:nvSpPr>
-        <p:spPr>
-          <a:xfrm>
+            <a:spLocks xmlns:a="http://schemas.openxmlformats.org/drawingml/2006/main" noGrp="1"/>
+          </p:cNvSpPr>
+          <p:nvPr/>
+        </p:nvSpPr>
+        <p:spPr>
+          <a:xfrm xmlns:a="http://schemas.openxmlformats.org/drawingml/2006/main">
             <a:off x="8504374" y="1520828"/>
             <a:ext cx="0" cy="914400"/>
           </a:xfrm>
-          <a:prstGeom prst="line">
-            <a:avLst/>
-          </a:prstGeom>
-          <a:noFill/>
-          <a:ln w="17145">
+          <a:prstGeom xmlns:a="http://schemas.openxmlformats.org/drawingml/2006/main" prst="line">
+            <a:avLst/>
+          </a:prstGeom>
+          <a:noFill xmlns:a="http://schemas.openxmlformats.org/drawingml/2006/main"/>
+          <a:ln xmlns:a="http://schemas.openxmlformats.org/drawingml/2006/main" w="17145">
             <a:solidFill>
               <a:srgbClr val="2E7D4F"/>
             </a:solidFill>
@@ -956,37 +1286,35 @@
           </a:ln>
         </p:spPr>
         <p:txBody>
-          <a:bodyPr/>
-          <a:lstStyle/>
-          <a:p>
-            <a:endParaRPr lang="en-CN"/>
-          </a:p>
+          <a:bodyPr xmlns:a="http://schemas.openxmlformats.org/drawingml/2006/main"/>
+          <a:lstStyle xmlns:a="http://schemas.openxmlformats.org/drawingml/2006/main"/>
+          <a:p xmlns:a="http://schemas.openxmlformats.org/drawingml/2006/main"/>
         </p:txBody>
       </p:sp>
       <p:sp>
         <p:nvSpPr>
           <p:cNvPr id="18" name="current-action-up-out">
-            <a:extLst>
+            <a:extLst xmlns:a="http://schemas.openxmlformats.org/drawingml/2006/main">
               <a:ext uri="{FF2B5EF4-FFF2-40B4-BE49-F238E27FC236}">
                 <a16:creationId xmlns:a16="http://schemas.microsoft.com/office/drawing/2014/main" id="{0B964772-7478-4E01-854B-73C755E6FBF2}"/>
               </a:ext>
             </a:extLst>
           </p:cNvPr>
           <p:cNvSpPr>
-            <a:spLocks noGrp="1"/>
-          </p:cNvSpPr>
-          <p:nvPr/>
-        </p:nvSpPr>
-        <p:spPr>
-          <a:xfrm>
+            <a:spLocks xmlns:a="http://schemas.openxmlformats.org/drawingml/2006/main" noGrp="1"/>
+          </p:cNvSpPr>
+          <p:nvPr/>
+        </p:nvSpPr>
+        <p:spPr>
+          <a:xfrm xmlns:a="http://schemas.openxmlformats.org/drawingml/2006/main">
             <a:off x="8504374" y="787403"/>
             <a:ext cx="114300" cy="0"/>
           </a:xfrm>
-          <a:prstGeom prst="line">
-            <a:avLst/>
-          </a:prstGeom>
-          <a:noFill/>
-          <a:ln w="17145">
+          <a:prstGeom xmlns:a="http://schemas.openxmlformats.org/drawingml/2006/main" prst="line">
+            <a:avLst/>
+          </a:prstGeom>
+          <a:noFill xmlns:a="http://schemas.openxmlformats.org/drawingml/2006/main"/>
+          <a:ln xmlns:a="http://schemas.openxmlformats.org/drawingml/2006/main" w="17145">
             <a:solidFill>
               <a:srgbClr val="B33A3A"/>
             </a:solidFill>
@@ -994,37 +1322,35 @@
           </a:ln>
         </p:spPr>
         <p:txBody>
-          <a:bodyPr/>
-          <a:lstStyle/>
-          <a:p>
-            <a:endParaRPr lang="en-CN"/>
-          </a:p>
+          <a:bodyPr xmlns:a="http://schemas.openxmlformats.org/drawingml/2006/main"/>
+          <a:lstStyle xmlns:a="http://schemas.openxmlformats.org/drawingml/2006/main"/>
+          <a:p xmlns:a="http://schemas.openxmlformats.org/drawingml/2006/main"/>
         </p:txBody>
       </p:sp>
       <p:sp>
         <p:nvSpPr>
           <p:cNvPr id="19" name="current-action-down-out">
-            <a:extLst>
+            <a:extLst xmlns:a="http://schemas.openxmlformats.org/drawingml/2006/main">
               <a:ext uri="{FF2B5EF4-FFF2-40B4-BE49-F238E27FC236}">
                 <a16:creationId xmlns:a16="http://schemas.microsoft.com/office/drawing/2014/main" id="{A7C9F19B-6660-477A-A6D8-F22016B7F5AC}"/>
               </a:ext>
             </a:extLst>
           </p:cNvPr>
           <p:cNvSpPr>
-            <a:spLocks noGrp="1"/>
-          </p:cNvSpPr>
-          <p:nvPr/>
-        </p:nvSpPr>
-        <p:spPr>
-          <a:xfrm>
+            <a:spLocks xmlns:a="http://schemas.openxmlformats.org/drawingml/2006/main" noGrp="1"/>
+          </p:cNvSpPr>
+          <p:nvPr/>
+        </p:nvSpPr>
+        <p:spPr>
+          <a:xfrm xmlns:a="http://schemas.openxmlformats.org/drawingml/2006/main">
             <a:off x="8504374" y="2435228"/>
             <a:ext cx="114300" cy="0"/>
           </a:xfrm>
-          <a:prstGeom prst="line">
-            <a:avLst/>
-          </a:prstGeom>
-          <a:noFill/>
-          <a:ln w="17145">
+          <a:prstGeom xmlns:a="http://schemas.openxmlformats.org/drawingml/2006/main" prst="line">
+            <a:avLst/>
+          </a:prstGeom>
+          <a:noFill xmlns:a="http://schemas.openxmlformats.org/drawingml/2006/main"/>
+          <a:ln xmlns:a="http://schemas.openxmlformats.org/drawingml/2006/main" w="17145">
             <a:solidFill>
               <a:srgbClr val="2E7D4F"/>
             </a:solidFill>
@@ -1032,39 +1358,37 @@
           </a:ln>
         </p:spPr>
         <p:txBody>
-          <a:bodyPr/>
-          <a:lstStyle/>
-          <a:p>
-            <a:endParaRPr lang="en-CN"/>
-          </a:p>
+          <a:bodyPr xmlns:a="http://schemas.openxmlformats.org/drawingml/2006/main"/>
+          <a:lstStyle xmlns:a="http://schemas.openxmlformats.org/drawingml/2006/main"/>
+          <a:p xmlns:a="http://schemas.openxmlformats.org/drawingml/2006/main"/>
         </p:txBody>
       </p:sp>
       <p:sp>
         <p:nvSpPr>
           <p:cNvPr id="20" name="recent-action-head">
-            <a:extLst>
+            <a:extLst xmlns:a="http://schemas.openxmlformats.org/drawingml/2006/main">
               <a:ext uri="{FF2B5EF4-FFF2-40B4-BE49-F238E27FC236}">
                 <a16:creationId xmlns:a16="http://schemas.microsoft.com/office/drawing/2014/main" id="{C0AFCB28-852B-4879-A60E-C2CFF8A67B15}"/>
               </a:ext>
             </a:extLst>
           </p:cNvPr>
           <p:cNvSpPr>
-            <a:spLocks noGrp="1"/>
-          </p:cNvSpPr>
-          <p:nvPr/>
-        </p:nvSpPr>
-        <p:spPr>
-          <a:xfrm rot="5400000">
+            <a:spLocks xmlns:a="http://schemas.openxmlformats.org/drawingml/2006/main" noGrp="1"/>
+          </p:cNvSpPr>
+          <p:nvPr/>
+        </p:nvSpPr>
+        <p:spPr>
+          <a:xfrm xmlns:a="http://schemas.openxmlformats.org/drawingml/2006/main" rot="5400000">
             <a:off x="8580574" y="749303"/>
             <a:ext cx="85725" cy="85725"/>
           </a:xfrm>
-          <a:prstGeom prst="triangle">
-            <a:avLst/>
-          </a:prstGeom>
-          <a:solidFill>
+          <a:prstGeom xmlns:a="http://schemas.openxmlformats.org/drawingml/2006/main" prst="triangle">
+            <a:avLst/>
+          </a:prstGeom>
+          <a:solidFill xmlns:a="http://schemas.openxmlformats.org/drawingml/2006/main">
             <a:srgbClr val="B33A3A"/>
           </a:solidFill>
-          <a:ln w="0">
+          <a:ln xmlns:a="http://schemas.openxmlformats.org/drawingml/2006/main" w="0">
             <a:solidFill>
               <a:srgbClr val="B33A3A"/>
             </a:solidFill>
@@ -1072,39 +1396,37 @@
           </a:ln>
         </p:spPr>
         <p:txBody>
-          <a:bodyPr/>
-          <a:lstStyle/>
-          <a:p>
-            <a:endParaRPr lang="en-CN"/>
-          </a:p>
+          <a:bodyPr xmlns:a="http://schemas.openxmlformats.org/drawingml/2006/main"/>
+          <a:lstStyle xmlns:a="http://schemas.openxmlformats.org/drawingml/2006/main"/>
+          <a:p xmlns:a="http://schemas.openxmlformats.org/drawingml/2006/main"/>
         </p:txBody>
       </p:sp>
       <p:sp>
         <p:nvSpPr>
           <p:cNvPr id="21" name="causal-action-head">
-            <a:extLst>
+            <a:extLst xmlns:a="http://schemas.openxmlformats.org/drawingml/2006/main">
               <a:ext uri="{FF2B5EF4-FFF2-40B4-BE49-F238E27FC236}">
                 <a16:creationId xmlns:a16="http://schemas.microsoft.com/office/drawing/2014/main" id="{104526E7-4EF6-41B0-82B1-A8EE4D624ED0}"/>
               </a:ext>
             </a:extLst>
           </p:cNvPr>
           <p:cNvSpPr>
-            <a:spLocks noGrp="1"/>
-          </p:cNvSpPr>
-          <p:nvPr/>
-        </p:nvSpPr>
-        <p:spPr>
-          <a:xfrm rot="5400000">
+            <a:spLocks xmlns:a="http://schemas.openxmlformats.org/drawingml/2006/main" noGrp="1"/>
+          </p:cNvSpPr>
+          <p:nvPr/>
+        </p:nvSpPr>
+        <p:spPr>
+          <a:xfrm xmlns:a="http://schemas.openxmlformats.org/drawingml/2006/main" rot="5400000">
             <a:off x="8580574" y="2397128"/>
             <a:ext cx="85725" cy="85725"/>
           </a:xfrm>
-          <a:prstGeom prst="triangle">
-            <a:avLst/>
-          </a:prstGeom>
-          <a:solidFill>
+          <a:prstGeom xmlns:a="http://schemas.openxmlformats.org/drawingml/2006/main" prst="triangle">
+            <a:avLst/>
+          </a:prstGeom>
+          <a:solidFill xmlns:a="http://schemas.openxmlformats.org/drawingml/2006/main">
             <a:srgbClr val="2E7D4F"/>
           </a:solidFill>
-          <a:ln w="0">
+          <a:ln xmlns:a="http://schemas.openxmlformats.org/drawingml/2006/main" w="0">
             <a:solidFill>
               <a:srgbClr val="2E7D4F"/>
             </a:solidFill>
@@ -1112,47 +1434,45 @@
           </a:ln>
         </p:spPr>
         <p:txBody>
-          <a:bodyPr/>
-          <a:lstStyle/>
-          <a:p>
-            <a:endParaRPr lang="en-CN"/>
-          </a:p>
+          <a:bodyPr xmlns:a="http://schemas.openxmlformats.org/drawingml/2006/main"/>
+          <a:lstStyle xmlns:a="http://schemas.openxmlformats.org/drawingml/2006/main"/>
+          <a:p xmlns:a="http://schemas.openxmlformats.org/drawingml/2006/main"/>
         </p:txBody>
       </p:sp>
       <p:sp>
         <p:nvSpPr>
           <p:cNvPr id="22" name="shared-prompt-title">
-            <a:extLst>
+            <a:extLst xmlns:a="http://schemas.openxmlformats.org/drawingml/2006/main">
               <a:ext uri="{FF2B5EF4-FFF2-40B4-BE49-F238E27FC236}">
                 <a16:creationId xmlns:a16="http://schemas.microsoft.com/office/drawing/2014/main" id="{A9B42570-4912-437A-94B9-495443017946}"/>
               </a:ext>
             </a:extLst>
           </p:cNvPr>
           <p:cNvSpPr>
-            <a:spLocks noGrp="1"/>
-          </p:cNvSpPr>
-          <p:nvPr/>
-        </p:nvSpPr>
-        <p:spPr>
-          <a:xfrm>
+            <a:spLocks xmlns:a="http://schemas.openxmlformats.org/drawingml/2006/main" noGrp="1"/>
+          </p:cNvSpPr>
+          <p:nvPr/>
+        </p:nvSpPr>
+        <p:spPr>
+          <a:xfrm xmlns:a="http://schemas.openxmlformats.org/drawingml/2006/main">
             <a:off x="285750" y="180975"/>
             <a:ext cx="1714500" cy="266700"/>
           </a:xfrm>
-          <a:prstGeom prst="rect">
-            <a:avLst/>
-          </a:prstGeom>
-          <a:noFill/>
-          <a:ln w="0">
+          <a:prstGeom xmlns:a="http://schemas.openxmlformats.org/drawingml/2006/main" prst="rect">
+            <a:avLst/>
+          </a:prstGeom>
+          <a:noFill xmlns:a="http://schemas.openxmlformats.org/drawingml/2006/main"/>
+          <a:ln xmlns:a="http://schemas.openxmlformats.org/drawingml/2006/main" w="0">
             <a:noFill/>
             <a:prstDash val="solid"/>
           </a:ln>
         </p:spPr>
         <p:txBody>
-          <a:bodyPr wrap="square" lIns="0" tIns="0" rIns="0" bIns="0" anchor="ctr">
-            <a:normAutofit/>
+          <a:bodyPr xmlns:a="http://schemas.openxmlformats.org/drawingml/2006/main" wrap="square" lIns="0" tIns="0" rIns="0" bIns="0" anchor="ctr">
+            <a:noAutofit/>
           </a:bodyPr>
-          <a:lstStyle/>
-          <a:p>
+          <a:lstStyle xmlns:a="http://schemas.openxmlformats.org/drawingml/2006/main"/>
+          <a:p xmlns:a="http://schemas.openxmlformats.org/drawingml/2006/main">
             <a:pPr algn="l">
               <a:lnSpc>
                 <a:spcPct val="95000"/>
@@ -1168,7 +1488,7 @@
               </a:defRPr>
             </a:pPr>
             <a:r>
-              <a:rPr sz="1575" b="1" dirty="0">
+              <a:rPr sz="1575" b="1">
                 <a:solidFill>
                   <a:srgbClr val="17212B"/>
                 </a:solidFill>
@@ -1179,7 +1499,7 @@
               <a:t>Shared </a:t>
             </a:r>
             <a:r>
-              <a:rPr lang="en-CN" sz="1575" b="1" dirty="0">
+              <a:rPr sz="1575" b="1">
                 <a:solidFill>
                   <a:srgbClr val="17212B"/>
                 </a:solidFill>
@@ -1189,51 +1509,43 @@
               </a:rPr>
               <a:t>Context</a:t>
             </a:r>
-            <a:endParaRPr sz="1575" b="1" dirty="0">
-              <a:solidFill>
-                <a:srgbClr val="17212B"/>
-              </a:solidFill>
-              <a:latin typeface="Arial"/>
-              <a:ea typeface="Arial"/>
-              <a:cs typeface="Arial"/>
-            </a:endParaRPr>
           </a:p>
         </p:txBody>
       </p:sp>
       <p:sp>
         <p:nvSpPr>
           <p:cNvPr id="23" name="goal-label">
-            <a:extLst>
+            <a:extLst xmlns:a="http://schemas.openxmlformats.org/drawingml/2006/main">
               <a:ext uri="{FF2B5EF4-FFF2-40B4-BE49-F238E27FC236}">
                 <a16:creationId xmlns:a16="http://schemas.microsoft.com/office/drawing/2014/main" id="{4EC935C0-3B1F-4F1A-8D32-17E067328E03}"/>
               </a:ext>
             </a:extLst>
           </p:cNvPr>
           <p:cNvSpPr>
-            <a:spLocks noGrp="1"/>
-          </p:cNvSpPr>
-          <p:nvPr/>
-        </p:nvSpPr>
-        <p:spPr>
-          <a:xfrm>
+            <a:spLocks xmlns:a="http://schemas.openxmlformats.org/drawingml/2006/main" noGrp="1"/>
+          </p:cNvSpPr>
+          <p:nvPr/>
+        </p:nvSpPr>
+        <p:spPr>
+          <a:xfrm xmlns:a="http://schemas.openxmlformats.org/drawingml/2006/main">
             <a:off x="285750" y="495300"/>
-            <a:ext cx="457200" cy="209550"/>
-          </a:xfrm>
-          <a:prstGeom prst="rect">
-            <a:avLst/>
-          </a:prstGeom>
-          <a:noFill/>
-          <a:ln w="0">
+            <a:ext cx="457200" cy="476250"/>
+          </a:xfrm>
+          <a:prstGeom xmlns:a="http://schemas.openxmlformats.org/drawingml/2006/main" prst="rect">
+            <a:avLst/>
+          </a:prstGeom>
+          <a:noFill xmlns:a="http://schemas.openxmlformats.org/drawingml/2006/main"/>
+          <a:ln xmlns:a="http://schemas.openxmlformats.org/drawingml/2006/main" w="0">
             <a:noFill/>
             <a:prstDash val="solid"/>
           </a:ln>
         </p:spPr>
         <p:txBody>
-          <a:bodyPr wrap="square" lIns="0" tIns="0" rIns="0" bIns="0" anchor="ctr">
-            <a:normAutofit/>
+          <a:bodyPr xmlns:a="http://schemas.openxmlformats.org/drawingml/2006/main" wrap="square" lIns="0" tIns="0" rIns="0" bIns="0" anchor="ctr">
+            <a:noAutofit/>
           </a:bodyPr>
-          <a:lstStyle/>
-          <a:p>
+          <a:lstStyle xmlns:a="http://schemas.openxmlformats.org/drawingml/2006/main"/>
+          <a:p xmlns:a="http://schemas.openxmlformats.org/drawingml/2006/main">
             <a:pPr algn="l">
               <a:lnSpc>
                 <a:spcPct val="95000"/>
@@ -1249,7 +1561,7 @@
               </a:defRPr>
             </a:pPr>
             <a:r>
-              <a:rPr sz="1200" b="1" dirty="0">
+              <a:rPr sz="1500" b="1">
                 <a:solidFill>
                   <a:srgbClr val="66727D"/>
                 </a:solidFill>
@@ -1265,37 +1577,37 @@
       <p:sp>
         <p:nvSpPr>
           <p:cNvPr id="24" name="goal-value">
-            <a:extLst>
+            <a:extLst xmlns:a="http://schemas.openxmlformats.org/drawingml/2006/main">
               <a:ext uri="{FF2B5EF4-FFF2-40B4-BE49-F238E27FC236}">
                 <a16:creationId xmlns:a16="http://schemas.microsoft.com/office/drawing/2014/main" id="{29F64F0A-A4FE-415C-AE00-6DA48F0E8345}"/>
               </a:ext>
             </a:extLst>
           </p:cNvPr>
           <p:cNvSpPr>
-            <a:spLocks noGrp="1"/>
-          </p:cNvSpPr>
-          <p:nvPr/>
-        </p:nvSpPr>
-        <p:spPr>
-          <a:xfrm>
-            <a:off x="781050" y="495300"/>
-            <a:ext cx="2714625" cy="209550"/>
-          </a:xfrm>
-          <a:prstGeom prst="rect">
-            <a:avLst/>
-          </a:prstGeom>
-          <a:noFill/>
-          <a:ln w="0">
+            <a:spLocks xmlns:a="http://schemas.openxmlformats.org/drawingml/2006/main" noGrp="1"/>
+          </p:cNvSpPr>
+          <p:nvPr/>
+        </p:nvSpPr>
+        <p:spPr>
+          <a:xfrm xmlns:a="http://schemas.openxmlformats.org/drawingml/2006/main">
+            <a:off x="781050" y="476250"/>
+            <a:ext cx="3143250" cy="495300"/>
+          </a:xfrm>
+          <a:prstGeom xmlns:a="http://schemas.openxmlformats.org/drawingml/2006/main" prst="rect">
+            <a:avLst/>
+          </a:prstGeom>
+          <a:noFill xmlns:a="http://schemas.openxmlformats.org/drawingml/2006/main"/>
+          <a:ln xmlns:a="http://schemas.openxmlformats.org/drawingml/2006/main" w="0">
             <a:noFill/>
             <a:prstDash val="solid"/>
           </a:ln>
         </p:spPr>
         <p:txBody>
-          <a:bodyPr wrap="square" lIns="0" tIns="0" rIns="0" bIns="0" anchor="ctr">
-            <a:normAutofit/>
+          <a:bodyPr xmlns:a="http://schemas.openxmlformats.org/drawingml/2006/main" wrap="square" lIns="0" tIns="0" rIns="0" bIns="0" anchor="ctr">
+            <a:noAutofit/>
           </a:bodyPr>
-          <a:lstStyle/>
-          <a:p>
+          <a:lstStyle xmlns:a="http://schemas.openxmlformats.org/drawingml/2006/main"/>
+          <a:p xmlns:a="http://schemas.openxmlformats.org/drawingml/2006/main">
             <a:pPr algn="l">
               <a:lnSpc>
                 <a:spcPct val="95000"/>
@@ -1311,7 +1623,7 @@
               </a:defRPr>
             </a:pPr>
             <a:r>
-              <a:rPr sz="1200" b="1" dirty="0">
+              <a:rPr sz="1500" b="1">
                 <a:solidFill>
                   <a:srgbClr val="17212B"/>
                 </a:solidFill>
@@ -1319,7 +1631,30 @@
                 <a:ea typeface="Arial"/>
                 <a:cs typeface="Arial"/>
               </a:rPr>
-              <a:t>pending shipment  →  SMS reminder</a:t>
+              <a:t>pending shipment</a:t>
+            </a:r>
+            <a:r>
+              <a:rPr sz="1500" b="1">
+                <a:solidFill>
+                  <a:srgbClr val="17212B"/>
+                </a:solidFill>
+                <a:latin typeface="Arial"/>
+                <a:ea typeface="Arial"/>
+                <a:cs typeface="Arial"/>
+              </a:rPr>
+              <a:t> →
+</a:t>
+            </a:r>
+            <a:r>
+              <a:rPr sz="1500" b="1">
+                <a:solidFill>
+                  <a:srgbClr val="17212B"/>
+                </a:solidFill>
+                <a:latin typeface="Arial"/>
+                <a:ea typeface="Arial"/>
+                <a:cs typeface="Arial"/>
+              </a:rPr>
+              <a:t>SMS reminder</a:t>
             </a:r>
           </a:p>
         </p:txBody>
@@ -1327,37 +1662,37 @@
       <p:sp>
         <p:nvSpPr>
           <p:cNvPr id="25" name="trace-title">
-            <a:extLst>
+            <a:extLst xmlns:a="http://schemas.openxmlformats.org/drawingml/2006/main">
               <a:ext uri="{FF2B5EF4-FFF2-40B4-BE49-F238E27FC236}">
                 <a16:creationId xmlns:a16="http://schemas.microsoft.com/office/drawing/2014/main" id="{90C432F5-CBEF-4448-9807-CE019EC563F5}"/>
               </a:ext>
             </a:extLst>
           </p:cNvPr>
           <p:cNvSpPr>
-            <a:spLocks noGrp="1"/>
-          </p:cNvSpPr>
-          <p:nvPr/>
-        </p:nvSpPr>
-        <p:spPr>
-          <a:xfrm>
-            <a:off x="285750" y="800100"/>
-            <a:ext cx="2000250" cy="238125"/>
-          </a:xfrm>
-          <a:prstGeom prst="rect">
-            <a:avLst/>
-          </a:prstGeom>
-          <a:noFill/>
-          <a:ln w="0">
+            <a:spLocks xmlns:a="http://schemas.openxmlformats.org/drawingml/2006/main" noGrp="1"/>
+          </p:cNvSpPr>
+          <p:nvPr/>
+        </p:nvSpPr>
+        <p:spPr>
+          <a:xfrm xmlns:a="http://schemas.openxmlformats.org/drawingml/2006/main">
+            <a:off x="285750" y="1057275"/>
+            <a:ext cx="2000250" cy="266700"/>
+          </a:xfrm>
+          <a:prstGeom xmlns:a="http://schemas.openxmlformats.org/drawingml/2006/main" prst="rect">
+            <a:avLst/>
+          </a:prstGeom>
+          <a:noFill xmlns:a="http://schemas.openxmlformats.org/drawingml/2006/main"/>
+          <a:ln xmlns:a="http://schemas.openxmlformats.org/drawingml/2006/main" w="0">
             <a:noFill/>
             <a:prstDash val="solid"/>
           </a:ln>
         </p:spPr>
         <p:txBody>
-          <a:bodyPr wrap="square" lIns="0" tIns="0" rIns="0" bIns="0" anchor="ctr">
-            <a:normAutofit/>
+          <a:bodyPr xmlns:a="http://schemas.openxmlformats.org/drawingml/2006/main" wrap="square" lIns="0" tIns="0" rIns="0" bIns="0" anchor="ctr">
+            <a:noAutofit/>
           </a:bodyPr>
-          <a:lstStyle/>
-          <a:p>
+          <a:lstStyle xmlns:a="http://schemas.openxmlformats.org/drawingml/2006/main"/>
+          <a:p xmlns:a="http://schemas.openxmlformats.org/drawingml/2006/main">
             <a:pPr algn="l">
               <a:lnSpc>
                 <a:spcPct val="95000"/>
@@ -1373,7 +1708,7 @@
               </a:defRPr>
             </a:pPr>
             <a:r>
-              <a:rPr sz="1350" b="1">
+              <a:rPr sz="1500" b="1">
                 <a:solidFill>
                   <a:srgbClr val="17212B"/>
                 </a:solidFill>
@@ -1389,29 +1724,29 @@
       <p:sp>
         <p:nvSpPr>
           <p:cNvPr id="26" name="trace-0-dot">
-            <a:extLst>
+            <a:extLst xmlns:a="http://schemas.openxmlformats.org/drawingml/2006/main">
               <a:ext uri="{FF2B5EF4-FFF2-40B4-BE49-F238E27FC236}">
                 <a16:creationId xmlns:a16="http://schemas.microsoft.com/office/drawing/2014/main" id="{75E99575-2A19-486A-88BC-2EAA7276B8DE}"/>
               </a:ext>
             </a:extLst>
           </p:cNvPr>
           <p:cNvSpPr>
-            <a:spLocks noGrp="1"/>
-          </p:cNvSpPr>
-          <p:nvPr/>
-        </p:nvSpPr>
-        <p:spPr>
-          <a:xfrm>
-            <a:off x="285750" y="1162050"/>
-            <a:ext cx="304800" cy="304800"/>
-          </a:xfrm>
-          <a:prstGeom prst="ellipse">
-            <a:avLst/>
-          </a:prstGeom>
-          <a:solidFill>
+            <a:spLocks xmlns:a="http://schemas.openxmlformats.org/drawingml/2006/main" noGrp="1"/>
+          </p:cNvSpPr>
+          <p:nvPr/>
+        </p:nvSpPr>
+        <p:spPr>
+          <a:xfrm xmlns:a="http://schemas.openxmlformats.org/drawingml/2006/main">
+            <a:off x="171450" y="1381125"/>
+            <a:ext cx="304800" cy="323850"/>
+          </a:xfrm>
+          <a:prstGeom xmlns:a="http://schemas.openxmlformats.org/drawingml/2006/main" prst="ellipse">
+            <a:avLst/>
+          </a:prstGeom>
+          <a:solidFill xmlns:a="http://schemas.openxmlformats.org/drawingml/2006/main">
             <a:srgbClr val="F3F5F6"/>
           </a:solidFill>
-          <a:ln w="14288">
+          <a:ln xmlns:a="http://schemas.openxmlformats.org/drawingml/2006/main" w="14288">
             <a:solidFill>
               <a:srgbClr val="66727D"/>
             </a:solidFill>
@@ -1419,12 +1754,13 @@
           </a:ln>
         </p:spPr>
         <p:txBody>
-          <a:bodyPr lIns="0" tIns="0" rIns="0" bIns="0" anchor="ctr">
-            <a:normAutofit/>
+          <a:bodyPr xmlns:a="http://schemas.openxmlformats.org/drawingml/2006/main" wrap="none" lIns="0" tIns="0" rIns="0" bIns="0" anchor="ctr">
+            <a:noAutofit/>
           </a:bodyPr>
-          <a:lstStyle/>
-          <a:p>
+          <a:lstStyle xmlns:a="http://schemas.openxmlformats.org/drawingml/2006/main"/>
+          <a:p xmlns:a="http://schemas.openxmlformats.org/drawingml/2006/main">
             <a:pPr algn="ctr">
+              <a:buNone/>
               <a:defRPr sz="975" b="1">
                 <a:solidFill>
                   <a:srgbClr val="66727D"/>
@@ -1435,7 +1771,7 @@
               </a:defRPr>
             </a:pPr>
             <a:r>
-              <a:rPr sz="975" b="1">
+              <a:rPr sz="1500" b="1">
                 <a:solidFill>
                   <a:srgbClr val="66727D"/>
                 </a:solidFill>
@@ -1451,29 +1787,29 @@
       <p:sp>
         <p:nvSpPr>
           <p:cNvPr id="27" name="trace-1-dot">
-            <a:extLst>
+            <a:extLst xmlns:a="http://schemas.openxmlformats.org/drawingml/2006/main">
               <a:ext uri="{FF2B5EF4-FFF2-40B4-BE49-F238E27FC236}">
                 <a16:creationId xmlns:a16="http://schemas.microsoft.com/office/drawing/2014/main" id="{1E009E3F-4ED4-4193-9B27-D5F41714634A}"/>
               </a:ext>
             </a:extLst>
           </p:cNvPr>
           <p:cNvSpPr>
-            <a:spLocks noGrp="1"/>
-          </p:cNvSpPr>
-          <p:nvPr/>
-        </p:nvSpPr>
-        <p:spPr>
-          <a:xfrm>
-            <a:off x="609600" y="1162050"/>
-            <a:ext cx="304800" cy="304800"/>
-          </a:xfrm>
-          <a:prstGeom prst="ellipse">
-            <a:avLst/>
-          </a:prstGeom>
-          <a:solidFill>
+            <a:spLocks xmlns:a="http://schemas.openxmlformats.org/drawingml/2006/main" noGrp="1"/>
+          </p:cNvSpPr>
+          <p:nvPr/>
+        </p:nvSpPr>
+        <p:spPr>
+          <a:xfrm xmlns:a="http://schemas.openxmlformats.org/drawingml/2006/main">
+            <a:off x="495300" y="1381125"/>
+            <a:ext cx="304800" cy="323850"/>
+          </a:xfrm>
+          <a:prstGeom xmlns:a="http://schemas.openxmlformats.org/drawingml/2006/main" prst="ellipse">
+            <a:avLst/>
+          </a:prstGeom>
+          <a:solidFill xmlns:a="http://schemas.openxmlformats.org/drawingml/2006/main">
             <a:srgbClr val="F3F5F6"/>
           </a:solidFill>
-          <a:ln w="14288">
+          <a:ln xmlns:a="http://schemas.openxmlformats.org/drawingml/2006/main" w="14288">
             <a:solidFill>
               <a:srgbClr val="66727D"/>
             </a:solidFill>
@@ -1481,12 +1817,13 @@
           </a:ln>
         </p:spPr>
         <p:txBody>
-          <a:bodyPr lIns="0" tIns="0" rIns="0" bIns="0" anchor="ctr">
-            <a:normAutofit/>
+          <a:bodyPr xmlns:a="http://schemas.openxmlformats.org/drawingml/2006/main" wrap="none" lIns="0" tIns="0" rIns="0" bIns="0" anchor="ctr">
+            <a:noAutofit/>
           </a:bodyPr>
-          <a:lstStyle/>
-          <a:p>
+          <a:lstStyle xmlns:a="http://schemas.openxmlformats.org/drawingml/2006/main"/>
+          <a:p xmlns:a="http://schemas.openxmlformats.org/drawingml/2006/main">
             <a:pPr algn="ctr">
+              <a:buNone/>
               <a:defRPr sz="975" b="1">
                 <a:solidFill>
                   <a:srgbClr val="66727D"/>
@@ -1497,7 +1834,7 @@
               </a:defRPr>
             </a:pPr>
             <a:r>
-              <a:rPr sz="975" b="1">
+              <a:rPr sz="1500" b="1">
                 <a:solidFill>
                   <a:srgbClr val="66727D"/>
                 </a:solidFill>
@@ -1513,29 +1850,29 @@
       <p:sp>
         <p:nvSpPr>
           <p:cNvPr id="28" name="trace-2-dot">
-            <a:extLst>
+            <a:extLst xmlns:a="http://schemas.openxmlformats.org/drawingml/2006/main">
               <a:ext uri="{FF2B5EF4-FFF2-40B4-BE49-F238E27FC236}">
                 <a16:creationId xmlns:a16="http://schemas.microsoft.com/office/drawing/2014/main" id="{855D64C7-1313-407D-8595-E111EDC58AC0}"/>
               </a:ext>
             </a:extLst>
           </p:cNvPr>
           <p:cNvSpPr>
-            <a:spLocks noGrp="1"/>
-          </p:cNvSpPr>
-          <p:nvPr/>
-        </p:nvSpPr>
-        <p:spPr>
-          <a:xfrm>
-            <a:off x="933450" y="1162050"/>
-            <a:ext cx="304800" cy="304800"/>
-          </a:xfrm>
-          <a:prstGeom prst="ellipse">
-            <a:avLst/>
-          </a:prstGeom>
-          <a:solidFill>
+            <a:spLocks xmlns:a="http://schemas.openxmlformats.org/drawingml/2006/main" noGrp="1"/>
+          </p:cNvSpPr>
+          <p:nvPr/>
+        </p:nvSpPr>
+        <p:spPr>
+          <a:xfrm xmlns:a="http://schemas.openxmlformats.org/drawingml/2006/main">
+            <a:off x="819150" y="1381125"/>
+            <a:ext cx="304800" cy="323850"/>
+          </a:xfrm>
+          <a:prstGeom xmlns:a="http://schemas.openxmlformats.org/drawingml/2006/main" prst="ellipse">
+            <a:avLst/>
+          </a:prstGeom>
+          <a:solidFill xmlns:a="http://schemas.openxmlformats.org/drawingml/2006/main">
             <a:srgbClr val="F3F5F6"/>
           </a:solidFill>
-          <a:ln w="14288">
+          <a:ln xmlns:a="http://schemas.openxmlformats.org/drawingml/2006/main" w="14288">
             <a:solidFill>
               <a:srgbClr val="66727D"/>
             </a:solidFill>
@@ -1543,12 +1880,13 @@
           </a:ln>
         </p:spPr>
         <p:txBody>
-          <a:bodyPr lIns="0" tIns="0" rIns="0" bIns="0" anchor="ctr">
-            <a:normAutofit/>
+          <a:bodyPr xmlns:a="http://schemas.openxmlformats.org/drawingml/2006/main" wrap="none" lIns="0" tIns="0" rIns="0" bIns="0" anchor="ctr">
+            <a:noAutofit/>
           </a:bodyPr>
-          <a:lstStyle/>
-          <a:p>
+          <a:lstStyle xmlns:a="http://schemas.openxmlformats.org/drawingml/2006/main"/>
+          <a:p xmlns:a="http://schemas.openxmlformats.org/drawingml/2006/main">
             <a:pPr algn="ctr">
+              <a:buNone/>
               <a:defRPr sz="975" b="1">
                 <a:solidFill>
                   <a:srgbClr val="66727D"/>
@@ -1559,7 +1897,7 @@
               </a:defRPr>
             </a:pPr>
             <a:r>
-              <a:rPr sz="975" b="1">
+              <a:rPr sz="1500" b="1">
                 <a:solidFill>
                   <a:srgbClr val="66727D"/>
                 </a:solidFill>
@@ -1575,29 +1913,29 @@
       <p:sp>
         <p:nvSpPr>
           <p:cNvPr id="29" name="trace-3-dot">
-            <a:extLst>
+            <a:extLst xmlns:a="http://schemas.openxmlformats.org/drawingml/2006/main">
               <a:ext uri="{FF2B5EF4-FFF2-40B4-BE49-F238E27FC236}">
                 <a16:creationId xmlns:a16="http://schemas.microsoft.com/office/drawing/2014/main" id="{B4C7246A-2C40-4564-8599-1D3FD5705048}"/>
               </a:ext>
             </a:extLst>
           </p:cNvPr>
           <p:cNvSpPr>
-            <a:spLocks noGrp="1"/>
-          </p:cNvSpPr>
-          <p:nvPr/>
-        </p:nvSpPr>
-        <p:spPr>
-          <a:xfrm>
-            <a:off x="1257300" y="1162050"/>
-            <a:ext cx="304800" cy="304800"/>
-          </a:xfrm>
-          <a:prstGeom prst="ellipse">
-            <a:avLst/>
-          </a:prstGeom>
-          <a:solidFill>
+            <a:spLocks xmlns:a="http://schemas.openxmlformats.org/drawingml/2006/main" noGrp="1"/>
+          </p:cNvSpPr>
+          <p:nvPr/>
+        </p:nvSpPr>
+        <p:spPr>
+          <a:xfrm xmlns:a="http://schemas.openxmlformats.org/drawingml/2006/main">
+            <a:off x="1143000" y="1381125"/>
+            <a:ext cx="304800" cy="323850"/>
+          </a:xfrm>
+          <a:prstGeom xmlns:a="http://schemas.openxmlformats.org/drawingml/2006/main" prst="ellipse">
+            <a:avLst/>
+          </a:prstGeom>
+          <a:solidFill xmlns:a="http://schemas.openxmlformats.org/drawingml/2006/main">
             <a:srgbClr val="FFF1E7"/>
           </a:solidFill>
-          <a:ln w="14288">
+          <a:ln xmlns:a="http://schemas.openxmlformats.org/drawingml/2006/main" w="14288">
             <a:solidFill>
               <a:srgbClr val="C45A14"/>
             </a:solidFill>
@@ -1605,12 +1943,13 @@
           </a:ln>
         </p:spPr>
         <p:txBody>
-          <a:bodyPr lIns="0" tIns="0" rIns="0" bIns="0" anchor="ctr">
-            <a:normAutofit/>
+          <a:bodyPr xmlns:a="http://schemas.openxmlformats.org/drawingml/2006/main" wrap="none" lIns="0" tIns="0" rIns="0" bIns="0" anchor="ctr">
+            <a:noAutofit/>
           </a:bodyPr>
-          <a:lstStyle/>
-          <a:p>
+          <a:lstStyle xmlns:a="http://schemas.openxmlformats.org/drawingml/2006/main"/>
+          <a:p xmlns:a="http://schemas.openxmlformats.org/drawingml/2006/main">
             <a:pPr algn="ctr">
+              <a:buNone/>
               <a:defRPr sz="975" b="1">
                 <a:solidFill>
                   <a:srgbClr val="C45A14"/>
@@ -1621,7 +1960,7 @@
               </a:defRPr>
             </a:pPr>
             <a:r>
-              <a:rPr sz="975" b="1">
+              <a:rPr sz="1500" b="1">
                 <a:solidFill>
                   <a:srgbClr val="C45A14"/>
                 </a:solidFill>
@@ -1637,29 +1976,29 @@
       <p:sp>
         <p:nvSpPr>
           <p:cNvPr id="30" name="trace-4-dot">
-            <a:extLst>
+            <a:extLst xmlns:a="http://schemas.openxmlformats.org/drawingml/2006/main">
               <a:ext uri="{FF2B5EF4-FFF2-40B4-BE49-F238E27FC236}">
                 <a16:creationId xmlns:a16="http://schemas.microsoft.com/office/drawing/2014/main" id="{CADC5127-6A47-4CFA-8200-2DDBDD8B1128}"/>
               </a:ext>
             </a:extLst>
           </p:cNvPr>
           <p:cNvSpPr>
-            <a:spLocks noGrp="1"/>
-          </p:cNvSpPr>
-          <p:nvPr/>
-        </p:nvSpPr>
-        <p:spPr>
-          <a:xfrm>
-            <a:off x="1581150" y="1162050"/>
-            <a:ext cx="304800" cy="304800"/>
-          </a:xfrm>
-          <a:prstGeom prst="ellipse">
-            <a:avLst/>
-          </a:prstGeom>
-          <a:solidFill>
+            <a:spLocks xmlns:a="http://schemas.openxmlformats.org/drawingml/2006/main" noGrp="1"/>
+          </p:cNvSpPr>
+          <p:nvPr/>
+        </p:nvSpPr>
+        <p:spPr>
+          <a:xfrm xmlns:a="http://schemas.openxmlformats.org/drawingml/2006/main">
+            <a:off x="1466850" y="1381125"/>
+            <a:ext cx="304800" cy="323850"/>
+          </a:xfrm>
+          <a:prstGeom xmlns:a="http://schemas.openxmlformats.org/drawingml/2006/main" prst="ellipse">
+            <a:avLst/>
+          </a:prstGeom>
+          <a:solidFill xmlns:a="http://schemas.openxmlformats.org/drawingml/2006/main">
             <a:srgbClr val="F3F5F6"/>
           </a:solidFill>
-          <a:ln w="14288">
+          <a:ln xmlns:a="http://schemas.openxmlformats.org/drawingml/2006/main" w="14288">
             <a:solidFill>
               <a:srgbClr val="66727D"/>
             </a:solidFill>
@@ -1667,12 +2006,13 @@
           </a:ln>
         </p:spPr>
         <p:txBody>
-          <a:bodyPr lIns="0" tIns="0" rIns="0" bIns="0" anchor="ctr">
-            <a:normAutofit/>
+          <a:bodyPr xmlns:a="http://schemas.openxmlformats.org/drawingml/2006/main" wrap="none" lIns="0" tIns="0" rIns="0" bIns="0" anchor="ctr">
+            <a:noAutofit/>
           </a:bodyPr>
-          <a:lstStyle/>
-          <a:p>
+          <a:lstStyle xmlns:a="http://schemas.openxmlformats.org/drawingml/2006/main"/>
+          <a:p xmlns:a="http://schemas.openxmlformats.org/drawingml/2006/main">
             <a:pPr algn="ctr">
+              <a:buNone/>
               <a:defRPr sz="975" b="1">
                 <a:solidFill>
                   <a:srgbClr val="66727D"/>
@@ -1683,7 +2023,7 @@
               </a:defRPr>
             </a:pPr>
             <a:r>
-              <a:rPr sz="975" b="1">
+              <a:rPr sz="1500" b="1">
                 <a:solidFill>
                   <a:srgbClr val="66727D"/>
                 </a:solidFill>
@@ -1699,29 +2039,29 @@
       <p:sp>
         <p:nvSpPr>
           <p:cNvPr id="31" name="trace-5-dot">
-            <a:extLst>
+            <a:extLst xmlns:a="http://schemas.openxmlformats.org/drawingml/2006/main">
               <a:ext uri="{FF2B5EF4-FFF2-40B4-BE49-F238E27FC236}">
                 <a16:creationId xmlns:a16="http://schemas.microsoft.com/office/drawing/2014/main" id="{5FE98C78-CD80-40F4-AD7F-D829BF09503C}"/>
               </a:ext>
             </a:extLst>
           </p:cNvPr>
           <p:cNvSpPr>
-            <a:spLocks noGrp="1"/>
-          </p:cNvSpPr>
-          <p:nvPr/>
-        </p:nvSpPr>
-        <p:spPr>
-          <a:xfrm>
-            <a:off x="1905000" y="1162050"/>
-            <a:ext cx="304800" cy="304800"/>
-          </a:xfrm>
-          <a:prstGeom prst="ellipse">
-            <a:avLst/>
-          </a:prstGeom>
-          <a:solidFill>
+            <a:spLocks xmlns:a="http://schemas.openxmlformats.org/drawingml/2006/main" noGrp="1"/>
+          </p:cNvSpPr>
+          <p:nvPr/>
+        </p:nvSpPr>
+        <p:spPr>
+          <a:xfrm xmlns:a="http://schemas.openxmlformats.org/drawingml/2006/main">
+            <a:off x="1790700" y="1381125"/>
+            <a:ext cx="304800" cy="323850"/>
+          </a:xfrm>
+          <a:prstGeom xmlns:a="http://schemas.openxmlformats.org/drawingml/2006/main" prst="ellipse">
+            <a:avLst/>
+          </a:prstGeom>
+          <a:solidFill xmlns:a="http://schemas.openxmlformats.org/drawingml/2006/main">
             <a:srgbClr val="F3F5F6"/>
           </a:solidFill>
-          <a:ln w="14288">
+          <a:ln xmlns:a="http://schemas.openxmlformats.org/drawingml/2006/main" w="14288">
             <a:solidFill>
               <a:srgbClr val="66727D"/>
             </a:solidFill>
@@ -1729,12 +2069,13 @@
           </a:ln>
         </p:spPr>
         <p:txBody>
-          <a:bodyPr lIns="0" tIns="0" rIns="0" bIns="0" anchor="ctr">
-            <a:normAutofit/>
+          <a:bodyPr xmlns:a="http://schemas.openxmlformats.org/drawingml/2006/main" wrap="none" lIns="0" tIns="0" rIns="0" bIns="0" anchor="ctr">
+            <a:noAutofit/>
           </a:bodyPr>
-          <a:lstStyle/>
-          <a:p>
+          <a:lstStyle xmlns:a="http://schemas.openxmlformats.org/drawingml/2006/main"/>
+          <a:p xmlns:a="http://schemas.openxmlformats.org/drawingml/2006/main">
             <a:pPr algn="ctr">
+              <a:buNone/>
               <a:defRPr sz="975" b="1">
                 <a:solidFill>
                   <a:srgbClr val="66727D"/>
@@ -1745,7 +2086,7 @@
               </a:defRPr>
             </a:pPr>
             <a:r>
-              <a:rPr sz="975" b="1">
+              <a:rPr sz="1500" b="1">
                 <a:solidFill>
                   <a:srgbClr val="66727D"/>
                 </a:solidFill>
@@ -1761,29 +2102,29 @@
       <p:sp>
         <p:nvSpPr>
           <p:cNvPr id="32" name="trace-6-dot">
-            <a:extLst>
+            <a:extLst xmlns:a="http://schemas.openxmlformats.org/drawingml/2006/main">
               <a:ext uri="{FF2B5EF4-FFF2-40B4-BE49-F238E27FC236}">
                 <a16:creationId xmlns:a16="http://schemas.microsoft.com/office/drawing/2014/main" id="{6EBC596A-EB38-4378-8401-BAF3BCF78A6D}"/>
               </a:ext>
             </a:extLst>
           </p:cNvPr>
           <p:cNvSpPr>
-            <a:spLocks noGrp="1"/>
-          </p:cNvSpPr>
-          <p:nvPr/>
-        </p:nvSpPr>
-        <p:spPr>
-          <a:xfrm>
-            <a:off x="2228850" y="1162050"/>
-            <a:ext cx="304800" cy="304800"/>
-          </a:xfrm>
-          <a:prstGeom prst="ellipse">
-            <a:avLst/>
-          </a:prstGeom>
-          <a:solidFill>
+            <a:spLocks xmlns:a="http://schemas.openxmlformats.org/drawingml/2006/main" noGrp="1"/>
+          </p:cNvSpPr>
+          <p:nvPr/>
+        </p:nvSpPr>
+        <p:spPr>
+          <a:xfrm xmlns:a="http://schemas.openxmlformats.org/drawingml/2006/main">
+            <a:off x="2114550" y="1381125"/>
+            <a:ext cx="400050" cy="323850"/>
+          </a:xfrm>
+          <a:prstGeom xmlns:a="http://schemas.openxmlformats.org/drawingml/2006/main" prst="ellipse">
+            <a:avLst/>
+          </a:prstGeom>
+          <a:solidFill xmlns:a="http://schemas.openxmlformats.org/drawingml/2006/main">
             <a:srgbClr val="EAF3F8"/>
           </a:solidFill>
-          <a:ln w="14288">
+          <a:ln xmlns:a="http://schemas.openxmlformats.org/drawingml/2006/main" w="14288">
             <a:solidFill>
               <a:srgbClr val="2E6F9E"/>
             </a:solidFill>
@@ -1791,12 +2132,13 @@
           </a:ln>
         </p:spPr>
         <p:txBody>
-          <a:bodyPr lIns="0" tIns="0" rIns="0" bIns="0" anchor="ctr">
-            <a:normAutofit/>
+          <a:bodyPr xmlns:a="http://schemas.openxmlformats.org/drawingml/2006/main" wrap="none" lIns="0" tIns="0" rIns="0" bIns="0" anchor="ctr">
+            <a:noAutofit/>
           </a:bodyPr>
-          <a:lstStyle/>
-          <a:p>
+          <a:lstStyle xmlns:a="http://schemas.openxmlformats.org/drawingml/2006/main"/>
+          <a:p xmlns:a="http://schemas.openxmlformats.org/drawingml/2006/main">
             <a:pPr algn="ctr">
+              <a:buNone/>
               <a:defRPr sz="975" b="1">
                 <a:solidFill>
                   <a:srgbClr val="2E6F9E"/>
@@ -1807,7 +2149,7 @@
               </a:defRPr>
             </a:pPr>
             <a:r>
-              <a:rPr sz="975" b="1">
+              <a:rPr sz="1500" b="1">
                 <a:solidFill>
                   <a:srgbClr val="2E6F9E"/>
                 </a:solidFill>
@@ -1823,29 +2165,29 @@
       <p:sp>
         <p:nvSpPr>
           <p:cNvPr id="33" name="trace-7-dot">
-            <a:extLst>
+            <a:extLst xmlns:a="http://schemas.openxmlformats.org/drawingml/2006/main">
               <a:ext uri="{FF2B5EF4-FFF2-40B4-BE49-F238E27FC236}">
                 <a16:creationId xmlns:a16="http://schemas.microsoft.com/office/drawing/2014/main" id="{076144F2-1115-4D84-A24C-A6F3AB51ED57}"/>
               </a:ext>
             </a:extLst>
           </p:cNvPr>
           <p:cNvSpPr>
-            <a:spLocks noGrp="1"/>
-          </p:cNvSpPr>
-          <p:nvPr/>
-        </p:nvSpPr>
-        <p:spPr>
-          <a:xfrm>
-            <a:off x="2552700" y="1162050"/>
-            <a:ext cx="304800" cy="304800"/>
-          </a:xfrm>
-          <a:prstGeom prst="ellipse">
-            <a:avLst/>
-          </a:prstGeom>
-          <a:solidFill>
+            <a:spLocks xmlns:a="http://schemas.openxmlformats.org/drawingml/2006/main" noGrp="1"/>
+          </p:cNvSpPr>
+          <p:nvPr/>
+        </p:nvSpPr>
+        <p:spPr>
+          <a:xfrm xmlns:a="http://schemas.openxmlformats.org/drawingml/2006/main">
+            <a:off x="2533650" y="1381125"/>
+            <a:ext cx="400050" cy="323850"/>
+          </a:xfrm>
+          <a:prstGeom xmlns:a="http://schemas.openxmlformats.org/drawingml/2006/main" prst="ellipse">
+            <a:avLst/>
+          </a:prstGeom>
+          <a:solidFill xmlns:a="http://schemas.openxmlformats.org/drawingml/2006/main">
             <a:srgbClr val="EAF3F8"/>
           </a:solidFill>
-          <a:ln w="14288">
+          <a:ln xmlns:a="http://schemas.openxmlformats.org/drawingml/2006/main" w="14288">
             <a:solidFill>
               <a:srgbClr val="2E6F9E"/>
             </a:solidFill>
@@ -1853,12 +2195,13 @@
           </a:ln>
         </p:spPr>
         <p:txBody>
-          <a:bodyPr lIns="0" tIns="0" rIns="0" bIns="0" anchor="ctr">
-            <a:normAutofit/>
+          <a:bodyPr xmlns:a="http://schemas.openxmlformats.org/drawingml/2006/main" wrap="none" lIns="0" tIns="0" rIns="0" bIns="0" anchor="ctr">
+            <a:noAutofit/>
           </a:bodyPr>
-          <a:lstStyle/>
-          <a:p>
+          <a:lstStyle xmlns:a="http://schemas.openxmlformats.org/drawingml/2006/main"/>
+          <a:p xmlns:a="http://schemas.openxmlformats.org/drawingml/2006/main">
             <a:pPr algn="ctr">
+              <a:buNone/>
               <a:defRPr sz="975" b="1">
                 <a:solidFill>
                   <a:srgbClr val="2E6F9E"/>
@@ -1869,7 +2212,7 @@
               </a:defRPr>
             </a:pPr>
             <a:r>
-              <a:rPr sz="975" b="1">
+              <a:rPr sz="1500" b="1">
                 <a:solidFill>
                   <a:srgbClr val="2E6F9E"/>
                 </a:solidFill>
@@ -1885,29 +2228,29 @@
       <p:sp>
         <p:nvSpPr>
           <p:cNvPr id="34" name="trace-8-dot">
-            <a:extLst>
+            <a:extLst xmlns:a="http://schemas.openxmlformats.org/drawingml/2006/main">
               <a:ext uri="{FF2B5EF4-FFF2-40B4-BE49-F238E27FC236}">
                 <a16:creationId xmlns:a16="http://schemas.microsoft.com/office/drawing/2014/main" id="{8100205D-5BF4-40BF-A763-22DEFB770872}"/>
               </a:ext>
             </a:extLst>
           </p:cNvPr>
           <p:cNvSpPr>
-            <a:spLocks noGrp="1"/>
-          </p:cNvSpPr>
-          <p:nvPr/>
-        </p:nvSpPr>
-        <p:spPr>
-          <a:xfrm>
-            <a:off x="2876550" y="1162050"/>
-            <a:ext cx="304800" cy="304800"/>
-          </a:xfrm>
-          <a:prstGeom prst="ellipse">
-            <a:avLst/>
-          </a:prstGeom>
-          <a:solidFill>
+            <a:spLocks xmlns:a="http://schemas.openxmlformats.org/drawingml/2006/main" noGrp="1"/>
+          </p:cNvSpPr>
+          <p:nvPr/>
+        </p:nvSpPr>
+        <p:spPr>
+          <a:xfrm xmlns:a="http://schemas.openxmlformats.org/drawingml/2006/main">
+            <a:off x="2952750" y="1381125"/>
+            <a:ext cx="400050" cy="323850"/>
+          </a:xfrm>
+          <a:prstGeom xmlns:a="http://schemas.openxmlformats.org/drawingml/2006/main" prst="ellipse">
+            <a:avLst/>
+          </a:prstGeom>
+          <a:solidFill xmlns:a="http://schemas.openxmlformats.org/drawingml/2006/main">
             <a:srgbClr val="EAF3F8"/>
           </a:solidFill>
-          <a:ln w="14288">
+          <a:ln xmlns:a="http://schemas.openxmlformats.org/drawingml/2006/main" w="14288">
             <a:solidFill>
               <a:srgbClr val="2E6F9E"/>
             </a:solidFill>
@@ -1915,12 +2258,13 @@
           </a:ln>
         </p:spPr>
         <p:txBody>
-          <a:bodyPr lIns="0" tIns="0" rIns="0" bIns="0" anchor="ctr">
-            <a:normAutofit/>
+          <a:bodyPr xmlns:a="http://schemas.openxmlformats.org/drawingml/2006/main" wrap="none" lIns="0" tIns="0" rIns="0" bIns="0" anchor="ctr">
+            <a:noAutofit/>
           </a:bodyPr>
-          <a:lstStyle/>
-          <a:p>
+          <a:lstStyle xmlns:a="http://schemas.openxmlformats.org/drawingml/2006/main"/>
+          <a:p xmlns:a="http://schemas.openxmlformats.org/drawingml/2006/main">
             <a:pPr algn="ctr">
+              <a:buNone/>
               <a:defRPr sz="975" b="1">
                 <a:solidFill>
                   <a:srgbClr val="2E6F9E"/>
@@ -1931,7 +2275,7 @@
               </a:defRPr>
             </a:pPr>
             <a:r>
-              <a:rPr sz="975" b="1">
+              <a:rPr sz="1500" b="1">
                 <a:solidFill>
                   <a:srgbClr val="2E6F9E"/>
                 </a:solidFill>
@@ -1947,29 +2291,29 @@
       <p:sp>
         <p:nvSpPr>
           <p:cNvPr id="35" name="trace-9-dot">
-            <a:extLst>
+            <a:extLst xmlns:a="http://schemas.openxmlformats.org/drawingml/2006/main">
               <a:ext uri="{FF2B5EF4-FFF2-40B4-BE49-F238E27FC236}">
                 <a16:creationId xmlns:a16="http://schemas.microsoft.com/office/drawing/2014/main" id="{C7B39A8B-6B01-4C88-86A1-94CB177C1715}"/>
               </a:ext>
             </a:extLst>
           </p:cNvPr>
           <p:cNvSpPr>
-            <a:spLocks noGrp="1"/>
-          </p:cNvSpPr>
-          <p:nvPr/>
-        </p:nvSpPr>
-        <p:spPr>
-          <a:xfrm>
-            <a:off x="3200400" y="1162050"/>
-            <a:ext cx="304800" cy="304800"/>
-          </a:xfrm>
-          <a:prstGeom prst="ellipse">
-            <a:avLst/>
-          </a:prstGeom>
-          <a:solidFill>
+            <a:spLocks xmlns:a="http://schemas.openxmlformats.org/drawingml/2006/main" noGrp="1"/>
+          </p:cNvSpPr>
+          <p:nvPr/>
+        </p:nvSpPr>
+        <p:spPr>
+          <a:xfrm xmlns:a="http://schemas.openxmlformats.org/drawingml/2006/main">
+            <a:off x="3371850" y="1381125"/>
+            <a:ext cx="400050" cy="323850"/>
+          </a:xfrm>
+          <a:prstGeom xmlns:a="http://schemas.openxmlformats.org/drawingml/2006/main" prst="ellipse">
+            <a:avLst/>
+          </a:prstGeom>
+          <a:solidFill xmlns:a="http://schemas.openxmlformats.org/drawingml/2006/main">
             <a:srgbClr val="EAF3F8"/>
           </a:solidFill>
-          <a:ln w="14288">
+          <a:ln xmlns:a="http://schemas.openxmlformats.org/drawingml/2006/main" w="14288">
             <a:solidFill>
               <a:srgbClr val="2E6F9E"/>
             </a:solidFill>
@@ -1977,12 +2321,13 @@
           </a:ln>
         </p:spPr>
         <p:txBody>
-          <a:bodyPr lIns="0" tIns="0" rIns="0" bIns="0" anchor="ctr">
-            <a:normAutofit/>
+          <a:bodyPr xmlns:a="http://schemas.openxmlformats.org/drawingml/2006/main" wrap="none" lIns="0" tIns="0" rIns="0" bIns="0" anchor="ctr">
+            <a:noAutofit/>
           </a:bodyPr>
-          <a:lstStyle/>
-          <a:p>
+          <a:lstStyle xmlns:a="http://schemas.openxmlformats.org/drawingml/2006/main"/>
+          <a:p xmlns:a="http://schemas.openxmlformats.org/drawingml/2006/main">
             <a:pPr algn="ctr">
+              <a:buNone/>
               <a:defRPr sz="975" b="1">
                 <a:solidFill>
                   <a:srgbClr val="2E6F9E"/>
@@ -1993,7 +2338,7 @@
               </a:defRPr>
             </a:pPr>
             <a:r>
-              <a:rPr sz="975" b="1">
+              <a:rPr sz="1500" b="1">
                 <a:solidFill>
                   <a:srgbClr val="2E6F9E"/>
                 </a:solidFill>
@@ -2009,37 +2354,37 @@
       <p:sp>
         <p:nvSpPr>
           <p:cNvPr id="36" name="summary-e6-id">
-            <a:extLst>
+            <a:extLst xmlns:a="http://schemas.openxmlformats.org/drawingml/2006/main">
               <a:ext uri="{FF2B5EF4-FFF2-40B4-BE49-F238E27FC236}">
                 <a16:creationId xmlns:a16="http://schemas.microsoft.com/office/drawing/2014/main" id="{14C95885-F8AF-4F31-91E3-9900FFCE649E}"/>
               </a:ext>
             </a:extLst>
           </p:cNvPr>
           <p:cNvSpPr>
-            <a:spLocks noGrp="1"/>
-          </p:cNvSpPr>
-          <p:nvPr/>
-        </p:nvSpPr>
-        <p:spPr>
-          <a:xfrm>
-            <a:off x="304800" y="1581150"/>
-            <a:ext cx="342900" cy="190500"/>
-          </a:xfrm>
-          <a:prstGeom prst="rect">
-            <a:avLst/>
-          </a:prstGeom>
-          <a:noFill/>
-          <a:ln w="0">
+            <a:spLocks xmlns:a="http://schemas.openxmlformats.org/drawingml/2006/main" noGrp="1"/>
+          </p:cNvSpPr>
+          <p:nvPr/>
+        </p:nvSpPr>
+        <p:spPr>
+          <a:xfrm xmlns:a="http://schemas.openxmlformats.org/drawingml/2006/main">
+            <a:off x="304800" y="1809750"/>
+            <a:ext cx="342900" cy="247650"/>
+          </a:xfrm>
+          <a:prstGeom xmlns:a="http://schemas.openxmlformats.org/drawingml/2006/main" prst="rect">
+            <a:avLst/>
+          </a:prstGeom>
+          <a:noFill xmlns:a="http://schemas.openxmlformats.org/drawingml/2006/main"/>
+          <a:ln xmlns:a="http://schemas.openxmlformats.org/drawingml/2006/main" w="0">
             <a:noFill/>
             <a:prstDash val="solid"/>
           </a:ln>
         </p:spPr>
         <p:txBody>
-          <a:bodyPr wrap="square" lIns="0" tIns="0" rIns="0" bIns="0" anchor="ctr">
-            <a:normAutofit/>
+          <a:bodyPr xmlns:a="http://schemas.openxmlformats.org/drawingml/2006/main" wrap="square" lIns="0" tIns="0" rIns="0" bIns="0" anchor="ctr">
+            <a:noAutofit/>
           </a:bodyPr>
-          <a:lstStyle/>
-          <a:p>
+          <a:lstStyle xmlns:a="http://schemas.openxmlformats.org/drawingml/2006/main"/>
+          <a:p xmlns:a="http://schemas.openxmlformats.org/drawingml/2006/main">
             <a:pPr algn="l">
               <a:lnSpc>
                 <a:spcPct val="95000"/>
@@ -2055,7 +2400,7 @@
               </a:defRPr>
             </a:pPr>
             <a:r>
-              <a:rPr sz="1200" b="1">
+              <a:rPr sz="1500" b="1">
                 <a:solidFill>
                   <a:srgbClr val="66727D"/>
                 </a:solidFill>
@@ -2071,37 +2416,37 @@
       <p:sp>
         <p:nvSpPr>
           <p:cNvPr id="37" name="summary-e6-text">
-            <a:extLst>
+            <a:extLst xmlns:a="http://schemas.openxmlformats.org/drawingml/2006/main">
               <a:ext uri="{FF2B5EF4-FFF2-40B4-BE49-F238E27FC236}">
                 <a16:creationId xmlns:a16="http://schemas.microsoft.com/office/drawing/2014/main" id="{29724644-62B5-4C9E-BD6A-467BBA0CF6C3}"/>
               </a:ext>
             </a:extLst>
           </p:cNvPr>
           <p:cNvSpPr>
-            <a:spLocks noGrp="1"/>
-          </p:cNvSpPr>
-          <p:nvPr/>
-        </p:nvSpPr>
-        <p:spPr>
-          <a:xfrm>
-            <a:off x="666750" y="1581150"/>
-            <a:ext cx="2190750" cy="190500"/>
-          </a:xfrm>
-          <a:prstGeom prst="rect">
-            <a:avLst/>
-          </a:prstGeom>
-          <a:noFill/>
-          <a:ln w="0">
+            <a:spLocks xmlns:a="http://schemas.openxmlformats.org/drawingml/2006/main" noGrp="1"/>
+          </p:cNvSpPr>
+          <p:nvPr/>
+        </p:nvSpPr>
+        <p:spPr>
+          <a:xfrm xmlns:a="http://schemas.openxmlformats.org/drawingml/2006/main">
+            <a:off x="666750" y="1809750"/>
+            <a:ext cx="2190750" cy="247650"/>
+          </a:xfrm>
+          <a:prstGeom xmlns:a="http://schemas.openxmlformats.org/drawingml/2006/main" prst="rect">
+            <a:avLst/>
+          </a:prstGeom>
+          <a:noFill xmlns:a="http://schemas.openxmlformats.org/drawingml/2006/main"/>
+          <a:ln xmlns:a="http://schemas.openxmlformats.org/drawingml/2006/main" w="0">
             <a:noFill/>
             <a:prstDash val="solid"/>
           </a:ln>
         </p:spPr>
         <p:txBody>
-          <a:bodyPr wrap="square" lIns="0" tIns="0" rIns="0" bIns="0" anchor="ctr">
-            <a:normAutofit/>
+          <a:bodyPr xmlns:a="http://schemas.openxmlformats.org/drawingml/2006/main" wrap="square" lIns="0" tIns="0" rIns="0" bIns="0" anchor="ctr">
+            <a:noAutofit/>
           </a:bodyPr>
-          <a:lstStyle/>
-          <a:p>
+          <a:lstStyle xmlns:a="http://schemas.openxmlformats.org/drawingml/2006/main"/>
+          <a:p xmlns:a="http://schemas.openxmlformats.org/drawingml/2006/main">
             <a:pPr algn="l">
               <a:lnSpc>
                 <a:spcPct val="95000"/>
@@ -2117,7 +2462,7 @@
               </a:defRPr>
             </a:pPr>
             <a:r>
-              <a:rPr sz="1200" b="0">
+              <a:rPr sz="1500" b="0">
                 <a:solidFill>
                   <a:srgbClr val="66727D"/>
                 </a:solidFill>
@@ -2133,37 +2478,37 @@
       <p:sp>
         <p:nvSpPr>
           <p:cNvPr id="38" name="summary-e7-id">
-            <a:extLst>
+            <a:extLst xmlns:a="http://schemas.openxmlformats.org/drawingml/2006/main">
               <a:ext uri="{FF2B5EF4-FFF2-40B4-BE49-F238E27FC236}">
                 <a16:creationId xmlns:a16="http://schemas.microsoft.com/office/drawing/2014/main" id="{0B04DDBB-7DBD-4C3F-8FE5-52D436E61D3D}"/>
               </a:ext>
             </a:extLst>
           </p:cNvPr>
           <p:cNvSpPr>
-            <a:spLocks noGrp="1"/>
-          </p:cNvSpPr>
-          <p:nvPr/>
-        </p:nvSpPr>
-        <p:spPr>
-          <a:xfrm>
-            <a:off x="304800" y="1838325"/>
-            <a:ext cx="342900" cy="190500"/>
-          </a:xfrm>
-          <a:prstGeom prst="rect">
-            <a:avLst/>
-          </a:prstGeom>
-          <a:noFill/>
-          <a:ln w="0">
+            <a:spLocks xmlns:a="http://schemas.openxmlformats.org/drawingml/2006/main" noGrp="1"/>
+          </p:cNvSpPr>
+          <p:nvPr/>
+        </p:nvSpPr>
+        <p:spPr>
+          <a:xfrm xmlns:a="http://schemas.openxmlformats.org/drawingml/2006/main">
+            <a:off x="304800" y="2066925"/>
+            <a:ext cx="342900" cy="247650"/>
+          </a:xfrm>
+          <a:prstGeom xmlns:a="http://schemas.openxmlformats.org/drawingml/2006/main" prst="rect">
+            <a:avLst/>
+          </a:prstGeom>
+          <a:noFill xmlns:a="http://schemas.openxmlformats.org/drawingml/2006/main"/>
+          <a:ln xmlns:a="http://schemas.openxmlformats.org/drawingml/2006/main" w="0">
             <a:noFill/>
             <a:prstDash val="solid"/>
           </a:ln>
         </p:spPr>
         <p:txBody>
-          <a:bodyPr wrap="square" lIns="0" tIns="0" rIns="0" bIns="0" anchor="ctr">
-            <a:normAutofit/>
+          <a:bodyPr xmlns:a="http://schemas.openxmlformats.org/drawingml/2006/main" wrap="square" lIns="0" tIns="0" rIns="0" bIns="0" anchor="ctr">
+            <a:noAutofit/>
           </a:bodyPr>
-          <a:lstStyle/>
-          <a:p>
+          <a:lstStyle xmlns:a="http://schemas.openxmlformats.org/drawingml/2006/main"/>
+          <a:p xmlns:a="http://schemas.openxmlformats.org/drawingml/2006/main">
             <a:pPr algn="l">
               <a:lnSpc>
                 <a:spcPct val="95000"/>
@@ -2179,7 +2524,7 @@
               </a:defRPr>
             </a:pPr>
             <a:r>
-              <a:rPr sz="1200" b="1">
+              <a:rPr sz="1500" b="1">
                 <a:solidFill>
                   <a:srgbClr val="C45A14"/>
                 </a:solidFill>
@@ -2195,37 +2540,37 @@
       <p:sp>
         <p:nvSpPr>
           <p:cNvPr id="39" name="summary-e7-text">
-            <a:extLst>
+            <a:extLst xmlns:a="http://schemas.openxmlformats.org/drawingml/2006/main">
               <a:ext uri="{FF2B5EF4-FFF2-40B4-BE49-F238E27FC236}">
                 <a16:creationId xmlns:a16="http://schemas.microsoft.com/office/drawing/2014/main" id="{845BB38F-F39C-481E-A09D-B133DC44E2C6}"/>
               </a:ext>
             </a:extLst>
           </p:cNvPr>
           <p:cNvSpPr>
-            <a:spLocks noGrp="1"/>
-          </p:cNvSpPr>
-          <p:nvPr/>
-        </p:nvSpPr>
-        <p:spPr>
-          <a:xfrm>
-            <a:off x="666750" y="1838325"/>
-            <a:ext cx="2190750" cy="190500"/>
-          </a:xfrm>
-          <a:prstGeom prst="rect">
-            <a:avLst/>
-          </a:prstGeom>
-          <a:noFill/>
-          <a:ln w="0">
+            <a:spLocks xmlns:a="http://schemas.openxmlformats.org/drawingml/2006/main" noGrp="1"/>
+          </p:cNvSpPr>
+          <p:nvPr/>
+        </p:nvSpPr>
+        <p:spPr>
+          <a:xfrm xmlns:a="http://schemas.openxmlformats.org/drawingml/2006/main">
+            <a:off x="666750" y="2066925"/>
+            <a:ext cx="2190750" cy="247650"/>
+          </a:xfrm>
+          <a:prstGeom xmlns:a="http://schemas.openxmlformats.org/drawingml/2006/main" prst="rect">
+            <a:avLst/>
+          </a:prstGeom>
+          <a:noFill xmlns:a="http://schemas.openxmlformats.org/drawingml/2006/main"/>
+          <a:ln xmlns:a="http://schemas.openxmlformats.org/drawingml/2006/main" w="0">
             <a:noFill/>
             <a:prstDash val="solid"/>
           </a:ln>
         </p:spPr>
         <p:txBody>
-          <a:bodyPr wrap="square" lIns="0" tIns="0" rIns="0" bIns="0" anchor="ctr">
-            <a:normAutofit/>
+          <a:bodyPr xmlns:a="http://schemas.openxmlformats.org/drawingml/2006/main" wrap="square" lIns="0" tIns="0" rIns="0" bIns="0" anchor="ctr">
+            <a:noAutofit/>
           </a:bodyPr>
-          <a:lstStyle/>
-          <a:p>
+          <a:lstStyle xmlns:a="http://schemas.openxmlformats.org/drawingml/2006/main"/>
+          <a:p xmlns:a="http://schemas.openxmlformats.org/drawingml/2006/main">
             <a:pPr algn="l">
               <a:lnSpc>
                 <a:spcPct val="95000"/>
@@ -2241,7 +2586,7 @@
               </a:defRPr>
             </a:pPr>
             <a:r>
-              <a:rPr sz="1200" b="0">
+              <a:rPr sz="1500" b="0">
                 <a:solidFill>
                   <a:srgbClr val="66727D"/>
                 </a:solidFill>
@@ -2257,37 +2602,37 @@
       <p:sp>
         <p:nvSpPr>
           <p:cNvPr id="40" name="summary-e8-id">
-            <a:extLst>
+            <a:extLst xmlns:a="http://schemas.openxmlformats.org/drawingml/2006/main">
               <a:ext uri="{FF2B5EF4-FFF2-40B4-BE49-F238E27FC236}">
                 <a16:creationId xmlns:a16="http://schemas.microsoft.com/office/drawing/2014/main" id="{82ED315B-F591-45B4-B1C9-14BE91521837}"/>
               </a:ext>
             </a:extLst>
           </p:cNvPr>
           <p:cNvSpPr>
-            <a:spLocks noGrp="1"/>
-          </p:cNvSpPr>
-          <p:nvPr/>
-        </p:nvSpPr>
-        <p:spPr>
-          <a:xfrm>
-            <a:off x="304800" y="2095500"/>
-            <a:ext cx="342900" cy="190500"/>
-          </a:xfrm>
-          <a:prstGeom prst="rect">
-            <a:avLst/>
-          </a:prstGeom>
-          <a:noFill/>
-          <a:ln w="0">
+            <a:spLocks xmlns:a="http://schemas.openxmlformats.org/drawingml/2006/main" noGrp="1"/>
+          </p:cNvSpPr>
+          <p:nvPr/>
+        </p:nvSpPr>
+        <p:spPr>
+          <a:xfrm xmlns:a="http://schemas.openxmlformats.org/drawingml/2006/main">
+            <a:off x="304800" y="2324100"/>
+            <a:ext cx="342900" cy="247650"/>
+          </a:xfrm>
+          <a:prstGeom xmlns:a="http://schemas.openxmlformats.org/drawingml/2006/main" prst="rect">
+            <a:avLst/>
+          </a:prstGeom>
+          <a:noFill xmlns:a="http://schemas.openxmlformats.org/drawingml/2006/main"/>
+          <a:ln xmlns:a="http://schemas.openxmlformats.org/drawingml/2006/main" w="0">
             <a:noFill/>
             <a:prstDash val="solid"/>
           </a:ln>
         </p:spPr>
         <p:txBody>
-          <a:bodyPr wrap="square" lIns="0" tIns="0" rIns="0" bIns="0" anchor="ctr">
-            <a:normAutofit/>
+          <a:bodyPr xmlns:a="http://schemas.openxmlformats.org/drawingml/2006/main" wrap="square" lIns="0" tIns="0" rIns="0" bIns="0" anchor="ctr">
+            <a:noAutofit/>
           </a:bodyPr>
-          <a:lstStyle/>
-          <a:p>
+          <a:lstStyle xmlns:a="http://schemas.openxmlformats.org/drawingml/2006/main"/>
+          <a:p xmlns:a="http://schemas.openxmlformats.org/drawingml/2006/main">
             <a:pPr algn="l">
               <a:lnSpc>
                 <a:spcPct val="95000"/>
@@ -2303,7 +2648,7 @@
               </a:defRPr>
             </a:pPr>
             <a:r>
-              <a:rPr sz="1200" b="1">
+              <a:rPr sz="1500" b="1">
                 <a:solidFill>
                   <a:srgbClr val="66727D"/>
                 </a:solidFill>
@@ -2319,37 +2664,37 @@
       <p:sp>
         <p:nvSpPr>
           <p:cNvPr id="41" name="summary-e8-text">
-            <a:extLst>
+            <a:extLst xmlns:a="http://schemas.openxmlformats.org/drawingml/2006/main">
               <a:ext uri="{FF2B5EF4-FFF2-40B4-BE49-F238E27FC236}">
                 <a16:creationId xmlns:a16="http://schemas.microsoft.com/office/drawing/2014/main" id="{70D49823-48B6-4ED1-83DC-B655CB1FB553}"/>
               </a:ext>
             </a:extLst>
           </p:cNvPr>
           <p:cNvSpPr>
-            <a:spLocks noGrp="1"/>
-          </p:cNvSpPr>
-          <p:nvPr/>
-        </p:nvSpPr>
-        <p:spPr>
-          <a:xfrm>
-            <a:off x="666750" y="2095500"/>
-            <a:ext cx="2190750" cy="190500"/>
-          </a:xfrm>
-          <a:prstGeom prst="rect">
-            <a:avLst/>
-          </a:prstGeom>
-          <a:noFill/>
-          <a:ln w="0">
+            <a:spLocks xmlns:a="http://schemas.openxmlformats.org/drawingml/2006/main" noGrp="1"/>
+          </p:cNvSpPr>
+          <p:nvPr/>
+        </p:nvSpPr>
+        <p:spPr>
+          <a:xfrm xmlns:a="http://schemas.openxmlformats.org/drawingml/2006/main">
+            <a:off x="666750" y="2324100"/>
+            <a:ext cx="2190750" cy="247650"/>
+          </a:xfrm>
+          <a:prstGeom xmlns:a="http://schemas.openxmlformats.org/drawingml/2006/main" prst="rect">
+            <a:avLst/>
+          </a:prstGeom>
+          <a:noFill xmlns:a="http://schemas.openxmlformats.org/drawingml/2006/main"/>
+          <a:ln xmlns:a="http://schemas.openxmlformats.org/drawingml/2006/main" w="0">
             <a:noFill/>
             <a:prstDash val="solid"/>
           </a:ln>
         </p:spPr>
         <p:txBody>
-          <a:bodyPr wrap="square" lIns="0" tIns="0" rIns="0" bIns="0" anchor="ctr">
-            <a:normAutofit/>
+          <a:bodyPr xmlns:a="http://schemas.openxmlformats.org/drawingml/2006/main" wrap="square" lIns="0" tIns="0" rIns="0" bIns="0" anchor="ctr">
+            <a:noAutofit/>
           </a:bodyPr>
-          <a:lstStyle/>
-          <a:p>
+          <a:lstStyle xmlns:a="http://schemas.openxmlformats.org/drawingml/2006/main"/>
+          <a:p xmlns:a="http://schemas.openxmlformats.org/drawingml/2006/main">
             <a:pPr algn="l">
               <a:lnSpc>
                 <a:spcPct val="95000"/>
@@ -2365,7 +2710,7 @@
               </a:defRPr>
             </a:pPr>
             <a:r>
-              <a:rPr sz="1200" b="0">
+              <a:rPr sz="1500" b="0">
                 <a:solidFill>
                   <a:srgbClr val="66727D"/>
                 </a:solidFill>
@@ -2381,37 +2726,37 @@
       <p:sp>
         <p:nvSpPr>
           <p:cNvPr id="42" name="summary-e12-id">
-            <a:extLst>
+            <a:extLst xmlns:a="http://schemas.openxmlformats.org/drawingml/2006/main">
               <a:ext uri="{FF2B5EF4-FFF2-40B4-BE49-F238E27FC236}">
                 <a16:creationId xmlns:a16="http://schemas.microsoft.com/office/drawing/2014/main" id="{12B72A54-2BEE-458E-9EEB-40AA1EBC64CB}"/>
               </a:ext>
             </a:extLst>
           </p:cNvPr>
           <p:cNvSpPr>
-            <a:spLocks noGrp="1"/>
-          </p:cNvSpPr>
-          <p:nvPr/>
-        </p:nvSpPr>
-        <p:spPr>
-          <a:xfrm>
-            <a:off x="304800" y="2352675"/>
-            <a:ext cx="342900" cy="190500"/>
-          </a:xfrm>
-          <a:prstGeom prst="rect">
-            <a:avLst/>
-          </a:prstGeom>
-          <a:noFill/>
-          <a:ln w="0">
+            <a:spLocks xmlns:a="http://schemas.openxmlformats.org/drawingml/2006/main" noGrp="1"/>
+          </p:cNvSpPr>
+          <p:nvPr/>
+        </p:nvSpPr>
+        <p:spPr>
+          <a:xfrm xmlns:a="http://schemas.openxmlformats.org/drawingml/2006/main">
+            <a:off x="304800" y="2581275"/>
+            <a:ext cx="342900" cy="247650"/>
+          </a:xfrm>
+          <a:prstGeom xmlns:a="http://schemas.openxmlformats.org/drawingml/2006/main" prst="rect">
+            <a:avLst/>
+          </a:prstGeom>
+          <a:noFill xmlns:a="http://schemas.openxmlformats.org/drawingml/2006/main"/>
+          <a:ln xmlns:a="http://schemas.openxmlformats.org/drawingml/2006/main" w="0">
             <a:noFill/>
             <a:prstDash val="solid"/>
           </a:ln>
         </p:spPr>
         <p:txBody>
-          <a:bodyPr wrap="square" lIns="0" tIns="0" rIns="0" bIns="0" anchor="ctr">
-            <a:normAutofit/>
+          <a:bodyPr xmlns:a="http://schemas.openxmlformats.org/drawingml/2006/main" wrap="square" lIns="0" tIns="0" rIns="0" bIns="0" anchor="ctr">
+            <a:noAutofit/>
           </a:bodyPr>
-          <a:lstStyle/>
-          <a:p>
+          <a:lstStyle xmlns:a="http://schemas.openxmlformats.org/drawingml/2006/main"/>
+          <a:p xmlns:a="http://schemas.openxmlformats.org/drawingml/2006/main">
             <a:pPr algn="l">
               <a:lnSpc>
                 <a:spcPct val="95000"/>
@@ -2427,7 +2772,7 @@
               </a:defRPr>
             </a:pPr>
             <a:r>
-              <a:rPr sz="1200" b="1">
+              <a:rPr sz="1500" b="1">
                 <a:solidFill>
                   <a:srgbClr val="2E6F9E"/>
                 </a:solidFill>
@@ -2443,37 +2788,37 @@
       <p:sp>
         <p:nvSpPr>
           <p:cNvPr id="43" name="summary-e12-text">
-            <a:extLst>
+            <a:extLst xmlns:a="http://schemas.openxmlformats.org/drawingml/2006/main">
               <a:ext uri="{FF2B5EF4-FFF2-40B4-BE49-F238E27FC236}">
                 <a16:creationId xmlns:a16="http://schemas.microsoft.com/office/drawing/2014/main" id="{62AEB2E7-7076-411E-B294-FDEEF030B1FD}"/>
               </a:ext>
             </a:extLst>
           </p:cNvPr>
           <p:cNvSpPr>
-            <a:spLocks noGrp="1"/>
-          </p:cNvSpPr>
-          <p:nvPr/>
-        </p:nvSpPr>
-        <p:spPr>
-          <a:xfrm>
-            <a:off x="666750" y="2352675"/>
-            <a:ext cx="2190750" cy="190500"/>
-          </a:xfrm>
-          <a:prstGeom prst="rect">
-            <a:avLst/>
-          </a:prstGeom>
-          <a:noFill/>
-          <a:ln w="0">
+            <a:spLocks xmlns:a="http://schemas.openxmlformats.org/drawingml/2006/main" noGrp="1"/>
+          </p:cNvSpPr>
+          <p:nvPr/>
+        </p:nvSpPr>
+        <p:spPr>
+          <a:xfrm xmlns:a="http://schemas.openxmlformats.org/drawingml/2006/main">
+            <a:off x="666750" y="2581275"/>
+            <a:ext cx="2190750" cy="247650"/>
+          </a:xfrm>
+          <a:prstGeom xmlns:a="http://schemas.openxmlformats.org/drawingml/2006/main" prst="rect">
+            <a:avLst/>
+          </a:prstGeom>
+          <a:noFill xmlns:a="http://schemas.openxmlformats.org/drawingml/2006/main"/>
+          <a:ln xmlns:a="http://schemas.openxmlformats.org/drawingml/2006/main" w="0">
             <a:noFill/>
             <a:prstDash val="solid"/>
           </a:ln>
         </p:spPr>
         <p:txBody>
-          <a:bodyPr wrap="square" lIns="0" tIns="0" rIns="0" bIns="0" anchor="ctr">
-            <a:normAutofit/>
+          <a:bodyPr xmlns:a="http://schemas.openxmlformats.org/drawingml/2006/main" wrap="square" lIns="0" tIns="0" rIns="0" bIns="0" anchor="ctr">
+            <a:noAutofit/>
           </a:bodyPr>
-          <a:lstStyle/>
-          <a:p>
+          <a:lstStyle xmlns:a="http://schemas.openxmlformats.org/drawingml/2006/main"/>
+          <a:p xmlns:a="http://schemas.openxmlformats.org/drawingml/2006/main">
             <a:pPr algn="l">
               <a:lnSpc>
                 <a:spcPct val="95000"/>
@@ -2489,7 +2834,7 @@
               </a:defRPr>
             </a:pPr>
             <a:r>
-              <a:rPr sz="1200" b="0">
+              <a:rPr sz="1500" b="0">
                 <a:solidFill>
                   <a:srgbClr val="66727D"/>
                 </a:solidFill>
@@ -2505,37 +2850,37 @@
       <p:sp>
         <p:nvSpPr>
           <p:cNvPr id="44" name="summary-e14-id">
-            <a:extLst>
+            <a:extLst xmlns:a="http://schemas.openxmlformats.org/drawingml/2006/main">
               <a:ext uri="{FF2B5EF4-FFF2-40B4-BE49-F238E27FC236}">
                 <a16:creationId xmlns:a16="http://schemas.microsoft.com/office/drawing/2014/main" id="{66112484-A71D-4628-810B-8423CA4E828D}"/>
               </a:ext>
             </a:extLst>
           </p:cNvPr>
           <p:cNvSpPr>
-            <a:spLocks noGrp="1"/>
-          </p:cNvSpPr>
-          <p:nvPr/>
-        </p:nvSpPr>
-        <p:spPr>
-          <a:xfrm>
-            <a:off x="304800" y="2609850"/>
-            <a:ext cx="342900" cy="190500"/>
-          </a:xfrm>
-          <a:prstGeom prst="rect">
-            <a:avLst/>
-          </a:prstGeom>
-          <a:noFill/>
-          <a:ln w="0">
+            <a:spLocks xmlns:a="http://schemas.openxmlformats.org/drawingml/2006/main" noGrp="1"/>
+          </p:cNvSpPr>
+          <p:nvPr/>
+        </p:nvSpPr>
+        <p:spPr>
+          <a:xfrm xmlns:a="http://schemas.openxmlformats.org/drawingml/2006/main">
+            <a:off x="304800" y="2838450"/>
+            <a:ext cx="342900" cy="247650"/>
+          </a:xfrm>
+          <a:prstGeom xmlns:a="http://schemas.openxmlformats.org/drawingml/2006/main" prst="rect">
+            <a:avLst/>
+          </a:prstGeom>
+          <a:noFill xmlns:a="http://schemas.openxmlformats.org/drawingml/2006/main"/>
+          <a:ln xmlns:a="http://schemas.openxmlformats.org/drawingml/2006/main" w="0">
             <a:noFill/>
             <a:prstDash val="solid"/>
           </a:ln>
         </p:spPr>
         <p:txBody>
-          <a:bodyPr wrap="square" lIns="0" tIns="0" rIns="0" bIns="0" anchor="ctr">
-            <a:normAutofit/>
+          <a:bodyPr xmlns:a="http://schemas.openxmlformats.org/drawingml/2006/main" wrap="square" lIns="0" tIns="0" rIns="0" bIns="0" anchor="ctr">
+            <a:noAutofit/>
           </a:bodyPr>
-          <a:lstStyle/>
-          <a:p>
+          <a:lstStyle xmlns:a="http://schemas.openxmlformats.org/drawingml/2006/main"/>
+          <a:p xmlns:a="http://schemas.openxmlformats.org/drawingml/2006/main">
             <a:pPr algn="l">
               <a:lnSpc>
                 <a:spcPct val="95000"/>
@@ -2551,7 +2896,7 @@
               </a:defRPr>
             </a:pPr>
             <a:r>
-              <a:rPr sz="1200" b="1">
+              <a:rPr sz="1500" b="1">
                 <a:solidFill>
                   <a:srgbClr val="2E6F9E"/>
                 </a:solidFill>
@@ -2567,37 +2912,37 @@
       <p:sp>
         <p:nvSpPr>
           <p:cNvPr id="45" name="summary-e14-text">
-            <a:extLst>
+            <a:extLst xmlns:a="http://schemas.openxmlformats.org/drawingml/2006/main">
               <a:ext uri="{FF2B5EF4-FFF2-40B4-BE49-F238E27FC236}">
                 <a16:creationId xmlns:a16="http://schemas.microsoft.com/office/drawing/2014/main" id="{F9B1F09C-930C-412D-BF3C-5D3BCA06199B}"/>
               </a:ext>
             </a:extLst>
           </p:cNvPr>
           <p:cNvSpPr>
-            <a:spLocks noGrp="1"/>
-          </p:cNvSpPr>
-          <p:nvPr/>
-        </p:nvSpPr>
-        <p:spPr>
-          <a:xfrm>
-            <a:off x="666750" y="2609850"/>
-            <a:ext cx="2190750" cy="190500"/>
-          </a:xfrm>
-          <a:prstGeom prst="rect">
-            <a:avLst/>
-          </a:prstGeom>
-          <a:noFill/>
-          <a:ln w="0">
+            <a:spLocks xmlns:a="http://schemas.openxmlformats.org/drawingml/2006/main" noGrp="1"/>
+          </p:cNvSpPr>
+          <p:nvPr/>
+        </p:nvSpPr>
+        <p:spPr>
+          <a:xfrm xmlns:a="http://schemas.openxmlformats.org/drawingml/2006/main">
+            <a:off x="666750" y="2838450"/>
+            <a:ext cx="2190750" cy="247650"/>
+          </a:xfrm>
+          <a:prstGeom xmlns:a="http://schemas.openxmlformats.org/drawingml/2006/main" prst="rect">
+            <a:avLst/>
+          </a:prstGeom>
+          <a:noFill xmlns:a="http://schemas.openxmlformats.org/drawingml/2006/main"/>
+          <a:ln xmlns:a="http://schemas.openxmlformats.org/drawingml/2006/main" w="0">
             <a:noFill/>
             <a:prstDash val="solid"/>
           </a:ln>
         </p:spPr>
         <p:txBody>
-          <a:bodyPr wrap="square" lIns="0" tIns="0" rIns="0" bIns="0" anchor="ctr">
-            <a:normAutofit/>
+          <a:bodyPr xmlns:a="http://schemas.openxmlformats.org/drawingml/2006/main" wrap="square" lIns="0" tIns="0" rIns="0" bIns="0" anchor="ctr">
+            <a:noAutofit/>
           </a:bodyPr>
-          <a:lstStyle/>
-          <a:p>
+          <a:lstStyle xmlns:a="http://schemas.openxmlformats.org/drawingml/2006/main"/>
+          <a:p xmlns:a="http://schemas.openxmlformats.org/drawingml/2006/main">
             <a:pPr algn="l">
               <a:lnSpc>
                 <a:spcPct val="95000"/>
@@ -2613,7 +2958,7 @@
               </a:defRPr>
             </a:pPr>
             <a:r>
-              <a:rPr sz="1200" b="0">
+              <a:rPr sz="1500" b="0">
                 <a:solidFill>
                   <a:srgbClr val="66727D"/>
                 </a:solidFill>
@@ -2629,37 +2974,37 @@
       <p:sp>
         <p:nvSpPr>
           <p:cNvPr id="46" name="recent-label">
-            <a:extLst>
+            <a:extLst xmlns:a="http://schemas.openxmlformats.org/drawingml/2006/main">
               <a:ext uri="{FF2B5EF4-FFF2-40B4-BE49-F238E27FC236}">
                 <a16:creationId xmlns:a16="http://schemas.microsoft.com/office/drawing/2014/main" id="{377479B6-77D9-477C-8BF8-FC9E8F3B14F1}"/>
               </a:ext>
             </a:extLst>
           </p:cNvPr>
           <p:cNvSpPr>
-            <a:spLocks noGrp="1"/>
-          </p:cNvSpPr>
-          <p:nvPr/>
-        </p:nvSpPr>
-        <p:spPr>
-          <a:xfrm>
-            <a:off x="3983181" y="520995"/>
-            <a:ext cx="2057401" cy="247650"/>
-          </a:xfrm>
-          <a:prstGeom prst="rect">
-            <a:avLst/>
-          </a:prstGeom>
-          <a:noFill/>
-          <a:ln w="0">
+            <a:spLocks xmlns:a="http://schemas.openxmlformats.org/drawingml/2006/main" noGrp="1"/>
+          </p:cNvSpPr>
+          <p:nvPr/>
+        </p:nvSpPr>
+        <p:spPr>
+          <a:xfrm xmlns:a="http://schemas.openxmlformats.org/drawingml/2006/main">
+            <a:off x="3983181" y="285750"/>
+            <a:ext cx="2057401" cy="476250"/>
+          </a:xfrm>
+          <a:prstGeom xmlns:a="http://schemas.openxmlformats.org/drawingml/2006/main" prst="rect">
+            <a:avLst/>
+          </a:prstGeom>
+          <a:noFill xmlns:a="http://schemas.openxmlformats.org/drawingml/2006/main"/>
+          <a:ln xmlns:a="http://schemas.openxmlformats.org/drawingml/2006/main" w="0">
             <a:noFill/>
             <a:prstDash val="solid"/>
           </a:ln>
         </p:spPr>
         <p:txBody>
-          <a:bodyPr wrap="square" lIns="0" tIns="0" rIns="0" bIns="0" anchor="ctr">
-            <a:normAutofit fontScale="77500" lnSpcReduction="20000"/>
+          <a:bodyPr xmlns:a="http://schemas.openxmlformats.org/drawingml/2006/main" wrap="square" lIns="0" tIns="0" rIns="0" bIns="0" anchor="ctr">
+            <a:noAutofit/>
           </a:bodyPr>
-          <a:lstStyle/>
-          <a:p>
+          <a:lstStyle xmlns:a="http://schemas.openxmlformats.org/drawingml/2006/main"/>
+          <a:p xmlns:a="http://schemas.openxmlformats.org/drawingml/2006/main">
             <a:pPr algn="l">
               <a:lnSpc>
                 <a:spcPct val="95000"/>
@@ -2675,7 +3020,7 @@
               </a:defRPr>
             </a:pPr>
             <a:r>
-              <a:rPr sz="1575" b="1" dirty="0">
+              <a:rPr sz="1575" b="1">
                 <a:solidFill>
                   <a:srgbClr val="2E6F9E"/>
                 </a:solidFill>
@@ -2686,7 +3031,7 @@
               <a:t>Recent</a:t>
             </a:r>
             <a:r>
-              <a:rPr lang="en-US" sz="1575" b="1" dirty="0">
+              <a:rPr sz="1575" b="1">
                 <a:solidFill>
                   <a:srgbClr val="2E6F9E"/>
                 </a:solidFill>
@@ -2696,43 +3041,35 @@
               </a:rPr>
               <a:t> High-Fidelity Images</a:t>
             </a:r>
-            <a:endParaRPr sz="1575" b="1" dirty="0">
-              <a:solidFill>
-                <a:srgbClr val="2E6F9E"/>
-              </a:solidFill>
-              <a:latin typeface="Arial"/>
-              <a:ea typeface="Arial"/>
-              <a:cs typeface="Arial"/>
-            </a:endParaRPr>
           </a:p>
         </p:txBody>
       </p:sp>
       <p:sp>
         <p:nvSpPr>
           <p:cNvPr id="47" name="recent-e11-dot">
-            <a:extLst>
+            <a:extLst xmlns:a="http://schemas.openxmlformats.org/drawingml/2006/main">
               <a:ext uri="{FF2B5EF4-FFF2-40B4-BE49-F238E27FC236}">
                 <a16:creationId xmlns:a16="http://schemas.microsoft.com/office/drawing/2014/main" id="{4B0AA075-C987-4A11-B7EC-B289BD56FFFD}"/>
               </a:ext>
             </a:extLst>
           </p:cNvPr>
           <p:cNvSpPr>
-            <a:spLocks noGrp="1"/>
-          </p:cNvSpPr>
-          <p:nvPr/>
-        </p:nvSpPr>
-        <p:spPr>
-          <a:xfrm>
-            <a:off x="4040332" y="825795"/>
-            <a:ext cx="342900" cy="342900"/>
-          </a:xfrm>
-          <a:prstGeom prst="ellipse">
-            <a:avLst/>
-          </a:prstGeom>
-          <a:solidFill>
+            <a:spLocks xmlns:a="http://schemas.openxmlformats.org/drawingml/2006/main" noGrp="1"/>
+          </p:cNvSpPr>
+          <p:nvPr/>
+        </p:nvSpPr>
+        <p:spPr>
+          <a:xfrm xmlns:a="http://schemas.openxmlformats.org/drawingml/2006/main">
+            <a:off x="4011757" y="797220"/>
+            <a:ext cx="400050" cy="400050"/>
+          </a:xfrm>
+          <a:prstGeom xmlns:a="http://schemas.openxmlformats.org/drawingml/2006/main" prst="ellipse">
+            <a:avLst/>
+          </a:prstGeom>
+          <a:solidFill xmlns:a="http://schemas.openxmlformats.org/drawingml/2006/main">
             <a:srgbClr val="EAF3F8"/>
           </a:solidFill>
-          <a:ln w="14288">
+          <a:ln xmlns:a="http://schemas.openxmlformats.org/drawingml/2006/main" w="14288">
             <a:solidFill>
               <a:srgbClr val="2E6F9E"/>
             </a:solidFill>
@@ -2740,12 +3077,13 @@
           </a:ln>
         </p:spPr>
         <p:txBody>
-          <a:bodyPr lIns="0" tIns="0" rIns="0" bIns="0" anchor="ctr">
-            <a:normAutofit/>
+          <a:bodyPr xmlns:a="http://schemas.openxmlformats.org/drawingml/2006/main" wrap="none" lIns="0" tIns="0" rIns="0" bIns="0" anchor="ctr">
+            <a:noAutofit/>
           </a:bodyPr>
-          <a:lstStyle/>
-          <a:p>
+          <a:lstStyle xmlns:a="http://schemas.openxmlformats.org/drawingml/2006/main"/>
+          <a:p xmlns:a="http://schemas.openxmlformats.org/drawingml/2006/main">
             <a:pPr algn="ctr">
+              <a:buNone/>
               <a:defRPr sz="1125" b="1">
                 <a:solidFill>
                   <a:srgbClr val="2E6F9E"/>
@@ -2756,7 +3094,7 @@
               </a:defRPr>
             </a:pPr>
             <a:r>
-              <a:rPr sz="1125" b="1">
+              <a:rPr sz="1500" b="1">
                 <a:solidFill>
                   <a:srgbClr val="2E6F9E"/>
                 </a:solidFill>
@@ -2772,29 +3110,29 @@
       <p:sp>
         <p:nvSpPr>
           <p:cNvPr id="48" name="recent-e12-dot">
-            <a:extLst>
+            <a:extLst xmlns:a="http://schemas.openxmlformats.org/drawingml/2006/main">
               <a:ext uri="{FF2B5EF4-FFF2-40B4-BE49-F238E27FC236}">
                 <a16:creationId xmlns:a16="http://schemas.microsoft.com/office/drawing/2014/main" id="{69EF4AA2-9CCF-445E-8153-CDCE57F1AEAA}"/>
               </a:ext>
             </a:extLst>
           </p:cNvPr>
           <p:cNvSpPr>
-            <a:spLocks noGrp="1"/>
-          </p:cNvSpPr>
-          <p:nvPr/>
-        </p:nvSpPr>
-        <p:spPr>
-          <a:xfrm>
-            <a:off x="4478482" y="825795"/>
-            <a:ext cx="342900" cy="342900"/>
-          </a:xfrm>
-          <a:prstGeom prst="ellipse">
-            <a:avLst/>
-          </a:prstGeom>
-          <a:solidFill>
+            <a:spLocks xmlns:a="http://schemas.openxmlformats.org/drawingml/2006/main" noGrp="1"/>
+          </p:cNvSpPr>
+          <p:nvPr/>
+        </p:nvSpPr>
+        <p:spPr>
+          <a:xfrm xmlns:a="http://schemas.openxmlformats.org/drawingml/2006/main">
+            <a:off x="4449907" y="797220"/>
+            <a:ext cx="400050" cy="400050"/>
+          </a:xfrm>
+          <a:prstGeom xmlns:a="http://schemas.openxmlformats.org/drawingml/2006/main" prst="ellipse">
+            <a:avLst/>
+          </a:prstGeom>
+          <a:solidFill xmlns:a="http://schemas.openxmlformats.org/drawingml/2006/main">
             <a:srgbClr val="EAF3F8"/>
           </a:solidFill>
-          <a:ln w="14288">
+          <a:ln xmlns:a="http://schemas.openxmlformats.org/drawingml/2006/main" w="14288">
             <a:solidFill>
               <a:srgbClr val="2E6F9E"/>
             </a:solidFill>
@@ -2802,12 +3140,13 @@
           </a:ln>
         </p:spPr>
         <p:txBody>
-          <a:bodyPr lIns="0" tIns="0" rIns="0" bIns="0" anchor="ctr">
-            <a:normAutofit/>
+          <a:bodyPr xmlns:a="http://schemas.openxmlformats.org/drawingml/2006/main" wrap="none" lIns="0" tIns="0" rIns="0" bIns="0" anchor="ctr">
+            <a:noAutofit/>
           </a:bodyPr>
-          <a:lstStyle/>
-          <a:p>
+          <a:lstStyle xmlns:a="http://schemas.openxmlformats.org/drawingml/2006/main"/>
+          <a:p xmlns:a="http://schemas.openxmlformats.org/drawingml/2006/main">
             <a:pPr algn="ctr">
+              <a:buNone/>
               <a:defRPr sz="1125" b="1">
                 <a:solidFill>
                   <a:srgbClr val="2E6F9E"/>
@@ -2818,7 +3157,7 @@
               </a:defRPr>
             </a:pPr>
             <a:r>
-              <a:rPr sz="1125" b="1">
+              <a:rPr sz="1500" b="1">
                 <a:solidFill>
                   <a:srgbClr val="2E6F9E"/>
                 </a:solidFill>
@@ -2834,29 +3173,29 @@
       <p:sp>
         <p:nvSpPr>
           <p:cNvPr id="49" name="recent-e13-dot">
-            <a:extLst>
+            <a:extLst xmlns:a="http://schemas.openxmlformats.org/drawingml/2006/main">
               <a:ext uri="{FF2B5EF4-FFF2-40B4-BE49-F238E27FC236}">
                 <a16:creationId xmlns:a16="http://schemas.microsoft.com/office/drawing/2014/main" id="{E90C362C-A1D6-4BE7-8CEB-E9E2A7008128}"/>
               </a:ext>
             </a:extLst>
           </p:cNvPr>
           <p:cNvSpPr>
-            <a:spLocks noGrp="1"/>
-          </p:cNvSpPr>
-          <p:nvPr/>
-        </p:nvSpPr>
-        <p:spPr>
-          <a:xfrm>
-            <a:off x="4916632" y="825795"/>
-            <a:ext cx="342900" cy="342900"/>
-          </a:xfrm>
-          <a:prstGeom prst="ellipse">
-            <a:avLst/>
-          </a:prstGeom>
-          <a:solidFill>
+            <a:spLocks xmlns:a="http://schemas.openxmlformats.org/drawingml/2006/main" noGrp="1"/>
+          </p:cNvSpPr>
+          <p:nvPr/>
+        </p:nvSpPr>
+        <p:spPr>
+          <a:xfrm xmlns:a="http://schemas.openxmlformats.org/drawingml/2006/main">
+            <a:off x="4888057" y="797220"/>
+            <a:ext cx="400050" cy="400050"/>
+          </a:xfrm>
+          <a:prstGeom xmlns:a="http://schemas.openxmlformats.org/drawingml/2006/main" prst="ellipse">
+            <a:avLst/>
+          </a:prstGeom>
+          <a:solidFill xmlns:a="http://schemas.openxmlformats.org/drawingml/2006/main">
             <a:srgbClr val="EAF3F8"/>
           </a:solidFill>
-          <a:ln w="14288">
+          <a:ln xmlns:a="http://schemas.openxmlformats.org/drawingml/2006/main" w="14288">
             <a:solidFill>
               <a:srgbClr val="2E6F9E"/>
             </a:solidFill>
@@ -2864,12 +3203,13 @@
           </a:ln>
         </p:spPr>
         <p:txBody>
-          <a:bodyPr lIns="0" tIns="0" rIns="0" bIns="0" anchor="ctr">
-            <a:normAutofit/>
+          <a:bodyPr xmlns:a="http://schemas.openxmlformats.org/drawingml/2006/main" wrap="none" lIns="0" tIns="0" rIns="0" bIns="0" anchor="ctr">
+            <a:noAutofit/>
           </a:bodyPr>
-          <a:lstStyle/>
-          <a:p>
+          <a:lstStyle xmlns:a="http://schemas.openxmlformats.org/drawingml/2006/main"/>
+          <a:p xmlns:a="http://schemas.openxmlformats.org/drawingml/2006/main">
             <a:pPr algn="ctr">
+              <a:buNone/>
               <a:defRPr sz="1125" b="1">
                 <a:solidFill>
                   <a:srgbClr val="2E6F9E"/>
@@ -2880,7 +3220,7 @@
               </a:defRPr>
             </a:pPr>
             <a:r>
-              <a:rPr sz="1125" b="1">
+              <a:rPr sz="1500" b="1">
                 <a:solidFill>
                   <a:srgbClr val="2E6F9E"/>
                 </a:solidFill>
@@ -2896,29 +3236,29 @@
       <p:sp>
         <p:nvSpPr>
           <p:cNvPr id="50" name="recent-e14-dot">
-            <a:extLst>
+            <a:extLst xmlns:a="http://schemas.openxmlformats.org/drawingml/2006/main">
               <a:ext uri="{FF2B5EF4-FFF2-40B4-BE49-F238E27FC236}">
                 <a16:creationId xmlns:a16="http://schemas.microsoft.com/office/drawing/2014/main" id="{805890C2-A385-471E-A22F-7E4911903AC9}"/>
               </a:ext>
             </a:extLst>
           </p:cNvPr>
           <p:cNvSpPr>
-            <a:spLocks noGrp="1"/>
-          </p:cNvSpPr>
-          <p:nvPr/>
-        </p:nvSpPr>
-        <p:spPr>
-          <a:xfrm>
-            <a:off x="5354782" y="825795"/>
-            <a:ext cx="342900" cy="342900"/>
-          </a:xfrm>
-          <a:prstGeom prst="ellipse">
-            <a:avLst/>
-          </a:prstGeom>
-          <a:solidFill>
+            <a:spLocks xmlns:a="http://schemas.openxmlformats.org/drawingml/2006/main" noGrp="1"/>
+          </p:cNvSpPr>
+          <p:nvPr/>
+        </p:nvSpPr>
+        <p:spPr>
+          <a:xfrm xmlns:a="http://schemas.openxmlformats.org/drawingml/2006/main">
+            <a:off x="5326207" y="797220"/>
+            <a:ext cx="400050" cy="400050"/>
+          </a:xfrm>
+          <a:prstGeom xmlns:a="http://schemas.openxmlformats.org/drawingml/2006/main" prst="ellipse">
+            <a:avLst/>
+          </a:prstGeom>
+          <a:solidFill xmlns:a="http://schemas.openxmlformats.org/drawingml/2006/main">
             <a:srgbClr val="EAF3F8"/>
           </a:solidFill>
-          <a:ln w="14288">
+          <a:ln xmlns:a="http://schemas.openxmlformats.org/drawingml/2006/main" w="14288">
             <a:solidFill>
               <a:srgbClr val="2E6F9E"/>
             </a:solidFill>
@@ -2926,12 +3266,13 @@
           </a:ln>
         </p:spPr>
         <p:txBody>
-          <a:bodyPr lIns="0" tIns="0" rIns="0" bIns="0" anchor="ctr">
-            <a:normAutofit/>
+          <a:bodyPr xmlns:a="http://schemas.openxmlformats.org/drawingml/2006/main" wrap="none" lIns="0" tIns="0" rIns="0" bIns="0" anchor="ctr">
+            <a:noAutofit/>
           </a:bodyPr>
-          <a:lstStyle/>
-          <a:p>
+          <a:lstStyle xmlns:a="http://schemas.openxmlformats.org/drawingml/2006/main"/>
+          <a:p xmlns:a="http://schemas.openxmlformats.org/drawingml/2006/main">
             <a:pPr algn="ctr">
+              <a:buNone/>
               <a:defRPr sz="1125" b="1">
                 <a:solidFill>
                   <a:srgbClr val="2E6F9E"/>
@@ -2942,7 +3283,7 @@
               </a:defRPr>
             </a:pPr>
             <a:r>
-              <a:rPr sz="1125" b="1">
+              <a:rPr sz="1500" b="1">
                 <a:solidFill>
                   <a:srgbClr val="2E6F9E"/>
                 </a:solidFill>
@@ -2958,37 +3299,37 @@
       <p:sp>
         <p:nvSpPr>
           <p:cNvPr id="51" name="causal-label">
-            <a:extLst>
+            <a:extLst xmlns:a="http://schemas.openxmlformats.org/drawingml/2006/main">
               <a:ext uri="{FF2B5EF4-FFF2-40B4-BE49-F238E27FC236}">
                 <a16:creationId xmlns:a16="http://schemas.microsoft.com/office/drawing/2014/main" id="{F43058FD-F2E2-4D45-A0F0-7937BDF077D3}"/>
               </a:ext>
             </a:extLst>
           </p:cNvPr>
           <p:cNvSpPr>
-            <a:spLocks noGrp="1"/>
-          </p:cNvSpPr>
-          <p:nvPr/>
-        </p:nvSpPr>
-        <p:spPr>
-          <a:xfrm>
+            <a:spLocks xmlns:a="http://schemas.openxmlformats.org/drawingml/2006/main" noGrp="1"/>
+          </p:cNvSpPr>
+          <p:nvPr/>
+        </p:nvSpPr>
+        <p:spPr>
+          <a:xfrm xmlns:a="http://schemas.openxmlformats.org/drawingml/2006/main">
             <a:off x="4058805" y="1344189"/>
             <a:ext cx="1428750" cy="257175"/>
           </a:xfrm>
-          <a:prstGeom prst="rect">
-            <a:avLst/>
-          </a:prstGeom>
-          <a:noFill/>
-          <a:ln w="0">
+          <a:prstGeom xmlns:a="http://schemas.openxmlformats.org/drawingml/2006/main" prst="rect">
+            <a:avLst/>
+          </a:prstGeom>
+          <a:noFill xmlns:a="http://schemas.openxmlformats.org/drawingml/2006/main"/>
+          <a:ln xmlns:a="http://schemas.openxmlformats.org/drawingml/2006/main" w="0">
             <a:noFill/>
             <a:prstDash val="solid"/>
           </a:ln>
         </p:spPr>
         <p:txBody>
-          <a:bodyPr wrap="square" lIns="0" tIns="0" rIns="0" bIns="0" anchor="ctr">
-            <a:normAutofit/>
+          <a:bodyPr xmlns:a="http://schemas.openxmlformats.org/drawingml/2006/main" wrap="square" lIns="0" tIns="0" rIns="0" bIns="0" anchor="ctr">
+            <a:noAutofit/>
           </a:bodyPr>
-          <a:lstStyle/>
-          <a:p>
+          <a:lstStyle xmlns:a="http://schemas.openxmlformats.org/drawingml/2006/main"/>
+          <a:p xmlns:a="http://schemas.openxmlformats.org/drawingml/2006/main">
             <a:pPr algn="l">
               <a:lnSpc>
                 <a:spcPct val="95000"/>
@@ -3020,29 +3361,29 @@
       <p:sp>
         <p:nvSpPr>
           <p:cNvPr id="52" name="causal-e6-dot">
-            <a:extLst>
+            <a:extLst xmlns:a="http://schemas.openxmlformats.org/drawingml/2006/main">
               <a:ext uri="{FF2B5EF4-FFF2-40B4-BE49-F238E27FC236}">
                 <a16:creationId xmlns:a16="http://schemas.microsoft.com/office/drawing/2014/main" id="{9684E93E-8A5E-4B86-AD80-386775412B67}"/>
               </a:ext>
             </a:extLst>
           </p:cNvPr>
           <p:cNvSpPr>
-            <a:spLocks noGrp="1"/>
-          </p:cNvSpPr>
-          <p:nvPr/>
-        </p:nvSpPr>
-        <p:spPr>
-          <a:xfrm>
-            <a:off x="4058805" y="1629939"/>
-            <a:ext cx="342900" cy="342900"/>
-          </a:xfrm>
-          <a:prstGeom prst="ellipse">
-            <a:avLst/>
-          </a:prstGeom>
-          <a:solidFill>
+            <a:spLocks xmlns:a="http://schemas.openxmlformats.org/drawingml/2006/main" noGrp="1"/>
+          </p:cNvSpPr>
+          <p:nvPr/>
+        </p:nvSpPr>
+        <p:spPr>
+          <a:xfrm xmlns:a="http://schemas.openxmlformats.org/drawingml/2006/main">
+            <a:off x="4030230" y="1601364"/>
+            <a:ext cx="400050" cy="400050"/>
+          </a:xfrm>
+          <a:prstGeom xmlns:a="http://schemas.openxmlformats.org/drawingml/2006/main" prst="ellipse">
+            <a:avLst/>
+          </a:prstGeom>
+          <a:solidFill xmlns:a="http://schemas.openxmlformats.org/drawingml/2006/main">
             <a:srgbClr val="FFF1E7"/>
           </a:solidFill>
-          <a:ln w="14288">
+          <a:ln xmlns:a="http://schemas.openxmlformats.org/drawingml/2006/main" w="14288">
             <a:solidFill>
               <a:srgbClr val="C45A14"/>
             </a:solidFill>
@@ -3050,12 +3391,13 @@
           </a:ln>
         </p:spPr>
         <p:txBody>
-          <a:bodyPr lIns="0" tIns="0" rIns="0" bIns="0" anchor="ctr">
-            <a:normAutofit/>
+          <a:bodyPr xmlns:a="http://schemas.openxmlformats.org/drawingml/2006/main" wrap="none" lIns="0" tIns="0" rIns="0" bIns="0" anchor="ctr">
+            <a:noAutofit/>
           </a:bodyPr>
-          <a:lstStyle/>
-          <a:p>
+          <a:lstStyle xmlns:a="http://schemas.openxmlformats.org/drawingml/2006/main"/>
+          <a:p xmlns:a="http://schemas.openxmlformats.org/drawingml/2006/main">
             <a:pPr algn="ctr">
+              <a:buNone/>
               <a:defRPr sz="1125" b="1">
                 <a:solidFill>
                   <a:srgbClr val="C45A14"/>
@@ -3066,7 +3408,7 @@
               </a:defRPr>
             </a:pPr>
             <a:r>
-              <a:rPr sz="1125" b="1">
+              <a:rPr sz="1500" b="1">
                 <a:solidFill>
                   <a:srgbClr val="C45A14"/>
                 </a:solidFill>
@@ -3082,29 +3424,29 @@
       <p:sp>
         <p:nvSpPr>
           <p:cNvPr id="53" name="causal-e7-dot">
-            <a:extLst>
+            <a:extLst xmlns:a="http://schemas.openxmlformats.org/drawingml/2006/main">
               <a:ext uri="{FF2B5EF4-FFF2-40B4-BE49-F238E27FC236}">
                 <a16:creationId xmlns:a16="http://schemas.microsoft.com/office/drawing/2014/main" id="{521458AB-53BE-4166-9D74-C93F3D1C925C}"/>
               </a:ext>
             </a:extLst>
           </p:cNvPr>
           <p:cNvSpPr>
-            <a:spLocks noGrp="1"/>
-          </p:cNvSpPr>
-          <p:nvPr/>
-        </p:nvSpPr>
-        <p:spPr>
-          <a:xfrm>
-            <a:off x="4496955" y="1629939"/>
-            <a:ext cx="342900" cy="342900"/>
-          </a:xfrm>
-          <a:prstGeom prst="ellipse">
-            <a:avLst/>
-          </a:prstGeom>
-          <a:solidFill>
+            <a:spLocks xmlns:a="http://schemas.openxmlformats.org/drawingml/2006/main" noGrp="1"/>
+          </p:cNvSpPr>
+          <p:nvPr/>
+        </p:nvSpPr>
+        <p:spPr>
+          <a:xfrm xmlns:a="http://schemas.openxmlformats.org/drawingml/2006/main">
+            <a:off x="4468380" y="1601364"/>
+            <a:ext cx="400050" cy="400050"/>
+          </a:xfrm>
+          <a:prstGeom xmlns:a="http://schemas.openxmlformats.org/drawingml/2006/main" prst="ellipse">
+            <a:avLst/>
+          </a:prstGeom>
+          <a:solidFill xmlns:a="http://schemas.openxmlformats.org/drawingml/2006/main">
             <a:srgbClr val="FFF1E7"/>
           </a:solidFill>
-          <a:ln w="14288">
+          <a:ln xmlns:a="http://schemas.openxmlformats.org/drawingml/2006/main" w="14288">
             <a:solidFill>
               <a:srgbClr val="C45A14"/>
             </a:solidFill>
@@ -3112,12 +3454,13 @@
           </a:ln>
         </p:spPr>
         <p:txBody>
-          <a:bodyPr lIns="0" tIns="0" rIns="0" bIns="0" anchor="ctr">
-            <a:normAutofit/>
+          <a:bodyPr xmlns:a="http://schemas.openxmlformats.org/drawingml/2006/main" wrap="none" lIns="0" tIns="0" rIns="0" bIns="0" anchor="ctr">
+            <a:noAutofit/>
           </a:bodyPr>
-          <a:lstStyle/>
-          <a:p>
+          <a:lstStyle xmlns:a="http://schemas.openxmlformats.org/drawingml/2006/main"/>
+          <a:p xmlns:a="http://schemas.openxmlformats.org/drawingml/2006/main">
             <a:pPr algn="ctr">
+              <a:buNone/>
               <a:defRPr sz="1125" b="1">
                 <a:solidFill>
                   <a:srgbClr val="C45A14"/>
@@ -3128,7 +3471,7 @@
               </a:defRPr>
             </a:pPr>
             <a:r>
-              <a:rPr sz="1125" b="1" dirty="0">
+              <a:rPr sz="1500" b="1">
                 <a:solidFill>
                   <a:srgbClr val="C45A14"/>
                 </a:solidFill>
@@ -3144,29 +3487,29 @@
       <p:sp>
         <p:nvSpPr>
           <p:cNvPr id="54" name="causal-e8-dot">
-            <a:extLst>
+            <a:extLst xmlns:a="http://schemas.openxmlformats.org/drawingml/2006/main">
               <a:ext uri="{FF2B5EF4-FFF2-40B4-BE49-F238E27FC236}">
                 <a16:creationId xmlns:a16="http://schemas.microsoft.com/office/drawing/2014/main" id="{FF618102-7C71-47BB-836B-EC3EBF48EFCB}"/>
               </a:ext>
             </a:extLst>
           </p:cNvPr>
           <p:cNvSpPr>
-            <a:spLocks noGrp="1"/>
-          </p:cNvSpPr>
-          <p:nvPr/>
-        </p:nvSpPr>
-        <p:spPr>
-          <a:xfrm>
-            <a:off x="4935105" y="1629939"/>
-            <a:ext cx="342900" cy="342900"/>
-          </a:xfrm>
-          <a:prstGeom prst="ellipse">
-            <a:avLst/>
-          </a:prstGeom>
-          <a:solidFill>
+            <a:spLocks xmlns:a="http://schemas.openxmlformats.org/drawingml/2006/main" noGrp="1"/>
+          </p:cNvSpPr>
+          <p:nvPr/>
+        </p:nvSpPr>
+        <p:spPr>
+          <a:xfrm xmlns:a="http://schemas.openxmlformats.org/drawingml/2006/main">
+            <a:off x="4906530" y="1601364"/>
+            <a:ext cx="400050" cy="400050"/>
+          </a:xfrm>
+          <a:prstGeom xmlns:a="http://schemas.openxmlformats.org/drawingml/2006/main" prst="ellipse">
+            <a:avLst/>
+          </a:prstGeom>
+          <a:solidFill xmlns:a="http://schemas.openxmlformats.org/drawingml/2006/main">
             <a:srgbClr val="FFF1E7"/>
           </a:solidFill>
-          <a:ln w="14288">
+          <a:ln xmlns:a="http://schemas.openxmlformats.org/drawingml/2006/main" w="14288">
             <a:solidFill>
               <a:srgbClr val="C45A14"/>
             </a:solidFill>
@@ -3174,12 +3517,13 @@
           </a:ln>
         </p:spPr>
         <p:txBody>
-          <a:bodyPr lIns="0" tIns="0" rIns="0" bIns="0" anchor="ctr">
-            <a:normAutofit/>
+          <a:bodyPr xmlns:a="http://schemas.openxmlformats.org/drawingml/2006/main" wrap="none" lIns="0" tIns="0" rIns="0" bIns="0" anchor="ctr">
+            <a:noAutofit/>
           </a:bodyPr>
-          <a:lstStyle/>
-          <a:p>
+          <a:lstStyle xmlns:a="http://schemas.openxmlformats.org/drawingml/2006/main"/>
+          <a:p xmlns:a="http://schemas.openxmlformats.org/drawingml/2006/main">
             <a:pPr algn="ctr">
+              <a:buNone/>
               <a:defRPr sz="1125" b="1">
                 <a:solidFill>
                   <a:srgbClr val="C45A14"/>
@@ -3190,7 +3534,7 @@
               </a:defRPr>
             </a:pPr>
             <a:r>
-              <a:rPr sz="1125" b="1">
+              <a:rPr sz="1500" b="1">
                 <a:solidFill>
                   <a:srgbClr val="C45A14"/>
                 </a:solidFill>
@@ -3206,29 +3550,29 @@
       <p:sp>
         <p:nvSpPr>
           <p:cNvPr id="55" name="causal-e12-dot">
-            <a:extLst>
+            <a:extLst xmlns:a="http://schemas.openxmlformats.org/drawingml/2006/main">
               <a:ext uri="{FF2B5EF4-FFF2-40B4-BE49-F238E27FC236}">
                 <a16:creationId xmlns:a16="http://schemas.microsoft.com/office/drawing/2014/main" id="{AAC720B7-90BB-465C-A910-03801A33288C}"/>
               </a:ext>
             </a:extLst>
           </p:cNvPr>
           <p:cNvSpPr>
-            <a:spLocks noGrp="1"/>
-          </p:cNvSpPr>
-          <p:nvPr/>
-        </p:nvSpPr>
-        <p:spPr>
-          <a:xfrm>
-            <a:off x="5373255" y="1629939"/>
-            <a:ext cx="342900" cy="342900"/>
-          </a:xfrm>
-          <a:prstGeom prst="ellipse">
-            <a:avLst/>
-          </a:prstGeom>
-          <a:solidFill>
+            <a:spLocks xmlns:a="http://schemas.openxmlformats.org/drawingml/2006/main" noGrp="1"/>
+          </p:cNvSpPr>
+          <p:nvPr/>
+        </p:nvSpPr>
+        <p:spPr>
+          <a:xfrm xmlns:a="http://schemas.openxmlformats.org/drawingml/2006/main">
+            <a:off x="5344680" y="1601364"/>
+            <a:ext cx="400050" cy="400050"/>
+          </a:xfrm>
+          <a:prstGeom xmlns:a="http://schemas.openxmlformats.org/drawingml/2006/main" prst="ellipse">
+            <a:avLst/>
+          </a:prstGeom>
+          <a:solidFill xmlns:a="http://schemas.openxmlformats.org/drawingml/2006/main">
             <a:srgbClr val="EAF3F8"/>
           </a:solidFill>
-          <a:ln w="14288">
+          <a:ln xmlns:a="http://schemas.openxmlformats.org/drawingml/2006/main" w="14288">
             <a:solidFill>
               <a:srgbClr val="2E6F9E"/>
             </a:solidFill>
@@ -3236,12 +3580,13 @@
           </a:ln>
         </p:spPr>
         <p:txBody>
-          <a:bodyPr lIns="0" tIns="0" rIns="0" bIns="0" anchor="ctr">
-            <a:normAutofit/>
+          <a:bodyPr xmlns:a="http://schemas.openxmlformats.org/drawingml/2006/main" wrap="none" lIns="0" tIns="0" rIns="0" bIns="0" anchor="ctr">
+            <a:noAutofit/>
           </a:bodyPr>
-          <a:lstStyle/>
-          <a:p>
+          <a:lstStyle xmlns:a="http://schemas.openxmlformats.org/drawingml/2006/main"/>
+          <a:p xmlns:a="http://schemas.openxmlformats.org/drawingml/2006/main">
             <a:pPr algn="ctr">
+              <a:buNone/>
               <a:defRPr sz="1125" b="1">
                 <a:solidFill>
                   <a:srgbClr val="2E6F9E"/>
@@ -3252,7 +3597,7 @@
               </a:defRPr>
             </a:pPr>
             <a:r>
-              <a:rPr sz="1125" b="1">
+              <a:rPr sz="1500" b="1">
                 <a:solidFill>
                   <a:srgbClr val="2E6F9E"/>
                 </a:solidFill>
@@ -3267,22 +3612,22 @@
       </p:sp>
       <p:pic>
         <p:nvPicPr>
-          <p:cNvPr id="126" name="Picture 125"/>
+          <p:cNvPr id="194" name="Picture 125"/>
           <p:cNvPicPr>
-            <a:picLocks noChangeAspect="1"/>
+            <a:picLocks xmlns:a="http://schemas.openxmlformats.org/drawingml/2006/main" noChangeAspect="1"/>
           </p:cNvPicPr>
           <p:nvPr/>
         </p:nvPicPr>
         <p:blipFill>
-          <a:blip r:embed="rId3"/>
-          <a:stretch/>
+          <a:blip xmlns:r="http://schemas.openxmlformats.org/officeDocument/2006/relationships" xmlns:a="http://schemas.openxmlformats.org/drawingml/2006/main" r:embed="R44a8d88460524994"/>
+          <a:stretch xmlns:a="http://schemas.openxmlformats.org/drawingml/2006/main"/>
         </p:blipFill>
         <p:spPr>
-          <a:xfrm>
-            <a:off x="4161678" y="2150171"/>
-            <a:ext cx="1207604" cy="1285875"/>
-          </a:xfrm>
-          <a:prstGeom prst="rect">
+          <a:xfrm xmlns:a="http://schemas.openxmlformats.org/drawingml/2006/main">
+            <a:off x="4201954" y="2138363"/>
+            <a:ext cx="1127093" cy="1200150"/>
+          </a:xfrm>
+          <a:prstGeom xmlns:a="http://schemas.openxmlformats.org/drawingml/2006/main" prst="rect">
             <a:avLst/>
           </a:prstGeom>
         </p:spPr>
@@ -3290,29 +3635,29 @@
       <p:sp>
         <p:nvSpPr>
           <p:cNvPr id="58" name="e7-image-border">
-            <a:extLst>
+            <a:extLst xmlns:a="http://schemas.openxmlformats.org/drawingml/2006/main">
               <a:ext uri="{FF2B5EF4-FFF2-40B4-BE49-F238E27FC236}">
                 <a16:creationId xmlns:a16="http://schemas.microsoft.com/office/drawing/2014/main" id="{828A0895-FBB0-43FF-A307-73ABAF4C379A}"/>
               </a:ext>
             </a:extLst>
           </p:cNvPr>
           <p:cNvSpPr>
-            <a:spLocks noGrp="1"/>
-          </p:cNvSpPr>
-          <p:nvPr/>
-        </p:nvSpPr>
-        <p:spPr>
-          <a:xfrm>
-            <a:off x="4129520" y="2156223"/>
-            <a:ext cx="1261000" cy="1285875"/>
-          </a:xfrm>
-          <a:prstGeom prst="roundRect">
+            <a:spLocks xmlns:a="http://schemas.openxmlformats.org/drawingml/2006/main" noGrp="1"/>
+          </p:cNvSpPr>
+          <p:nvPr/>
+        </p:nvSpPr>
+        <p:spPr>
+          <a:xfrm xmlns:a="http://schemas.openxmlformats.org/drawingml/2006/main">
+            <a:off x="4162235" y="2128838"/>
+            <a:ext cx="1195578" cy="1219200"/>
+          </a:xfrm>
+          <a:prstGeom xmlns:a="http://schemas.openxmlformats.org/drawingml/2006/main" prst="roundRect">
             <a:avLst>
               <a:gd name="adj" fmla="val 2878"/>
             </a:avLst>
           </a:prstGeom>
-          <a:noFill/>
-          <a:ln w="19050">
+          <a:noFill xmlns:a="http://schemas.openxmlformats.org/drawingml/2006/main"/>
+          <a:ln xmlns:a="http://schemas.openxmlformats.org/drawingml/2006/main" w="19050">
             <a:solidFill>
               <a:srgbClr val="C45A14"/>
             </a:solidFill>
@@ -3320,47 +3665,45 @@
           </a:ln>
         </p:spPr>
         <p:txBody>
-          <a:bodyPr/>
-          <a:lstStyle/>
-          <a:p>
-            <a:endParaRPr lang="en-CN"/>
-          </a:p>
+          <a:bodyPr xmlns:a="http://schemas.openxmlformats.org/drawingml/2006/main"/>
+          <a:lstStyle xmlns:a="http://schemas.openxmlformats.org/drawingml/2006/main"/>
+          <a:p xmlns:a="http://schemas.openxmlformats.org/drawingml/2006/main"/>
         </p:txBody>
       </p:sp>
       <p:sp>
         <p:nvSpPr>
           <p:cNvPr id="59" name="current-label">
-            <a:extLst>
+            <a:extLst xmlns:a="http://schemas.openxmlformats.org/drawingml/2006/main">
               <a:ext uri="{FF2B5EF4-FFF2-40B4-BE49-F238E27FC236}">
                 <a16:creationId xmlns:a16="http://schemas.microsoft.com/office/drawing/2014/main" id="{9E0BB765-D725-4D0F-B594-5329DFD9E7B5}"/>
               </a:ext>
             </a:extLst>
           </p:cNvPr>
           <p:cNvSpPr>
-            <a:spLocks noGrp="1"/>
-          </p:cNvSpPr>
-          <p:nvPr/>
-        </p:nvSpPr>
-        <p:spPr>
-          <a:xfrm>
-            <a:off x="6173926" y="857250"/>
-            <a:ext cx="1982932" cy="304800"/>
-          </a:xfrm>
-          <a:prstGeom prst="rect">
-            <a:avLst/>
-          </a:prstGeom>
-          <a:noFill/>
-          <a:ln w="0">
+            <a:spLocks xmlns:a="http://schemas.openxmlformats.org/drawingml/2006/main" noGrp="1"/>
+          </p:cNvSpPr>
+          <p:nvPr/>
+        </p:nvSpPr>
+        <p:spPr>
+          <a:xfrm xmlns:a="http://schemas.openxmlformats.org/drawingml/2006/main">
+            <a:off x="6048375" y="857250"/>
+            <a:ext cx="2362200" cy="304800"/>
+          </a:xfrm>
+          <a:prstGeom xmlns:a="http://schemas.openxmlformats.org/drawingml/2006/main" prst="rect">
+            <a:avLst/>
+          </a:prstGeom>
+          <a:noFill xmlns:a="http://schemas.openxmlformats.org/drawingml/2006/main"/>
+          <a:ln xmlns:a="http://schemas.openxmlformats.org/drawingml/2006/main" w="0">
             <a:noFill/>
             <a:prstDash val="solid"/>
           </a:ln>
         </p:spPr>
         <p:txBody>
-          <a:bodyPr wrap="square" lIns="0" tIns="0" rIns="0" bIns="0" anchor="ctr">
-            <a:normAutofit fontScale="92500"/>
+          <a:bodyPr xmlns:a="http://schemas.openxmlformats.org/drawingml/2006/main" wrap="square" lIns="0" tIns="0" rIns="0" bIns="0" anchor="ctr">
+            <a:noAutofit/>
           </a:bodyPr>
-          <a:lstStyle/>
-          <a:p>
+          <a:lstStyle xmlns:a="http://schemas.openxmlformats.org/drawingml/2006/main"/>
+          <a:p xmlns:a="http://schemas.openxmlformats.org/drawingml/2006/main">
             <a:pPr algn="ctr">
               <a:lnSpc>
                 <a:spcPct val="95000"/>
@@ -3376,7 +3719,7 @@
               </a:defRPr>
             </a:pPr>
             <a:r>
-              <a:rPr lang="en-US" sz="1350" b="1" dirty="0">
+              <a:rPr sz="1500" b="1">
                 <a:solidFill>
                   <a:srgbClr val="17212B"/>
                 </a:solidFill>
@@ -3387,7 +3730,7 @@
               <a:t>C</a:t>
             </a:r>
             <a:r>
-              <a:rPr sz="1350" b="1" dirty="0">
+              <a:rPr sz="1500" b="1">
                 <a:solidFill>
                   <a:srgbClr val="17212B"/>
                 </a:solidFill>
@@ -3398,7 +3741,7 @@
               <a:t>urrent</a:t>
             </a:r>
             <a:r>
-              <a:rPr lang="zh-CN" altLang="en-US" sz="1350" b="1" dirty="0">
+              <a:rPr sz="1500" b="1">
                 <a:solidFill>
                   <a:srgbClr val="17212B"/>
                 </a:solidFill>
@@ -3409,7 +3752,7 @@
               <a:t> </a:t>
             </a:r>
             <a:r>
-              <a:rPr lang="en-US" altLang="zh-CN" sz="1350" b="1" dirty="0">
+              <a:rPr sz="1500" b="1">
                 <a:solidFill>
                   <a:srgbClr val="17212B"/>
                 </a:solidFill>
@@ -3419,35 +3762,27 @@
               </a:rPr>
               <a:t>Keyboard Image</a:t>
             </a:r>
-            <a:endParaRPr sz="1350" b="1" dirty="0">
-              <a:solidFill>
-                <a:srgbClr val="17212B"/>
-              </a:solidFill>
-              <a:latin typeface="Arial"/>
-              <a:ea typeface="Arial"/>
-              <a:cs typeface="Arial"/>
-            </a:endParaRPr>
           </a:p>
         </p:txBody>
       </p:sp>
       <p:pic>
         <p:nvPicPr>
-          <p:cNvPr id="129" name="Picture 128"/>
+          <p:cNvPr id="197" name="Picture 128"/>
           <p:cNvPicPr>
-            <a:picLocks noChangeAspect="1"/>
+            <a:picLocks xmlns:a="http://schemas.openxmlformats.org/drawingml/2006/main" noChangeAspect="1"/>
           </p:cNvPicPr>
           <p:nvPr/>
         </p:nvPicPr>
         <p:blipFill>
-          <a:blip r:embed="rId4"/>
-          <a:stretch/>
+          <a:blip xmlns:r="http://schemas.openxmlformats.org/officeDocument/2006/relationships" xmlns:a="http://schemas.openxmlformats.org/drawingml/2006/main" r:embed="R5e445bf1721e4df3"/>
+          <a:stretch xmlns:a="http://schemas.openxmlformats.org/drawingml/2006/main"/>
         </p:blipFill>
         <p:spPr>
-          <a:xfrm>
+          <a:xfrm xmlns:a="http://schemas.openxmlformats.org/drawingml/2006/main">
             <a:off x="6163829" y="1169173"/>
             <a:ext cx="2126682" cy="590744"/>
           </a:xfrm>
-          <a:prstGeom prst="rect">
+          <a:prstGeom xmlns:a="http://schemas.openxmlformats.org/drawingml/2006/main" prst="rect">
             <a:avLst/>
           </a:prstGeom>
         </p:spPr>
@@ -3455,37 +3790,37 @@
       <p:sp>
         <p:nvSpPr>
           <p:cNvPr id="62" name="recent-action-label">
-            <a:extLst>
+            <a:extLst xmlns:a="http://schemas.openxmlformats.org/drawingml/2006/main">
               <a:ext uri="{FF2B5EF4-FFF2-40B4-BE49-F238E27FC236}">
                 <a16:creationId xmlns:a16="http://schemas.microsoft.com/office/drawing/2014/main" id="{768912DE-ECC4-47CA-9908-F21841DC31A2}"/>
               </a:ext>
             </a:extLst>
           </p:cNvPr>
           <p:cNvSpPr>
-            <a:spLocks noGrp="1"/>
-          </p:cNvSpPr>
-          <p:nvPr/>
-        </p:nvSpPr>
-        <p:spPr>
-          <a:xfrm>
+            <a:spLocks xmlns:a="http://schemas.openxmlformats.org/drawingml/2006/main" noGrp="1"/>
+          </p:cNvSpPr>
+          <p:nvPr/>
+        </p:nvSpPr>
+        <p:spPr>
+          <a:xfrm xmlns:a="http://schemas.openxmlformats.org/drawingml/2006/main">
             <a:off x="8574802" y="63503"/>
             <a:ext cx="1123950" cy="247650"/>
           </a:xfrm>
-          <a:prstGeom prst="rect">
-            <a:avLst/>
-          </a:prstGeom>
-          <a:noFill/>
-          <a:ln w="0">
+          <a:prstGeom xmlns:a="http://schemas.openxmlformats.org/drawingml/2006/main" prst="rect">
+            <a:avLst/>
+          </a:prstGeom>
+          <a:noFill xmlns:a="http://schemas.openxmlformats.org/drawingml/2006/main"/>
+          <a:ln xmlns:a="http://schemas.openxmlformats.org/drawingml/2006/main" w="0">
             <a:noFill/>
             <a:prstDash val="solid"/>
           </a:ln>
         </p:spPr>
         <p:txBody>
-          <a:bodyPr wrap="square" lIns="0" tIns="0" rIns="0" bIns="0" anchor="ctr">
-            <a:normAutofit/>
+          <a:bodyPr xmlns:a="http://schemas.openxmlformats.org/drawingml/2006/main" wrap="square" lIns="0" tIns="0" rIns="0" bIns="0" anchor="ctr">
+            <a:noAutofit/>
           </a:bodyPr>
-          <a:lstStyle/>
-          <a:p>
+          <a:lstStyle xmlns:a="http://schemas.openxmlformats.org/drawingml/2006/main"/>
+          <a:p xmlns:a="http://schemas.openxmlformats.org/drawingml/2006/main">
             <a:pPr algn="l">
               <a:lnSpc>
                 <a:spcPct val="95000"/>
@@ -3501,7 +3836,7 @@
               </a:defRPr>
             </a:pPr>
             <a:r>
-              <a:rPr sz="1350" b="1">
+              <a:rPr sz="1500" b="1">
                 <a:solidFill>
                   <a:srgbClr val="2E6F9E"/>
                 </a:solidFill>
@@ -3517,37 +3852,37 @@
       <p:sp>
         <p:nvSpPr>
           <p:cNvPr id="63" name="recent-cross">
-            <a:extLst>
+            <a:extLst xmlns:a="http://schemas.openxmlformats.org/drawingml/2006/main">
               <a:ext uri="{FF2B5EF4-FFF2-40B4-BE49-F238E27FC236}">
                 <a16:creationId xmlns:a16="http://schemas.microsoft.com/office/drawing/2014/main" id="{0E02D744-9CF8-4343-8A08-1CD79E79771E}"/>
               </a:ext>
             </a:extLst>
           </p:cNvPr>
           <p:cNvSpPr>
-            <a:spLocks noGrp="1"/>
-          </p:cNvSpPr>
-          <p:nvPr/>
-        </p:nvSpPr>
-        <p:spPr>
-          <a:xfrm>
+            <a:spLocks xmlns:a="http://schemas.openxmlformats.org/drawingml/2006/main" noGrp="1"/>
+          </p:cNvSpPr>
+          <p:nvPr/>
+        </p:nvSpPr>
+        <p:spPr>
+          <a:xfrm xmlns:a="http://schemas.openxmlformats.org/drawingml/2006/main">
             <a:off x="9717802" y="25403"/>
             <a:ext cx="285750" cy="285750"/>
           </a:xfrm>
-          <a:prstGeom prst="rect">
-            <a:avLst/>
-          </a:prstGeom>
-          <a:noFill/>
-          <a:ln w="0">
+          <a:prstGeom xmlns:a="http://schemas.openxmlformats.org/drawingml/2006/main" prst="rect">
+            <a:avLst/>
+          </a:prstGeom>
+          <a:noFill xmlns:a="http://schemas.openxmlformats.org/drawingml/2006/main"/>
+          <a:ln xmlns:a="http://schemas.openxmlformats.org/drawingml/2006/main" w="0">
             <a:noFill/>
             <a:prstDash val="solid"/>
           </a:ln>
         </p:spPr>
         <p:txBody>
-          <a:bodyPr wrap="square" lIns="0" tIns="0" rIns="0" bIns="0" anchor="ctr">
-            <a:normAutofit fontScale="97466" lnSpcReduction="10000"/>
+          <a:bodyPr xmlns:a="http://schemas.openxmlformats.org/drawingml/2006/main" wrap="square" lIns="0" tIns="0" rIns="0" bIns="0" anchor="ctr">
+            <a:noAutofit/>
           </a:bodyPr>
-          <a:lstStyle/>
-          <a:p>
+          <a:lstStyle xmlns:a="http://schemas.openxmlformats.org/drawingml/2006/main"/>
+          <a:p xmlns:a="http://schemas.openxmlformats.org/drawingml/2006/main">
             <a:pPr algn="ctr">
               <a:lnSpc>
                 <a:spcPct val="95000"/>
@@ -3579,37 +3914,37 @@
       <p:sp>
         <p:nvSpPr>
           <p:cNvPr id="64" name="recent-action">
-            <a:extLst>
+            <a:extLst xmlns:a="http://schemas.openxmlformats.org/drawingml/2006/main">
               <a:ext uri="{FF2B5EF4-FFF2-40B4-BE49-F238E27FC236}">
                 <a16:creationId xmlns:a16="http://schemas.microsoft.com/office/drawing/2014/main" id="{67A8085D-1AA4-4BBA-BB66-81BB6E0869F8}"/>
               </a:ext>
             </a:extLst>
           </p:cNvPr>
           <p:cNvSpPr>
-            <a:spLocks noGrp="1"/>
-          </p:cNvSpPr>
-          <p:nvPr/>
-        </p:nvSpPr>
-        <p:spPr>
-          <a:xfrm>
-            <a:off x="8694874" y="368303"/>
-            <a:ext cx="1428750" cy="1066800"/>
-          </a:xfrm>
-          <a:prstGeom prst="rect">
-            <a:avLst/>
-          </a:prstGeom>
-          <a:noFill/>
-          <a:ln w="0">
+            <a:spLocks xmlns:a="http://schemas.openxmlformats.org/drawingml/2006/main" noGrp="1"/>
+          </p:cNvSpPr>
+          <p:nvPr/>
+        </p:nvSpPr>
+        <p:spPr>
+          <a:xfrm xmlns:a="http://schemas.openxmlformats.org/drawingml/2006/main">
+            <a:off x="8667750" y="368303"/>
+            <a:ext cx="1619250" cy="1181100"/>
+          </a:xfrm>
+          <a:prstGeom xmlns:a="http://schemas.openxmlformats.org/drawingml/2006/main" prst="rect">
+            <a:avLst/>
+          </a:prstGeom>
+          <a:noFill xmlns:a="http://schemas.openxmlformats.org/drawingml/2006/main"/>
+          <a:ln xmlns:a="http://schemas.openxmlformats.org/drawingml/2006/main" w="0">
             <a:noFill/>
             <a:prstDash val="solid"/>
           </a:ln>
         </p:spPr>
         <p:txBody>
-          <a:bodyPr wrap="square" lIns="0" tIns="0" rIns="0" bIns="0" anchor="ctr">
-            <a:normAutofit/>
+          <a:bodyPr xmlns:a="http://schemas.openxmlformats.org/drawingml/2006/main" wrap="square" lIns="0" tIns="0" rIns="0" bIns="0" anchor="ctr">
+            <a:noAutofit/>
           </a:bodyPr>
-          <a:lstStyle/>
-          <a:p>
+          <a:lstStyle xmlns:a="http://schemas.openxmlformats.org/drawingml/2006/main"/>
+          <a:p xmlns:a="http://schemas.openxmlformats.org/drawingml/2006/main">
             <a:pPr algn="l">
               <a:lnSpc>
                 <a:spcPct val="90000"/>
@@ -3625,7 +3960,7 @@
               </a:defRPr>
             </a:pPr>
             <a:r>
-              <a:rPr sz="1350" b="1" dirty="0">
+              <a:rPr sz="1500" b="1">
                 <a:solidFill>
                   <a:srgbClr val="17212B"/>
                 </a:solidFill>
@@ -3636,7 +3971,7 @@
               <a:t>type:</a:t>
             </a:r>
           </a:p>
-          <a:p>
+          <a:p xmlns:a="http://schemas.openxmlformats.org/drawingml/2006/main">
             <a:pPr algn="l">
               <a:lnSpc>
                 <a:spcPct val="90000"/>
@@ -3652,7 +3987,7 @@
               </a:defRPr>
             </a:pPr>
             <a:r>
-              <a:rPr sz="1350" b="1" dirty="0">
+              <a:rPr sz="1500" b="1">
                 <a:solidFill>
                   <a:srgbClr val="17212B"/>
                 </a:solidFill>
@@ -3663,7 +3998,7 @@
               <a:t>Women's Cotton</a:t>
             </a:r>
           </a:p>
-          <a:p>
+          <a:p xmlns:a="http://schemas.openxmlformats.org/drawingml/2006/main">
             <a:pPr algn="l">
               <a:lnSpc>
                 <a:spcPct val="90000"/>
@@ -3679,7 +4014,7 @@
               </a:defRPr>
             </a:pPr>
             <a:r>
-              <a:rPr sz="1350" b="1" dirty="0">
+              <a:rPr sz="1500" b="1">
                 <a:solidFill>
                   <a:srgbClr val="17212B"/>
                 </a:solidFill>
@@ -3690,7 +4025,7 @@
               <a:t>Short Sleeve T-shirt,</a:t>
             </a:r>
           </a:p>
-          <a:p>
+          <a:p xmlns:a="http://schemas.openxmlformats.org/drawingml/2006/main">
             <a:pPr algn="l">
               <a:lnSpc>
                 <a:spcPct val="90000"/>
@@ -3706,7 +4041,7 @@
               </a:defRPr>
             </a:pPr>
             <a:r>
-              <a:rPr sz="1350" b="1" dirty="0">
+              <a:rPr sz="1500" b="1">
                 <a:solidFill>
                   <a:srgbClr val="17212B"/>
                 </a:solidFill>
@@ -3722,27 +4057,27 @@
       <p:sp>
         <p:nvSpPr>
           <p:cNvPr id="65" name="recent-result-rule">
-            <a:extLst>
+            <a:extLst xmlns:a="http://schemas.openxmlformats.org/drawingml/2006/main">
               <a:ext uri="{FF2B5EF4-FFF2-40B4-BE49-F238E27FC236}">
                 <a16:creationId xmlns:a16="http://schemas.microsoft.com/office/drawing/2014/main" id="{07533E0F-AC24-458E-AC7B-EAA3BE3840C5}"/>
               </a:ext>
             </a:extLst>
           </p:cNvPr>
           <p:cNvSpPr>
-            <a:spLocks noGrp="1"/>
-          </p:cNvSpPr>
-          <p:nvPr/>
-        </p:nvSpPr>
-        <p:spPr>
-          <a:xfrm>
-            <a:off x="8694874" y="1492253"/>
-            <a:ext cx="1428750" cy="0"/>
-          </a:xfrm>
-          <a:prstGeom prst="line">
-            <a:avLst/>
-          </a:prstGeom>
-          <a:noFill/>
-          <a:ln w="9525">
+            <a:spLocks xmlns:a="http://schemas.openxmlformats.org/drawingml/2006/main" noGrp="1"/>
+          </p:cNvSpPr>
+          <p:nvPr/>
+        </p:nvSpPr>
+        <p:spPr>
+          <a:xfrm xmlns:a="http://schemas.openxmlformats.org/drawingml/2006/main">
+            <a:off x="8667750" y="1562100"/>
+            <a:ext cx="1619250" cy="0"/>
+          </a:xfrm>
+          <a:prstGeom xmlns:a="http://schemas.openxmlformats.org/drawingml/2006/main" prst="line">
+            <a:avLst/>
+          </a:prstGeom>
+          <a:noFill xmlns:a="http://schemas.openxmlformats.org/drawingml/2006/main"/>
+          <a:ln xmlns:a="http://schemas.openxmlformats.org/drawingml/2006/main" w="9525">
             <a:solidFill>
               <a:srgbClr val="E8EDF1"/>
             </a:solidFill>
@@ -3750,47 +4085,45 @@
           </a:ln>
         </p:spPr>
         <p:txBody>
-          <a:bodyPr/>
-          <a:lstStyle/>
-          <a:p>
-            <a:endParaRPr lang="en-CN"/>
-          </a:p>
+          <a:bodyPr xmlns:a="http://schemas.openxmlformats.org/drawingml/2006/main"/>
+          <a:lstStyle xmlns:a="http://schemas.openxmlformats.org/drawingml/2006/main"/>
+          <a:p xmlns:a="http://schemas.openxmlformats.org/drawingml/2006/main"/>
         </p:txBody>
       </p:sp>
       <p:sp>
         <p:nvSpPr>
           <p:cNvPr id="66" name="causal-action-label">
-            <a:extLst>
+            <a:extLst xmlns:a="http://schemas.openxmlformats.org/drawingml/2006/main">
               <a:ext uri="{FF2B5EF4-FFF2-40B4-BE49-F238E27FC236}">
                 <a16:creationId xmlns:a16="http://schemas.microsoft.com/office/drawing/2014/main" id="{3954EE80-1CC3-44CE-A1DB-9388B24C62A1}"/>
               </a:ext>
             </a:extLst>
           </p:cNvPr>
           <p:cNvSpPr>
-            <a:spLocks noGrp="1"/>
-          </p:cNvSpPr>
-          <p:nvPr/>
-        </p:nvSpPr>
-        <p:spPr>
-          <a:xfrm>
+            <a:spLocks xmlns:a="http://schemas.openxmlformats.org/drawingml/2006/main" noGrp="1"/>
+          </p:cNvSpPr>
+          <p:nvPr/>
+        </p:nvSpPr>
+        <p:spPr>
+          <a:xfrm xmlns:a="http://schemas.openxmlformats.org/drawingml/2006/main">
             <a:off x="8694874" y="1720853"/>
-            <a:ext cx="1123950" cy="257175"/>
-          </a:xfrm>
-          <a:prstGeom prst="rect">
-            <a:avLst/>
-          </a:prstGeom>
-          <a:noFill/>
-          <a:ln w="0">
+            <a:ext cx="1333500" cy="257175"/>
+          </a:xfrm>
+          <a:prstGeom xmlns:a="http://schemas.openxmlformats.org/drawingml/2006/main" prst="rect">
+            <a:avLst/>
+          </a:prstGeom>
+          <a:noFill xmlns:a="http://schemas.openxmlformats.org/drawingml/2006/main"/>
+          <a:ln xmlns:a="http://schemas.openxmlformats.org/drawingml/2006/main" w="0">
             <a:noFill/>
             <a:prstDash val="solid"/>
           </a:ln>
         </p:spPr>
         <p:txBody>
-          <a:bodyPr wrap="square" lIns="0" tIns="0" rIns="0" bIns="0" anchor="ctr">
-            <a:normAutofit/>
+          <a:bodyPr xmlns:a="http://schemas.openxmlformats.org/drawingml/2006/main" wrap="square" lIns="0" tIns="0" rIns="0" bIns="0" anchor="ctr">
+            <a:noAutofit/>
           </a:bodyPr>
-          <a:lstStyle/>
-          <a:p>
+          <a:lstStyle xmlns:a="http://schemas.openxmlformats.org/drawingml/2006/main"/>
+          <a:p xmlns:a="http://schemas.openxmlformats.org/drawingml/2006/main">
             <a:pPr algn="l">
               <a:lnSpc>
                 <a:spcPct val="95000"/>
@@ -3806,7 +4139,7 @@
               </a:defRPr>
             </a:pPr>
             <a:r>
-              <a:rPr sz="1350" b="1">
+              <a:rPr sz="1500" b="1">
                 <a:solidFill>
                   <a:srgbClr val="C45A14"/>
                 </a:solidFill>
@@ -3822,37 +4155,37 @@
       <p:sp>
         <p:nvSpPr>
           <p:cNvPr id="67" name="causal-check">
-            <a:extLst>
+            <a:extLst xmlns:a="http://schemas.openxmlformats.org/drawingml/2006/main">
               <a:ext uri="{FF2B5EF4-FFF2-40B4-BE49-F238E27FC236}">
                 <a16:creationId xmlns:a16="http://schemas.microsoft.com/office/drawing/2014/main" id="{6EFB5E33-F4DB-46A0-A6BE-1D1BDE10AA1F}"/>
               </a:ext>
             </a:extLst>
           </p:cNvPr>
           <p:cNvSpPr>
-            <a:spLocks noGrp="1"/>
-          </p:cNvSpPr>
-          <p:nvPr/>
-        </p:nvSpPr>
-        <p:spPr>
-          <a:xfrm>
-            <a:off x="9828349" y="1682753"/>
+            <a:spLocks xmlns:a="http://schemas.openxmlformats.org/drawingml/2006/main" noGrp="1"/>
+          </p:cNvSpPr>
+          <p:nvPr/>
+        </p:nvSpPr>
+        <p:spPr>
+          <a:xfrm xmlns:a="http://schemas.openxmlformats.org/drawingml/2006/main">
+            <a:off x="10048875" y="1682753"/>
             <a:ext cx="295275" cy="295275"/>
           </a:xfrm>
-          <a:prstGeom prst="rect">
-            <a:avLst/>
-          </a:prstGeom>
-          <a:noFill/>
-          <a:ln w="0">
+          <a:prstGeom xmlns:a="http://schemas.openxmlformats.org/drawingml/2006/main" prst="rect">
+            <a:avLst/>
+          </a:prstGeom>
+          <a:noFill xmlns:a="http://schemas.openxmlformats.org/drawingml/2006/main"/>
+          <a:ln xmlns:a="http://schemas.openxmlformats.org/drawingml/2006/main" w="0">
             <a:noFill/>
             <a:prstDash val="solid"/>
           </a:ln>
         </p:spPr>
         <p:txBody>
-          <a:bodyPr wrap="square" lIns="0" tIns="0" rIns="0" bIns="0" anchor="ctr">
-            <a:normAutofit/>
+          <a:bodyPr xmlns:a="http://schemas.openxmlformats.org/drawingml/2006/main" wrap="square" lIns="0" tIns="0" rIns="0" bIns="0" anchor="ctr">
+            <a:noAutofit/>
           </a:bodyPr>
-          <a:lstStyle/>
-          <a:p>
+          <a:lstStyle xmlns:a="http://schemas.openxmlformats.org/drawingml/2006/main"/>
+          <a:p xmlns:a="http://schemas.openxmlformats.org/drawingml/2006/main">
             <a:pPr algn="ctr">
               <a:lnSpc>
                 <a:spcPct val="95000"/>
@@ -3884,37 +4217,37 @@
       <p:sp>
         <p:nvSpPr>
           <p:cNvPr id="68" name="causal-action">
-            <a:extLst>
+            <a:extLst xmlns:a="http://schemas.openxmlformats.org/drawingml/2006/main">
               <a:ext uri="{FF2B5EF4-FFF2-40B4-BE49-F238E27FC236}">
                 <a16:creationId xmlns:a16="http://schemas.microsoft.com/office/drawing/2014/main" id="{E2D38684-84C8-45BE-888A-0116BACD4E75}"/>
               </a:ext>
             </a:extLst>
           </p:cNvPr>
           <p:cNvSpPr>
-            <a:spLocks noGrp="1"/>
-          </p:cNvSpPr>
-          <p:nvPr/>
-        </p:nvSpPr>
-        <p:spPr>
-          <a:xfrm>
-            <a:off x="8694874" y="2006603"/>
-            <a:ext cx="1428750" cy="857250"/>
-          </a:xfrm>
-          <a:prstGeom prst="rect">
-            <a:avLst/>
-          </a:prstGeom>
-          <a:noFill/>
-          <a:ln w="0">
+            <a:spLocks xmlns:a="http://schemas.openxmlformats.org/drawingml/2006/main" noGrp="1"/>
+          </p:cNvSpPr>
+          <p:nvPr/>
+        </p:nvSpPr>
+        <p:spPr>
+          <a:xfrm xmlns:a="http://schemas.openxmlformats.org/drawingml/2006/main">
+            <a:off x="8667750" y="2006603"/>
+            <a:ext cx="1619250" cy="933450"/>
+          </a:xfrm>
+          <a:prstGeom xmlns:a="http://schemas.openxmlformats.org/drawingml/2006/main" prst="rect">
+            <a:avLst/>
+          </a:prstGeom>
+          <a:noFill xmlns:a="http://schemas.openxmlformats.org/drawingml/2006/main"/>
+          <a:ln xmlns:a="http://schemas.openxmlformats.org/drawingml/2006/main" w="0">
             <a:noFill/>
             <a:prstDash val="solid"/>
           </a:ln>
         </p:spPr>
         <p:txBody>
-          <a:bodyPr wrap="square" lIns="0" tIns="0" rIns="0" bIns="0" anchor="ctr">
-            <a:normAutofit/>
+          <a:bodyPr xmlns:a="http://schemas.openxmlformats.org/drawingml/2006/main" wrap="square" lIns="0" tIns="0" rIns="0" bIns="0" anchor="ctr">
+            <a:noAutofit/>
           </a:bodyPr>
-          <a:lstStyle/>
-          <a:p>
+          <a:lstStyle xmlns:a="http://schemas.openxmlformats.org/drawingml/2006/main"/>
+          <a:p xmlns:a="http://schemas.openxmlformats.org/drawingml/2006/main">
             <a:pPr algn="l">
               <a:lnSpc>
                 <a:spcPct val="90000"/>
@@ -3930,7 +4263,7 @@
               </a:defRPr>
             </a:pPr>
             <a:r>
-              <a:rPr sz="1350" b="1">
+              <a:rPr sz="1500" b="1">
                 <a:solidFill>
                   <a:srgbClr val="17212B"/>
                 </a:solidFill>
@@ -3941,7 +4274,7 @@
               <a:t>type:</a:t>
             </a:r>
           </a:p>
-          <a:p>
+          <a:p xmlns:a="http://schemas.openxmlformats.org/drawingml/2006/main">
             <a:pPr algn="l">
               <a:lnSpc>
                 <a:spcPct val="90000"/>
@@ -3957,7 +4290,7 @@
               </a:defRPr>
             </a:pPr>
             <a:r>
-              <a:rPr sz="1350" b="1">
+              <a:rPr sz="1500" b="1">
                 <a:solidFill>
                   <a:srgbClr val="17212B"/>
                 </a:solidFill>
@@ -3968,7 +4301,7 @@
               <a:t>经典白色T恤,</a:t>
             </a:r>
           </a:p>
-          <a:p>
+          <a:p xmlns:a="http://schemas.openxmlformats.org/drawingml/2006/main">
             <a:pPr algn="l">
               <a:lnSpc>
                 <a:spcPct val="90000"/>
@@ -3984,7 +4317,7 @@
               </a:defRPr>
             </a:pPr>
             <a:r>
-              <a:rPr sz="1350" b="1">
+              <a:rPr sz="1500" b="1">
                 <a:solidFill>
                   <a:srgbClr val="17212B"/>
                 </a:solidFill>
@@ -3995,7 +4328,7 @@
               <a:t>保湿面霜套装,</a:t>
             </a:r>
           </a:p>
-          <a:p>
+          <a:p xmlns:a="http://schemas.openxmlformats.org/drawingml/2006/main">
             <a:pPr algn="l">
               <a:lnSpc>
                 <a:spcPct val="90000"/>
@@ -4011,7 +4344,7 @@
               </a:defRPr>
             </a:pPr>
             <a:r>
-              <a:rPr sz="1350" b="1">
+              <a:rPr sz="1500" b="1">
                 <a:solidFill>
                   <a:srgbClr val="17212B"/>
                 </a:solidFill>
@@ -4027,27 +4360,27 @@
       <p:sp>
         <p:nvSpPr>
           <p:cNvPr id="69" name="causal-result-rule">
-            <a:extLst>
+            <a:extLst xmlns:a="http://schemas.openxmlformats.org/drawingml/2006/main">
               <a:ext uri="{FF2B5EF4-FFF2-40B4-BE49-F238E27FC236}">
                 <a16:creationId xmlns:a16="http://schemas.microsoft.com/office/drawing/2014/main" id="{F979257B-A37D-4587-AB3B-FD8B27063617}"/>
               </a:ext>
             </a:extLst>
           </p:cNvPr>
           <p:cNvSpPr>
-            <a:spLocks noGrp="1"/>
-          </p:cNvSpPr>
-          <p:nvPr/>
-        </p:nvSpPr>
-        <p:spPr>
-          <a:xfrm>
-            <a:off x="8694874" y="2863853"/>
-            <a:ext cx="1428750" cy="0"/>
-          </a:xfrm>
-          <a:prstGeom prst="line">
-            <a:avLst/>
-          </a:prstGeom>
-          <a:noFill/>
-          <a:ln w="9525">
+            <a:spLocks xmlns:a="http://schemas.openxmlformats.org/drawingml/2006/main" noGrp="1"/>
+          </p:cNvSpPr>
+          <p:nvPr/>
+        </p:nvSpPr>
+        <p:spPr>
+          <a:xfrm xmlns:a="http://schemas.openxmlformats.org/drawingml/2006/main">
+            <a:off x="8667750" y="2962275"/>
+            <a:ext cx="1619250" cy="0"/>
+          </a:xfrm>
+          <a:prstGeom xmlns:a="http://schemas.openxmlformats.org/drawingml/2006/main" prst="line">
+            <a:avLst/>
+          </a:prstGeom>
+          <a:noFill xmlns:a="http://schemas.openxmlformats.org/drawingml/2006/main"/>
+          <a:ln xmlns:a="http://schemas.openxmlformats.org/drawingml/2006/main" w="9525">
             <a:solidFill>
               <a:srgbClr val="E8EDF1"/>
             </a:solidFill>
@@ -4055,89 +4388,75 @@
           </a:ln>
         </p:spPr>
         <p:txBody>
-          <a:bodyPr/>
-          <a:lstStyle/>
-          <a:p>
-            <a:endParaRPr lang="en-CN"/>
-          </a:p>
+          <a:bodyPr xmlns:a="http://schemas.openxmlformats.org/drawingml/2006/main"/>
+          <a:lstStyle xmlns:a="http://schemas.openxmlformats.org/drawingml/2006/main"/>
+          <a:p xmlns:a="http://schemas.openxmlformats.org/drawingml/2006/main"/>
         </p:txBody>
       </p:sp>
       <p:cxnSp>
         <p:nvCxnSpPr>
-          <p:cNvPr id="72" name="Straight Arrow Connector 71">
-            <a:extLst>
-              <a:ext uri="{FF2B5EF4-FFF2-40B4-BE49-F238E27FC236}">
-                <a16:creationId xmlns:a16="http://schemas.microsoft.com/office/drawing/2014/main" id="{93D83DE7-CFDD-7E82-FEF6-6280BB19E7D2}"/>
-              </a:ext>
-            </a:extLst>
-          </p:cNvPr>
+          <p:cNvPr id="206" name="Straight Arrow Connector 71"/>
           <p:cNvCxnSpPr>
-            <a:endCxn id="47" idx="2"/>
+            <a:endCxn xmlns:a="http://schemas.openxmlformats.org/drawingml/2006/main" id="47" idx="2"/>
           </p:cNvCxnSpPr>
           <p:nvPr/>
         </p:nvCxnSpPr>
         <p:spPr>
-          <a:xfrm flipV="1">
-            <a:off x="3619500" y="997245"/>
-            <a:ext cx="420832" cy="345780"/>
-          </a:xfrm>
-          <a:prstGeom prst="straightConnector1">
-            <a:avLst/>
-          </a:prstGeom>
-          <a:ln>
+          <a:xfrm xmlns:a="http://schemas.openxmlformats.org/drawingml/2006/main" flipV="1">
+            <a:off x="3771900" y="997245"/>
+            <a:ext cx="268432" cy="574380"/>
+          </a:xfrm>
+          <a:prstGeom xmlns:a="http://schemas.openxmlformats.org/drawingml/2006/main" prst="straightConnector1">
+            <a:avLst/>
+          </a:prstGeom>
+          <a:ln xmlns:a="http://schemas.openxmlformats.org/drawingml/2006/main">
             <a:tailEnd type="triangle"/>
           </a:ln>
         </p:spPr>
         <p:style>
-          <a:lnRef idx="1">
+          <a:lnRef xmlns:a="http://schemas.openxmlformats.org/drawingml/2006/main" idx="1">
             <a:schemeClr val="dk1"/>
           </a:lnRef>
-          <a:fillRef idx="0">
+          <a:fillRef xmlns:a="http://schemas.openxmlformats.org/drawingml/2006/main" idx="0">
             <a:schemeClr val="dk1"/>
           </a:fillRef>
-          <a:effectRef idx="0">
+          <a:effectRef xmlns:a="http://schemas.openxmlformats.org/drawingml/2006/main" idx="0">
             <a:schemeClr val="dk1"/>
           </a:effectRef>
-          <a:fontRef idx="minor">
+          <a:fontRef xmlns:a="http://schemas.openxmlformats.org/drawingml/2006/main" idx="minor">
             <a:schemeClr val="tx1"/>
           </a:fontRef>
         </p:style>
       </p:cxnSp>
       <p:cxnSp>
         <p:nvCxnSpPr>
-          <p:cNvPr id="74" name="Straight Arrow Connector 73">
-            <a:extLst>
-              <a:ext uri="{FF2B5EF4-FFF2-40B4-BE49-F238E27FC236}">
-                <a16:creationId xmlns:a16="http://schemas.microsoft.com/office/drawing/2014/main" id="{7F03416E-AB1F-7A7B-BCEA-F601B02876B2}"/>
-              </a:ext>
-            </a:extLst>
-          </p:cNvPr>
+          <p:cNvPr id="207" name="Straight Arrow Connector 73"/>
           <p:cNvCxnSpPr/>
           <p:nvPr/>
         </p:nvCxnSpPr>
         <p:spPr>
-          <a:xfrm>
-            <a:off x="3636334" y="1343025"/>
-            <a:ext cx="420832" cy="428625"/>
-          </a:xfrm>
-          <a:prstGeom prst="straightConnector1">
-            <a:avLst/>
-          </a:prstGeom>
-          <a:ln>
+          <a:xfrm xmlns:a="http://schemas.openxmlformats.org/drawingml/2006/main">
+            <a:off x="3771900" y="1571625"/>
+            <a:ext cx="285261" cy="201189"/>
+          </a:xfrm>
+          <a:prstGeom xmlns:a="http://schemas.openxmlformats.org/drawingml/2006/main" prst="straightConnector1">
+            <a:avLst/>
+          </a:prstGeom>
+          <a:ln xmlns:a="http://schemas.openxmlformats.org/drawingml/2006/main">
             <a:tailEnd type="triangle"/>
           </a:ln>
         </p:spPr>
         <p:style>
-          <a:lnRef idx="1">
+          <a:lnRef xmlns:a="http://schemas.openxmlformats.org/drawingml/2006/main" idx="1">
             <a:schemeClr val="dk1"/>
           </a:lnRef>
-          <a:fillRef idx="0">
+          <a:fillRef xmlns:a="http://schemas.openxmlformats.org/drawingml/2006/main" idx="0">
             <a:schemeClr val="dk1"/>
           </a:fillRef>
-          <a:effectRef idx="0">
+          <a:effectRef xmlns:a="http://schemas.openxmlformats.org/drawingml/2006/main" idx="0">
             <a:schemeClr val="dk1"/>
           </a:effectRef>
-          <a:fontRef idx="minor">
+          <a:fontRef xmlns:a="http://schemas.openxmlformats.org/drawingml/2006/main" idx="minor">
             <a:schemeClr val="tx1"/>
           </a:fontRef>
         </p:style>
@@ -4145,171 +4464,161 @@
       <p:sp>
         <p:nvSpPr>
           <p:cNvPr id="78" name="Down Arrow 77">
-            <a:extLst>
+            <a:extLst xmlns:a="http://schemas.openxmlformats.org/drawingml/2006/main">
               <a:ext uri="{FF2B5EF4-FFF2-40B4-BE49-F238E27FC236}">
                 <a16:creationId xmlns:a16="http://schemas.microsoft.com/office/drawing/2014/main" id="{34E2B314-5650-18ED-5743-3AF95A88704E}"/>
               </a:ext>
             </a:extLst>
           </p:cNvPr>
-          <p:cNvSpPr/>
-          <p:nvPr/>
-        </p:nvSpPr>
-        <p:spPr>
-          <a:xfrm>
+          <p:cNvSpPr>
+            <a:spLocks xmlns:a="http://schemas.openxmlformats.org/drawingml/2006/main" noGrp="1"/>
+          </p:cNvSpPr>
+          <p:nvPr/>
+        </p:nvSpPr>
+        <p:spPr>
+          <a:xfrm xmlns:a="http://schemas.openxmlformats.org/drawingml/2006/main">
             <a:off x="4668405" y="2015255"/>
             <a:ext cx="45719" cy="100012"/>
           </a:xfrm>
-          <a:prstGeom prst="downArrow">
+          <a:prstGeom xmlns:a="http://schemas.openxmlformats.org/drawingml/2006/main" prst="downArrow">
             <a:avLst/>
           </a:prstGeom>
         </p:spPr>
         <p:style>
-          <a:lnRef idx="2">
+          <a:lnRef xmlns:a="http://schemas.openxmlformats.org/drawingml/2006/main" idx="2">
             <a:schemeClr val="accent1">
               <a:shade val="15000"/>
             </a:schemeClr>
           </a:lnRef>
-          <a:fillRef idx="1">
+          <a:fillRef xmlns:a="http://schemas.openxmlformats.org/drawingml/2006/main" idx="1">
             <a:schemeClr val="accent1"/>
           </a:fillRef>
-          <a:effectRef idx="0">
+          <a:effectRef xmlns:a="http://schemas.openxmlformats.org/drawingml/2006/main" idx="0">
             <a:schemeClr val="accent1"/>
           </a:effectRef>
-          <a:fontRef idx="minor">
+          <a:fontRef xmlns:a="http://schemas.openxmlformats.org/drawingml/2006/main" idx="minor">
             <a:schemeClr val="lt1"/>
           </a:fontRef>
         </p:style>
         <p:txBody>
-          <a:bodyPr rtlCol="0" anchor="ctr"/>
-          <a:lstStyle/>
-          <a:p>
-            <a:pPr algn="ctr"/>
-            <a:endParaRPr lang="en-CN"/>
+          <a:bodyPr xmlns:a="http://schemas.openxmlformats.org/drawingml/2006/main" anchor="ctr"/>
+          <a:lstStyle xmlns:a="http://schemas.openxmlformats.org/drawingml/2006/main"/>
+          <a:p xmlns:a="http://schemas.openxmlformats.org/drawingml/2006/main">
+            <a:pPr algn="ctr">
+              <a:buNone/>
+            </a:pPr>
           </a:p>
         </p:txBody>
       </p:sp>
       <p:sp>
         <p:nvSpPr>
           <p:cNvPr id="79" name="Right Brace 78">
-            <a:extLst>
+            <a:extLst xmlns:a="http://schemas.openxmlformats.org/drawingml/2006/main">
               <a:ext uri="{FF2B5EF4-FFF2-40B4-BE49-F238E27FC236}">
                 <a16:creationId xmlns:a16="http://schemas.microsoft.com/office/drawing/2014/main" id="{CAF379E8-8C3F-0235-E532-24E7470E0290}"/>
               </a:ext>
             </a:extLst>
           </p:cNvPr>
-          <p:cNvSpPr/>
-          <p:nvPr/>
-        </p:nvSpPr>
-        <p:spPr>
-          <a:xfrm>
+          <p:cNvSpPr>
+            <a:spLocks xmlns:a="http://schemas.openxmlformats.org/drawingml/2006/main" noGrp="1"/>
+          </p:cNvSpPr>
+          <p:nvPr/>
+        </p:nvSpPr>
+        <p:spPr>
+          <a:xfrm xmlns:a="http://schemas.openxmlformats.org/drawingml/2006/main">
             <a:off x="5749844" y="962025"/>
             <a:ext cx="155448" cy="914400"/>
           </a:xfrm>
-          <a:prstGeom prst="rightBrace">
+          <a:prstGeom xmlns:a="http://schemas.openxmlformats.org/drawingml/2006/main" prst="rightBrace">
             <a:avLst/>
           </a:prstGeom>
         </p:spPr>
         <p:style>
-          <a:lnRef idx="2">
+          <a:lnRef xmlns:a="http://schemas.openxmlformats.org/drawingml/2006/main" idx="2">
             <a:schemeClr val="dk1"/>
           </a:lnRef>
-          <a:fillRef idx="0">
+          <a:fillRef xmlns:a="http://schemas.openxmlformats.org/drawingml/2006/main" idx="0">
             <a:schemeClr val="dk1"/>
           </a:fillRef>
-          <a:effectRef idx="1">
+          <a:effectRef xmlns:a="http://schemas.openxmlformats.org/drawingml/2006/main" idx="1">
             <a:schemeClr val="dk1"/>
           </a:effectRef>
-          <a:fontRef idx="minor">
+          <a:fontRef xmlns:a="http://schemas.openxmlformats.org/drawingml/2006/main" idx="minor">
             <a:schemeClr val="tx1"/>
           </a:fontRef>
         </p:style>
         <p:txBody>
-          <a:bodyPr rtlCol="0" anchor="ctr"/>
-          <a:lstStyle/>
-          <a:p>
-            <a:pPr algn="ctr"/>
-            <a:endParaRPr lang="en-CN"/>
+          <a:bodyPr xmlns:a="http://schemas.openxmlformats.org/drawingml/2006/main" anchor="ctr"/>
+          <a:lstStyle xmlns:a="http://schemas.openxmlformats.org/drawingml/2006/main"/>
+          <a:p xmlns:a="http://schemas.openxmlformats.org/drawingml/2006/main">
+            <a:pPr algn="ctr">
+              <a:buNone/>
+            </a:pPr>
           </a:p>
         </p:txBody>
       </p:sp>
       <p:cxnSp>
         <p:nvCxnSpPr>
-          <p:cNvPr id="81" name="Straight Arrow Connector 80">
-            <a:extLst>
-              <a:ext uri="{FF2B5EF4-FFF2-40B4-BE49-F238E27FC236}">
-                <a16:creationId xmlns:a16="http://schemas.microsoft.com/office/drawing/2014/main" id="{0DB745FC-CE1E-3449-D5A0-18B12A493675}"/>
-              </a:ext>
-            </a:extLst>
-          </p:cNvPr>
-          <p:cNvCxnSpPr>
-            <a:cxnSpLocks/>
-          </p:cNvCxnSpPr>
+          <p:cNvPr id="210" name="Straight Arrow Connector 80"/>
+          <p:cNvCxnSpPr/>
           <p:nvPr/>
         </p:nvCxnSpPr>
         <p:spPr>
-          <a:xfrm>
+          <a:xfrm xmlns:a="http://schemas.openxmlformats.org/drawingml/2006/main">
             <a:off x="5905292" y="1419225"/>
             <a:ext cx="273835" cy="0"/>
           </a:xfrm>
-          <a:prstGeom prst="straightConnector1">
-            <a:avLst/>
-          </a:prstGeom>
-          <a:ln>
+          <a:prstGeom xmlns:a="http://schemas.openxmlformats.org/drawingml/2006/main" prst="straightConnector1">
+            <a:avLst/>
+          </a:prstGeom>
+          <a:ln xmlns:a="http://schemas.openxmlformats.org/drawingml/2006/main">
             <a:tailEnd type="triangle"/>
           </a:ln>
         </p:spPr>
         <p:style>
-          <a:lnRef idx="1">
+          <a:lnRef xmlns:a="http://schemas.openxmlformats.org/drawingml/2006/main" idx="1">
             <a:schemeClr val="dk1"/>
           </a:lnRef>
-          <a:fillRef idx="0">
+          <a:fillRef xmlns:a="http://schemas.openxmlformats.org/drawingml/2006/main" idx="0">
             <a:schemeClr val="dk1"/>
           </a:fillRef>
-          <a:effectRef idx="0">
+          <a:effectRef xmlns:a="http://schemas.openxmlformats.org/drawingml/2006/main" idx="0">
             <a:schemeClr val="dk1"/>
           </a:effectRef>
-          <a:fontRef idx="minor">
+          <a:fontRef xmlns:a="http://schemas.openxmlformats.org/drawingml/2006/main" idx="minor">
             <a:schemeClr val="tx1"/>
           </a:fontRef>
         </p:style>
       </p:cxnSp>
       <p:cxnSp>
         <p:nvCxnSpPr>
-          <p:cNvPr id="83" name="Straight Arrow Connector 82">
-            <a:extLst>
-              <a:ext uri="{FF2B5EF4-FFF2-40B4-BE49-F238E27FC236}">
-                <a16:creationId xmlns:a16="http://schemas.microsoft.com/office/drawing/2014/main" id="{70655B4A-64DC-0F74-44E1-130549656C9A}"/>
-              </a:ext>
-            </a:extLst>
-          </p:cNvPr>
-          <p:cNvCxnSpPr>
-            <a:cxnSpLocks/>
-          </p:cNvCxnSpPr>
+          <p:cNvPr id="211" name="Straight Arrow Connector 82"/>
+          <p:cNvCxnSpPr/>
           <p:nvPr/>
         </p:nvCxnSpPr>
         <p:spPr>
-          <a:xfrm>
+          <a:xfrm xmlns:a="http://schemas.openxmlformats.org/drawingml/2006/main">
             <a:off x="8230539" y="1484460"/>
             <a:ext cx="273835" cy="0"/>
           </a:xfrm>
-          <a:prstGeom prst="straightConnector1">
-            <a:avLst/>
-          </a:prstGeom>
-          <a:ln>
+          <a:prstGeom xmlns:a="http://schemas.openxmlformats.org/drawingml/2006/main" prst="straightConnector1">
+            <a:avLst/>
+          </a:prstGeom>
+          <a:ln xmlns:a="http://schemas.openxmlformats.org/drawingml/2006/main">
             <a:tailEnd type="triangle"/>
           </a:ln>
         </p:spPr>
         <p:style>
-          <a:lnRef idx="1">
+          <a:lnRef xmlns:a="http://schemas.openxmlformats.org/drawingml/2006/main" idx="1">
             <a:schemeClr val="dk1"/>
           </a:lnRef>
-          <a:fillRef idx="0">
+          <a:fillRef xmlns:a="http://schemas.openxmlformats.org/drawingml/2006/main" idx="0">
             <a:schemeClr val="dk1"/>
           </a:fillRef>
-          <a:effectRef idx="0">
+          <a:effectRef xmlns:a="http://schemas.openxmlformats.org/drawingml/2006/main" idx="0">
             <a:schemeClr val="dk1"/>
           </a:effectRef>
-          <a:fontRef idx="minor">
+          <a:fontRef xmlns:a="http://schemas.openxmlformats.org/drawingml/2006/main" idx="minor">
             <a:schemeClr val="tx1"/>
           </a:fontRef>
         </p:style>
@@ -4321,9 +4630,6 @@
       </p:ext>
     </p:extLst>
   </p:cSld>
-  <p:clrMapOvr>
-    <a:masterClrMapping/>
-  </p:clrMapOvr>
 </p:sld>
 </file>
 
@@ -4569,254 +4875,5 @@
       </a:bgFillStyleLst>
     </a:fmtScheme>
   </a:themeElements>
-  <a:objectDefaults/>
-  <a:extraClrSchemeLst/>
-</a:theme>
-</file>
-
-<file path=ppt/theme/theme2.xml><?xml version="1.0" encoding="utf-8"?>
-<a:theme xmlns:a="http://schemas.openxmlformats.org/drawingml/2006/main" name="ChatGPT">
-  <a:themeElements>
-    <a:clrScheme name="ChatGPT">
-      <a:dk1>
-        <a:srgbClr val="000000"/>
-      </a:dk1>
-      <a:lt1>
-        <a:srgbClr val="FFFFFF"/>
-      </a:lt1>
-      <a:dk2>
-        <a:srgbClr val="0E2841"/>
-      </a:dk2>
-      <a:lt2>
-        <a:srgbClr val="E8E8E8"/>
-      </a:lt2>
-      <a:accent1>
-        <a:srgbClr val="156082"/>
-      </a:accent1>
-      <a:accent2>
-        <a:srgbClr val="E97132"/>
-      </a:accent2>
-      <a:accent3>
-        <a:srgbClr val="196B24"/>
-      </a:accent3>
-      <a:accent4>
-        <a:srgbClr val="0F9ED5"/>
-      </a:accent4>
-      <a:accent5>
-        <a:srgbClr val="A02B93"/>
-      </a:accent5>
-      <a:accent6>
-        <a:srgbClr val="4EA72E"/>
-      </a:accent6>
-      <a:hlink>
-        <a:srgbClr val="467886"/>
-      </a:hlink>
-      <a:folHlink>
-        <a:srgbClr val="96607D"/>
-      </a:folHlink>
-    </a:clrScheme>
-    <a:fontScheme name="Office">
-      <a:majorFont>
-        <a:latin typeface="Calibri Light"/>
-        <a:ea typeface="Calibri Light"/>
-        <a:cs typeface="Calibri Light"/>
-      </a:majorFont>
-      <a:minorFont>
-        <a:latin typeface="Calibri"/>
-        <a:ea typeface="Calibri"/>
-        <a:cs typeface="Calibri"/>
-      </a:minorFont>
-    </a:fontScheme>
-    <a:fmtScheme name="ChatGPT">
-      <a:fillStyleLst>
-        <a:solidFill>
-          <a:schemeClr val="phClr"/>
-        </a:solidFill>
-        <a:gradFill>
-          <a:gsLst>
-            <a:gs pos="0">
-              <a:schemeClr val="phClr">
-                <a:tint val="67000"/>
-                <a:lumMod val="110000"/>
-                <a:satMod val="105000"/>
-              </a:schemeClr>
-            </a:gs>
-            <a:gs pos="50000">
-              <a:schemeClr val="phClr">
-                <a:tint val="73000"/>
-                <a:lumMod val="105000"/>
-                <a:satMod val="103000"/>
-              </a:schemeClr>
-            </a:gs>
-            <a:gs pos="100000">
-              <a:schemeClr val="phClr">
-                <a:tint val="81000"/>
-                <a:lumMod val="105000"/>
-                <a:satMod val="109000"/>
-              </a:schemeClr>
-            </a:gs>
-          </a:gsLst>
-          <a:lin ang="5400000" scaled="0"/>
-        </a:gradFill>
-        <a:gradFill>
-          <a:gsLst>
-            <a:gs pos="0">
-              <a:schemeClr val="phClr">
-                <a:tint val="94000"/>
-                <a:lumMod val="102000"/>
-                <a:satMod val="103000"/>
-              </a:schemeClr>
-            </a:gs>
-            <a:gs pos="50000">
-              <a:schemeClr val="phClr">
-                <a:shade val="100000"/>
-                <a:lumMod val="100000"/>
-                <a:satMod val="110000"/>
-              </a:schemeClr>
-            </a:gs>
-            <a:gs pos="100000">
-              <a:schemeClr val="phClr">
-                <a:shade val="78000"/>
-                <a:lumMod val="99000"/>
-                <a:satMod val="120000"/>
-              </a:schemeClr>
-            </a:gs>
-          </a:gsLst>
-          <a:lin ang="5400000" scaled="0"/>
-        </a:gradFill>
-      </a:fillStyleLst>
-      <a:lnStyleLst>
-        <a:ln w="12700">
-          <a:solidFill>
-            <a:schemeClr val="phClr"/>
-          </a:solidFill>
-          <a:prstDash val="solid"/>
-        </a:ln>
-        <a:ln w="19050">
-          <a:solidFill>
-            <a:schemeClr val="phClr"/>
-          </a:solidFill>
-          <a:prstDash val="solid"/>
-        </a:ln>
-        <a:ln w="25400">
-          <a:solidFill>
-            <a:schemeClr val="phClr"/>
-          </a:solidFill>
-          <a:prstDash val="solid"/>
-        </a:ln>
-      </a:lnStyleLst>
-      <a:effectStyleLst>
-        <a:effectStyle>
-          <a:effectLst/>
-        </a:effectStyle>
-        <a:effectStyle>
-          <a:effectLst/>
-        </a:effectStyle>
-        <a:effectStyle>
-          <a:effectLst>
-            <a:outerShdw blurRad="57150" dist="19050" dir="5400000">
-              <a:srgbClr val="000000">
-                <a:alpha val="16000"/>
-              </a:srgbClr>
-            </a:outerShdw>
-          </a:effectLst>
-        </a:effectStyle>
-        <a:effectStyle>
-          <a:effectLst>
-            <a:outerShdw blurRad="19050" dist="9525" dir="5400000">
-              <a:srgbClr val="000000">
-                <a:alpha val="6000"/>
-              </a:srgbClr>
-            </a:outerShdw>
-          </a:effectLst>
-        </a:effectStyle>
-        <a:effectStyle>
-          <a:effectLst>
-            <a:outerShdw blurRad="28575" dist="9525" dir="5400000">
-              <a:srgbClr val="000000">
-                <a:alpha val="8000"/>
-              </a:srgbClr>
-            </a:outerShdw>
-          </a:effectLst>
-        </a:effectStyle>
-        <a:effectStyle>
-          <a:effectLst>
-            <a:outerShdw blurRad="57150" dist="19050" dir="5400000">
-              <a:srgbClr val="000000">
-                <a:alpha val="10000"/>
-              </a:srgbClr>
-            </a:outerShdw>
-          </a:effectLst>
-        </a:effectStyle>
-        <a:effectStyle>
-          <a:effectLst>
-            <a:outerShdw blurRad="114300" dist="38100" dir="5400000">
-              <a:srgbClr val="000000">
-                <a:alpha val="12000"/>
-              </a:srgbClr>
-            </a:outerShdw>
-          </a:effectLst>
-        </a:effectStyle>
-        <a:effectStyle>
-          <a:effectLst>
-            <a:outerShdw blurRad="171450" dist="57150" dir="5400000">
-              <a:srgbClr val="000000">
-                <a:alpha val="16000"/>
-              </a:srgbClr>
-            </a:outerShdw>
-          </a:effectLst>
-        </a:effectStyle>
-        <a:effectStyle>
-          <a:effectLst>
-            <a:outerShdw blurRad="266700" dist="95250" dir="5400000">
-              <a:srgbClr val="000000">
-                <a:alpha val="24000"/>
-              </a:srgbClr>
-            </a:outerShdw>
-          </a:effectLst>
-        </a:effectStyle>
-      </a:effectStyleLst>
-      <a:bgFillStyleLst>
-        <a:solidFill>
-          <a:schemeClr val="phClr"/>
-        </a:solidFill>
-        <a:solidFill>
-          <a:schemeClr val="phClr">
-            <a:tint val="95000"/>
-            <a:satMod val="170000"/>
-          </a:schemeClr>
-        </a:solidFill>
-        <a:gradFill>
-          <a:gsLst>
-            <a:gs pos="0">
-              <a:schemeClr val="phClr">
-                <a:tint val="93000"/>
-                <a:shade val="98000"/>
-                <a:lumMod val="102000"/>
-                <a:satMod val="150000"/>
-              </a:schemeClr>
-            </a:gs>
-            <a:gs pos="50000">
-              <a:schemeClr val="phClr">
-                <a:tint val="98000"/>
-                <a:shade val="90000"/>
-                <a:lumMod val="103000"/>
-                <a:satMod val="130000"/>
-              </a:schemeClr>
-            </a:gs>
-            <a:gs pos="100000">
-              <a:schemeClr val="phClr">
-                <a:shade val="63000"/>
-                <a:satMod val="120000"/>
-              </a:schemeClr>
-            </a:gs>
-          </a:gsLst>
-          <a:lin ang="5400000" scaled="0"/>
-        </a:gradFill>
-      </a:bgFillStyleLst>
-    </a:fmtScheme>
-  </a:themeElements>
-  <a:objectDefaults/>
-  <a:extraClrSchemeLst/>
 </a:theme>
 </file>